--- a/Week01/Lecture_Slides_Week01.pptx
+++ b/Week01/Lecture_Slides_Week01.pptx
@@ -2,26 +2,26 @@
 <file path=ppt/presentation.xml><?xml version="1.0" encoding="utf-8"?>
 <p:presentation xmlns:p="http://schemas.openxmlformats.org/presentationml/2006/main">
   <p:sldMasterIdLst>
-    <p:sldMasterId xmlns:r="http://schemas.openxmlformats.org/officeDocument/2006/relationships" id="2147483648" r:id="R722fb67990da4231"/>
-    <p:sldMasterId xmlns:r="http://schemas.openxmlformats.org/officeDocument/2006/relationships" id="2147483650" r:id="R5fd9f9156c274c13"/>
+    <p:sldMasterId xmlns:r="http://schemas.openxmlformats.org/officeDocument/2006/relationships" id="2147483648" r:id="R2a394c48204f4692"/>
+    <p:sldMasterId xmlns:r="http://schemas.openxmlformats.org/officeDocument/2006/relationships" id="2147483650" r:id="R7d41edc9af8b4859"/>
   </p:sldMasterIdLst>
   <p:notesMasterIdLst>
-    <p:notesMasterId xmlns:r="http://schemas.openxmlformats.org/officeDocument/2006/relationships" r:id="Rc33a9cc6e4864349"/>
+    <p:notesMasterId xmlns:r="http://schemas.openxmlformats.org/officeDocument/2006/relationships" r:id="R605f67a30aa24dfe"/>
   </p:notesMasterIdLst>
   <p:sldIdLst>
-    <p:sldId xmlns:r="http://schemas.openxmlformats.org/officeDocument/2006/relationships" id="256" r:id="Rf6ca9322df684591"/>
-    <p:sldId xmlns:r="http://schemas.openxmlformats.org/officeDocument/2006/relationships" id="257" r:id="Rc32a4de1d8a64b35"/>
-    <p:sldId xmlns:r="http://schemas.openxmlformats.org/officeDocument/2006/relationships" id="258" r:id="Rd8371256e6da41db"/>
-    <p:sldId xmlns:r="http://schemas.openxmlformats.org/officeDocument/2006/relationships" id="259" r:id="R67a44ca9cb274977"/>
-    <p:sldId xmlns:r="http://schemas.openxmlformats.org/officeDocument/2006/relationships" id="260" r:id="R1d38f3eb107b49a6"/>
-    <p:sldId xmlns:r="http://schemas.openxmlformats.org/officeDocument/2006/relationships" id="261" r:id="R7423de95fb41431d"/>
-    <p:sldId xmlns:r="http://schemas.openxmlformats.org/officeDocument/2006/relationships" id="262" r:id="R85bce7389f1b4181"/>
-    <p:sldId xmlns:r="http://schemas.openxmlformats.org/officeDocument/2006/relationships" id="263" r:id="R9b08826052a64cff"/>
-    <p:sldId xmlns:r="http://schemas.openxmlformats.org/officeDocument/2006/relationships" id="264" r:id="R76417d9fe5c4407f"/>
-    <p:sldId xmlns:r="http://schemas.openxmlformats.org/officeDocument/2006/relationships" id="265" r:id="Rd9ea5f5479c64822"/>
-    <p:sldId xmlns:r="http://schemas.openxmlformats.org/officeDocument/2006/relationships" id="266" r:id="Rf928f7b40c8842f4"/>
-    <p:sldId xmlns:r="http://schemas.openxmlformats.org/officeDocument/2006/relationships" id="267" r:id="R4a1f2961abbb4b48"/>
-    <p:sldId xmlns:r="http://schemas.openxmlformats.org/officeDocument/2006/relationships" id="268" r:id="R68450d6663a34983"/>
+    <p:sldId xmlns:r="http://schemas.openxmlformats.org/officeDocument/2006/relationships" id="256" r:id="R12467b8ecca64b31"/>
+    <p:sldId xmlns:r="http://schemas.openxmlformats.org/officeDocument/2006/relationships" id="257" r:id="R7e3bd3e80bc54772"/>
+    <p:sldId xmlns:r="http://schemas.openxmlformats.org/officeDocument/2006/relationships" id="258" r:id="R64614bc2c29a402e"/>
+    <p:sldId xmlns:r="http://schemas.openxmlformats.org/officeDocument/2006/relationships" id="259" r:id="R6ff48c5bb0574eba"/>
+    <p:sldId xmlns:r="http://schemas.openxmlformats.org/officeDocument/2006/relationships" id="260" r:id="Rc121f412283f4428"/>
+    <p:sldId xmlns:r="http://schemas.openxmlformats.org/officeDocument/2006/relationships" id="261" r:id="R347844938464477a"/>
+    <p:sldId xmlns:r="http://schemas.openxmlformats.org/officeDocument/2006/relationships" id="262" r:id="R57f0e0276f3f4a45"/>
+    <p:sldId xmlns:r="http://schemas.openxmlformats.org/officeDocument/2006/relationships" id="263" r:id="R0086c02ac7d64562"/>
+    <p:sldId xmlns:r="http://schemas.openxmlformats.org/officeDocument/2006/relationships" id="264" r:id="Rab30d3b244aa4031"/>
+    <p:sldId xmlns:r="http://schemas.openxmlformats.org/officeDocument/2006/relationships" id="265" r:id="Re89fff09c61542fe"/>
+    <p:sldId xmlns:r="http://schemas.openxmlformats.org/officeDocument/2006/relationships" id="266" r:id="R9041f12bb6c3434b"/>
+    <p:sldId xmlns:r="http://schemas.openxmlformats.org/officeDocument/2006/relationships" id="267" r:id="R6b29e5c2944042e6"/>
+    <p:sldId xmlns:r="http://schemas.openxmlformats.org/officeDocument/2006/relationships" id="268" r:id="R486b437c97084ffe"/>
   </p:sldIdLst>
   <p:sldSz cx="18288000" cy="10287000"/>
   <p:notesSz cx="6858000" cy="9144000"/>
@@ -545,12 +545,12 @@
           </a:p>
           <a:p xmlns:a="http://schemas.openxmlformats.org/drawingml/2006/main">
             <a:r>
-              <a:t>- PHY4605 Week 01 content manifest</a:t>
-            </a:r>
-          </a:p>
-          <a:p xmlns:a="http://schemas.openxmlformats.org/drawingml/2006/main">
-            <a:r>
-              <a:t>- MATLAB documentation: colon operator, linspace, and array indexing</a:t>
+              <a:t>- PHY4605 Course Topic and Difficulty Blueprint</a:t>
+            </a:r>
+          </a:p>
+          <a:p xmlns:a="http://schemas.openxmlformats.org/drawingml/2006/main">
+            <a:r>
+              <a:t>- MATLAB documentation: array vs matrix operations</a:t>
             </a:r>
           </a:p>
         </p:txBody>
@@ -625,12 +625,12 @@
           </a:p>
           <a:p xmlns:a="http://schemas.openxmlformats.org/drawingml/2006/main">
             <a:r>
-              <a:t>- PHY4605 Course Topic and Difficulty Blueprint</a:t>
-            </a:r>
-          </a:p>
-          <a:p xmlns:a="http://schemas.openxmlformats.org/drawingml/2006/main">
-            <a:r>
-              <a:t>- MATLAB documentation: array vs matrix operations</a:t>
+              <a:t>- PHY4605 Week 01 content manifest</a:t>
+            </a:r>
+          </a:p>
+          <a:p xmlns:a="http://schemas.openxmlformats.org/drawingml/2006/main">
+            <a:r>
+              <a:t>- MATLAB figure generated by Week01/.agent/matlab/generate_week01_plot.m from retained MAT and CSV data</a:t>
             </a:r>
           </a:p>
         </p:txBody>
@@ -705,12 +705,12 @@
           </a:p>
           <a:p xmlns:a="http://schemas.openxmlformats.org/drawingml/2006/main">
             <a:r>
-              <a:t>- PHY4605 Week 01 content manifest</a:t>
-            </a:r>
-          </a:p>
-          <a:p xmlns:a="http://schemas.openxmlformats.org/drawingml/2006/main">
-            <a:r>
-              <a:t>- MATLAB figure generated by Week01/.agent/matlab/generate_week01_plot.m from retained MAT and CSV data</a:t>
+              <a:t>- PHY4605 Course Topic and Difficulty Blueprint</a:t>
+            </a:r>
+          </a:p>
+          <a:p xmlns:a="http://schemas.openxmlformats.org/drawingml/2006/main">
+            <a:r>
+              <a:t>- Week 02 connection: pseudocode, loops, and debugging</a:t>
             </a:r>
           </a:p>
         </p:txBody>
@@ -785,12 +785,12 @@
           </a:p>
           <a:p xmlns:a="http://schemas.openxmlformats.org/drawingml/2006/main">
             <a:r>
-              <a:t>- PHY4605 Course Topic and Difficulty Blueprint</a:t>
-            </a:r>
-          </a:p>
-          <a:p xmlns:a="http://schemas.openxmlformats.org/drawingml/2006/main">
-            <a:r>
-              <a:t>- Week 02 connection: pseudocode, loops, and debugging</a:t>
+              <a:t>- PHY4605 Lecture Slide Deck Design Specification</a:t>
+            </a:r>
+          </a:p>
+          <a:p xmlns:a="http://schemas.openxmlformats.org/drawingml/2006/main">
+            <a:r>
+              <a:t>- Working exposure only: selected outputs from y(t) = 20t - 0.5(9.81)t^2 for t = 0, 1, 2, 3, 4 s. This is a logical/table support slide, not a parameter sweep.</a:t>
             </a:r>
           </a:p>
         </p:txBody>
@@ -1260,7 +1260,7 @@
           </a:p>
           <a:p xmlns:a="http://schemas.openxmlformats.org/drawingml/2006/main">
             <a:r>
-              <a:t>- symbolG: TeX `g`; SVG `Week01/.agent/lecture-slides/assets/equations/symbol-g.svg`; PNG `Week01/.agent/lecture-slides/assets/equations/symbol-g.png`; foreground `#6F4B9B`; target `110 × 48 px`; fit/crop `contain`; alt `LaTeX-rendered symbol g`; QA `render-equations-diagrams, PNG scale 6, retained TeX/SVG`</a:t>
+              <a:t>- symbolG: TeX `g`; SVG `Week01/.agent/lecture-slides/assets/equations/symbol-g.svg`; PNG `Week01/.agent/lecture-slides/assets/equations/symbol-g.png`; foreground `#C98A16`; target `110 × 48 px`; fit/crop `contain`; alt `LaTeX-rendered symbol g`; QA `render-equations-diagrams, PNG scale 6, retained TeX/SVG`</a:t>
             </a:r>
           </a:p>
           <a:p xmlns:a="http://schemas.openxmlformats.org/drawingml/2006/main">
@@ -1545,42 +1545,12 @@
           </a:p>
           <a:p xmlns:a="http://schemas.openxmlformats.org/drawingml/2006/main">
             <a:r>
-              <a:t>- PHY4605 Lecture Slide Deck Design Specification</a:t>
-            </a:r>
-          </a:p>
-          <a:p xmlns:a="http://schemas.openxmlformats.org/drawingml/2006/main">
-            <a:r>
-              <a:t>- Standard constant-acceleration kinematics; comparison calculated for v0 = 20 m/s and 15 m/s</a:t>
-            </a:r>
-          </a:p>
-          <a:p xmlns:a="http://schemas.openxmlformats.org/drawingml/2006/main">
-            <a:r>
-              <a:t>- MATLAB figure `assets/matlab-figures/launch_speed_comparison.png`, generated by `source/generate_master_matlab_figures.m` from retained `launch_speed_comparison_data.mat` and `.csv`; title, axes, legend, and all figure text use the LaTeX interpreter</a:t>
-            </a:r>
-          </a:p>
-          <a:p xmlns:a="http://schemas.openxmlformats.org/drawingml/2006/main">
-            <a:r>
-              <a:t>- LaTeX display assets: `comparison-v0.tex` and `comparison-g-y0.tex`; rendered by `render-equations-diagrams`; transparent PNGs inserted for the changed/fixed parameter labels; matching SVG and TeX retained in `.agent/lecture-slide-system/assets/equations`</a:t>
-            </a:r>
-          </a:p>
-          <a:p xmlns:a="http://schemas.openxmlformats.org/drawingml/2006/main">
-            <a:r>
-              <a:t/>
-            </a:r>
-          </a:p>
-          <a:p xmlns:a="http://schemas.openxmlformats.org/drawingml/2006/main">
-            <a:r>
-              <a:t>[Equation provenance]</a:t>
-            </a:r>
-          </a:p>
-          <a:p xmlns:a="http://schemas.openxmlformats.org/drawingml/2006/main">
-            <a:r>
-              <a:t>- comparisonV0: TeX `v_0`; SVG `Week01/.agent/lecture-slides/assets/equations/comparison-v0.svg`; PNG `Week01/.agent/lecture-slides/assets/equations/comparison-v0.png`; foreground `#2F6DB2`; target `58 × 34 px`; fit/crop `contain`; alt `LaTeX-rendered symbol v subscript zero`; QA `render-equations-diagrams, PNG scale 6, retained TeX/SVG`</a:t>
-            </a:r>
-          </a:p>
-          <a:p xmlns:a="http://schemas.openxmlformats.org/drawingml/2006/main">
-            <a:r>
-              <a:t>- comparisonGY0: TeX `g,\;y_0`; SVG `Week01/.agent/lecture-slides/assets/equations/comparison-g-y0.svg`; PNG `Week01/.agent/lecture-slides/assets/equations/comparison-g-y0.png`; foreground `#697684`; target `130 × 34 px`; fit/crop `contain`; alt `LaTeX-rendered expression g and y subscript zero`; QA `render-equations-diagrams, PNG scale 6, retained TeX/SVG`</a:t>
+              <a:t>- PHY4605 Course Topic and Difficulty Blueprint</a:t>
+            </a:r>
+          </a:p>
+          <a:p xmlns:a="http://schemas.openxmlformats.org/drawingml/2006/main">
+            <a:r>
+              <a:t>- PHY4605 Week 01 content manifest</a:t>
             </a:r>
           </a:p>
         </p:txBody>
@@ -1655,12 +1625,12 @@
           </a:p>
           <a:p xmlns:a="http://schemas.openxmlformats.org/drawingml/2006/main">
             <a:r>
-              <a:t>- PHY4605 Course Topic and Difficulty Blueprint</a:t>
-            </a:r>
-          </a:p>
-          <a:p xmlns:a="http://schemas.openxmlformats.org/drawingml/2006/main">
-            <a:r>
               <a:t>- PHY4605 Week 01 content manifest</a:t>
+            </a:r>
+          </a:p>
+          <a:p xmlns:a="http://schemas.openxmlformats.org/drawingml/2006/main">
+            <a:r>
+              <a:t>- MATLAB documentation: colon operator, linspace, and array indexing</a:t>
             </a:r>
           </a:p>
         </p:txBody>
@@ -2642,7 +2612,7 @@
   </p:cSld>
   <p:clrMap bg1="lt1" tx1="dk1" bg2="lt2" tx2="dk2" accent1="accent1" accent2="accent2" accent3="accent3" accent4="accent4" accent5="accent5" accent6="accent6" hlink="hlink" folHlink="folHlink"/>
   <p:sldLayoutIdLst>
-    <p:sldLayoutId xmlns:r="http://schemas.openxmlformats.org/officeDocument/2006/relationships" id="2147483649" r:id="Rb515174f33bb45dd"/>
+    <p:sldLayoutId xmlns:r="http://schemas.openxmlformats.org/officeDocument/2006/relationships" id="2147483649" r:id="R5f75916ce5ac4e75"/>
   </p:sldLayoutIdLst>
   <p:txStyles>
     <p:titleStyle>
@@ -3081,10 +3051,10 @@
   </p:cSld>
   <p:clrMap bg1="lt1" tx1="dk1" bg2="lt2" tx2="dk2" accent1="accent1" accent2="accent2" accent3="accent3" accent4="accent4" accent5="accent5" accent6="accent6" hlink="hlink" folHlink="folHlink"/>
   <p:sldLayoutIdLst>
-    <p:sldLayoutId xmlns:r="http://schemas.openxmlformats.org/officeDocument/2006/relationships" id="2147483651" r:id="Ra0e063bddb9c4ad0"/>
-    <p:sldLayoutId xmlns:r="http://schemas.openxmlformats.org/officeDocument/2006/relationships" id="2147483652" r:id="Rf09746a54861448c"/>
-    <p:sldLayoutId xmlns:r="http://schemas.openxmlformats.org/officeDocument/2006/relationships" id="2147483653" r:id="Rf2318505f3074cd9"/>
-    <p:sldLayoutId xmlns:r="http://schemas.openxmlformats.org/officeDocument/2006/relationships" id="2147483654" r:id="R73a20a5519374e7a"/>
+    <p:sldLayoutId xmlns:r="http://schemas.openxmlformats.org/officeDocument/2006/relationships" id="2147483651" r:id="Rb03e99e98bb04edb"/>
+    <p:sldLayoutId xmlns:r="http://schemas.openxmlformats.org/officeDocument/2006/relationships" id="2147483652" r:id="R4828075a2b4040d0"/>
+    <p:sldLayoutId xmlns:r="http://schemas.openxmlformats.org/officeDocument/2006/relationships" id="2147483653" r:id="R8191ba7d67ff4791"/>
+    <p:sldLayoutId xmlns:r="http://schemas.openxmlformats.org/officeDocument/2006/relationships" id="2147483654" r:id="R1fcf570915814892"/>
   </p:sldLayoutIdLst>
 </p:sldMaster>
 </file>
@@ -3603,7 +3573,7 @@
           <p:cNvPr id="17" name="course-tag">
             <a:extLst xmlns:a="http://schemas.openxmlformats.org/drawingml/2006/main">
               <a:ext uri="{FF2B5EF4-FFF2-40B4-BE49-F238E27FC236}">
-                <a16:creationId xmlns:a16="http://schemas.microsoft.com/office/drawing/2014/main" id="{1EBB1331-58E5-4370-B04B-9503B48D33E4}"/>
+                <a16:creationId xmlns:a16="http://schemas.microsoft.com/office/drawing/2014/main" id="{44C274F3-E856-4F7E-939B-ACE4EC2D34D1}"/>
               </a:ext>
             </a:extLst>
           </p:cNvPr>
@@ -3661,7 +3631,7 @@
           <p:cNvPr id="2" name="opening-title">
             <a:extLst xmlns:a="http://schemas.openxmlformats.org/drawingml/2006/main">
               <a:ext uri="{FF2B5EF4-FFF2-40B4-BE49-F238E27FC236}">
-                <a16:creationId xmlns:a16="http://schemas.microsoft.com/office/drawing/2014/main" id="{154B61F5-31A2-474A-A770-D01BCC291FCE}"/>
+                <a16:creationId xmlns:a16="http://schemas.microsoft.com/office/drawing/2014/main" id="{50326116-3367-486A-BB7A-547D4D596ABB}"/>
               </a:ext>
             </a:extLst>
           </p:cNvPr>
@@ -3725,7 +3695,7 @@
           <p:cNvPr id="3" name="opening-subtitle">
             <a:extLst xmlns:a="http://schemas.openxmlformats.org/drawingml/2006/main">
               <a:ext uri="{FF2B5EF4-FFF2-40B4-BE49-F238E27FC236}">
-                <a16:creationId xmlns:a16="http://schemas.microsoft.com/office/drawing/2014/main" id="{CA40F58B-0288-49B4-807E-D29A5D99CA74}"/>
+                <a16:creationId xmlns:a16="http://schemas.microsoft.com/office/drawing/2014/main" id="{12A48451-5BBF-4655-8DEF-106DC33B55E3}"/>
               </a:ext>
             </a:extLst>
           </p:cNvPr>
@@ -3789,7 +3759,7 @@
           <p:nvPr/>
         </p:nvPicPr>
         <p:blipFill>
-          <a:blip xmlns:r="http://schemas.openxmlformats.org/officeDocument/2006/relationships" xmlns:a="http://schemas.openxmlformats.org/drawingml/2006/main" r:embed="R9d5a86c23b464868"/>
+          <a:blip xmlns:r="http://schemas.openxmlformats.org/officeDocument/2006/relationships" xmlns:a="http://schemas.openxmlformats.org/drawingml/2006/main" r:embed="R45718c2fd6fc498d"/>
           <a:stretch xmlns:a="http://schemas.openxmlformats.org/drawingml/2006/main"/>
         </p:blipFill>
         <p:spPr>
@@ -3807,7 +3777,7 @@
           <p:cNvPr id="5" name="">
             <a:extLst xmlns:a="http://schemas.openxmlformats.org/drawingml/2006/main">
               <a:ext uri="{FF2B5EF4-FFF2-40B4-BE49-F238E27FC236}">
-                <a16:creationId xmlns:a16="http://schemas.microsoft.com/office/drawing/2014/main" id="{CCB088C3-4C31-4CA5-BD4D-B7C2A6C97CE1}"/>
+                <a16:creationId xmlns:a16="http://schemas.microsoft.com/office/drawing/2014/main" id="{B1FD5713-28FC-443A-AC94-417929744494}"/>
               </a:ext>
             </a:extLst>
           </p:cNvPr>
@@ -3865,7 +3835,7 @@
           <p:cNvPr id="6" name="">
             <a:extLst xmlns:a="http://schemas.openxmlformats.org/drawingml/2006/main">
               <a:ext uri="{FF2B5EF4-FFF2-40B4-BE49-F238E27FC236}">
-                <a16:creationId xmlns:a16="http://schemas.microsoft.com/office/drawing/2014/main" id="{EE771CF3-3171-4637-B7CE-9A11033C4C51}"/>
+                <a16:creationId xmlns:a16="http://schemas.microsoft.com/office/drawing/2014/main" id="{A67CB8AE-BFA1-4670-9451-90E3E4CF81FC}"/>
               </a:ext>
             </a:extLst>
           </p:cNvPr>
@@ -3923,7 +3893,7 @@
           <p:cNvPr id="7" name="">
             <a:extLst xmlns:a="http://schemas.openxmlformats.org/drawingml/2006/main">
               <a:ext uri="{FF2B5EF4-FFF2-40B4-BE49-F238E27FC236}">
-                <a16:creationId xmlns:a16="http://schemas.microsoft.com/office/drawing/2014/main" id="{45D4EB95-273E-4EA7-ACB5-E03198223AA5}"/>
+                <a16:creationId xmlns:a16="http://schemas.microsoft.com/office/drawing/2014/main" id="{B198F562-047A-4200-BDC3-5259485D5263}"/>
               </a:ext>
             </a:extLst>
           </p:cNvPr>
@@ -3981,7 +3951,7 @@
           <p:cNvPr id="8" name="">
             <a:extLst xmlns:a="http://schemas.openxmlformats.org/drawingml/2006/main">
               <a:ext uri="{FF2B5EF4-FFF2-40B4-BE49-F238E27FC236}">
-                <a16:creationId xmlns:a16="http://schemas.microsoft.com/office/drawing/2014/main" id="{61C7ADBE-F7AF-46E0-8A3A-61AC554AC046}"/>
+                <a16:creationId xmlns:a16="http://schemas.microsoft.com/office/drawing/2014/main" id="{63AE9C72-7B33-48F5-83B9-37F92758AF51}"/>
               </a:ext>
             </a:extLst>
           </p:cNvPr>
@@ -4012,7 +3982,7 @@
           <p:cNvPr id="9" name="">
             <a:extLst xmlns:a="http://schemas.openxmlformats.org/drawingml/2006/main">
               <a:ext uri="{FF2B5EF4-FFF2-40B4-BE49-F238E27FC236}">
-                <a16:creationId xmlns:a16="http://schemas.microsoft.com/office/drawing/2014/main" id="{54575BC4-2A4C-4D97-AD07-1837F76D8753}"/>
+                <a16:creationId xmlns:a16="http://schemas.microsoft.com/office/drawing/2014/main" id="{6C099A46-38F6-4114-9D4D-904944558E2B}"/>
               </a:ext>
             </a:extLst>
           </p:cNvPr>
@@ -4070,7 +4040,7 @@
           <p:cNvPr id="10" name="">
             <a:extLst xmlns:a="http://schemas.openxmlformats.org/drawingml/2006/main">
               <a:ext uri="{FF2B5EF4-FFF2-40B4-BE49-F238E27FC236}">
-                <a16:creationId xmlns:a16="http://schemas.microsoft.com/office/drawing/2014/main" id="{499748EE-C925-4520-BDD7-D0E2E073B49D}"/>
+                <a16:creationId xmlns:a16="http://schemas.microsoft.com/office/drawing/2014/main" id="{0EC0970F-C1C7-4110-8E51-E90EB4A2A137}"/>
               </a:ext>
             </a:extLst>
           </p:cNvPr>
@@ -4132,7 +4102,7 @@
           <p:cNvPr id="11" name="">
             <a:extLst xmlns:a="http://schemas.openxmlformats.org/drawingml/2006/main">
               <a:ext uri="{FF2B5EF4-FFF2-40B4-BE49-F238E27FC236}">
-                <a16:creationId xmlns:a16="http://schemas.microsoft.com/office/drawing/2014/main" id="{54537458-7224-417F-93B4-CA3865F17A28}"/>
+                <a16:creationId xmlns:a16="http://schemas.microsoft.com/office/drawing/2014/main" id="{726E2F31-1F30-4A65-9870-8DF76116B32A}"/>
               </a:ext>
             </a:extLst>
           </p:cNvPr>
@@ -4163,7 +4133,7 @@
           <p:cNvPr id="12" name="">
             <a:extLst xmlns:a="http://schemas.openxmlformats.org/drawingml/2006/main">
               <a:ext uri="{FF2B5EF4-FFF2-40B4-BE49-F238E27FC236}">
-                <a16:creationId xmlns:a16="http://schemas.microsoft.com/office/drawing/2014/main" id="{170EF58D-F4F4-454F-A2E5-A42A39CF9FF7}"/>
+                <a16:creationId xmlns:a16="http://schemas.microsoft.com/office/drawing/2014/main" id="{D1A5E6F2-686F-4779-86BE-53E627234F34}"/>
               </a:ext>
             </a:extLst>
           </p:cNvPr>
@@ -4225,7 +4195,7 @@
           <p:cNvPr id="13" name="">
             <a:extLst xmlns:a="http://schemas.openxmlformats.org/drawingml/2006/main">
               <a:ext uri="{FF2B5EF4-FFF2-40B4-BE49-F238E27FC236}">
-                <a16:creationId xmlns:a16="http://schemas.microsoft.com/office/drawing/2014/main" id="{B32EB692-9928-4F37-ACCC-AF2CB6868418}"/>
+                <a16:creationId xmlns:a16="http://schemas.microsoft.com/office/drawing/2014/main" id="{49880897-CBE9-462D-8ABE-062167049DD9}"/>
               </a:ext>
             </a:extLst>
           </p:cNvPr>
@@ -4256,7 +4226,7 @@
           <p:cNvPr id="14" name="">
             <a:extLst xmlns:a="http://schemas.openxmlformats.org/drawingml/2006/main">
               <a:ext uri="{FF2B5EF4-FFF2-40B4-BE49-F238E27FC236}">
-                <a16:creationId xmlns:a16="http://schemas.microsoft.com/office/drawing/2014/main" id="{5DF66477-7283-4C54-AF58-B906D579991D}"/>
+                <a16:creationId xmlns:a16="http://schemas.microsoft.com/office/drawing/2014/main" id="{5475D4C9-6A79-44C1-9CC3-96C226368A28}"/>
               </a:ext>
             </a:extLst>
           </p:cNvPr>
@@ -4318,7 +4288,7 @@
           <p:cNvPr id="15" name="">
             <a:extLst xmlns:a="http://schemas.openxmlformats.org/drawingml/2006/main">
               <a:ext uri="{FF2B5EF4-FFF2-40B4-BE49-F238E27FC236}">
-                <a16:creationId xmlns:a16="http://schemas.microsoft.com/office/drawing/2014/main" id="{FADE844D-73A2-4C4D-B536-E9C99584D604}"/>
+                <a16:creationId xmlns:a16="http://schemas.microsoft.com/office/drawing/2014/main" id="{3F2D6057-DA4C-4402-B94D-3D08525405A1}"/>
               </a:ext>
             </a:extLst>
           </p:cNvPr>
@@ -4349,7 +4319,7 @@
           <p:cNvPr id="16" name="">
             <a:extLst xmlns:a="http://schemas.openxmlformats.org/drawingml/2006/main">
               <a:ext uri="{FF2B5EF4-FFF2-40B4-BE49-F238E27FC236}">
-                <a16:creationId xmlns:a16="http://schemas.microsoft.com/office/drawing/2014/main" id="{475B6A15-218A-4D05-859B-DC8E2E704DEF}"/>
+                <a16:creationId xmlns:a16="http://schemas.microsoft.com/office/drawing/2014/main" id="{D7AB46AA-E669-4586-8359-C1F40393B08A}"/>
               </a:ext>
             </a:extLst>
           </p:cNvPr>
@@ -4409,7 +4379,7 @@
     </p:spTree>
     <p:extLst>
       <p:ext uri="{BB962C8B-B14F-4D97-AF65-F5344CB8AC3E}">
-        <p14:creationId xmlns:p14="http://schemas.microsoft.com/office/powerpoint/2010/main" val="1917240407"/>
+        <p14:creationId xmlns:p14="http://schemas.microsoft.com/office/powerpoint/2010/main" val="821322701"/>
       </p:ext>
     </p:extLst>
   </p:cSld>
@@ -4437,10 +4407,10 @@
       </p:grpSpPr>
       <p:sp>
         <p:nvSpPr>
-          <p:cNvPr id="14" name="title-T1">
-            <a:extLst xmlns:a="http://schemas.openxmlformats.org/drawingml/2006/main">
-              <a:ext uri="{FF2B5EF4-FFF2-40B4-BE49-F238E27FC236}">
-                <a16:creationId xmlns:a16="http://schemas.microsoft.com/office/drawing/2014/main" id="{897B7A31-3AF3-4A54-84A1-A620909CA06D}"/>
+          <p:cNvPr id="18" name="title-T1">
+            <a:extLst xmlns:a="http://schemas.openxmlformats.org/drawingml/2006/main">
+              <a:ext uri="{FF2B5EF4-FFF2-40B4-BE49-F238E27FC236}">
+                <a16:creationId xmlns:a16="http://schemas.microsoft.com/office/drawing/2014/main" id="{DA944C53-60FA-4DE2-BF30-F224F5ABF467}"/>
               </a:ext>
             </a:extLst>
           </p:cNvPr>
@@ -4494,7 +4464,7 @@
                 <a:ea typeface="Nunito"/>
                 <a:cs typeface="Nunito"/>
               </a:rPr>
-              <a:t>Build the time array first</a:t>
+              <a:t>Dots tell MATLAB to work through an array</a:t>
             </a:r>
           </a:p>
         </p:txBody>
@@ -4504,7 +4474,7 @@
           <p:cNvPr id="2" name="subtitle-T1">
             <a:extLst xmlns:a="http://schemas.openxmlformats.org/drawingml/2006/main">
               <a:ext uri="{FF2B5EF4-FFF2-40B4-BE49-F238E27FC236}">
-                <a16:creationId xmlns:a16="http://schemas.microsoft.com/office/drawing/2014/main" id="{870C61A3-93F6-4971-8F00-9FCE5A3AA5B2}"/>
+                <a16:creationId xmlns:a16="http://schemas.microsoft.com/office/drawing/2014/main" id="{3D11CB5E-59FE-41BA-A56F-7F9157431835}"/>
               </a:ext>
             </a:extLst>
           </p:cNvPr>
@@ -4554,7 +4524,7 @@
                 <a:ea typeface="Nunito"/>
                 <a:cs typeface="Nunito"/>
               </a:rPr>
-              <a:t>The model needs one time value for each computed height</a:t>
+              <a:t>Use element-wise operators when time contains many values</a:t>
             </a:r>
           </a:p>
         </p:txBody>
@@ -4564,23 +4534,232 @@
           <p:cNvPr id="3" name="">
             <a:extLst xmlns:a="http://schemas.openxmlformats.org/drawingml/2006/main">
               <a:ext uri="{FF2B5EF4-FFF2-40B4-BE49-F238E27FC236}">
-                <a16:creationId xmlns:a16="http://schemas.microsoft.com/office/drawing/2014/main" id="{EEF53A9A-A6E5-4AA2-8685-5DE3DD47294B}"/>
-              </a:ext>
-            </a:extLst>
-          </p:cNvPr>
-          <p:cNvSpPr>
-            <a:spLocks xmlns:a="http://schemas.openxmlformats.org/drawingml/2006/main" noGrp="1"/>
-          </p:cNvSpPr>
-          <p:nvPr/>
-        </p:nvSpPr>
-        <p:spPr>
-          <a:xfrm xmlns:a="http://schemas.openxmlformats.org/drawingml/2006/main">
-            <a:off x="1095375" y="2714625"/>
-            <a:ext cx="6858000" cy="4000500"/>
+                <a16:creationId xmlns:a16="http://schemas.microsoft.com/office/drawing/2014/main" id="{37A52283-085C-453C-9A02-5538E926132C}"/>
+              </a:ext>
+            </a:extLst>
+          </p:cNvPr>
+          <p:cNvSpPr>
+            <a:spLocks xmlns:a="http://schemas.openxmlformats.org/drawingml/2006/main" noGrp="1"/>
+          </p:cNvSpPr>
+          <p:nvPr/>
+        </p:nvSpPr>
+        <p:spPr>
+          <a:xfrm xmlns:a="http://schemas.openxmlformats.org/drawingml/2006/main">
+            <a:off x="1095375" y="3048000"/>
+            <a:ext cx="3714750" cy="3143250"/>
           </a:xfrm>
           <a:prstGeom xmlns:a="http://schemas.openxmlformats.org/drawingml/2006/main" prst="roundRect">
             <a:avLst>
-              <a:gd name="adj" fmla="val 2857"/>
+              <a:gd name="adj" fmla="val 3636"/>
+            </a:avLst>
+          </a:prstGeom>
+          <a:solidFill xmlns:a="http://schemas.openxmlformats.org/drawingml/2006/main">
+            <a:srgbClr val="F7F9FB"/>
+          </a:solidFill>
+          <a:ln xmlns:a="http://schemas.openxmlformats.org/drawingml/2006/main" w="19050">
+            <a:solidFill>
+              <a:srgbClr val="0B2B4C"/>
+            </a:solidFill>
+            <a:prstDash val="solid"/>
+          </a:ln>
+        </p:spPr>
+      </p:sp>
+      <p:sp>
+        <p:nvSpPr>
+          <p:cNvPr id="4" name="">
+            <a:extLst xmlns:a="http://schemas.openxmlformats.org/drawingml/2006/main">
+              <a:ext uri="{FF2B5EF4-FFF2-40B4-BE49-F238E27FC236}">
+                <a16:creationId xmlns:a16="http://schemas.microsoft.com/office/drawing/2014/main" id="{7EBA58F7-E710-4C1F-A585-0B035D69BFCE}"/>
+              </a:ext>
+            </a:extLst>
+          </p:cNvPr>
+          <p:cNvSpPr>
+            <a:spLocks xmlns:a="http://schemas.openxmlformats.org/drawingml/2006/main" noGrp="1"/>
+          </p:cNvSpPr>
+          <p:nvPr/>
+        </p:nvSpPr>
+        <p:spPr>
+          <a:xfrm xmlns:a="http://schemas.openxmlformats.org/drawingml/2006/main">
+            <a:off x="1381125" y="3476625"/>
+            <a:ext cx="3143250" cy="419100"/>
+          </a:xfrm>
+          <a:prstGeom xmlns:a="http://schemas.openxmlformats.org/drawingml/2006/main" prst="rect">
+            <a:avLst/>
+          </a:prstGeom>
+          <a:noFill xmlns:a="http://schemas.openxmlformats.org/drawingml/2006/main"/>
+          <a:ln xmlns:a="http://schemas.openxmlformats.org/drawingml/2006/main" w="0">
+            <a:noFill/>
+            <a:prstDash val="solid"/>
+          </a:ln>
+        </p:spPr>
+        <p:txBody>
+          <a:bodyPr xmlns:a="http://schemas.openxmlformats.org/drawingml/2006/main" wrap="square" lIns="0" tIns="0" rIns="0" bIns="0" anchor="t">
+            <a:noAutofit/>
+          </a:bodyPr>
+          <a:lstStyle xmlns:a="http://schemas.openxmlformats.org/drawingml/2006/main"/>
+          <a:p xmlns:a="http://schemas.openxmlformats.org/drawingml/2006/main">
+            <a:pPr algn="l">
+              <a:defRPr sz="2250" b="1">
+                <a:solidFill>
+                  <a:srgbClr val="0B2B4C"/>
+                </a:solidFill>
+                <a:latin typeface="Nunito"/>
+                <a:ea typeface="Nunito"/>
+                <a:cs typeface="Nunito"/>
+              </a:defRPr>
+            </a:pPr>
+            <a:r>
+              <a:rPr sz="2250" b="1">
+                <a:solidFill>
+                  <a:srgbClr val="0B2B4C"/>
+                </a:solidFill>
+                <a:latin typeface="Nunito"/>
+                <a:ea typeface="Nunito"/>
+                <a:cs typeface="Nunito"/>
+              </a:rPr>
+              <a:t>scalar arithmetic</a:t>
+            </a:r>
+          </a:p>
+        </p:txBody>
+      </p:sp>
+      <p:sp>
+        <p:nvSpPr>
+          <p:cNvPr id="5" name="">
+            <a:extLst xmlns:a="http://schemas.openxmlformats.org/drawingml/2006/main">
+              <a:ext uri="{FF2B5EF4-FFF2-40B4-BE49-F238E27FC236}">
+                <a16:creationId xmlns:a16="http://schemas.microsoft.com/office/drawing/2014/main" id="{85BFF628-481D-44A2-BCDF-9FA23B6CF415}"/>
+              </a:ext>
+            </a:extLst>
+          </p:cNvPr>
+          <p:cNvSpPr>
+            <a:spLocks xmlns:a="http://schemas.openxmlformats.org/drawingml/2006/main" noGrp="1"/>
+          </p:cNvSpPr>
+          <p:nvPr/>
+        </p:nvSpPr>
+        <p:spPr>
+          <a:xfrm xmlns:a="http://schemas.openxmlformats.org/drawingml/2006/main">
+            <a:off x="1381125" y="4476750"/>
+            <a:ext cx="3143250" cy="552450"/>
+          </a:xfrm>
+          <a:prstGeom xmlns:a="http://schemas.openxmlformats.org/drawingml/2006/main" prst="rect">
+            <a:avLst/>
+          </a:prstGeom>
+          <a:noFill xmlns:a="http://schemas.openxmlformats.org/drawingml/2006/main"/>
+          <a:ln xmlns:a="http://schemas.openxmlformats.org/drawingml/2006/main" w="0">
+            <a:noFill/>
+            <a:prstDash val="solid"/>
+          </a:ln>
+        </p:spPr>
+        <p:txBody>
+          <a:bodyPr xmlns:a="http://schemas.openxmlformats.org/drawingml/2006/main" wrap="square" lIns="0" tIns="0" rIns="0" bIns="0" anchor="t">
+            <a:noAutofit/>
+          </a:bodyPr>
+          <a:lstStyle xmlns:a="http://schemas.openxmlformats.org/drawingml/2006/main"/>
+          <a:p xmlns:a="http://schemas.openxmlformats.org/drawingml/2006/main">
+            <a:pPr algn="l">
+              <a:defRPr sz="2250" b="1">
+                <a:solidFill>
+                  <a:srgbClr val="0B2B4C"/>
+                </a:solidFill>
+                <a:latin typeface="IBM Plex Mono"/>
+                <a:ea typeface="IBM Plex Mono"/>
+                <a:cs typeface="IBM Plex Mono"/>
+              </a:defRPr>
+            </a:pPr>
+            <a:r>
+              <a:rPr sz="2250" b="1">
+                <a:solidFill>
+                  <a:srgbClr val="0B2B4C"/>
+                </a:solidFill>
+                <a:latin typeface="IBM Plex Mono"/>
+                <a:ea typeface="IBM Plex Mono"/>
+                <a:cs typeface="IBM Plex Mono"/>
+              </a:rPr>
+              <a:t>20 * 3</a:t>
+            </a:r>
+          </a:p>
+        </p:txBody>
+      </p:sp>
+      <p:sp>
+        <p:nvSpPr>
+          <p:cNvPr id="6" name="">
+            <a:extLst xmlns:a="http://schemas.openxmlformats.org/drawingml/2006/main">
+              <a:ext uri="{FF2B5EF4-FFF2-40B4-BE49-F238E27FC236}">
+                <a16:creationId xmlns:a16="http://schemas.microsoft.com/office/drawing/2014/main" id="{A21B2DED-FA06-4AE6-B25F-647C63106CA4}"/>
+              </a:ext>
+            </a:extLst>
+          </p:cNvPr>
+          <p:cNvSpPr>
+            <a:spLocks xmlns:a="http://schemas.openxmlformats.org/drawingml/2006/main" noGrp="1"/>
+          </p:cNvSpPr>
+          <p:nvPr/>
+        </p:nvSpPr>
+        <p:spPr>
+          <a:xfrm xmlns:a="http://schemas.openxmlformats.org/drawingml/2006/main">
+            <a:off x="1381125" y="5381625"/>
+            <a:ext cx="3143250" cy="495300"/>
+          </a:xfrm>
+          <a:prstGeom xmlns:a="http://schemas.openxmlformats.org/drawingml/2006/main" prst="rect">
+            <a:avLst/>
+          </a:prstGeom>
+          <a:noFill xmlns:a="http://schemas.openxmlformats.org/drawingml/2006/main"/>
+          <a:ln xmlns:a="http://schemas.openxmlformats.org/drawingml/2006/main" w="0">
+            <a:noFill/>
+            <a:prstDash val="solid"/>
+          </a:ln>
+        </p:spPr>
+        <p:txBody>
+          <a:bodyPr xmlns:a="http://schemas.openxmlformats.org/drawingml/2006/main" wrap="square" lIns="0" tIns="0" rIns="0" bIns="0" anchor="t">
+            <a:noAutofit/>
+          </a:bodyPr>
+          <a:lstStyle xmlns:a="http://schemas.openxmlformats.org/drawingml/2006/main"/>
+          <a:p xmlns:a="http://schemas.openxmlformats.org/drawingml/2006/main">
+            <a:pPr algn="l">
+              <a:defRPr sz="1875">
+                <a:solidFill>
+                  <a:srgbClr val="3F4B57"/>
+                </a:solidFill>
+                <a:latin typeface="Nunito"/>
+                <a:ea typeface="Nunito"/>
+                <a:cs typeface="Nunito"/>
+              </a:defRPr>
+            </a:pPr>
+            <a:r>
+              <a:rPr sz="1875">
+                <a:solidFill>
+                  <a:srgbClr val="3F4B57"/>
+                </a:solidFill>
+                <a:latin typeface="Nunito"/>
+                <a:ea typeface="Nunito"/>
+                <a:cs typeface="Nunito"/>
+              </a:rPr>
+              <a:t>one number</a:t>
+            </a:r>
+          </a:p>
+        </p:txBody>
+      </p:sp>
+      <p:sp>
+        <p:nvSpPr>
+          <p:cNvPr id="7" name="">
+            <a:extLst xmlns:a="http://schemas.openxmlformats.org/drawingml/2006/main">
+              <a:ext uri="{FF2B5EF4-FFF2-40B4-BE49-F238E27FC236}">
+                <a16:creationId xmlns:a16="http://schemas.microsoft.com/office/drawing/2014/main" id="{500A120D-D546-4D51-AD37-A143A239B351}"/>
+              </a:ext>
+            </a:extLst>
+          </p:cNvPr>
+          <p:cNvSpPr>
+            <a:spLocks xmlns:a="http://schemas.openxmlformats.org/drawingml/2006/main" noGrp="1"/>
+          </p:cNvSpPr>
+          <p:nvPr/>
+        </p:nvSpPr>
+        <p:spPr>
+          <a:xfrm xmlns:a="http://schemas.openxmlformats.org/drawingml/2006/main">
+            <a:off x="5334000" y="3048000"/>
+            <a:ext cx="3714750" cy="3143250"/>
+          </a:xfrm>
+          <a:prstGeom xmlns:a="http://schemas.openxmlformats.org/drawingml/2006/main" prst="roundRect">
+            <a:avLst>
+              <a:gd name="adj" fmla="val 3636"/>
             </a:avLst>
           </a:prstGeom>
           <a:solidFill xmlns:a="http://schemas.openxmlformats.org/drawingml/2006/main">
@@ -4596,22 +4775,22 @@
       </p:sp>
       <p:sp>
         <p:nvSpPr>
-          <p:cNvPr id="4" name="">
-            <a:extLst xmlns:a="http://schemas.openxmlformats.org/drawingml/2006/main">
-              <a:ext uri="{FF2B5EF4-FFF2-40B4-BE49-F238E27FC236}">
-                <a16:creationId xmlns:a16="http://schemas.microsoft.com/office/drawing/2014/main" id="{0301F0E5-C313-4F54-B878-210A42E6B96D}"/>
-              </a:ext>
-            </a:extLst>
-          </p:cNvPr>
-          <p:cNvSpPr>
-            <a:spLocks xmlns:a="http://schemas.openxmlformats.org/drawingml/2006/main" noGrp="1"/>
-          </p:cNvSpPr>
-          <p:nvPr/>
-        </p:nvSpPr>
-        <p:spPr>
-          <a:xfrm xmlns:a="http://schemas.openxmlformats.org/drawingml/2006/main">
-            <a:off x="1476375" y="3095625"/>
-            <a:ext cx="5905500" cy="571500"/>
+          <p:cNvPr id="8" name="">
+            <a:extLst xmlns:a="http://schemas.openxmlformats.org/drawingml/2006/main">
+              <a:ext uri="{FF2B5EF4-FFF2-40B4-BE49-F238E27FC236}">
+                <a16:creationId xmlns:a16="http://schemas.microsoft.com/office/drawing/2014/main" id="{B9814BC8-4464-41C9-BC68-FAEB27961266}"/>
+              </a:ext>
+            </a:extLst>
+          </p:cNvPr>
+          <p:cNvSpPr>
+            <a:spLocks xmlns:a="http://schemas.openxmlformats.org/drawingml/2006/main" noGrp="1"/>
+          </p:cNvSpPr>
+          <p:nvPr/>
+        </p:nvSpPr>
+        <p:spPr>
+          <a:xfrm xmlns:a="http://schemas.openxmlformats.org/drawingml/2006/main">
+            <a:off x="5619750" y="3476625"/>
+            <a:ext cx="3143250" cy="419100"/>
           </a:xfrm>
           <a:prstGeom xmlns:a="http://schemas.openxmlformats.org/drawingml/2006/main" prst="rect">
             <a:avLst/>
@@ -4629,47 +4808,47 @@
           <a:lstStyle xmlns:a="http://schemas.openxmlformats.org/drawingml/2006/main"/>
           <a:p xmlns:a="http://schemas.openxmlformats.org/drawingml/2006/main">
             <a:pPr algn="l">
-              <a:defRPr sz="2550" b="1">
-                <a:solidFill>
-                  <a:srgbClr val="0B2B4C"/>
-                </a:solidFill>
-                <a:latin typeface="Nunito"/>
-                <a:ea typeface="Nunito"/>
-                <a:cs typeface="Nunito"/>
-              </a:defRPr>
-            </a:pPr>
-            <a:r>
-              <a:rPr sz="2550" b="1">
-                <a:solidFill>
-                  <a:srgbClr val="0B2B4C"/>
-                </a:solidFill>
-                <a:latin typeface="Nunito"/>
-                <a:ea typeface="Nunito"/>
-                <a:cs typeface="Nunito"/>
-              </a:rPr>
-              <a:t>Two ways to make 41 samples</a:t>
-            </a:r>
-          </a:p>
-        </p:txBody>
-      </p:sp>
-      <p:sp>
-        <p:nvSpPr>
-          <p:cNvPr id="5" name="">
-            <a:extLst xmlns:a="http://schemas.openxmlformats.org/drawingml/2006/main">
-              <a:ext uri="{FF2B5EF4-FFF2-40B4-BE49-F238E27FC236}">
-                <a16:creationId xmlns:a16="http://schemas.microsoft.com/office/drawing/2014/main" id="{9242D1D1-94CD-45DA-A04C-C162FD199BD4}"/>
-              </a:ext>
-            </a:extLst>
-          </p:cNvPr>
-          <p:cNvSpPr>
-            <a:spLocks xmlns:a="http://schemas.openxmlformats.org/drawingml/2006/main" noGrp="1"/>
-          </p:cNvSpPr>
-          <p:nvPr/>
-        </p:nvSpPr>
-        <p:spPr>
-          <a:xfrm xmlns:a="http://schemas.openxmlformats.org/drawingml/2006/main">
-            <a:off x="1571625" y="4000500"/>
-            <a:ext cx="5524500" cy="571500"/>
+              <a:defRPr sz="2250" b="1">
+                <a:solidFill>
+                  <a:srgbClr val="2F6DB2"/>
+                </a:solidFill>
+                <a:latin typeface="Nunito"/>
+                <a:ea typeface="Nunito"/>
+                <a:cs typeface="Nunito"/>
+              </a:defRPr>
+            </a:pPr>
+            <a:r>
+              <a:rPr sz="2250" b="1">
+                <a:solidFill>
+                  <a:srgbClr val="2F6DB2"/>
+                </a:solidFill>
+                <a:latin typeface="Nunito"/>
+                <a:ea typeface="Nunito"/>
+                <a:cs typeface="Nunito"/>
+              </a:rPr>
+              <a:t>every time value</a:t>
+            </a:r>
+          </a:p>
+        </p:txBody>
+      </p:sp>
+      <p:sp>
+        <p:nvSpPr>
+          <p:cNvPr id="9" name="">
+            <a:extLst xmlns:a="http://schemas.openxmlformats.org/drawingml/2006/main">
+              <a:ext uri="{FF2B5EF4-FFF2-40B4-BE49-F238E27FC236}">
+                <a16:creationId xmlns:a16="http://schemas.microsoft.com/office/drawing/2014/main" id="{AD584174-0578-4EAE-A710-04B77DA1A687}"/>
+              </a:ext>
+            </a:extLst>
+          </p:cNvPr>
+          <p:cNvSpPr>
+            <a:spLocks xmlns:a="http://schemas.openxmlformats.org/drawingml/2006/main" noGrp="1"/>
+          </p:cNvSpPr>
+          <p:nvPr/>
+        </p:nvSpPr>
+        <p:spPr>
+          <a:xfrm xmlns:a="http://schemas.openxmlformats.org/drawingml/2006/main">
+            <a:off x="5619750" y="4476750"/>
+            <a:ext cx="3143250" cy="552450"/>
           </a:xfrm>
           <a:prstGeom xmlns:a="http://schemas.openxmlformats.org/drawingml/2006/main" prst="rect">
             <a:avLst/>
@@ -4687,7 +4866,7 @@
           <a:lstStyle xmlns:a="http://schemas.openxmlformats.org/drawingml/2006/main"/>
           <a:p xmlns:a="http://schemas.openxmlformats.org/drawingml/2006/main">
             <a:pPr algn="l">
-              <a:defRPr sz="2550" b="1">
+              <a:defRPr sz="2250" b="1">
                 <a:solidFill>
                   <a:srgbClr val="0B2B4C"/>
                 </a:solidFill>
@@ -4697,7 +4876,7 @@
               </a:defRPr>
             </a:pPr>
             <a:r>
-              <a:rPr sz="2550" b="1">
+              <a:rPr sz="2250" b="1">
                 <a:solidFill>
                   <a:srgbClr val="0B2B4C"/>
                 </a:solidFill>
@@ -4705,29 +4884,29 @@
                 <a:ea typeface="IBM Plex Mono"/>
                 <a:cs typeface="IBM Plex Mono"/>
               </a:rPr>
-              <a:t>t_s = 0:0.1:4;</a:t>
-            </a:r>
-          </a:p>
-        </p:txBody>
-      </p:sp>
-      <p:sp>
-        <p:nvSpPr>
-          <p:cNvPr id="6" name="">
-            <a:extLst xmlns:a="http://schemas.openxmlformats.org/drawingml/2006/main">
-              <a:ext uri="{FF2B5EF4-FFF2-40B4-BE49-F238E27FC236}">
-                <a16:creationId xmlns:a16="http://schemas.microsoft.com/office/drawing/2014/main" id="{A864DABD-6B34-4F2C-B481-F4B58EE5490F}"/>
-              </a:ext>
-            </a:extLst>
-          </p:cNvPr>
-          <p:cNvSpPr>
-            <a:spLocks xmlns:a="http://schemas.openxmlformats.org/drawingml/2006/main" noGrp="1"/>
-          </p:cNvSpPr>
-          <p:nvPr/>
-        </p:nvSpPr>
-        <p:spPr>
-          <a:xfrm xmlns:a="http://schemas.openxmlformats.org/drawingml/2006/main">
-            <a:off x="1571625" y="4857750"/>
-            <a:ext cx="952500" cy="419100"/>
+              <a:t>v0_mps .* t_s</a:t>
+            </a:r>
+          </a:p>
+        </p:txBody>
+      </p:sp>
+      <p:sp>
+        <p:nvSpPr>
+          <p:cNvPr id="10" name="">
+            <a:extLst xmlns:a="http://schemas.openxmlformats.org/drawingml/2006/main">
+              <a:ext uri="{FF2B5EF4-FFF2-40B4-BE49-F238E27FC236}">
+                <a16:creationId xmlns:a16="http://schemas.microsoft.com/office/drawing/2014/main" id="{492DCAAF-2126-4D90-A9DB-B92A21AE3BC2}"/>
+              </a:ext>
+            </a:extLst>
+          </p:cNvPr>
+          <p:cNvSpPr>
+            <a:spLocks xmlns:a="http://schemas.openxmlformats.org/drawingml/2006/main" noGrp="1"/>
+          </p:cNvSpPr>
+          <p:nvPr/>
+        </p:nvSpPr>
+        <p:spPr>
+          <a:xfrm xmlns:a="http://schemas.openxmlformats.org/drawingml/2006/main">
+            <a:off x="5619750" y="5381625"/>
+            <a:ext cx="3143250" cy="495300"/>
           </a:xfrm>
           <a:prstGeom xmlns:a="http://schemas.openxmlformats.org/drawingml/2006/main" prst="rect">
             <a:avLst/>
@@ -4745,47 +4924,82 @@
           <a:lstStyle xmlns:a="http://schemas.openxmlformats.org/drawingml/2006/main"/>
           <a:p xmlns:a="http://schemas.openxmlformats.org/drawingml/2006/main">
             <a:pPr algn="l">
-              <a:defRPr sz="2100">
-                <a:solidFill>
-                  <a:srgbClr val="697684"/>
-                </a:solidFill>
-                <a:latin typeface="Nunito"/>
-                <a:ea typeface="Nunito"/>
-                <a:cs typeface="Nunito"/>
-              </a:defRPr>
-            </a:pPr>
-            <a:r>
-              <a:rPr sz="2100">
-                <a:solidFill>
-                  <a:srgbClr val="697684"/>
-                </a:solidFill>
-                <a:latin typeface="Nunito"/>
-                <a:ea typeface="Nunito"/>
-                <a:cs typeface="Nunito"/>
-              </a:rPr>
-              <a:t>or</a:t>
-            </a:r>
-          </a:p>
-        </p:txBody>
-      </p:sp>
-      <p:sp>
-        <p:nvSpPr>
-          <p:cNvPr id="7" name="">
-            <a:extLst xmlns:a="http://schemas.openxmlformats.org/drawingml/2006/main">
-              <a:ext uri="{FF2B5EF4-FFF2-40B4-BE49-F238E27FC236}">
-                <a16:creationId xmlns:a16="http://schemas.microsoft.com/office/drawing/2014/main" id="{E4EE2A9A-ECAE-4643-BF83-272F02E9E5FF}"/>
-              </a:ext>
-            </a:extLst>
-          </p:cNvPr>
-          <p:cNvSpPr>
-            <a:spLocks xmlns:a="http://schemas.openxmlformats.org/drawingml/2006/main" noGrp="1"/>
-          </p:cNvSpPr>
-          <p:nvPr/>
-        </p:nvSpPr>
-        <p:spPr>
-          <a:xfrm xmlns:a="http://schemas.openxmlformats.org/drawingml/2006/main">
-            <a:off x="1571625" y="5524500"/>
-            <a:ext cx="5810250" cy="571500"/>
+              <a:defRPr sz="1875">
+                <a:solidFill>
+                  <a:srgbClr val="3F4B57"/>
+                </a:solidFill>
+                <a:latin typeface="Nunito"/>
+                <a:ea typeface="Nunito"/>
+                <a:cs typeface="Nunito"/>
+              </a:defRPr>
+            </a:pPr>
+            <a:r>
+              <a:rPr sz="1875">
+                <a:solidFill>
+                  <a:srgbClr val="3F4B57"/>
+                </a:solidFill>
+                <a:latin typeface="Nunito"/>
+                <a:ea typeface="Nunito"/>
+                <a:cs typeface="Nunito"/>
+              </a:rPr>
+              <a:t>one value for every time</a:t>
+            </a:r>
+          </a:p>
+        </p:txBody>
+      </p:sp>
+      <p:sp>
+        <p:nvSpPr>
+          <p:cNvPr id="11" name="">
+            <a:extLst xmlns:a="http://schemas.openxmlformats.org/drawingml/2006/main">
+              <a:ext uri="{FF2B5EF4-FFF2-40B4-BE49-F238E27FC236}">
+                <a16:creationId xmlns:a16="http://schemas.microsoft.com/office/drawing/2014/main" id="{0550CCB4-020F-47A9-8110-43FBEBA58B93}"/>
+              </a:ext>
+            </a:extLst>
+          </p:cNvPr>
+          <p:cNvSpPr>
+            <a:spLocks xmlns:a="http://schemas.openxmlformats.org/drawingml/2006/main" noGrp="1"/>
+          </p:cNvSpPr>
+          <p:nvPr/>
+        </p:nvSpPr>
+        <p:spPr>
+          <a:xfrm xmlns:a="http://schemas.openxmlformats.org/drawingml/2006/main">
+            <a:off x="9572625" y="3048000"/>
+            <a:ext cx="3714750" cy="3143250"/>
+          </a:xfrm>
+          <a:prstGeom xmlns:a="http://schemas.openxmlformats.org/drawingml/2006/main" prst="roundRect">
+            <a:avLst>
+              <a:gd name="adj" fmla="val 3636"/>
+            </a:avLst>
+          </a:prstGeom>
+          <a:solidFill xmlns:a="http://schemas.openxmlformats.org/drawingml/2006/main">
+            <a:srgbClr val="FFF7E6"/>
+          </a:solidFill>
+          <a:ln xmlns:a="http://schemas.openxmlformats.org/drawingml/2006/main" w="19050">
+            <a:solidFill>
+              <a:srgbClr val="C98A16"/>
+            </a:solidFill>
+            <a:prstDash val="solid"/>
+          </a:ln>
+        </p:spPr>
+      </p:sp>
+      <p:sp>
+        <p:nvSpPr>
+          <p:cNvPr id="12" name="">
+            <a:extLst xmlns:a="http://schemas.openxmlformats.org/drawingml/2006/main">
+              <a:ext uri="{FF2B5EF4-FFF2-40B4-BE49-F238E27FC236}">
+                <a16:creationId xmlns:a16="http://schemas.microsoft.com/office/drawing/2014/main" id="{379FFAAB-EB26-4DEC-A682-B62A191F06D3}"/>
+              </a:ext>
+            </a:extLst>
+          </p:cNvPr>
+          <p:cNvSpPr>
+            <a:spLocks xmlns:a="http://schemas.openxmlformats.org/drawingml/2006/main" noGrp="1"/>
+          </p:cNvSpPr>
+          <p:nvPr/>
+        </p:nvSpPr>
+        <p:spPr>
+          <a:xfrm xmlns:a="http://schemas.openxmlformats.org/drawingml/2006/main">
+            <a:off x="9858375" y="3476625"/>
+            <a:ext cx="3143250" cy="419100"/>
           </a:xfrm>
           <a:prstGeom xmlns:a="http://schemas.openxmlformats.org/drawingml/2006/main" prst="rect">
             <a:avLst/>
@@ -4803,7 +5017,65 @@
           <a:lstStyle xmlns:a="http://schemas.openxmlformats.org/drawingml/2006/main"/>
           <a:p xmlns:a="http://schemas.openxmlformats.org/drawingml/2006/main">
             <a:pPr algn="l">
-              <a:defRPr sz="2550" b="1">
+              <a:defRPr sz="2250" b="1">
+                <a:solidFill>
+                  <a:srgbClr val="C98A16"/>
+                </a:solidFill>
+                <a:latin typeface="Nunito"/>
+                <a:ea typeface="Nunito"/>
+                <a:cs typeface="Nunito"/>
+              </a:defRPr>
+            </a:pPr>
+            <a:r>
+              <a:rPr sz="2250" b="1">
+                <a:solidFill>
+                  <a:srgbClr val="C98A16"/>
+                </a:solidFill>
+                <a:latin typeface="Nunito"/>
+                <a:ea typeface="Nunito"/>
+                <a:cs typeface="Nunito"/>
+              </a:rPr>
+              <a:t>array square</a:t>
+            </a:r>
+          </a:p>
+        </p:txBody>
+      </p:sp>
+      <p:sp>
+        <p:nvSpPr>
+          <p:cNvPr id="13" name="">
+            <a:extLst xmlns:a="http://schemas.openxmlformats.org/drawingml/2006/main">
+              <a:ext uri="{FF2B5EF4-FFF2-40B4-BE49-F238E27FC236}">
+                <a16:creationId xmlns:a16="http://schemas.microsoft.com/office/drawing/2014/main" id="{4A00B873-6F04-451F-BF5B-614E8C4647EF}"/>
+              </a:ext>
+            </a:extLst>
+          </p:cNvPr>
+          <p:cNvSpPr>
+            <a:spLocks xmlns:a="http://schemas.openxmlformats.org/drawingml/2006/main" noGrp="1"/>
+          </p:cNvSpPr>
+          <p:nvPr/>
+        </p:nvSpPr>
+        <p:spPr>
+          <a:xfrm xmlns:a="http://schemas.openxmlformats.org/drawingml/2006/main">
+            <a:off x="9858375" y="4476750"/>
+            <a:ext cx="3143250" cy="552450"/>
+          </a:xfrm>
+          <a:prstGeom xmlns:a="http://schemas.openxmlformats.org/drawingml/2006/main" prst="rect">
+            <a:avLst/>
+          </a:prstGeom>
+          <a:noFill xmlns:a="http://schemas.openxmlformats.org/drawingml/2006/main"/>
+          <a:ln xmlns:a="http://schemas.openxmlformats.org/drawingml/2006/main" w="0">
+            <a:noFill/>
+            <a:prstDash val="solid"/>
+          </a:ln>
+        </p:spPr>
+        <p:txBody>
+          <a:bodyPr xmlns:a="http://schemas.openxmlformats.org/drawingml/2006/main" wrap="square" lIns="0" tIns="0" rIns="0" bIns="0" anchor="t">
+            <a:noAutofit/>
+          </a:bodyPr>
+          <a:lstStyle xmlns:a="http://schemas.openxmlformats.org/drawingml/2006/main"/>
+          <a:p xmlns:a="http://schemas.openxmlformats.org/drawingml/2006/main">
+            <a:pPr algn="l">
+              <a:defRPr sz="2250" b="1">
                 <a:solidFill>
                   <a:srgbClr val="0B2B4C"/>
                 </a:solidFill>
@@ -4813,7 +5085,7 @@
               </a:defRPr>
             </a:pPr>
             <a:r>
-              <a:rPr sz="2550" b="1">
+              <a:rPr sz="2250" b="1">
                 <a:solidFill>
                   <a:srgbClr val="0B2B4C"/>
                 </a:solidFill>
@@ -4821,41 +5093,99 @@
                 <a:ea typeface="IBM Plex Mono"/>
                 <a:cs typeface="IBM Plex Mono"/>
               </a:rPr>
-              <a:t>t_s = linspace(0,4,41);</a:t>
-            </a:r>
-          </a:p>
-        </p:txBody>
-      </p:sp>
-      <p:sp>
-        <p:nvSpPr>
-          <p:cNvPr id="8" name="">
-            <a:extLst xmlns:a="http://schemas.openxmlformats.org/drawingml/2006/main">
-              <a:ext uri="{FF2B5EF4-FFF2-40B4-BE49-F238E27FC236}">
-                <a16:creationId xmlns:a16="http://schemas.microsoft.com/office/drawing/2014/main" id="{5955A6B8-AD78-4763-AD3D-77DBB301159E}"/>
-              </a:ext>
-            </a:extLst>
-          </p:cNvPr>
-          <p:cNvSpPr>
-            <a:spLocks xmlns:a="http://schemas.openxmlformats.org/drawingml/2006/main" noGrp="1"/>
-          </p:cNvSpPr>
-          <p:nvPr/>
-        </p:nvSpPr>
-        <p:spPr>
-          <a:xfrm xmlns:a="http://schemas.openxmlformats.org/drawingml/2006/main">
-            <a:off x="8858250" y="2714625"/>
-            <a:ext cx="7239000" cy="4000500"/>
+              <a:t>t_s.^2</a:t>
+            </a:r>
+          </a:p>
+        </p:txBody>
+      </p:sp>
+      <p:sp>
+        <p:nvSpPr>
+          <p:cNvPr id="14" name="">
+            <a:extLst xmlns:a="http://schemas.openxmlformats.org/drawingml/2006/main">
+              <a:ext uri="{FF2B5EF4-FFF2-40B4-BE49-F238E27FC236}">
+                <a16:creationId xmlns:a16="http://schemas.microsoft.com/office/drawing/2014/main" id="{525E2B64-68E8-4D7E-B3F2-708BC4F832CB}"/>
+              </a:ext>
+            </a:extLst>
+          </p:cNvPr>
+          <p:cNvSpPr>
+            <a:spLocks xmlns:a="http://schemas.openxmlformats.org/drawingml/2006/main" noGrp="1"/>
+          </p:cNvSpPr>
+          <p:nvPr/>
+        </p:nvSpPr>
+        <p:spPr>
+          <a:xfrm xmlns:a="http://schemas.openxmlformats.org/drawingml/2006/main">
+            <a:off x="9858375" y="5381625"/>
+            <a:ext cx="3143250" cy="495300"/>
+          </a:xfrm>
+          <a:prstGeom xmlns:a="http://schemas.openxmlformats.org/drawingml/2006/main" prst="rect">
+            <a:avLst/>
+          </a:prstGeom>
+          <a:noFill xmlns:a="http://schemas.openxmlformats.org/drawingml/2006/main"/>
+          <a:ln xmlns:a="http://schemas.openxmlformats.org/drawingml/2006/main" w="0">
+            <a:noFill/>
+            <a:prstDash val="solid"/>
+          </a:ln>
+        </p:spPr>
+        <p:txBody>
+          <a:bodyPr xmlns:a="http://schemas.openxmlformats.org/drawingml/2006/main" wrap="square" lIns="0" tIns="0" rIns="0" bIns="0" anchor="t">
+            <a:noAutofit/>
+          </a:bodyPr>
+          <a:lstStyle xmlns:a="http://schemas.openxmlformats.org/drawingml/2006/main"/>
+          <a:p xmlns:a="http://schemas.openxmlformats.org/drawingml/2006/main">
+            <a:pPr algn="l">
+              <a:defRPr sz="1875">
+                <a:solidFill>
+                  <a:srgbClr val="3F4B57"/>
+                </a:solidFill>
+                <a:latin typeface="Nunito"/>
+                <a:ea typeface="Nunito"/>
+                <a:cs typeface="Nunito"/>
+              </a:defRPr>
+            </a:pPr>
+            <a:r>
+              <a:rPr sz="1875">
+                <a:solidFill>
+                  <a:srgbClr val="3F4B57"/>
+                </a:solidFill>
+                <a:latin typeface="Nunito"/>
+                <a:ea typeface="Nunito"/>
+                <a:cs typeface="Nunito"/>
+              </a:rPr>
+              <a:t>every time value squared</a:t>
+            </a:r>
+          </a:p>
+        </p:txBody>
+      </p:sp>
+      <p:sp>
+        <p:nvSpPr>
+          <p:cNvPr id="15" name="">
+            <a:extLst xmlns:a="http://schemas.openxmlformats.org/drawingml/2006/main">
+              <a:ext uri="{FF2B5EF4-FFF2-40B4-BE49-F238E27FC236}">
+                <a16:creationId xmlns:a16="http://schemas.microsoft.com/office/drawing/2014/main" id="{4D4F58DF-AAA9-49B7-A468-CC11D1B5363F}"/>
+              </a:ext>
+            </a:extLst>
+          </p:cNvPr>
+          <p:cNvSpPr>
+            <a:spLocks xmlns:a="http://schemas.openxmlformats.org/drawingml/2006/main" noGrp="1"/>
+          </p:cNvSpPr>
+          <p:nvPr/>
+        </p:nvSpPr>
+        <p:spPr>
+          <a:xfrm xmlns:a="http://schemas.openxmlformats.org/drawingml/2006/main">
+            <a:off x="1095375" y="7239000"/>
+            <a:ext cx="15001875" cy="952500"/>
           </a:xfrm>
           <a:prstGeom xmlns:a="http://schemas.openxmlformats.org/drawingml/2006/main" prst="roundRect">
             <a:avLst>
-              <a:gd name="adj" fmla="val 2857"/>
+              <a:gd name="adj" fmla="val 12000"/>
             </a:avLst>
           </a:prstGeom>
           <a:solidFill xmlns:a="http://schemas.openxmlformats.org/drawingml/2006/main">
-            <a:srgbClr val="F0FAF7"/>
+            <a:srgbClr val="FFF7E6"/>
           </a:solidFill>
           <a:ln xmlns:a="http://schemas.openxmlformats.org/drawingml/2006/main" w="19050">
             <a:solidFill>
-              <a:srgbClr val="3E8E45"/>
+              <a:srgbClr val="C98A16"/>
             </a:solidFill>
             <a:prstDash val="solid"/>
           </a:ln>
@@ -4863,22 +5193,22 @@
       </p:sp>
       <p:sp>
         <p:nvSpPr>
-          <p:cNvPr id="9" name="">
-            <a:extLst xmlns:a="http://schemas.openxmlformats.org/drawingml/2006/main">
-              <a:ext uri="{FF2B5EF4-FFF2-40B4-BE49-F238E27FC236}">
-                <a16:creationId xmlns:a16="http://schemas.microsoft.com/office/drawing/2014/main" id="{B6D261D9-DBC1-41E0-92DB-74071E644CF4}"/>
-              </a:ext>
-            </a:extLst>
-          </p:cNvPr>
-          <p:cNvSpPr>
-            <a:spLocks xmlns:a="http://schemas.openxmlformats.org/drawingml/2006/main" noGrp="1"/>
-          </p:cNvSpPr>
-          <p:nvPr/>
-        </p:nvSpPr>
-        <p:spPr>
-          <a:xfrm xmlns:a="http://schemas.openxmlformats.org/drawingml/2006/main">
-            <a:off x="9239250" y="3095625"/>
-            <a:ext cx="6191250" cy="457200"/>
+          <p:cNvPr id="16" name="">
+            <a:extLst xmlns:a="http://schemas.openxmlformats.org/drawingml/2006/main">
+              <a:ext uri="{FF2B5EF4-FFF2-40B4-BE49-F238E27FC236}">
+                <a16:creationId xmlns:a16="http://schemas.microsoft.com/office/drawing/2014/main" id="{AD7989C5-7E80-48CC-8318-5D1A1E8573E2}"/>
+              </a:ext>
+            </a:extLst>
+          </p:cNvPr>
+          <p:cNvSpPr>
+            <a:spLocks xmlns:a="http://schemas.openxmlformats.org/drawingml/2006/main" noGrp="1"/>
+          </p:cNvSpPr>
+          <p:nvPr/>
+        </p:nvSpPr>
+        <p:spPr>
+          <a:xfrm xmlns:a="http://schemas.openxmlformats.org/drawingml/2006/main">
+            <a:off x="1476375" y="7524750"/>
+            <a:ext cx="14239875" cy="400050"/>
           </a:xfrm>
           <a:prstGeom xmlns:a="http://schemas.openxmlformats.org/drawingml/2006/main" prst="rect">
             <a:avLst/>
@@ -4895,184 +5225,10 @@
           </a:bodyPr>
           <a:lstStyle xmlns:a="http://schemas.openxmlformats.org/drawingml/2006/main"/>
           <a:p xmlns:a="http://schemas.openxmlformats.org/drawingml/2006/main">
-            <a:pPr algn="l">
-              <a:defRPr sz="2550" b="1">
-                <a:solidFill>
-                  <a:srgbClr val="3E8E45"/>
-                </a:solidFill>
-                <a:latin typeface="Nunito"/>
-                <a:ea typeface="Nunito"/>
-                <a:cs typeface="Nunito"/>
-              </a:defRPr>
-            </a:pPr>
-            <a:r>
-              <a:rPr sz="2550" b="1">
-                <a:solidFill>
-                  <a:srgbClr val="3E8E45"/>
-                </a:solidFill>
-                <a:latin typeface="Nunito"/>
-                <a:ea typeface="Nunito"/>
-                <a:cs typeface="Nunito"/>
-              </a:rPr>
-              <a:t>Read one indexed value</a:t>
-            </a:r>
-          </a:p>
-        </p:txBody>
-      </p:sp>
-      <p:sp>
-        <p:nvSpPr>
-          <p:cNvPr id="10" name="">
-            <a:extLst xmlns:a="http://schemas.openxmlformats.org/drawingml/2006/main">
-              <a:ext uri="{FF2B5EF4-FFF2-40B4-BE49-F238E27FC236}">
-                <a16:creationId xmlns:a16="http://schemas.microsoft.com/office/drawing/2014/main" id="{EF95B21A-FE30-438C-8271-E38A09975C38}"/>
-              </a:ext>
-            </a:extLst>
-          </p:cNvPr>
-          <p:cNvSpPr>
-            <a:spLocks xmlns:a="http://schemas.openxmlformats.org/drawingml/2006/main" noGrp="1"/>
-          </p:cNvSpPr>
-          <p:nvPr/>
-        </p:nvSpPr>
-        <p:spPr>
-          <a:xfrm xmlns:a="http://schemas.openxmlformats.org/drawingml/2006/main">
-            <a:off x="9334500" y="4095750"/>
-            <a:ext cx="5810250" cy="495300"/>
-          </a:xfrm>
-          <a:prstGeom xmlns:a="http://schemas.openxmlformats.org/drawingml/2006/main" prst="rect">
-            <a:avLst/>
-          </a:prstGeom>
-          <a:noFill xmlns:a="http://schemas.openxmlformats.org/drawingml/2006/main"/>
-          <a:ln xmlns:a="http://schemas.openxmlformats.org/drawingml/2006/main" w="0">
-            <a:noFill/>
-            <a:prstDash val="solid"/>
-          </a:ln>
-        </p:spPr>
-        <p:txBody>
-          <a:bodyPr xmlns:a="http://schemas.openxmlformats.org/drawingml/2006/main" wrap="square" lIns="0" tIns="0" rIns="0" bIns="0" anchor="t">
-            <a:noAutofit/>
-          </a:bodyPr>
-          <a:lstStyle xmlns:a="http://schemas.openxmlformats.org/drawingml/2006/main"/>
-          <a:p xmlns:a="http://schemas.openxmlformats.org/drawingml/2006/main">
-            <a:pPr algn="l">
-              <a:defRPr sz="2250">
-                <a:solidFill>
-                  <a:srgbClr val="0B2B4C"/>
-                </a:solidFill>
-                <a:latin typeface="IBM Plex Mono"/>
-                <a:ea typeface="IBM Plex Mono"/>
-                <a:cs typeface="IBM Plex Mono"/>
-              </a:defRPr>
-            </a:pPr>
-            <a:r>
-              <a:rPr sz="2250">
-                <a:solidFill>
-                  <a:srgbClr val="0B2B4C"/>
-                </a:solidFill>
-                <a:latin typeface="IBM Plex Mono"/>
-                <a:ea typeface="IBM Plex Mono"/>
-                <a:cs typeface="IBM Plex Mono"/>
-              </a:rPr>
-              <a:t>length(t_s)     % 41</a:t>
-            </a:r>
-          </a:p>
-        </p:txBody>
-      </p:sp>
-      <p:sp>
-        <p:nvSpPr>
-          <p:cNvPr id="11" name="">
-            <a:extLst xmlns:a="http://schemas.openxmlformats.org/drawingml/2006/main">
-              <a:ext uri="{FF2B5EF4-FFF2-40B4-BE49-F238E27FC236}">
-                <a16:creationId xmlns:a16="http://schemas.microsoft.com/office/drawing/2014/main" id="{AD233E0E-4FAD-4081-B7F1-81809A11BE4D}"/>
-              </a:ext>
-            </a:extLst>
-          </p:cNvPr>
-          <p:cNvSpPr>
-            <a:spLocks xmlns:a="http://schemas.openxmlformats.org/drawingml/2006/main" noGrp="1"/>
-          </p:cNvSpPr>
-          <p:nvPr/>
-        </p:nvSpPr>
-        <p:spPr>
-          <a:xfrm xmlns:a="http://schemas.openxmlformats.org/drawingml/2006/main">
-            <a:off x="9334500" y="5143500"/>
-            <a:ext cx="5810250" cy="495300"/>
-          </a:xfrm>
-          <a:prstGeom xmlns:a="http://schemas.openxmlformats.org/drawingml/2006/main" prst="rect">
-            <a:avLst/>
-          </a:prstGeom>
-          <a:noFill xmlns:a="http://schemas.openxmlformats.org/drawingml/2006/main"/>
-          <a:ln xmlns:a="http://schemas.openxmlformats.org/drawingml/2006/main" w="0">
-            <a:noFill/>
-            <a:prstDash val="solid"/>
-          </a:ln>
-        </p:spPr>
-        <p:txBody>
-          <a:bodyPr xmlns:a="http://schemas.openxmlformats.org/drawingml/2006/main" wrap="square" lIns="0" tIns="0" rIns="0" bIns="0" anchor="t">
-            <a:noAutofit/>
-          </a:bodyPr>
-          <a:lstStyle xmlns:a="http://schemas.openxmlformats.org/drawingml/2006/main"/>
-          <a:p xmlns:a="http://schemas.openxmlformats.org/drawingml/2006/main">
-            <a:pPr algn="l">
-              <a:defRPr sz="2250">
-                <a:solidFill>
-                  <a:srgbClr val="0B2B4C"/>
-                </a:solidFill>
-                <a:latin typeface="IBM Plex Mono"/>
-                <a:ea typeface="IBM Plex Mono"/>
-                <a:cs typeface="IBM Plex Mono"/>
-              </a:defRPr>
-            </a:pPr>
-            <a:r>
-              <a:rPr sz="2250">
-                <a:solidFill>
-                  <a:srgbClr val="0B2B4C"/>
-                </a:solidFill>
-                <a:latin typeface="IBM Plex Mono"/>
-                <a:ea typeface="IBM Plex Mono"/>
-                <a:cs typeface="IBM Plex Mono"/>
-              </a:rPr>
-              <a:t>t_s(11)         % 1.0 s</a:t>
-            </a:r>
-          </a:p>
-        </p:txBody>
-      </p:sp>
-      <p:sp>
-        <p:nvSpPr>
-          <p:cNvPr id="12" name="">
-            <a:extLst xmlns:a="http://schemas.openxmlformats.org/drawingml/2006/main">
-              <a:ext uri="{FF2B5EF4-FFF2-40B4-BE49-F238E27FC236}">
-                <a16:creationId xmlns:a16="http://schemas.microsoft.com/office/drawing/2014/main" id="{2476CE75-A984-4775-8C90-9818C1C3C262}"/>
-              </a:ext>
-            </a:extLst>
-          </p:cNvPr>
-          <p:cNvSpPr>
-            <a:spLocks xmlns:a="http://schemas.openxmlformats.org/drawingml/2006/main" noGrp="1"/>
-          </p:cNvSpPr>
-          <p:nvPr/>
-        </p:nvSpPr>
-        <p:spPr>
-          <a:xfrm xmlns:a="http://schemas.openxmlformats.org/drawingml/2006/main">
-            <a:off x="1095375" y="7620000"/>
-            <a:ext cx="14287500" cy="457200"/>
-          </a:xfrm>
-          <a:prstGeom xmlns:a="http://schemas.openxmlformats.org/drawingml/2006/main" prst="rect">
-            <a:avLst/>
-          </a:prstGeom>
-          <a:noFill xmlns:a="http://schemas.openxmlformats.org/drawingml/2006/main"/>
-          <a:ln xmlns:a="http://schemas.openxmlformats.org/drawingml/2006/main" w="0">
-            <a:noFill/>
-            <a:prstDash val="solid"/>
-          </a:ln>
-        </p:spPr>
-        <p:txBody>
-          <a:bodyPr xmlns:a="http://schemas.openxmlformats.org/drawingml/2006/main" wrap="square" lIns="0" tIns="0" rIns="0" bIns="0" anchor="t">
-            <a:noAutofit/>
-          </a:bodyPr>
-          <a:lstStyle xmlns:a="http://schemas.openxmlformats.org/drawingml/2006/main"/>
-          <a:p xmlns:a="http://schemas.openxmlformats.org/drawingml/2006/main">
-            <a:pPr algn="l">
+            <a:pPr algn="ctr">
               <a:defRPr sz="2400" b="1">
                 <a:solidFill>
-                  <a:srgbClr val="0B2B4C"/>
+                  <a:srgbClr val="C98A16"/>
                 </a:solidFill>
                 <a:latin typeface="Nunito"/>
                 <a:ea typeface="Nunito"/>
@@ -5082,23 +5238,23 @@
             <a:r>
               <a:rPr sz="2400" b="1">
                 <a:solidFill>
-                  <a:srgbClr val="0B2B4C"/>
-                </a:solidFill>
-                <a:latin typeface="Nunito"/>
-                <a:ea typeface="Nunito"/>
-                <a:cs typeface="Nunito"/>
-              </a:rPr>
-              <a:t>MATLAB indices start at 1: t_s(1) is the launch time</a:t>
-            </a:r>
-          </a:p>
-        </p:txBody>
-      </p:sp>
-      <p:sp>
-        <p:nvSpPr>
-          <p:cNvPr id="13" name="slide-number-10">
-            <a:extLst xmlns:a="http://schemas.openxmlformats.org/drawingml/2006/main">
-              <a:ext uri="{FF2B5EF4-FFF2-40B4-BE49-F238E27FC236}">
-                <a16:creationId xmlns:a16="http://schemas.microsoft.com/office/drawing/2014/main" id="{0549A68F-3DAC-4F1B-8B70-FE4AE41309B7}"/>
+                  <a:srgbClr val="C98A16"/>
+                </a:solidFill>
+                <a:latin typeface="Nunito"/>
+                <a:ea typeface="Nunito"/>
+                <a:cs typeface="Nunito"/>
+              </a:rPr>
+              <a:t>Checkpoint: explain why the model line contains .* and .^</a:t>
+            </a:r>
+          </a:p>
+        </p:txBody>
+      </p:sp>
+      <p:sp>
+        <p:nvSpPr>
+          <p:cNvPr id="17" name="slide-number-10">
+            <a:extLst xmlns:a="http://schemas.openxmlformats.org/drawingml/2006/main">
+              <a:ext uri="{FF2B5EF4-FFF2-40B4-BE49-F238E27FC236}">
+                <a16:creationId xmlns:a16="http://schemas.microsoft.com/office/drawing/2014/main" id="{CBEAD77A-6DB3-4E43-9372-8094ACE58D4B}"/>
               </a:ext>
             </a:extLst>
           </p:cNvPr>
@@ -5156,7 +5312,7 @@
     </p:spTree>
     <p:extLst>
       <p:ext uri="{BB962C8B-B14F-4D97-AF65-F5344CB8AC3E}">
-        <p14:creationId xmlns:p14="http://schemas.microsoft.com/office/powerpoint/2010/main" val="90627649"/>
+        <p14:creationId xmlns:p14="http://schemas.microsoft.com/office/powerpoint/2010/main" val="112182626"/>
       </p:ext>
     </p:extLst>
   </p:cSld>
@@ -5184,10 +5340,10 @@
       </p:grpSpPr>
       <p:sp>
         <p:nvSpPr>
-          <p:cNvPr id="18" name="title-T1">
-            <a:extLst xmlns:a="http://schemas.openxmlformats.org/drawingml/2006/main">
-              <a:ext uri="{FF2B5EF4-FFF2-40B4-BE49-F238E27FC236}">
-                <a16:creationId xmlns:a16="http://schemas.microsoft.com/office/drawing/2014/main" id="{F1229DA0-5BF0-44B6-93D8-879CE5B0CA08}"/>
+          <p:cNvPr id="9" name="title-T1">
+            <a:extLst xmlns:a="http://schemas.openxmlformats.org/drawingml/2006/main">
+              <a:ext uri="{FF2B5EF4-FFF2-40B4-BE49-F238E27FC236}">
+                <a16:creationId xmlns:a16="http://schemas.microsoft.com/office/drawing/2014/main" id="{1A3B9DD8-2229-420C-93BB-FC689E6FE240}"/>
               </a:ext>
             </a:extLst>
           </p:cNvPr>
@@ -5241,7 +5397,7 @@
                 <a:ea typeface="Nunito"/>
                 <a:cs typeface="Nunito"/>
               </a:rPr>
-              <a:t>Dots tell MATLAB to work through an array</a:t>
+              <a:t>Run the model, then read the graph</a:t>
             </a:r>
           </a:p>
         </p:txBody>
@@ -5251,7 +5407,7 @@
           <p:cNvPr id="2" name="subtitle-T1">
             <a:extLst xmlns:a="http://schemas.openxmlformats.org/drawingml/2006/main">
               <a:ext uri="{FF2B5EF4-FFF2-40B4-BE49-F238E27FC236}">
-                <a16:creationId xmlns:a16="http://schemas.microsoft.com/office/drawing/2014/main" id="{5A771816-1FAD-4A76-A622-D706E3D577BE}"/>
+                <a16:creationId xmlns:a16="http://schemas.microsoft.com/office/drawing/2014/main" id="{18F9244A-04F0-4B65-9FE8-D99CF040ABA9}"/>
               </a:ext>
             </a:extLst>
           </p:cNvPr>
@@ -5301,7 +5457,7 @@
                 <a:ea typeface="Nunito"/>
                 <a:cs typeface="Nunito"/>
               </a:rPr>
-              <a:t>Use element-wise operators when time contains many values</a:t>
+              <a:t>Prediction comes before the plot; a known value checks the result</a:t>
             </a:r>
           </a:p>
         </p:txBody>
@@ -5311,236 +5467,27 @@
           <p:cNvPr id="3" name="">
             <a:extLst xmlns:a="http://schemas.openxmlformats.org/drawingml/2006/main">
               <a:ext uri="{FF2B5EF4-FFF2-40B4-BE49-F238E27FC236}">
-                <a16:creationId xmlns:a16="http://schemas.microsoft.com/office/drawing/2014/main" id="{98487662-3B6D-4E5F-8C4B-33B2567E3220}"/>
-              </a:ext>
-            </a:extLst>
-          </p:cNvPr>
-          <p:cNvSpPr>
-            <a:spLocks xmlns:a="http://schemas.openxmlformats.org/drawingml/2006/main" noGrp="1"/>
-          </p:cNvSpPr>
-          <p:nvPr/>
-        </p:nvSpPr>
-        <p:spPr>
-          <a:xfrm xmlns:a="http://schemas.openxmlformats.org/drawingml/2006/main">
-            <a:off x="1095375" y="3048000"/>
-            <a:ext cx="3714750" cy="3143250"/>
+                <a16:creationId xmlns:a16="http://schemas.microsoft.com/office/drawing/2014/main" id="{78DE4F26-22F4-478A-9F05-042F0C77374C}"/>
+              </a:ext>
+            </a:extLst>
+          </p:cNvPr>
+          <p:cNvSpPr>
+            <a:spLocks xmlns:a="http://schemas.openxmlformats.org/drawingml/2006/main" noGrp="1"/>
+          </p:cNvSpPr>
+          <p:nvPr/>
+        </p:nvSpPr>
+        <p:spPr>
+          <a:xfrm xmlns:a="http://schemas.openxmlformats.org/drawingml/2006/main">
+            <a:off x="1095375" y="2571750"/>
+            <a:ext cx="7239000" cy="5286375"/>
           </a:xfrm>
           <a:prstGeom xmlns:a="http://schemas.openxmlformats.org/drawingml/2006/main" prst="roundRect">
             <a:avLst>
-              <a:gd name="adj" fmla="val 3636"/>
+              <a:gd name="adj" fmla="val 2162"/>
             </a:avLst>
           </a:prstGeom>
           <a:solidFill xmlns:a="http://schemas.openxmlformats.org/drawingml/2006/main">
-            <a:srgbClr val="F7F9FB"/>
-          </a:solidFill>
-          <a:ln xmlns:a="http://schemas.openxmlformats.org/drawingml/2006/main" w="19050">
-            <a:solidFill>
-              <a:srgbClr val="0B2B4C"/>
-            </a:solidFill>
-            <a:prstDash val="solid"/>
-          </a:ln>
-        </p:spPr>
-      </p:sp>
-      <p:sp>
-        <p:nvSpPr>
-          <p:cNvPr id="4" name="">
-            <a:extLst xmlns:a="http://schemas.openxmlformats.org/drawingml/2006/main">
-              <a:ext uri="{FF2B5EF4-FFF2-40B4-BE49-F238E27FC236}">
-                <a16:creationId xmlns:a16="http://schemas.microsoft.com/office/drawing/2014/main" id="{F219DDCB-053B-4997-A98D-06735CF39406}"/>
-              </a:ext>
-            </a:extLst>
-          </p:cNvPr>
-          <p:cNvSpPr>
-            <a:spLocks xmlns:a="http://schemas.openxmlformats.org/drawingml/2006/main" noGrp="1"/>
-          </p:cNvSpPr>
-          <p:nvPr/>
-        </p:nvSpPr>
-        <p:spPr>
-          <a:xfrm xmlns:a="http://schemas.openxmlformats.org/drawingml/2006/main">
-            <a:off x="1381125" y="3476625"/>
-            <a:ext cx="3143250" cy="419100"/>
-          </a:xfrm>
-          <a:prstGeom xmlns:a="http://schemas.openxmlformats.org/drawingml/2006/main" prst="rect">
-            <a:avLst/>
-          </a:prstGeom>
-          <a:noFill xmlns:a="http://schemas.openxmlformats.org/drawingml/2006/main"/>
-          <a:ln xmlns:a="http://schemas.openxmlformats.org/drawingml/2006/main" w="0">
-            <a:noFill/>
-            <a:prstDash val="solid"/>
-          </a:ln>
-        </p:spPr>
-        <p:txBody>
-          <a:bodyPr xmlns:a="http://schemas.openxmlformats.org/drawingml/2006/main" wrap="square" lIns="0" tIns="0" rIns="0" bIns="0" anchor="t">
-            <a:noAutofit/>
-          </a:bodyPr>
-          <a:lstStyle xmlns:a="http://schemas.openxmlformats.org/drawingml/2006/main"/>
-          <a:p xmlns:a="http://schemas.openxmlformats.org/drawingml/2006/main">
-            <a:pPr algn="l">
-              <a:defRPr sz="2250" b="1">
-                <a:solidFill>
-                  <a:srgbClr val="0B2B4C"/>
-                </a:solidFill>
-                <a:latin typeface="Nunito"/>
-                <a:ea typeface="Nunito"/>
-                <a:cs typeface="Nunito"/>
-              </a:defRPr>
-            </a:pPr>
-            <a:r>
-              <a:rPr sz="2250" b="1">
-                <a:solidFill>
-                  <a:srgbClr val="0B2B4C"/>
-                </a:solidFill>
-                <a:latin typeface="Nunito"/>
-                <a:ea typeface="Nunito"/>
-                <a:cs typeface="Nunito"/>
-              </a:rPr>
-              <a:t>scalar arithmetic</a:t>
-            </a:r>
-          </a:p>
-        </p:txBody>
-      </p:sp>
-      <p:sp>
-        <p:nvSpPr>
-          <p:cNvPr id="5" name="">
-            <a:extLst xmlns:a="http://schemas.openxmlformats.org/drawingml/2006/main">
-              <a:ext uri="{FF2B5EF4-FFF2-40B4-BE49-F238E27FC236}">
-                <a16:creationId xmlns:a16="http://schemas.microsoft.com/office/drawing/2014/main" id="{6E37FAFB-9B13-4D3E-81B9-657BC2D2092D}"/>
-              </a:ext>
-            </a:extLst>
-          </p:cNvPr>
-          <p:cNvSpPr>
-            <a:spLocks xmlns:a="http://schemas.openxmlformats.org/drawingml/2006/main" noGrp="1"/>
-          </p:cNvSpPr>
-          <p:nvPr/>
-        </p:nvSpPr>
-        <p:spPr>
-          <a:xfrm xmlns:a="http://schemas.openxmlformats.org/drawingml/2006/main">
-            <a:off x="1381125" y="4476750"/>
-            <a:ext cx="3143250" cy="552450"/>
-          </a:xfrm>
-          <a:prstGeom xmlns:a="http://schemas.openxmlformats.org/drawingml/2006/main" prst="rect">
-            <a:avLst/>
-          </a:prstGeom>
-          <a:noFill xmlns:a="http://schemas.openxmlformats.org/drawingml/2006/main"/>
-          <a:ln xmlns:a="http://schemas.openxmlformats.org/drawingml/2006/main" w="0">
-            <a:noFill/>
-            <a:prstDash val="solid"/>
-          </a:ln>
-        </p:spPr>
-        <p:txBody>
-          <a:bodyPr xmlns:a="http://schemas.openxmlformats.org/drawingml/2006/main" wrap="square" lIns="0" tIns="0" rIns="0" bIns="0" anchor="t">
-            <a:noAutofit/>
-          </a:bodyPr>
-          <a:lstStyle xmlns:a="http://schemas.openxmlformats.org/drawingml/2006/main"/>
-          <a:p xmlns:a="http://schemas.openxmlformats.org/drawingml/2006/main">
-            <a:pPr algn="l">
-              <a:defRPr sz="2250" b="1">
-                <a:solidFill>
-                  <a:srgbClr val="0B2B4C"/>
-                </a:solidFill>
-                <a:latin typeface="IBM Plex Mono"/>
-                <a:ea typeface="IBM Plex Mono"/>
-                <a:cs typeface="IBM Plex Mono"/>
-              </a:defRPr>
-            </a:pPr>
-            <a:r>
-              <a:rPr sz="2250" b="1">
-                <a:solidFill>
-                  <a:srgbClr val="0B2B4C"/>
-                </a:solidFill>
-                <a:latin typeface="IBM Plex Mono"/>
-                <a:ea typeface="IBM Plex Mono"/>
-                <a:cs typeface="IBM Plex Mono"/>
-              </a:rPr>
-              <a:t>20 * 3</a:t>
-            </a:r>
-          </a:p>
-        </p:txBody>
-      </p:sp>
-      <p:sp>
-        <p:nvSpPr>
-          <p:cNvPr id="6" name="">
-            <a:extLst xmlns:a="http://schemas.openxmlformats.org/drawingml/2006/main">
-              <a:ext uri="{FF2B5EF4-FFF2-40B4-BE49-F238E27FC236}">
-                <a16:creationId xmlns:a16="http://schemas.microsoft.com/office/drawing/2014/main" id="{2C768D68-46A5-470C-AE07-666F2D720E94}"/>
-              </a:ext>
-            </a:extLst>
-          </p:cNvPr>
-          <p:cNvSpPr>
-            <a:spLocks xmlns:a="http://schemas.openxmlformats.org/drawingml/2006/main" noGrp="1"/>
-          </p:cNvSpPr>
-          <p:nvPr/>
-        </p:nvSpPr>
-        <p:spPr>
-          <a:xfrm xmlns:a="http://schemas.openxmlformats.org/drawingml/2006/main">
-            <a:off x="1381125" y="5381625"/>
-            <a:ext cx="3143250" cy="495300"/>
-          </a:xfrm>
-          <a:prstGeom xmlns:a="http://schemas.openxmlformats.org/drawingml/2006/main" prst="rect">
-            <a:avLst/>
-          </a:prstGeom>
-          <a:noFill xmlns:a="http://schemas.openxmlformats.org/drawingml/2006/main"/>
-          <a:ln xmlns:a="http://schemas.openxmlformats.org/drawingml/2006/main" w="0">
-            <a:noFill/>
-            <a:prstDash val="solid"/>
-          </a:ln>
-        </p:spPr>
-        <p:txBody>
-          <a:bodyPr xmlns:a="http://schemas.openxmlformats.org/drawingml/2006/main" wrap="square" lIns="0" tIns="0" rIns="0" bIns="0" anchor="t">
-            <a:noAutofit/>
-          </a:bodyPr>
-          <a:lstStyle xmlns:a="http://schemas.openxmlformats.org/drawingml/2006/main"/>
-          <a:p xmlns:a="http://schemas.openxmlformats.org/drawingml/2006/main">
-            <a:pPr algn="l">
-              <a:defRPr sz="1875">
-                <a:solidFill>
-                  <a:srgbClr val="3F4B57"/>
-                </a:solidFill>
-                <a:latin typeface="Nunito"/>
-                <a:ea typeface="Nunito"/>
-                <a:cs typeface="Nunito"/>
-              </a:defRPr>
-            </a:pPr>
-            <a:r>
-              <a:rPr sz="1875">
-                <a:solidFill>
-                  <a:srgbClr val="3F4B57"/>
-                </a:solidFill>
-                <a:latin typeface="Nunito"/>
-                <a:ea typeface="Nunito"/>
-                <a:cs typeface="Nunito"/>
-              </a:rPr>
-              <a:t>one number</a:t>
-            </a:r>
-          </a:p>
-        </p:txBody>
-      </p:sp>
-      <p:sp>
-        <p:nvSpPr>
-          <p:cNvPr id="7" name="">
-            <a:extLst xmlns:a="http://schemas.openxmlformats.org/drawingml/2006/main">
-              <a:ext uri="{FF2B5EF4-FFF2-40B4-BE49-F238E27FC236}">
-                <a16:creationId xmlns:a16="http://schemas.microsoft.com/office/drawing/2014/main" id="{3EDA70C4-B481-4ACF-864F-FF53D6236CE5}"/>
-              </a:ext>
-            </a:extLst>
-          </p:cNvPr>
-          <p:cNvSpPr>
-            <a:spLocks xmlns:a="http://schemas.openxmlformats.org/drawingml/2006/main" noGrp="1"/>
-          </p:cNvSpPr>
-          <p:nvPr/>
-        </p:nvSpPr>
-        <p:spPr>
-          <a:xfrm xmlns:a="http://schemas.openxmlformats.org/drawingml/2006/main">
-            <a:off x="5334000" y="3048000"/>
-            <a:ext cx="3714750" cy="3143250"/>
-          </a:xfrm>
-          <a:prstGeom xmlns:a="http://schemas.openxmlformats.org/drawingml/2006/main" prst="roundRect">
-            <a:avLst>
-              <a:gd name="adj" fmla="val 3636"/>
-            </a:avLst>
-          </a:prstGeom>
-          <a:solidFill xmlns:a="http://schemas.openxmlformats.org/drawingml/2006/main">
-            <a:srgbClr val="EEF5FD"/>
+            <a:srgbClr val="F4F8FC"/>
           </a:solidFill>
           <a:ln xmlns:a="http://schemas.openxmlformats.org/drawingml/2006/main" w="19050">
             <a:solidFill>
@@ -5552,22 +5499,22 @@
       </p:sp>
       <p:sp>
         <p:nvSpPr>
-          <p:cNvPr id="8" name="">
-            <a:extLst xmlns:a="http://schemas.openxmlformats.org/drawingml/2006/main">
-              <a:ext uri="{FF2B5EF4-FFF2-40B4-BE49-F238E27FC236}">
-                <a16:creationId xmlns:a16="http://schemas.microsoft.com/office/drawing/2014/main" id="{24AE32CA-A670-450D-B632-E4899E18A5C0}"/>
-              </a:ext>
-            </a:extLst>
-          </p:cNvPr>
-          <p:cNvSpPr>
-            <a:spLocks xmlns:a="http://schemas.openxmlformats.org/drawingml/2006/main" noGrp="1"/>
-          </p:cNvSpPr>
-          <p:nvPr/>
-        </p:nvSpPr>
-        <p:spPr>
-          <a:xfrm xmlns:a="http://schemas.openxmlformats.org/drawingml/2006/main">
-            <a:off x="5619750" y="3476625"/>
-            <a:ext cx="3143250" cy="419100"/>
+          <p:cNvPr id="4" name="">
+            <a:extLst xmlns:a="http://schemas.openxmlformats.org/drawingml/2006/main">
+              <a:ext uri="{FF2B5EF4-FFF2-40B4-BE49-F238E27FC236}">
+                <a16:creationId xmlns:a16="http://schemas.microsoft.com/office/drawing/2014/main" id="{CE84F75D-AF05-44C9-80F6-C8E8558A7043}"/>
+              </a:ext>
+            </a:extLst>
+          </p:cNvPr>
+          <p:cNvSpPr>
+            <a:spLocks xmlns:a="http://schemas.openxmlformats.org/drawingml/2006/main" noGrp="1"/>
+          </p:cNvSpPr>
+          <p:nvPr/>
+        </p:nvSpPr>
+        <p:spPr>
+          <a:xfrm xmlns:a="http://schemas.openxmlformats.org/drawingml/2006/main">
+            <a:off x="1476375" y="2952750"/>
+            <a:ext cx="6191250" cy="419100"/>
           </a:xfrm>
           <a:prstGeom xmlns:a="http://schemas.openxmlformats.org/drawingml/2006/main" prst="rect">
             <a:avLst/>
@@ -5585,7 +5532,7 @@
           <a:lstStyle xmlns:a="http://schemas.openxmlformats.org/drawingml/2006/main"/>
           <a:p xmlns:a="http://schemas.openxmlformats.org/drawingml/2006/main">
             <a:pPr algn="l">
-              <a:defRPr sz="2250" b="1">
+              <a:defRPr sz="2550" b="1">
                 <a:solidFill>
                   <a:srgbClr val="2F6DB2"/>
                 </a:solidFill>
@@ -5595,7 +5542,7 @@
               </a:defRPr>
             </a:pPr>
             <a:r>
-              <a:rPr sz="2250" b="1">
+              <a:rPr sz="2550" b="1">
                 <a:solidFill>
                   <a:srgbClr val="2F6DB2"/>
                 </a:solidFill>
@@ -5603,29 +5550,29 @@
                 <a:ea typeface="Nunito"/>
                 <a:cs typeface="Nunito"/>
               </a:rPr>
-              <a:t>every time value</a:t>
-            </a:r>
-          </a:p>
-        </p:txBody>
-      </p:sp>
-      <p:sp>
-        <p:nvSpPr>
-          <p:cNvPr id="9" name="">
-            <a:extLst xmlns:a="http://schemas.openxmlformats.org/drawingml/2006/main">
-              <a:ext uri="{FF2B5EF4-FFF2-40B4-BE49-F238E27FC236}">
-                <a16:creationId xmlns:a16="http://schemas.microsoft.com/office/drawing/2014/main" id="{9F6A6D30-E89C-4DA3-ADA8-39C791CF7D41}"/>
-              </a:ext>
-            </a:extLst>
-          </p:cNvPr>
-          <p:cNvSpPr>
-            <a:spLocks xmlns:a="http://schemas.openxmlformats.org/drawingml/2006/main" noGrp="1"/>
-          </p:cNvSpPr>
-          <p:nvPr/>
-        </p:nvSpPr>
-        <p:spPr>
-          <a:xfrm xmlns:a="http://schemas.openxmlformats.org/drawingml/2006/main">
-            <a:off x="5619750" y="4476750"/>
-            <a:ext cx="3143250" cy="552450"/>
+              <a:t>Trace this short fragment</a:t>
+            </a:r>
+          </a:p>
+        </p:txBody>
+      </p:sp>
+      <p:sp>
+        <p:nvSpPr>
+          <p:cNvPr id="5" name="">
+            <a:extLst xmlns:a="http://schemas.openxmlformats.org/drawingml/2006/main">
+              <a:ext uri="{FF2B5EF4-FFF2-40B4-BE49-F238E27FC236}">
+                <a16:creationId xmlns:a16="http://schemas.microsoft.com/office/drawing/2014/main" id="{31BC8493-0516-4F39-9BE4-F7EED42B2D9F}"/>
+              </a:ext>
+            </a:extLst>
+          </p:cNvPr>
+          <p:cNvSpPr>
+            <a:spLocks xmlns:a="http://schemas.openxmlformats.org/drawingml/2006/main" noGrp="1"/>
+          </p:cNvSpPr>
+          <p:nvPr/>
+        </p:nvSpPr>
+        <p:spPr>
+          <a:xfrm xmlns:a="http://schemas.openxmlformats.org/drawingml/2006/main">
+            <a:off x="1476375" y="3762375"/>
+            <a:ext cx="6286500" cy="3238500"/>
           </a:xfrm>
           <a:prstGeom xmlns:a="http://schemas.openxmlformats.org/drawingml/2006/main" prst="rect">
             <a:avLst/>
@@ -5643,7 +5590,11 @@
           <a:lstStyle xmlns:a="http://schemas.openxmlformats.org/drawingml/2006/main"/>
           <a:p xmlns:a="http://schemas.openxmlformats.org/drawingml/2006/main">
             <a:pPr algn="l">
-              <a:defRPr sz="2250" b="1">
+              <a:lnSpc>
+                <a:spcPct val="122000"/>
+              </a:lnSpc>
+              <a:buNone/>
+              <a:defRPr sz="1875">
                 <a:solidFill>
                   <a:srgbClr val="0B2B4C"/>
                 </a:solidFill>
@@ -5653,7 +5604,7 @@
               </a:defRPr>
             </a:pPr>
             <a:r>
-              <a:rPr sz="2250" b="1">
+              <a:rPr sz="1875">
                 <a:solidFill>
                   <a:srgbClr val="0B2B4C"/>
                 </a:solidFill>
@@ -5661,29 +5612,186 @@
                 <a:ea typeface="IBM Plex Mono"/>
                 <a:cs typeface="IBM Plex Mono"/>
               </a:rPr>
-              <a:t>v0_mps .* t_s</a:t>
-            </a:r>
-          </a:p>
-        </p:txBody>
-      </p:sp>
-      <p:sp>
-        <p:nvSpPr>
-          <p:cNvPr id="10" name="">
-            <a:extLst xmlns:a="http://schemas.openxmlformats.org/drawingml/2006/main">
-              <a:ext uri="{FF2B5EF4-FFF2-40B4-BE49-F238E27FC236}">
-                <a16:creationId xmlns:a16="http://schemas.microsoft.com/office/drawing/2014/main" id="{71B6948C-A5E3-46C8-938C-A549BEB8593C}"/>
-              </a:ext>
-            </a:extLst>
-          </p:cNvPr>
-          <p:cNvSpPr>
-            <a:spLocks xmlns:a="http://schemas.openxmlformats.org/drawingml/2006/main" noGrp="1"/>
-          </p:cNvSpPr>
-          <p:nvPr/>
-        </p:nvSpPr>
-        <p:spPr>
-          <a:xfrm xmlns:a="http://schemas.openxmlformats.org/drawingml/2006/main">
-            <a:off x="5619750" y="5381625"/>
-            <a:ext cx="3143250" cy="495300"/>
+              <a:t>t_s = 0:0.1:4;</a:t>
+            </a:r>
+          </a:p>
+          <a:p xmlns:a="http://schemas.openxmlformats.org/drawingml/2006/main">
+            <a:pPr algn="l">
+              <a:lnSpc>
+                <a:spcPct val="122000"/>
+              </a:lnSpc>
+              <a:buNone/>
+              <a:defRPr sz="1875">
+                <a:solidFill>
+                  <a:srgbClr val="0B2B4C"/>
+                </a:solidFill>
+                <a:latin typeface="IBM Plex Mono"/>
+                <a:ea typeface="IBM Plex Mono"/>
+                <a:cs typeface="IBM Plex Mono"/>
+              </a:defRPr>
+            </a:pPr>
+            <a:r>
+              <a:rPr sz="1875">
+                <a:solidFill>
+                  <a:srgbClr val="0B2B4C"/>
+                </a:solidFill>
+                <a:latin typeface="IBM Plex Mono"/>
+                <a:ea typeface="IBM Plex Mono"/>
+                <a:cs typeface="IBM Plex Mono"/>
+              </a:rPr>
+              <a:t>y_m = 20.*t_s - 0.5*9.81*t_s.^2;</a:t>
+            </a:r>
+          </a:p>
+          <a:p xmlns:a="http://schemas.openxmlformats.org/drawingml/2006/main">
+            <a:pPr algn="l">
+              <a:lnSpc>
+                <a:spcPct val="122000"/>
+              </a:lnSpc>
+              <a:buNone/>
+              <a:defRPr sz="1875">
+                <a:solidFill>
+                  <a:srgbClr val="0B2B4C"/>
+                </a:solidFill>
+                <a:latin typeface="IBM Plex Mono"/>
+                <a:ea typeface="IBM Plex Mono"/>
+                <a:cs typeface="IBM Plex Mono"/>
+              </a:defRPr>
+            </a:pPr>
+            <a:r>
+              <a:rPr sz="1875">
+                <a:solidFill>
+                  <a:srgbClr val="0B2B4C"/>
+                </a:solidFill>
+                <a:latin typeface="IBM Plex Mono"/>
+                <a:ea typeface="IBM Plex Mono"/>
+                <a:cs typeface="IBM Plex Mono"/>
+              </a:rPr>
+              <a:t>plot(t_s,y_m,'LineWidth',2)</a:t>
+            </a:r>
+          </a:p>
+          <a:p xmlns:a="http://schemas.openxmlformats.org/drawingml/2006/main">
+            <a:pPr algn="l">
+              <a:lnSpc>
+                <a:spcPct val="122000"/>
+              </a:lnSpc>
+              <a:buNone/>
+              <a:defRPr sz="1875">
+                <a:solidFill>
+                  <a:srgbClr val="0B2B4C"/>
+                </a:solidFill>
+                <a:latin typeface="IBM Plex Mono"/>
+                <a:ea typeface="IBM Plex Mono"/>
+                <a:cs typeface="IBM Plex Mono"/>
+              </a:defRPr>
+            </a:pPr>
+            <a:r>
+              <a:rPr sz="1875">
+                <a:solidFill>
+                  <a:srgbClr val="0B2B4C"/>
+                </a:solidFill>
+                <a:latin typeface="IBM Plex Mono"/>
+                <a:ea typeface="IBM Plex Mono"/>
+                <a:cs typeface="IBM Plex Mono"/>
+              </a:rPr>
+              <a:t>xlabel('Time (s)')</a:t>
+            </a:r>
+          </a:p>
+          <a:p xmlns:a="http://schemas.openxmlformats.org/drawingml/2006/main">
+            <a:pPr algn="l">
+              <a:lnSpc>
+                <a:spcPct val="122000"/>
+              </a:lnSpc>
+              <a:buNone/>
+              <a:defRPr sz="1875">
+                <a:solidFill>
+                  <a:srgbClr val="0B2B4C"/>
+                </a:solidFill>
+                <a:latin typeface="IBM Plex Mono"/>
+                <a:ea typeface="IBM Plex Mono"/>
+                <a:cs typeface="IBM Plex Mono"/>
+              </a:defRPr>
+            </a:pPr>
+            <a:r>
+              <a:rPr sz="1875">
+                <a:solidFill>
+                  <a:srgbClr val="0B2B4C"/>
+                </a:solidFill>
+                <a:latin typeface="IBM Plex Mono"/>
+                <a:ea typeface="IBM Plex Mono"/>
+                <a:cs typeface="IBM Plex Mono"/>
+              </a:rPr>
+              <a:t>ylabel('Vertical position (m)')</a:t>
+            </a:r>
+          </a:p>
+          <a:p xmlns:a="http://schemas.openxmlformats.org/drawingml/2006/main">
+            <a:pPr algn="l">
+              <a:lnSpc>
+                <a:spcPct val="122000"/>
+              </a:lnSpc>
+              <a:buNone/>
+              <a:defRPr sz="1875">
+                <a:solidFill>
+                  <a:srgbClr val="0B2B4C"/>
+                </a:solidFill>
+                <a:latin typeface="IBM Plex Mono"/>
+                <a:ea typeface="IBM Plex Mono"/>
+                <a:cs typeface="IBM Plex Mono"/>
+              </a:defRPr>
+            </a:pPr>
+            <a:r>
+              <a:rPr sz="1875">
+                <a:solidFill>
+                  <a:srgbClr val="0B2B4C"/>
+                </a:solidFill>
+                <a:latin typeface="IBM Plex Mono"/>
+                <a:ea typeface="IBM Plex Mono"/>
+                <a:cs typeface="IBM Plex Mono"/>
+              </a:rPr>
+              <a:t>assert(abs(y_m(1)) &lt; 1e-12)</a:t>
+            </a:r>
+          </a:p>
+        </p:txBody>
+      </p:sp>
+      <p:pic>
+        <p:nvPicPr>
+          <p:cNvPr id="14" name="image-slide11-1" descr="PHY4605 scientific visual or LaTeX-rendered equation (image-slide11-1)"/>
+          <p:cNvPicPr>
+            <a:picLocks xmlns:a="http://schemas.openxmlformats.org/drawingml/2006/main" noChangeAspect="1"/>
+          </p:cNvPicPr>
+          <p:nvPr/>
+        </p:nvPicPr>
+        <p:blipFill>
+          <a:blip xmlns:r="http://schemas.openxmlformats.org/officeDocument/2006/relationships" xmlns:a="http://schemas.openxmlformats.org/drawingml/2006/main" r:embed="Rb6f4a094d94b4425"/>
+          <a:stretch xmlns:a="http://schemas.openxmlformats.org/drawingml/2006/main"/>
+        </p:blipFill>
+        <p:spPr>
+          <a:xfrm xmlns:a="http://schemas.openxmlformats.org/drawingml/2006/main">
+            <a:off x="9096375" y="3038976"/>
+            <a:ext cx="6953250" cy="3732797"/>
+          </a:xfrm>
+          <a:prstGeom xmlns:a="http://schemas.openxmlformats.org/drawingml/2006/main" prst="rect">
+            <a:avLst/>
+          </a:prstGeom>
+        </p:spPr>
+      </p:pic>
+      <p:sp>
+        <p:nvSpPr>
+          <p:cNvPr id="7" name="">
+            <a:extLst xmlns:a="http://schemas.openxmlformats.org/drawingml/2006/main">
+              <a:ext uri="{FF2B5EF4-FFF2-40B4-BE49-F238E27FC236}">
+                <a16:creationId xmlns:a16="http://schemas.microsoft.com/office/drawing/2014/main" id="{44AD1E5A-4DA8-40C0-8A2C-9A92757B8789}"/>
+              </a:ext>
+            </a:extLst>
+          </p:cNvPr>
+          <p:cNvSpPr>
+            <a:spLocks xmlns:a="http://schemas.openxmlformats.org/drawingml/2006/main" noGrp="1"/>
+          </p:cNvSpPr>
+          <p:nvPr/>
+        </p:nvSpPr>
+        <p:spPr>
+          <a:xfrm xmlns:a="http://schemas.openxmlformats.org/drawingml/2006/main">
+            <a:off x="1095375" y="8191500"/>
+            <a:ext cx="14478000" cy="400050"/>
           </a:xfrm>
           <a:prstGeom xmlns:a="http://schemas.openxmlformats.org/drawingml/2006/main" prst="rect">
             <a:avLst/>
@@ -5701,102 +5809,9 @@
           <a:lstStyle xmlns:a="http://schemas.openxmlformats.org/drawingml/2006/main"/>
           <a:p xmlns:a="http://schemas.openxmlformats.org/drawingml/2006/main">
             <a:pPr algn="l">
-              <a:defRPr sz="1875">
-                <a:solidFill>
-                  <a:srgbClr val="3F4B57"/>
-                </a:solidFill>
-                <a:latin typeface="Nunito"/>
-                <a:ea typeface="Nunito"/>
-                <a:cs typeface="Nunito"/>
-              </a:defRPr>
-            </a:pPr>
-            <a:r>
-              <a:rPr sz="1875">
-                <a:solidFill>
-                  <a:srgbClr val="3F4B57"/>
-                </a:solidFill>
-                <a:latin typeface="Nunito"/>
-                <a:ea typeface="Nunito"/>
-                <a:cs typeface="Nunito"/>
-              </a:rPr>
-              <a:t>one value for every time</a:t>
-            </a:r>
-          </a:p>
-        </p:txBody>
-      </p:sp>
-      <p:sp>
-        <p:nvSpPr>
-          <p:cNvPr id="11" name="">
-            <a:extLst xmlns:a="http://schemas.openxmlformats.org/drawingml/2006/main">
-              <a:ext uri="{FF2B5EF4-FFF2-40B4-BE49-F238E27FC236}">
-                <a16:creationId xmlns:a16="http://schemas.microsoft.com/office/drawing/2014/main" id="{7B9A476D-2357-4693-9732-B41B390FA800}"/>
-              </a:ext>
-            </a:extLst>
-          </p:cNvPr>
-          <p:cNvSpPr>
-            <a:spLocks xmlns:a="http://schemas.openxmlformats.org/drawingml/2006/main" noGrp="1"/>
-          </p:cNvSpPr>
-          <p:nvPr/>
-        </p:nvSpPr>
-        <p:spPr>
-          <a:xfrm xmlns:a="http://schemas.openxmlformats.org/drawingml/2006/main">
-            <a:off x="9572625" y="3048000"/>
-            <a:ext cx="3714750" cy="3143250"/>
-          </a:xfrm>
-          <a:prstGeom xmlns:a="http://schemas.openxmlformats.org/drawingml/2006/main" prst="roundRect">
-            <a:avLst>
-              <a:gd name="adj" fmla="val 3636"/>
-            </a:avLst>
-          </a:prstGeom>
-          <a:solidFill xmlns:a="http://schemas.openxmlformats.org/drawingml/2006/main">
-            <a:srgbClr val="FFF7E6"/>
-          </a:solidFill>
-          <a:ln xmlns:a="http://schemas.openxmlformats.org/drawingml/2006/main" w="19050">
-            <a:solidFill>
-              <a:srgbClr val="C98A16"/>
-            </a:solidFill>
-            <a:prstDash val="solid"/>
-          </a:ln>
-        </p:spPr>
-      </p:sp>
-      <p:sp>
-        <p:nvSpPr>
-          <p:cNvPr id="12" name="">
-            <a:extLst xmlns:a="http://schemas.openxmlformats.org/drawingml/2006/main">
-              <a:ext uri="{FF2B5EF4-FFF2-40B4-BE49-F238E27FC236}">
-                <a16:creationId xmlns:a16="http://schemas.microsoft.com/office/drawing/2014/main" id="{3791AFAB-C54E-469F-8053-380D7EC6B41F}"/>
-              </a:ext>
-            </a:extLst>
-          </p:cNvPr>
-          <p:cNvSpPr>
-            <a:spLocks xmlns:a="http://schemas.openxmlformats.org/drawingml/2006/main" noGrp="1"/>
-          </p:cNvSpPr>
-          <p:nvPr/>
-        </p:nvSpPr>
-        <p:spPr>
-          <a:xfrm xmlns:a="http://schemas.openxmlformats.org/drawingml/2006/main">
-            <a:off x="9858375" y="3476625"/>
-            <a:ext cx="3143250" cy="419100"/>
-          </a:xfrm>
-          <a:prstGeom xmlns:a="http://schemas.openxmlformats.org/drawingml/2006/main" prst="rect">
-            <a:avLst/>
-          </a:prstGeom>
-          <a:noFill xmlns:a="http://schemas.openxmlformats.org/drawingml/2006/main"/>
-          <a:ln xmlns:a="http://schemas.openxmlformats.org/drawingml/2006/main" w="0">
-            <a:noFill/>
-            <a:prstDash val="solid"/>
-          </a:ln>
-        </p:spPr>
-        <p:txBody>
-          <a:bodyPr xmlns:a="http://schemas.openxmlformats.org/drawingml/2006/main" wrap="square" lIns="0" tIns="0" rIns="0" bIns="0" anchor="t">
-            <a:noAutofit/>
-          </a:bodyPr>
-          <a:lstStyle xmlns:a="http://schemas.openxmlformats.org/drawingml/2006/main"/>
-          <a:p xmlns:a="http://schemas.openxmlformats.org/drawingml/2006/main">
-            <a:pPr algn="l">
               <a:defRPr sz="2250" b="1">
                 <a:solidFill>
-                  <a:srgbClr val="C98A16"/>
+                  <a:srgbClr val="0B2B4C"/>
                 </a:solidFill>
                 <a:latin typeface="Nunito"/>
                 <a:ea typeface="Nunito"/>
@@ -5806,232 +5821,23 @@
             <a:r>
               <a:rPr sz="2250" b="1">
                 <a:solidFill>
-                  <a:srgbClr val="C98A16"/>
-                </a:solidFill>
-                <a:latin typeface="Nunito"/>
-                <a:ea typeface="Nunito"/>
-                <a:cs typeface="Nunito"/>
-              </a:rPr>
-              <a:t>array square</a:t>
-            </a:r>
-          </a:p>
-        </p:txBody>
-      </p:sp>
-      <p:sp>
-        <p:nvSpPr>
-          <p:cNvPr id="13" name="">
-            <a:extLst xmlns:a="http://schemas.openxmlformats.org/drawingml/2006/main">
-              <a:ext uri="{FF2B5EF4-FFF2-40B4-BE49-F238E27FC236}">
-                <a16:creationId xmlns:a16="http://schemas.microsoft.com/office/drawing/2014/main" id="{1097B2A9-7214-4F14-B64B-3ABCB03C0EA1}"/>
-              </a:ext>
-            </a:extLst>
-          </p:cNvPr>
-          <p:cNvSpPr>
-            <a:spLocks xmlns:a="http://schemas.openxmlformats.org/drawingml/2006/main" noGrp="1"/>
-          </p:cNvSpPr>
-          <p:nvPr/>
-        </p:nvSpPr>
-        <p:spPr>
-          <a:xfrm xmlns:a="http://schemas.openxmlformats.org/drawingml/2006/main">
-            <a:off x="9858375" y="4476750"/>
-            <a:ext cx="3143250" cy="552450"/>
-          </a:xfrm>
-          <a:prstGeom xmlns:a="http://schemas.openxmlformats.org/drawingml/2006/main" prst="rect">
-            <a:avLst/>
-          </a:prstGeom>
-          <a:noFill xmlns:a="http://schemas.openxmlformats.org/drawingml/2006/main"/>
-          <a:ln xmlns:a="http://schemas.openxmlformats.org/drawingml/2006/main" w="0">
-            <a:noFill/>
-            <a:prstDash val="solid"/>
-          </a:ln>
-        </p:spPr>
-        <p:txBody>
-          <a:bodyPr xmlns:a="http://schemas.openxmlformats.org/drawingml/2006/main" wrap="square" lIns="0" tIns="0" rIns="0" bIns="0" anchor="t">
-            <a:noAutofit/>
-          </a:bodyPr>
-          <a:lstStyle xmlns:a="http://schemas.openxmlformats.org/drawingml/2006/main"/>
-          <a:p xmlns:a="http://schemas.openxmlformats.org/drawingml/2006/main">
-            <a:pPr algn="l">
-              <a:defRPr sz="2250" b="1">
-                <a:solidFill>
                   <a:srgbClr val="0B2B4C"/>
                 </a:solidFill>
-                <a:latin typeface="IBM Plex Mono"/>
-                <a:ea typeface="IBM Plex Mono"/>
-                <a:cs typeface="IBM Plex Mono"/>
-              </a:defRPr>
-            </a:pPr>
-            <a:r>
-              <a:rPr sz="2250" b="1">
-                <a:solidFill>
-                  <a:srgbClr val="0B2B4C"/>
-                </a:solidFill>
-                <a:latin typeface="IBM Plex Mono"/>
-                <a:ea typeface="IBM Plex Mono"/>
-                <a:cs typeface="IBM Plex Mono"/>
-              </a:rPr>
-              <a:t>t_s.^2</a:t>
-            </a:r>
-          </a:p>
-        </p:txBody>
-      </p:sp>
-      <p:sp>
-        <p:nvSpPr>
-          <p:cNvPr id="14" name="">
-            <a:extLst xmlns:a="http://schemas.openxmlformats.org/drawingml/2006/main">
-              <a:ext uri="{FF2B5EF4-FFF2-40B4-BE49-F238E27FC236}">
-                <a16:creationId xmlns:a16="http://schemas.microsoft.com/office/drawing/2014/main" id="{8A880D28-46DB-41F7-813D-58BFD65152FD}"/>
-              </a:ext>
-            </a:extLst>
-          </p:cNvPr>
-          <p:cNvSpPr>
-            <a:spLocks xmlns:a="http://schemas.openxmlformats.org/drawingml/2006/main" noGrp="1"/>
-          </p:cNvSpPr>
-          <p:nvPr/>
-        </p:nvSpPr>
-        <p:spPr>
-          <a:xfrm xmlns:a="http://schemas.openxmlformats.org/drawingml/2006/main">
-            <a:off x="9858375" y="5381625"/>
-            <a:ext cx="3143250" cy="495300"/>
-          </a:xfrm>
-          <a:prstGeom xmlns:a="http://schemas.openxmlformats.org/drawingml/2006/main" prst="rect">
-            <a:avLst/>
-          </a:prstGeom>
-          <a:noFill xmlns:a="http://schemas.openxmlformats.org/drawingml/2006/main"/>
-          <a:ln xmlns:a="http://schemas.openxmlformats.org/drawingml/2006/main" w="0">
-            <a:noFill/>
-            <a:prstDash val="solid"/>
-          </a:ln>
-        </p:spPr>
-        <p:txBody>
-          <a:bodyPr xmlns:a="http://schemas.openxmlformats.org/drawingml/2006/main" wrap="square" lIns="0" tIns="0" rIns="0" bIns="0" anchor="t">
-            <a:noAutofit/>
-          </a:bodyPr>
-          <a:lstStyle xmlns:a="http://schemas.openxmlformats.org/drawingml/2006/main"/>
-          <a:p xmlns:a="http://schemas.openxmlformats.org/drawingml/2006/main">
-            <a:pPr algn="l">
-              <a:defRPr sz="1875">
-                <a:solidFill>
-                  <a:srgbClr val="3F4B57"/>
-                </a:solidFill>
-                <a:latin typeface="Nunito"/>
-                <a:ea typeface="Nunito"/>
-                <a:cs typeface="Nunito"/>
-              </a:defRPr>
-            </a:pPr>
-            <a:r>
-              <a:rPr sz="1875">
-                <a:solidFill>
-                  <a:srgbClr val="3F4B57"/>
-                </a:solidFill>
-                <a:latin typeface="Nunito"/>
-                <a:ea typeface="Nunito"/>
-                <a:cs typeface="Nunito"/>
-              </a:rPr>
-              <a:t>every time value squared</a:t>
-            </a:r>
-          </a:p>
-        </p:txBody>
-      </p:sp>
-      <p:sp>
-        <p:nvSpPr>
-          <p:cNvPr id="15" name="">
-            <a:extLst xmlns:a="http://schemas.openxmlformats.org/drawingml/2006/main">
-              <a:ext uri="{FF2B5EF4-FFF2-40B4-BE49-F238E27FC236}">
-                <a16:creationId xmlns:a16="http://schemas.microsoft.com/office/drawing/2014/main" id="{B4249A4E-8D07-40B2-88DD-36E4DE9AB838}"/>
-              </a:ext>
-            </a:extLst>
-          </p:cNvPr>
-          <p:cNvSpPr>
-            <a:spLocks xmlns:a="http://schemas.openxmlformats.org/drawingml/2006/main" noGrp="1"/>
-          </p:cNvSpPr>
-          <p:nvPr/>
-        </p:nvSpPr>
-        <p:spPr>
-          <a:xfrm xmlns:a="http://schemas.openxmlformats.org/drawingml/2006/main">
-            <a:off x="1095375" y="7239000"/>
-            <a:ext cx="15001875" cy="952500"/>
-          </a:xfrm>
-          <a:prstGeom xmlns:a="http://schemas.openxmlformats.org/drawingml/2006/main" prst="roundRect">
-            <a:avLst>
-              <a:gd name="adj" fmla="val 12000"/>
-            </a:avLst>
-          </a:prstGeom>
-          <a:solidFill xmlns:a="http://schemas.openxmlformats.org/drawingml/2006/main">
-            <a:srgbClr val="FFF2F2"/>
-          </a:solidFill>
-          <a:ln xmlns:a="http://schemas.openxmlformats.org/drawingml/2006/main" w="19050">
-            <a:solidFill>
-              <a:srgbClr val="B3262E"/>
-            </a:solidFill>
-            <a:prstDash val="solid"/>
-          </a:ln>
-        </p:spPr>
-      </p:sp>
-      <p:sp>
-        <p:nvSpPr>
-          <p:cNvPr id="16" name="">
-            <a:extLst xmlns:a="http://schemas.openxmlformats.org/drawingml/2006/main">
-              <a:ext uri="{FF2B5EF4-FFF2-40B4-BE49-F238E27FC236}">
-                <a16:creationId xmlns:a16="http://schemas.microsoft.com/office/drawing/2014/main" id="{703C7BAC-B039-4621-926E-8FD31EE3033F}"/>
-              </a:ext>
-            </a:extLst>
-          </p:cNvPr>
-          <p:cNvSpPr>
-            <a:spLocks xmlns:a="http://schemas.openxmlformats.org/drawingml/2006/main" noGrp="1"/>
-          </p:cNvSpPr>
-          <p:nvPr/>
-        </p:nvSpPr>
-        <p:spPr>
-          <a:xfrm xmlns:a="http://schemas.openxmlformats.org/drawingml/2006/main">
-            <a:off x="1476375" y="7524750"/>
-            <a:ext cx="14239875" cy="400050"/>
-          </a:xfrm>
-          <a:prstGeom xmlns:a="http://schemas.openxmlformats.org/drawingml/2006/main" prst="rect">
-            <a:avLst/>
-          </a:prstGeom>
-          <a:noFill xmlns:a="http://schemas.openxmlformats.org/drawingml/2006/main"/>
-          <a:ln xmlns:a="http://schemas.openxmlformats.org/drawingml/2006/main" w="0">
-            <a:noFill/>
-            <a:prstDash val="solid"/>
-          </a:ln>
-        </p:spPr>
-        <p:txBody>
-          <a:bodyPr xmlns:a="http://schemas.openxmlformats.org/drawingml/2006/main" wrap="square" lIns="0" tIns="0" rIns="0" bIns="0" anchor="t">
-            <a:noAutofit/>
-          </a:bodyPr>
-          <a:lstStyle xmlns:a="http://schemas.openxmlformats.org/drawingml/2006/main"/>
-          <a:p xmlns:a="http://schemas.openxmlformats.org/drawingml/2006/main">
-            <a:pPr algn="ctr">
-              <a:defRPr sz="2400" b="1">
-                <a:solidFill>
-                  <a:srgbClr val="B3262E"/>
-                </a:solidFill>
-                <a:latin typeface="Nunito"/>
-                <a:ea typeface="Nunito"/>
-                <a:cs typeface="Nunito"/>
-              </a:defRPr>
-            </a:pPr>
-            <a:r>
-              <a:rPr sz="2400" b="1">
-                <a:solidFill>
-                  <a:srgbClr val="B3262E"/>
-                </a:solidFill>
-                <a:latin typeface="Nunito"/>
-                <a:ea typeface="Nunito"/>
-                <a:cs typeface="Nunito"/>
-              </a:rPr>
-              <a:t>Checkpoint: explain why the model line contains .* and .^</a:t>
-            </a:r>
-          </a:p>
-        </p:txBody>
-      </p:sp>
-      <p:sp>
-        <p:nvSpPr>
-          <p:cNvPr id="17" name="slide-number-11">
-            <a:extLst xmlns:a="http://schemas.openxmlformats.org/drawingml/2006/main">
-              <a:ext uri="{FF2B5EF4-FFF2-40B4-BE49-F238E27FC236}">
-                <a16:creationId xmlns:a16="http://schemas.microsoft.com/office/drawing/2014/main" id="{35E4F0F2-41DE-4371-BA5F-78B364A855C2}"/>
+                <a:latin typeface="Nunito"/>
+                <a:ea typeface="Nunito"/>
+                <a:cs typeface="Nunito"/>
+              </a:rPr>
+              <a:t>Prediction: rise, one peak, then fall. Check: y_m(1) = 0 m</a:t>
+            </a:r>
+          </a:p>
+        </p:txBody>
+      </p:sp>
+      <p:sp>
+        <p:nvSpPr>
+          <p:cNvPr id="8" name="slide-number-11">
+            <a:extLst xmlns:a="http://schemas.openxmlformats.org/drawingml/2006/main">
+              <a:ext uri="{FF2B5EF4-FFF2-40B4-BE49-F238E27FC236}">
+                <a16:creationId xmlns:a16="http://schemas.microsoft.com/office/drawing/2014/main" id="{F0658922-662B-4BCB-988A-71C460095831}"/>
               </a:ext>
             </a:extLst>
           </p:cNvPr>
@@ -6089,7 +5895,7 @@
     </p:spTree>
     <p:extLst>
       <p:ext uri="{BB962C8B-B14F-4D97-AF65-F5344CB8AC3E}">
-        <p14:creationId xmlns:p14="http://schemas.microsoft.com/office/powerpoint/2010/main" val="1169084441"/>
+        <p14:creationId xmlns:p14="http://schemas.microsoft.com/office/powerpoint/2010/main" val="1891287767"/>
       </p:ext>
     </p:extLst>
   </p:cSld>
@@ -6117,10 +5923,10 @@
       </p:grpSpPr>
       <p:sp>
         <p:nvSpPr>
-          <p:cNvPr id="9" name="title-T1">
-            <a:extLst xmlns:a="http://schemas.openxmlformats.org/drawingml/2006/main">
-              <a:ext uri="{FF2B5EF4-FFF2-40B4-BE49-F238E27FC236}">
-                <a16:creationId xmlns:a16="http://schemas.microsoft.com/office/drawing/2014/main" id="{F5589028-76D9-4CD3-8976-4B61AC6606DF}"/>
+          <p:cNvPr id="17" name="title-T1">
+            <a:extLst xmlns:a="http://schemas.openxmlformats.org/drawingml/2006/main">
+              <a:ext uri="{FF2B5EF4-FFF2-40B4-BE49-F238E27FC236}">
+                <a16:creationId xmlns:a16="http://schemas.microsoft.com/office/drawing/2014/main" id="{99589B3F-17D6-447E-92F6-8471FC04598E}"/>
               </a:ext>
             </a:extLst>
           </p:cNvPr>
@@ -6174,7 +5980,7 @@
                 <a:ea typeface="Nunito"/>
                 <a:cs typeface="Nunito"/>
               </a:rPr>
-              <a:t>Run the model, then read the graph</a:t>
+              <a:t>Week 1 exit ticket</a:t>
             </a:r>
           </a:p>
         </p:txBody>
@@ -6184,7 +5990,7 @@
           <p:cNvPr id="2" name="subtitle-T1">
             <a:extLst xmlns:a="http://schemas.openxmlformats.org/drawingml/2006/main">
               <a:ext uri="{FF2B5EF4-FFF2-40B4-BE49-F238E27FC236}">
-                <a16:creationId xmlns:a16="http://schemas.microsoft.com/office/drawing/2014/main" id="{1008E080-FAC7-4770-9DE2-D923599AFCAA}"/>
+                <a16:creationId xmlns:a16="http://schemas.microsoft.com/office/drawing/2014/main" id="{699717FA-EA70-4536-A8F9-4E301C2F6978}"/>
               </a:ext>
             </a:extLst>
           </p:cNvPr>
@@ -6234,7 +6040,7 @@
                 <a:ea typeface="Nunito"/>
                 <a:cs typeface="Nunito"/>
               </a:rPr>
-              <a:t>Prediction comes before the plot; a known value checks the result</a:t>
+              <a:t>Use the same ball model and answer in one or two sentences</a:t>
             </a:r>
           </a:p>
         </p:txBody>
@@ -6244,31 +6050,604 @@
           <p:cNvPr id="3" name="">
             <a:extLst xmlns:a="http://schemas.openxmlformats.org/drawingml/2006/main">
               <a:ext uri="{FF2B5EF4-FFF2-40B4-BE49-F238E27FC236}">
-                <a16:creationId xmlns:a16="http://schemas.microsoft.com/office/drawing/2014/main" id="{95AD220D-6ACC-414B-B549-BC5D04EF53F4}"/>
-              </a:ext>
-            </a:extLst>
-          </p:cNvPr>
-          <p:cNvSpPr>
-            <a:spLocks xmlns:a="http://schemas.openxmlformats.org/drawingml/2006/main" noGrp="1"/>
-          </p:cNvSpPr>
-          <p:nvPr/>
-        </p:nvSpPr>
-        <p:spPr>
-          <a:xfrm xmlns:a="http://schemas.openxmlformats.org/drawingml/2006/main">
-            <a:off x="1095375" y="2571750"/>
-            <a:ext cx="7239000" cy="5286375"/>
+                <a16:creationId xmlns:a16="http://schemas.microsoft.com/office/drawing/2014/main" id="{5C3E4D7F-4247-42C0-BD05-EEE8B5220B71}"/>
+              </a:ext>
+            </a:extLst>
+          </p:cNvPr>
+          <p:cNvSpPr>
+            <a:spLocks xmlns:a="http://schemas.openxmlformats.org/drawingml/2006/main" noGrp="1"/>
+          </p:cNvSpPr>
+          <p:nvPr/>
+        </p:nvSpPr>
+        <p:spPr>
+          <a:xfrm xmlns:a="http://schemas.openxmlformats.org/drawingml/2006/main">
+            <a:off x="1190625" y="2571750"/>
+            <a:ext cx="552450" cy="552450"/>
           </a:xfrm>
           <a:prstGeom xmlns:a="http://schemas.openxmlformats.org/drawingml/2006/main" prst="roundRect">
             <a:avLst>
-              <a:gd name="adj" fmla="val 2162"/>
+              <a:gd name="adj" fmla="val 50000"/>
             </a:avLst>
           </a:prstGeom>
           <a:solidFill xmlns:a="http://schemas.openxmlformats.org/drawingml/2006/main">
-            <a:srgbClr val="F4F8FC"/>
+            <a:srgbClr val="EEF5FD"/>
+          </a:solidFill>
+          <a:ln xmlns:a="http://schemas.openxmlformats.org/drawingml/2006/main" w="0">
+            <a:noFill/>
+            <a:prstDash val="solid"/>
+          </a:ln>
+        </p:spPr>
+        <p:txBody>
+          <a:bodyPr xmlns:a="http://schemas.openxmlformats.org/drawingml/2006/main" lIns="76200" tIns="0" rIns="76200" bIns="0" anchor="ctr">
+            <a:noAutofit/>
+          </a:bodyPr>
+          <a:lstStyle xmlns:a="http://schemas.openxmlformats.org/drawingml/2006/main"/>
+          <a:p xmlns:a="http://schemas.openxmlformats.org/drawingml/2006/main">
+            <a:pPr algn="ctr">
+              <a:defRPr sz="1650" b="1">
+                <a:solidFill>
+                  <a:srgbClr val="2F6DB2"/>
+                </a:solidFill>
+                <a:latin typeface="Nunito"/>
+                <a:ea typeface="Nunito"/>
+                <a:cs typeface="Nunito"/>
+              </a:defRPr>
+            </a:pPr>
+            <a:r>
+              <a:rPr sz="1650" b="1">
+                <a:solidFill>
+                  <a:srgbClr val="2F6DB2"/>
+                </a:solidFill>
+                <a:latin typeface="Nunito"/>
+                <a:ea typeface="Nunito"/>
+                <a:cs typeface="Nunito"/>
+              </a:rPr>
+              <a:t>1</a:t>
+            </a:r>
+          </a:p>
+        </p:txBody>
+      </p:sp>
+      <p:sp>
+        <p:nvSpPr>
+          <p:cNvPr id="4" name="">
+            <a:extLst xmlns:a="http://schemas.openxmlformats.org/drawingml/2006/main">
+              <a:ext uri="{FF2B5EF4-FFF2-40B4-BE49-F238E27FC236}">
+                <a16:creationId xmlns:a16="http://schemas.microsoft.com/office/drawing/2014/main" id="{2A73B683-CC52-4C43-8488-F10A9CF7D073}"/>
+              </a:ext>
+            </a:extLst>
+          </p:cNvPr>
+          <p:cNvSpPr>
+            <a:spLocks xmlns:a="http://schemas.openxmlformats.org/drawingml/2006/main" noGrp="1"/>
+          </p:cNvSpPr>
+          <p:nvPr/>
+        </p:nvSpPr>
+        <p:spPr>
+          <a:xfrm xmlns:a="http://schemas.openxmlformats.org/drawingml/2006/main">
+            <a:off x="2095500" y="2628900"/>
+            <a:ext cx="13049250" cy="609600"/>
+          </a:xfrm>
+          <a:prstGeom xmlns:a="http://schemas.openxmlformats.org/drawingml/2006/main" prst="rect">
+            <a:avLst/>
+          </a:prstGeom>
+          <a:noFill xmlns:a="http://schemas.openxmlformats.org/drawingml/2006/main"/>
+          <a:ln xmlns:a="http://schemas.openxmlformats.org/drawingml/2006/main" w="0">
+            <a:noFill/>
+            <a:prstDash val="solid"/>
+          </a:ln>
+        </p:spPr>
+        <p:txBody>
+          <a:bodyPr xmlns:a="http://schemas.openxmlformats.org/drawingml/2006/main" wrap="square" lIns="0" tIns="0" rIns="0" bIns="0" anchor="t">
+            <a:noAutofit/>
+          </a:bodyPr>
+          <a:lstStyle xmlns:a="http://schemas.openxmlformats.org/drawingml/2006/main"/>
+          <a:p xmlns:a="http://schemas.openxmlformats.org/drawingml/2006/main">
+            <a:pPr algn="l">
+              <a:defRPr sz="2400">
+                <a:solidFill>
+                  <a:srgbClr val="3F4B57"/>
+                </a:solidFill>
+                <a:latin typeface="Nunito"/>
+                <a:ea typeface="Nunito"/>
+                <a:cs typeface="Nunito"/>
+              </a:defRPr>
+            </a:pPr>
+            <a:r>
+              <a:rPr sz="2400">
+                <a:solidFill>
+                  <a:srgbClr val="3F4B57"/>
+                </a:solidFill>
+                <a:latin typeface="Nunito"/>
+                <a:ea typeface="Nunito"/>
+                <a:cs typeface="Nunito"/>
+              </a:rPr>
+              <a:t>Name the output variable and its unit</a:t>
+            </a:r>
+          </a:p>
+        </p:txBody>
+      </p:sp>
+      <p:sp>
+        <p:nvSpPr>
+          <p:cNvPr id="5" name="">
+            <a:extLst xmlns:a="http://schemas.openxmlformats.org/drawingml/2006/main">
+              <a:ext uri="{FF2B5EF4-FFF2-40B4-BE49-F238E27FC236}">
+                <a16:creationId xmlns:a16="http://schemas.microsoft.com/office/drawing/2014/main" id="{FC10985E-AC8D-4B84-BD1D-7276F635CD37}"/>
+              </a:ext>
+            </a:extLst>
+          </p:cNvPr>
+          <p:cNvSpPr>
+            <a:spLocks xmlns:a="http://schemas.openxmlformats.org/drawingml/2006/main" noGrp="1"/>
+          </p:cNvSpPr>
+          <p:nvPr/>
+        </p:nvSpPr>
+        <p:spPr>
+          <a:xfrm xmlns:a="http://schemas.openxmlformats.org/drawingml/2006/main">
+            <a:off x="2095500" y="3448050"/>
+            <a:ext cx="13049250" cy="0"/>
+          </a:xfrm>
+          <a:prstGeom xmlns:a="http://schemas.openxmlformats.org/drawingml/2006/main" prst="line">
+            <a:avLst/>
+          </a:prstGeom>
+          <a:noFill xmlns:a="http://schemas.openxmlformats.org/drawingml/2006/main"/>
+          <a:ln xmlns:a="http://schemas.openxmlformats.org/drawingml/2006/main" w="19050">
+            <a:solidFill>
+              <a:srgbClr val="DDE5EC"/>
+            </a:solidFill>
+            <a:prstDash val="solid"/>
+          </a:ln>
+        </p:spPr>
+      </p:sp>
+      <p:sp>
+        <p:nvSpPr>
+          <p:cNvPr id="6" name="">
+            <a:extLst xmlns:a="http://schemas.openxmlformats.org/drawingml/2006/main">
+              <a:ext uri="{FF2B5EF4-FFF2-40B4-BE49-F238E27FC236}">
+                <a16:creationId xmlns:a16="http://schemas.microsoft.com/office/drawing/2014/main" id="{CD4DD665-ECA8-49E5-BF08-999C15157071}"/>
+              </a:ext>
+            </a:extLst>
+          </p:cNvPr>
+          <p:cNvSpPr>
+            <a:spLocks xmlns:a="http://schemas.openxmlformats.org/drawingml/2006/main" noGrp="1"/>
+          </p:cNvSpPr>
+          <p:nvPr/>
+        </p:nvSpPr>
+        <p:spPr>
+          <a:xfrm xmlns:a="http://schemas.openxmlformats.org/drawingml/2006/main">
+            <a:off x="1190625" y="3857625"/>
+            <a:ext cx="552450" cy="552450"/>
+          </a:xfrm>
+          <a:prstGeom xmlns:a="http://schemas.openxmlformats.org/drawingml/2006/main" prst="roundRect">
+            <a:avLst>
+              <a:gd name="adj" fmla="val 50000"/>
+            </a:avLst>
+          </a:prstGeom>
+          <a:solidFill xmlns:a="http://schemas.openxmlformats.org/drawingml/2006/main">
+            <a:srgbClr val="EEF5FD"/>
+          </a:solidFill>
+          <a:ln xmlns:a="http://schemas.openxmlformats.org/drawingml/2006/main" w="0">
+            <a:noFill/>
+            <a:prstDash val="solid"/>
+          </a:ln>
+        </p:spPr>
+        <p:txBody>
+          <a:bodyPr xmlns:a="http://schemas.openxmlformats.org/drawingml/2006/main" lIns="76200" tIns="0" rIns="76200" bIns="0" anchor="ctr">
+            <a:noAutofit/>
+          </a:bodyPr>
+          <a:lstStyle xmlns:a="http://schemas.openxmlformats.org/drawingml/2006/main"/>
+          <a:p xmlns:a="http://schemas.openxmlformats.org/drawingml/2006/main">
+            <a:pPr algn="ctr">
+              <a:defRPr sz="1650" b="1">
+                <a:solidFill>
+                  <a:srgbClr val="2F6DB2"/>
+                </a:solidFill>
+                <a:latin typeface="Nunito"/>
+                <a:ea typeface="Nunito"/>
+                <a:cs typeface="Nunito"/>
+              </a:defRPr>
+            </a:pPr>
+            <a:r>
+              <a:rPr sz="1650" b="1">
+                <a:solidFill>
+                  <a:srgbClr val="2F6DB2"/>
+                </a:solidFill>
+                <a:latin typeface="Nunito"/>
+                <a:ea typeface="Nunito"/>
+                <a:cs typeface="Nunito"/>
+              </a:rPr>
+              <a:t>2</a:t>
+            </a:r>
+          </a:p>
+        </p:txBody>
+      </p:sp>
+      <p:sp>
+        <p:nvSpPr>
+          <p:cNvPr id="7" name="">
+            <a:extLst xmlns:a="http://schemas.openxmlformats.org/drawingml/2006/main">
+              <a:ext uri="{FF2B5EF4-FFF2-40B4-BE49-F238E27FC236}">
+                <a16:creationId xmlns:a16="http://schemas.microsoft.com/office/drawing/2014/main" id="{8B0EAC89-BF37-40C9-A63F-34619D8A13D3}"/>
+              </a:ext>
+            </a:extLst>
+          </p:cNvPr>
+          <p:cNvSpPr>
+            <a:spLocks xmlns:a="http://schemas.openxmlformats.org/drawingml/2006/main" noGrp="1"/>
+          </p:cNvSpPr>
+          <p:nvPr/>
+        </p:nvSpPr>
+        <p:spPr>
+          <a:xfrm xmlns:a="http://schemas.openxmlformats.org/drawingml/2006/main">
+            <a:off x="2095500" y="3914775"/>
+            <a:ext cx="13049250" cy="609600"/>
+          </a:xfrm>
+          <a:prstGeom xmlns:a="http://schemas.openxmlformats.org/drawingml/2006/main" prst="rect">
+            <a:avLst/>
+          </a:prstGeom>
+          <a:noFill xmlns:a="http://schemas.openxmlformats.org/drawingml/2006/main"/>
+          <a:ln xmlns:a="http://schemas.openxmlformats.org/drawingml/2006/main" w="0">
+            <a:noFill/>
+            <a:prstDash val="solid"/>
+          </a:ln>
+        </p:spPr>
+        <p:txBody>
+          <a:bodyPr xmlns:a="http://schemas.openxmlformats.org/drawingml/2006/main" wrap="square" lIns="0" tIns="0" rIns="0" bIns="0" anchor="t">
+            <a:noAutofit/>
+          </a:bodyPr>
+          <a:lstStyle xmlns:a="http://schemas.openxmlformats.org/drawingml/2006/main"/>
+          <a:p xmlns:a="http://schemas.openxmlformats.org/drawingml/2006/main">
+            <a:pPr algn="l">
+              <a:defRPr sz="2400">
+                <a:solidFill>
+                  <a:srgbClr val="3F4B57"/>
+                </a:solidFill>
+                <a:latin typeface="Nunito"/>
+                <a:ea typeface="Nunito"/>
+                <a:cs typeface="Nunito"/>
+              </a:defRPr>
+            </a:pPr>
+            <a:r>
+              <a:rPr sz="2400">
+                <a:solidFill>
+                  <a:srgbClr val="3F4B57"/>
+                </a:solidFill>
+                <a:latin typeface="Nunito"/>
+                <a:ea typeface="Nunito"/>
+                <a:cs typeface="Nunito"/>
+              </a:rPr>
+              <a:t>What does t_s(11) select?</a:t>
+            </a:r>
+          </a:p>
+        </p:txBody>
+      </p:sp>
+      <p:sp>
+        <p:nvSpPr>
+          <p:cNvPr id="8" name="">
+            <a:extLst xmlns:a="http://schemas.openxmlformats.org/drawingml/2006/main">
+              <a:ext uri="{FF2B5EF4-FFF2-40B4-BE49-F238E27FC236}">
+                <a16:creationId xmlns:a16="http://schemas.microsoft.com/office/drawing/2014/main" id="{1BE45551-E0FD-41D1-AAAD-D38A65BA0034}"/>
+              </a:ext>
+            </a:extLst>
+          </p:cNvPr>
+          <p:cNvSpPr>
+            <a:spLocks xmlns:a="http://schemas.openxmlformats.org/drawingml/2006/main" noGrp="1"/>
+          </p:cNvSpPr>
+          <p:nvPr/>
+        </p:nvSpPr>
+        <p:spPr>
+          <a:xfrm xmlns:a="http://schemas.openxmlformats.org/drawingml/2006/main">
+            <a:off x="2095500" y="4733925"/>
+            <a:ext cx="13049250" cy="0"/>
+          </a:xfrm>
+          <a:prstGeom xmlns:a="http://schemas.openxmlformats.org/drawingml/2006/main" prst="line">
+            <a:avLst/>
+          </a:prstGeom>
+          <a:noFill xmlns:a="http://schemas.openxmlformats.org/drawingml/2006/main"/>
+          <a:ln xmlns:a="http://schemas.openxmlformats.org/drawingml/2006/main" w="19050">
+            <a:solidFill>
+              <a:srgbClr val="DDE5EC"/>
+            </a:solidFill>
+            <a:prstDash val="solid"/>
+          </a:ln>
+        </p:spPr>
+      </p:sp>
+      <p:sp>
+        <p:nvSpPr>
+          <p:cNvPr id="9" name="">
+            <a:extLst xmlns:a="http://schemas.openxmlformats.org/drawingml/2006/main">
+              <a:ext uri="{FF2B5EF4-FFF2-40B4-BE49-F238E27FC236}">
+                <a16:creationId xmlns:a16="http://schemas.microsoft.com/office/drawing/2014/main" id="{54F344E1-3592-4994-A5D2-D8403887F60B}"/>
+              </a:ext>
+            </a:extLst>
+          </p:cNvPr>
+          <p:cNvSpPr>
+            <a:spLocks xmlns:a="http://schemas.openxmlformats.org/drawingml/2006/main" noGrp="1"/>
+          </p:cNvSpPr>
+          <p:nvPr/>
+        </p:nvSpPr>
+        <p:spPr>
+          <a:xfrm xmlns:a="http://schemas.openxmlformats.org/drawingml/2006/main">
+            <a:off x="1190625" y="5143500"/>
+            <a:ext cx="552450" cy="552450"/>
+          </a:xfrm>
+          <a:prstGeom xmlns:a="http://schemas.openxmlformats.org/drawingml/2006/main" prst="roundRect">
+            <a:avLst>
+              <a:gd name="adj" fmla="val 50000"/>
+            </a:avLst>
+          </a:prstGeom>
+          <a:solidFill xmlns:a="http://schemas.openxmlformats.org/drawingml/2006/main">
+            <a:srgbClr val="EEF5FD"/>
+          </a:solidFill>
+          <a:ln xmlns:a="http://schemas.openxmlformats.org/drawingml/2006/main" w="0">
+            <a:noFill/>
+            <a:prstDash val="solid"/>
+          </a:ln>
+        </p:spPr>
+        <p:txBody>
+          <a:bodyPr xmlns:a="http://schemas.openxmlformats.org/drawingml/2006/main" lIns="76200" tIns="0" rIns="76200" bIns="0" anchor="ctr">
+            <a:noAutofit/>
+          </a:bodyPr>
+          <a:lstStyle xmlns:a="http://schemas.openxmlformats.org/drawingml/2006/main"/>
+          <a:p xmlns:a="http://schemas.openxmlformats.org/drawingml/2006/main">
+            <a:pPr algn="ctr">
+              <a:defRPr sz="1650" b="1">
+                <a:solidFill>
+                  <a:srgbClr val="2F6DB2"/>
+                </a:solidFill>
+                <a:latin typeface="Nunito"/>
+                <a:ea typeface="Nunito"/>
+                <a:cs typeface="Nunito"/>
+              </a:defRPr>
+            </a:pPr>
+            <a:r>
+              <a:rPr sz="1650" b="1">
+                <a:solidFill>
+                  <a:srgbClr val="2F6DB2"/>
+                </a:solidFill>
+                <a:latin typeface="Nunito"/>
+                <a:ea typeface="Nunito"/>
+                <a:cs typeface="Nunito"/>
+              </a:rPr>
+              <a:t>3</a:t>
+            </a:r>
+          </a:p>
+        </p:txBody>
+      </p:sp>
+      <p:sp>
+        <p:nvSpPr>
+          <p:cNvPr id="10" name="">
+            <a:extLst xmlns:a="http://schemas.openxmlformats.org/drawingml/2006/main">
+              <a:ext uri="{FF2B5EF4-FFF2-40B4-BE49-F238E27FC236}">
+                <a16:creationId xmlns:a16="http://schemas.microsoft.com/office/drawing/2014/main" id="{EFE162DF-0C04-45A7-B1A4-143D8BF02D4C}"/>
+              </a:ext>
+            </a:extLst>
+          </p:cNvPr>
+          <p:cNvSpPr>
+            <a:spLocks xmlns:a="http://schemas.openxmlformats.org/drawingml/2006/main" noGrp="1"/>
+          </p:cNvSpPr>
+          <p:nvPr/>
+        </p:nvSpPr>
+        <p:spPr>
+          <a:xfrm xmlns:a="http://schemas.openxmlformats.org/drawingml/2006/main">
+            <a:off x="2095500" y="5200650"/>
+            <a:ext cx="13049250" cy="609600"/>
+          </a:xfrm>
+          <a:prstGeom xmlns:a="http://schemas.openxmlformats.org/drawingml/2006/main" prst="rect">
+            <a:avLst/>
+          </a:prstGeom>
+          <a:noFill xmlns:a="http://schemas.openxmlformats.org/drawingml/2006/main"/>
+          <a:ln xmlns:a="http://schemas.openxmlformats.org/drawingml/2006/main" w="0">
+            <a:noFill/>
+            <a:prstDash val="solid"/>
+          </a:ln>
+        </p:spPr>
+        <p:txBody>
+          <a:bodyPr xmlns:a="http://schemas.openxmlformats.org/drawingml/2006/main" wrap="square" lIns="0" tIns="0" rIns="0" bIns="0" anchor="t">
+            <a:noAutofit/>
+          </a:bodyPr>
+          <a:lstStyle xmlns:a="http://schemas.openxmlformats.org/drawingml/2006/main"/>
+          <a:p xmlns:a="http://schemas.openxmlformats.org/drawingml/2006/main">
+            <a:pPr algn="l">
+              <a:defRPr sz="2400">
+                <a:solidFill>
+                  <a:srgbClr val="3F4B57"/>
+                </a:solidFill>
+                <a:latin typeface="Nunito"/>
+                <a:ea typeface="Nunito"/>
+                <a:cs typeface="Nunito"/>
+              </a:defRPr>
+            </a:pPr>
+            <a:r>
+              <a:rPr sz="2400">
+                <a:solidFill>
+                  <a:srgbClr val="3F4B57"/>
+                </a:solidFill>
+                <a:latin typeface="Nunito"/>
+                <a:ea typeface="Nunito"/>
+                <a:cs typeface="Nunito"/>
+              </a:rPr>
+              <a:t>Which operator lets MATLAB square every value in t_s?</a:t>
+            </a:r>
+          </a:p>
+        </p:txBody>
+      </p:sp>
+      <p:sp>
+        <p:nvSpPr>
+          <p:cNvPr id="11" name="">
+            <a:extLst xmlns:a="http://schemas.openxmlformats.org/drawingml/2006/main">
+              <a:ext uri="{FF2B5EF4-FFF2-40B4-BE49-F238E27FC236}">
+                <a16:creationId xmlns:a16="http://schemas.microsoft.com/office/drawing/2014/main" id="{2DB5B209-0820-40D7-9FAE-AD9DF152DB2B}"/>
+              </a:ext>
+            </a:extLst>
+          </p:cNvPr>
+          <p:cNvSpPr>
+            <a:spLocks xmlns:a="http://schemas.openxmlformats.org/drawingml/2006/main" noGrp="1"/>
+          </p:cNvSpPr>
+          <p:nvPr/>
+        </p:nvSpPr>
+        <p:spPr>
+          <a:xfrm xmlns:a="http://schemas.openxmlformats.org/drawingml/2006/main">
+            <a:off x="2095500" y="6019800"/>
+            <a:ext cx="13049250" cy="0"/>
+          </a:xfrm>
+          <a:prstGeom xmlns:a="http://schemas.openxmlformats.org/drawingml/2006/main" prst="line">
+            <a:avLst/>
+          </a:prstGeom>
+          <a:noFill xmlns:a="http://schemas.openxmlformats.org/drawingml/2006/main"/>
+          <a:ln xmlns:a="http://schemas.openxmlformats.org/drawingml/2006/main" w="19050">
+            <a:solidFill>
+              <a:srgbClr val="DDE5EC"/>
+            </a:solidFill>
+            <a:prstDash val="solid"/>
+          </a:ln>
+        </p:spPr>
+      </p:sp>
+      <p:sp>
+        <p:nvSpPr>
+          <p:cNvPr id="12" name="">
+            <a:extLst xmlns:a="http://schemas.openxmlformats.org/drawingml/2006/main">
+              <a:ext uri="{FF2B5EF4-FFF2-40B4-BE49-F238E27FC236}">
+                <a16:creationId xmlns:a16="http://schemas.microsoft.com/office/drawing/2014/main" id="{FB914D84-1A7B-4841-9B71-69D316BF97EE}"/>
+              </a:ext>
+            </a:extLst>
+          </p:cNvPr>
+          <p:cNvSpPr>
+            <a:spLocks xmlns:a="http://schemas.openxmlformats.org/drawingml/2006/main" noGrp="1"/>
+          </p:cNvSpPr>
+          <p:nvPr/>
+        </p:nvSpPr>
+        <p:spPr>
+          <a:xfrm xmlns:a="http://schemas.openxmlformats.org/drawingml/2006/main">
+            <a:off x="1190625" y="6429375"/>
+            <a:ext cx="552450" cy="552450"/>
+          </a:xfrm>
+          <a:prstGeom xmlns:a="http://schemas.openxmlformats.org/drawingml/2006/main" prst="roundRect">
+            <a:avLst>
+              <a:gd name="adj" fmla="val 50000"/>
+            </a:avLst>
+          </a:prstGeom>
+          <a:solidFill xmlns:a="http://schemas.openxmlformats.org/drawingml/2006/main">
+            <a:srgbClr val="EEF5FD"/>
+          </a:solidFill>
+          <a:ln xmlns:a="http://schemas.openxmlformats.org/drawingml/2006/main" w="0">
+            <a:noFill/>
+            <a:prstDash val="solid"/>
+          </a:ln>
+        </p:spPr>
+        <p:txBody>
+          <a:bodyPr xmlns:a="http://schemas.openxmlformats.org/drawingml/2006/main" lIns="76200" tIns="0" rIns="76200" bIns="0" anchor="ctr">
+            <a:noAutofit/>
+          </a:bodyPr>
+          <a:lstStyle xmlns:a="http://schemas.openxmlformats.org/drawingml/2006/main"/>
+          <a:p xmlns:a="http://schemas.openxmlformats.org/drawingml/2006/main">
+            <a:pPr algn="ctr">
+              <a:defRPr sz="1650" b="1">
+                <a:solidFill>
+                  <a:srgbClr val="2F6DB2"/>
+                </a:solidFill>
+                <a:latin typeface="Nunito"/>
+                <a:ea typeface="Nunito"/>
+                <a:cs typeface="Nunito"/>
+              </a:defRPr>
+            </a:pPr>
+            <a:r>
+              <a:rPr sz="1650" b="1">
+                <a:solidFill>
+                  <a:srgbClr val="2F6DB2"/>
+                </a:solidFill>
+                <a:latin typeface="Nunito"/>
+                <a:ea typeface="Nunito"/>
+                <a:cs typeface="Nunito"/>
+              </a:rPr>
+              <a:t>4</a:t>
+            </a:r>
+          </a:p>
+        </p:txBody>
+      </p:sp>
+      <p:sp>
+        <p:nvSpPr>
+          <p:cNvPr id="13" name="">
+            <a:extLst xmlns:a="http://schemas.openxmlformats.org/drawingml/2006/main">
+              <a:ext uri="{FF2B5EF4-FFF2-40B4-BE49-F238E27FC236}">
+                <a16:creationId xmlns:a16="http://schemas.microsoft.com/office/drawing/2014/main" id="{F005833B-75AD-42AF-85CE-DD5F7F3EBE42}"/>
+              </a:ext>
+            </a:extLst>
+          </p:cNvPr>
+          <p:cNvSpPr>
+            <a:spLocks xmlns:a="http://schemas.openxmlformats.org/drawingml/2006/main" noGrp="1"/>
+          </p:cNvSpPr>
+          <p:nvPr/>
+        </p:nvSpPr>
+        <p:spPr>
+          <a:xfrm xmlns:a="http://schemas.openxmlformats.org/drawingml/2006/main">
+            <a:off x="2095500" y="6486525"/>
+            <a:ext cx="13049250" cy="609600"/>
+          </a:xfrm>
+          <a:prstGeom xmlns:a="http://schemas.openxmlformats.org/drawingml/2006/main" prst="rect">
+            <a:avLst/>
+          </a:prstGeom>
+          <a:noFill xmlns:a="http://schemas.openxmlformats.org/drawingml/2006/main"/>
+          <a:ln xmlns:a="http://schemas.openxmlformats.org/drawingml/2006/main" w="0">
+            <a:noFill/>
+            <a:prstDash val="solid"/>
+          </a:ln>
+        </p:spPr>
+        <p:txBody>
+          <a:bodyPr xmlns:a="http://schemas.openxmlformats.org/drawingml/2006/main" wrap="square" lIns="0" tIns="0" rIns="0" bIns="0" anchor="t">
+            <a:noAutofit/>
+          </a:bodyPr>
+          <a:lstStyle xmlns:a="http://schemas.openxmlformats.org/drawingml/2006/main"/>
+          <a:p xmlns:a="http://schemas.openxmlformats.org/drawingml/2006/main">
+            <a:pPr algn="l">
+              <a:defRPr sz="2400">
+                <a:solidFill>
+                  <a:srgbClr val="3F4B57"/>
+                </a:solidFill>
+                <a:latin typeface="Nunito"/>
+                <a:ea typeface="Nunito"/>
+                <a:cs typeface="Nunito"/>
+              </a:defRPr>
+            </a:pPr>
+            <a:r>
+              <a:rPr sz="2400">
+                <a:solidFill>
+                  <a:srgbClr val="3F4B57"/>
+                </a:solidFill>
+                <a:latin typeface="Nunito"/>
+                <a:ea typeface="Nunito"/>
+                <a:cs typeface="Nunito"/>
+              </a:rPr>
+              <a:t>State one prediction for the graph and one value you can validate</a:t>
+            </a:r>
+          </a:p>
+        </p:txBody>
+      </p:sp>
+      <p:sp>
+        <p:nvSpPr>
+          <p:cNvPr id="14" name="">
+            <a:extLst xmlns:a="http://schemas.openxmlformats.org/drawingml/2006/main">
+              <a:ext uri="{FF2B5EF4-FFF2-40B4-BE49-F238E27FC236}">
+                <a16:creationId xmlns:a16="http://schemas.microsoft.com/office/drawing/2014/main" id="{5622E32D-2BB4-4794-898F-F4DCF3A74B9F}"/>
+              </a:ext>
+            </a:extLst>
+          </p:cNvPr>
+          <p:cNvSpPr>
+            <a:spLocks xmlns:a="http://schemas.openxmlformats.org/drawingml/2006/main" noGrp="1"/>
+          </p:cNvSpPr>
+          <p:nvPr/>
+        </p:nvSpPr>
+        <p:spPr>
+          <a:xfrm xmlns:a="http://schemas.openxmlformats.org/drawingml/2006/main">
+            <a:off x="1095375" y="8096250"/>
+            <a:ext cx="15001875" cy="838200"/>
+          </a:xfrm>
+          <a:prstGeom xmlns:a="http://schemas.openxmlformats.org/drawingml/2006/main" prst="roundRect">
+            <a:avLst>
+              <a:gd name="adj" fmla="val 13636"/>
+            </a:avLst>
+          </a:prstGeom>
+          <a:solidFill xmlns:a="http://schemas.openxmlformats.org/drawingml/2006/main">
+            <a:srgbClr val="F0FAF7"/>
           </a:solidFill>
           <a:ln xmlns:a="http://schemas.openxmlformats.org/drawingml/2006/main" w="19050">
             <a:solidFill>
-              <a:srgbClr val="2F6DB2"/>
+              <a:srgbClr val="3E8E45"/>
             </a:solidFill>
             <a:prstDash val="solid"/>
           </a:ln>
@@ -6276,22 +6655,22 @@
       </p:sp>
       <p:sp>
         <p:nvSpPr>
-          <p:cNvPr id="4" name="">
-            <a:extLst xmlns:a="http://schemas.openxmlformats.org/drawingml/2006/main">
-              <a:ext uri="{FF2B5EF4-FFF2-40B4-BE49-F238E27FC236}">
-                <a16:creationId xmlns:a16="http://schemas.microsoft.com/office/drawing/2014/main" id="{2AB0D8B7-B74D-4F38-AC05-440CB2D494EE}"/>
-              </a:ext>
-            </a:extLst>
-          </p:cNvPr>
-          <p:cNvSpPr>
-            <a:spLocks xmlns:a="http://schemas.openxmlformats.org/drawingml/2006/main" noGrp="1"/>
-          </p:cNvSpPr>
-          <p:nvPr/>
-        </p:nvSpPr>
-        <p:spPr>
-          <a:xfrm xmlns:a="http://schemas.openxmlformats.org/drawingml/2006/main">
-            <a:off x="1476375" y="2952750"/>
-            <a:ext cx="6191250" cy="419100"/>
+          <p:cNvPr id="15" name="">
+            <a:extLst xmlns:a="http://schemas.openxmlformats.org/drawingml/2006/main">
+              <a:ext uri="{FF2B5EF4-FFF2-40B4-BE49-F238E27FC236}">
+                <a16:creationId xmlns:a16="http://schemas.microsoft.com/office/drawing/2014/main" id="{04262253-2A4A-4BB7-909E-F63D47993619}"/>
+              </a:ext>
+            </a:extLst>
+          </p:cNvPr>
+          <p:cNvSpPr>
+            <a:spLocks xmlns:a="http://schemas.openxmlformats.org/drawingml/2006/main" noGrp="1"/>
+          </p:cNvSpPr>
+          <p:nvPr/>
+        </p:nvSpPr>
+        <p:spPr>
+          <a:xfrm xmlns:a="http://schemas.openxmlformats.org/drawingml/2006/main">
+            <a:off x="1476375" y="8334375"/>
+            <a:ext cx="14239875" cy="381000"/>
           </a:xfrm>
           <a:prstGeom xmlns:a="http://schemas.openxmlformats.org/drawingml/2006/main" prst="rect">
             <a:avLst/>
@@ -6308,287 +6687,10 @@
           </a:bodyPr>
           <a:lstStyle xmlns:a="http://schemas.openxmlformats.org/drawingml/2006/main"/>
           <a:p xmlns:a="http://schemas.openxmlformats.org/drawingml/2006/main">
-            <a:pPr algn="l">
-              <a:defRPr sz="2550" b="1">
-                <a:solidFill>
-                  <a:srgbClr val="2F6DB2"/>
-                </a:solidFill>
-                <a:latin typeface="Nunito"/>
-                <a:ea typeface="Nunito"/>
-                <a:cs typeface="Nunito"/>
-              </a:defRPr>
-            </a:pPr>
-            <a:r>
-              <a:rPr sz="2550" b="1">
-                <a:solidFill>
-                  <a:srgbClr val="2F6DB2"/>
-                </a:solidFill>
-                <a:latin typeface="Nunito"/>
-                <a:ea typeface="Nunito"/>
-                <a:cs typeface="Nunito"/>
-              </a:rPr>
-              <a:t>Trace this short fragment</a:t>
-            </a:r>
-          </a:p>
-        </p:txBody>
-      </p:sp>
-      <p:sp>
-        <p:nvSpPr>
-          <p:cNvPr id="5" name="">
-            <a:extLst xmlns:a="http://schemas.openxmlformats.org/drawingml/2006/main">
-              <a:ext uri="{FF2B5EF4-FFF2-40B4-BE49-F238E27FC236}">
-                <a16:creationId xmlns:a16="http://schemas.microsoft.com/office/drawing/2014/main" id="{135BCF2C-DED0-416D-AC78-83B904388763}"/>
-              </a:ext>
-            </a:extLst>
-          </p:cNvPr>
-          <p:cNvSpPr>
-            <a:spLocks xmlns:a="http://schemas.openxmlformats.org/drawingml/2006/main" noGrp="1"/>
-          </p:cNvSpPr>
-          <p:nvPr/>
-        </p:nvSpPr>
-        <p:spPr>
-          <a:xfrm xmlns:a="http://schemas.openxmlformats.org/drawingml/2006/main">
-            <a:off x="1476375" y="3762375"/>
-            <a:ext cx="6286500" cy="3238500"/>
-          </a:xfrm>
-          <a:prstGeom xmlns:a="http://schemas.openxmlformats.org/drawingml/2006/main" prst="rect">
-            <a:avLst/>
-          </a:prstGeom>
-          <a:noFill xmlns:a="http://schemas.openxmlformats.org/drawingml/2006/main"/>
-          <a:ln xmlns:a="http://schemas.openxmlformats.org/drawingml/2006/main" w="0">
-            <a:noFill/>
-            <a:prstDash val="solid"/>
-          </a:ln>
-        </p:spPr>
-        <p:txBody>
-          <a:bodyPr xmlns:a="http://schemas.openxmlformats.org/drawingml/2006/main" wrap="square" lIns="0" tIns="0" rIns="0" bIns="0" anchor="t">
-            <a:noAutofit/>
-          </a:bodyPr>
-          <a:lstStyle xmlns:a="http://schemas.openxmlformats.org/drawingml/2006/main"/>
-          <a:p xmlns:a="http://schemas.openxmlformats.org/drawingml/2006/main">
-            <a:pPr algn="l">
-              <a:lnSpc>
-                <a:spcPct val="122000"/>
-              </a:lnSpc>
-              <a:buNone/>
-              <a:defRPr sz="1875">
-                <a:solidFill>
-                  <a:srgbClr val="0B2B4C"/>
-                </a:solidFill>
-                <a:latin typeface="IBM Plex Mono"/>
-                <a:ea typeface="IBM Plex Mono"/>
-                <a:cs typeface="IBM Plex Mono"/>
-              </a:defRPr>
-            </a:pPr>
-            <a:r>
-              <a:rPr sz="1875">
-                <a:solidFill>
-                  <a:srgbClr val="0B2B4C"/>
-                </a:solidFill>
-                <a:latin typeface="IBM Plex Mono"/>
-                <a:ea typeface="IBM Plex Mono"/>
-                <a:cs typeface="IBM Plex Mono"/>
-              </a:rPr>
-              <a:t>t_s = 0:0.1:4;</a:t>
-            </a:r>
-          </a:p>
-          <a:p xmlns:a="http://schemas.openxmlformats.org/drawingml/2006/main">
-            <a:pPr algn="l">
-              <a:lnSpc>
-                <a:spcPct val="122000"/>
-              </a:lnSpc>
-              <a:buNone/>
-              <a:defRPr sz="1875">
-                <a:solidFill>
-                  <a:srgbClr val="0B2B4C"/>
-                </a:solidFill>
-                <a:latin typeface="IBM Plex Mono"/>
-                <a:ea typeface="IBM Plex Mono"/>
-                <a:cs typeface="IBM Plex Mono"/>
-              </a:defRPr>
-            </a:pPr>
-            <a:r>
-              <a:rPr sz="1875">
-                <a:solidFill>
-                  <a:srgbClr val="0B2B4C"/>
-                </a:solidFill>
-                <a:latin typeface="IBM Plex Mono"/>
-                <a:ea typeface="IBM Plex Mono"/>
-                <a:cs typeface="IBM Plex Mono"/>
-              </a:rPr>
-              <a:t>y_m = 20.*t_s - 0.5*9.81*t_s.^2;</a:t>
-            </a:r>
-          </a:p>
-          <a:p xmlns:a="http://schemas.openxmlformats.org/drawingml/2006/main">
-            <a:pPr algn="l">
-              <a:lnSpc>
-                <a:spcPct val="122000"/>
-              </a:lnSpc>
-              <a:buNone/>
-              <a:defRPr sz="1875">
-                <a:solidFill>
-                  <a:srgbClr val="0B2B4C"/>
-                </a:solidFill>
-                <a:latin typeface="IBM Plex Mono"/>
-                <a:ea typeface="IBM Plex Mono"/>
-                <a:cs typeface="IBM Plex Mono"/>
-              </a:defRPr>
-            </a:pPr>
-            <a:r>
-              <a:rPr sz="1875">
-                <a:solidFill>
-                  <a:srgbClr val="0B2B4C"/>
-                </a:solidFill>
-                <a:latin typeface="IBM Plex Mono"/>
-                <a:ea typeface="IBM Plex Mono"/>
-                <a:cs typeface="IBM Plex Mono"/>
-              </a:rPr>
-              <a:t>plot(t_s,y_m,'LineWidth',2)</a:t>
-            </a:r>
-          </a:p>
-          <a:p xmlns:a="http://schemas.openxmlformats.org/drawingml/2006/main">
-            <a:pPr algn="l">
-              <a:lnSpc>
-                <a:spcPct val="122000"/>
-              </a:lnSpc>
-              <a:buNone/>
-              <a:defRPr sz="1875">
-                <a:solidFill>
-                  <a:srgbClr val="0B2B4C"/>
-                </a:solidFill>
-                <a:latin typeface="IBM Plex Mono"/>
-                <a:ea typeface="IBM Plex Mono"/>
-                <a:cs typeface="IBM Plex Mono"/>
-              </a:defRPr>
-            </a:pPr>
-            <a:r>
-              <a:rPr sz="1875">
-                <a:solidFill>
-                  <a:srgbClr val="0B2B4C"/>
-                </a:solidFill>
-                <a:latin typeface="IBM Plex Mono"/>
-                <a:ea typeface="IBM Plex Mono"/>
-                <a:cs typeface="IBM Plex Mono"/>
-              </a:rPr>
-              <a:t>xlabel('Time (s)')</a:t>
-            </a:r>
-          </a:p>
-          <a:p xmlns:a="http://schemas.openxmlformats.org/drawingml/2006/main">
-            <a:pPr algn="l">
-              <a:lnSpc>
-                <a:spcPct val="122000"/>
-              </a:lnSpc>
-              <a:buNone/>
-              <a:defRPr sz="1875">
-                <a:solidFill>
-                  <a:srgbClr val="0B2B4C"/>
-                </a:solidFill>
-                <a:latin typeface="IBM Plex Mono"/>
-                <a:ea typeface="IBM Plex Mono"/>
-                <a:cs typeface="IBM Plex Mono"/>
-              </a:defRPr>
-            </a:pPr>
-            <a:r>
-              <a:rPr sz="1875">
-                <a:solidFill>
-                  <a:srgbClr val="0B2B4C"/>
-                </a:solidFill>
-                <a:latin typeface="IBM Plex Mono"/>
-                <a:ea typeface="IBM Plex Mono"/>
-                <a:cs typeface="IBM Plex Mono"/>
-              </a:rPr>
-              <a:t>ylabel('Vertical position (m)')</a:t>
-            </a:r>
-          </a:p>
-          <a:p xmlns:a="http://schemas.openxmlformats.org/drawingml/2006/main">
-            <a:pPr algn="l">
-              <a:lnSpc>
-                <a:spcPct val="122000"/>
-              </a:lnSpc>
-              <a:buNone/>
-              <a:defRPr sz="1875">
-                <a:solidFill>
-                  <a:srgbClr val="0B2B4C"/>
-                </a:solidFill>
-                <a:latin typeface="IBM Plex Mono"/>
-                <a:ea typeface="IBM Plex Mono"/>
-                <a:cs typeface="IBM Plex Mono"/>
-              </a:defRPr>
-            </a:pPr>
-            <a:r>
-              <a:rPr sz="1875">
-                <a:solidFill>
-                  <a:srgbClr val="0B2B4C"/>
-                </a:solidFill>
-                <a:latin typeface="IBM Plex Mono"/>
-                <a:ea typeface="IBM Plex Mono"/>
-                <a:cs typeface="IBM Plex Mono"/>
-              </a:rPr>
-              <a:t>assert(abs(y_m(1)) &lt; 1e-12)</a:t>
-            </a:r>
-          </a:p>
-        </p:txBody>
-      </p:sp>
-      <p:pic>
-        <p:nvPicPr>
-          <p:cNvPr id="14" name="week01-matlab-plot" descr="MATLAB height-versus-time plot for the Week 1 vertical-motion model: the ball starts at 0 metres, rises to one peak, then returns towards 0 metres; the initial-value marker confirms y_m(1) equals 0 metres"/>
-          <p:cNvPicPr>
-            <a:picLocks xmlns:a="http://schemas.openxmlformats.org/drawingml/2006/main" noChangeAspect="1"/>
-          </p:cNvPicPr>
-          <p:nvPr/>
-        </p:nvPicPr>
-        <p:blipFill>
-          <a:blip xmlns:r="http://schemas.openxmlformats.org/officeDocument/2006/relationships" xmlns:a="http://schemas.openxmlformats.org/drawingml/2006/main" r:embed="R12502576839c4178"/>
-          <a:stretch xmlns:a="http://schemas.openxmlformats.org/drawingml/2006/main"/>
-        </p:blipFill>
-        <p:spPr>
-          <a:xfrm xmlns:a="http://schemas.openxmlformats.org/drawingml/2006/main">
-            <a:off x="9096375" y="2553154"/>
-            <a:ext cx="6953250" cy="4704442"/>
-          </a:xfrm>
-          <a:prstGeom xmlns:a="http://schemas.openxmlformats.org/drawingml/2006/main" prst="rect">
-            <a:avLst/>
-          </a:prstGeom>
-        </p:spPr>
-      </p:pic>
-      <p:sp>
-        <p:nvSpPr>
-          <p:cNvPr id="7" name="">
-            <a:extLst xmlns:a="http://schemas.openxmlformats.org/drawingml/2006/main">
-              <a:ext uri="{FF2B5EF4-FFF2-40B4-BE49-F238E27FC236}">
-                <a16:creationId xmlns:a16="http://schemas.microsoft.com/office/drawing/2014/main" id="{A768AA25-78D4-4C00-B02F-A4982D7EF183}"/>
-              </a:ext>
-            </a:extLst>
-          </p:cNvPr>
-          <p:cNvSpPr>
-            <a:spLocks xmlns:a="http://schemas.openxmlformats.org/drawingml/2006/main" noGrp="1"/>
-          </p:cNvSpPr>
-          <p:nvPr/>
-        </p:nvSpPr>
-        <p:spPr>
-          <a:xfrm xmlns:a="http://schemas.openxmlformats.org/drawingml/2006/main">
-            <a:off x="1095375" y="8191500"/>
-            <a:ext cx="14478000" cy="400050"/>
-          </a:xfrm>
-          <a:prstGeom xmlns:a="http://schemas.openxmlformats.org/drawingml/2006/main" prst="rect">
-            <a:avLst/>
-          </a:prstGeom>
-          <a:noFill xmlns:a="http://schemas.openxmlformats.org/drawingml/2006/main"/>
-          <a:ln xmlns:a="http://schemas.openxmlformats.org/drawingml/2006/main" w="0">
-            <a:noFill/>
-            <a:prstDash val="solid"/>
-          </a:ln>
-        </p:spPr>
-        <p:txBody>
-          <a:bodyPr xmlns:a="http://schemas.openxmlformats.org/drawingml/2006/main" wrap="square" lIns="0" tIns="0" rIns="0" bIns="0" anchor="t">
-            <a:noAutofit/>
-          </a:bodyPr>
-          <a:lstStyle xmlns:a="http://schemas.openxmlformats.org/drawingml/2006/main"/>
-          <a:p xmlns:a="http://schemas.openxmlformats.org/drawingml/2006/main">
-            <a:pPr algn="l">
+            <a:pPr algn="ctr">
               <a:defRPr sz="2250" b="1">
                 <a:solidFill>
-                  <a:srgbClr val="0B2B4C"/>
+                  <a:srgbClr val="3E8E45"/>
                 </a:solidFill>
                 <a:latin typeface="Nunito"/>
                 <a:ea typeface="Nunito"/>
@@ -6598,23 +6700,23 @@
             <a:r>
               <a:rPr sz="2250" b="1">
                 <a:solidFill>
-                  <a:srgbClr val="0B2B4C"/>
-                </a:solidFill>
-                <a:latin typeface="Nunito"/>
-                <a:ea typeface="Nunito"/>
-                <a:cs typeface="Nunito"/>
-              </a:rPr>
-              <a:t>Prediction: rise, one peak, then fall. Check: y_m(1) = 0 m</a:t>
-            </a:r>
-          </a:p>
-        </p:txBody>
-      </p:sp>
-      <p:sp>
-        <p:nvSpPr>
-          <p:cNvPr id="8" name="slide-number-12">
-            <a:extLst xmlns:a="http://schemas.openxmlformats.org/drawingml/2006/main">
-              <a:ext uri="{FF2B5EF4-FFF2-40B4-BE49-F238E27FC236}">
-                <a16:creationId xmlns:a16="http://schemas.microsoft.com/office/drawing/2014/main" id="{56DE9460-1A1C-4F5C-B419-D95258853220}"/>
+                  <a:srgbClr val="3E8E45"/>
+                </a:solidFill>
+                <a:latin typeface="Nunito"/>
+                <a:ea typeface="Nunito"/>
+                <a:cs typeface="Nunito"/>
+              </a:rPr>
+              <a:t>Next time: turn the same physical model into a traceable algorithm</a:t>
+            </a:r>
+          </a:p>
+        </p:txBody>
+      </p:sp>
+      <p:sp>
+        <p:nvSpPr>
+          <p:cNvPr id="16" name="slide-number-12">
+            <a:extLst xmlns:a="http://schemas.openxmlformats.org/drawingml/2006/main">
+              <a:ext uri="{FF2B5EF4-FFF2-40B4-BE49-F238E27FC236}">
+                <a16:creationId xmlns:a16="http://schemas.microsoft.com/office/drawing/2014/main" id="{BE96CF1E-849B-4D5C-9DC6-D394E8D1F939}"/>
               </a:ext>
             </a:extLst>
           </p:cNvPr>
@@ -6672,7 +6774,7 @@
     </p:spTree>
     <p:extLst>
       <p:ext uri="{BB962C8B-B14F-4D97-AF65-F5344CB8AC3E}">
-        <p14:creationId xmlns:p14="http://schemas.microsoft.com/office/powerpoint/2010/main" val="1894131039"/>
+        <p14:creationId xmlns:p14="http://schemas.microsoft.com/office/powerpoint/2010/main" val="38666728"/>
       </p:ext>
     </p:extLst>
   </p:cSld>
@@ -6700,10 +6802,10 @@
       </p:grpSpPr>
       <p:sp>
         <p:nvSpPr>
-          <p:cNvPr id="17" name="title-T1">
-            <a:extLst xmlns:a="http://schemas.openxmlformats.org/drawingml/2006/main">
-              <a:ext uri="{FF2B5EF4-FFF2-40B4-BE49-F238E27FC236}">
-                <a16:creationId xmlns:a16="http://schemas.microsoft.com/office/drawing/2014/main" id="{2A900C11-0572-4952-BFE7-525B6F40CA73}"/>
+          <p:cNvPr id="27" name="title-T2">
+            <a:extLst xmlns:a="http://schemas.openxmlformats.org/drawingml/2006/main">
+              <a:ext uri="{FF2B5EF4-FFF2-40B4-BE49-F238E27FC236}">
+                <a16:creationId xmlns:a16="http://schemas.microsoft.com/office/drawing/2014/main" id="{DE5F4CBF-38D7-4869-8481-08EA244B91B3}"/>
               </a:ext>
             </a:extLst>
           </p:cNvPr>
@@ -6739,7 +6841,7 @@
                 <a:spcPct val="100000"/>
               </a:lnSpc>
               <a:buNone/>
-              <a:defRPr sz="5100" b="1">
+              <a:defRPr sz="4650" b="1">
                 <a:solidFill>
                   <a:srgbClr val="0B2B4C"/>
                 </a:solidFill>
@@ -6749,7 +6851,7 @@
               </a:defRPr>
             </a:pPr>
             <a:r>
-              <a:rPr sz="5100" b="1">
+              <a:rPr sz="4650" b="1">
                 <a:solidFill>
                   <a:srgbClr val="0B2B4C"/>
                 </a:solidFill>
@@ -6757,17 +6859,17 @@
                 <a:ea typeface="Nunito"/>
                 <a:cs typeface="Nunito"/>
               </a:rPr>
-              <a:t>Week 1 exit ticket</a:t>
-            </a:r>
-          </a:p>
-        </p:txBody>
-      </p:sp>
-      <p:sp>
-        <p:nvSpPr>
-          <p:cNvPr id="2" name="subtitle-T1">
-            <a:extLst xmlns:a="http://schemas.openxmlformats.org/drawingml/2006/main">
-              <a:ext uri="{FF2B5EF4-FFF2-40B4-BE49-F238E27FC236}">
-                <a16:creationId xmlns:a16="http://schemas.microsoft.com/office/drawing/2014/main" id="{3263D84A-47E6-42BD-ABFC-6D8592A146B7}"/>
+              <a:t>Working exposure: selected values</a:t>
+            </a:r>
+          </a:p>
+        </p:txBody>
+      </p:sp>
+      <p:sp>
+        <p:nvSpPr>
+          <p:cNvPr id="2" name="subtitle-T2">
+            <a:extLst xmlns:a="http://schemas.openxmlformats.org/drawingml/2006/main">
+              <a:ext uri="{FF2B5EF4-FFF2-40B4-BE49-F238E27FC236}">
+                <a16:creationId xmlns:a16="http://schemas.microsoft.com/office/drawing/2014/main" id="{06D666B4-A5A6-4715-BBDB-7B0D4AA29D8E}"/>
               </a:ext>
             </a:extLst>
           </p:cNvPr>
@@ -6817,7 +6919,7 @@
                 <a:ea typeface="Nunito"/>
                 <a:cs typeface="Nunito"/>
               </a:rPr>
-              <a:t>Use the same ball model and answer in one or two sentences</a:t>
+              <a:t>Read a few model outputs before drawing the full graph</a:t>
             </a:r>
           </a:p>
         </p:txBody>
@@ -6827,81 +6929,112 @@
           <p:cNvPr id="3" name="">
             <a:extLst xmlns:a="http://schemas.openxmlformats.org/drawingml/2006/main">
               <a:ext uri="{FF2B5EF4-FFF2-40B4-BE49-F238E27FC236}">
-                <a16:creationId xmlns:a16="http://schemas.microsoft.com/office/drawing/2014/main" id="{BE16DF85-3C5B-4F42-9448-8A67356ACA77}"/>
-              </a:ext>
-            </a:extLst>
-          </p:cNvPr>
-          <p:cNvSpPr>
-            <a:spLocks xmlns:a="http://schemas.openxmlformats.org/drawingml/2006/main" noGrp="1"/>
-          </p:cNvSpPr>
-          <p:nvPr/>
-        </p:nvSpPr>
-        <p:spPr>
-          <a:xfrm xmlns:a="http://schemas.openxmlformats.org/drawingml/2006/main">
-            <a:off x="1190625" y="2571750"/>
-            <a:ext cx="552450" cy="552450"/>
+                <a16:creationId xmlns:a16="http://schemas.microsoft.com/office/drawing/2014/main" id="{FE8CD82D-3DA1-4958-A1FC-8E99F455D869}"/>
+              </a:ext>
+            </a:extLst>
+          </p:cNvPr>
+          <p:cNvSpPr>
+            <a:spLocks xmlns:a="http://schemas.openxmlformats.org/drawingml/2006/main" noGrp="1"/>
+          </p:cNvSpPr>
+          <p:nvPr/>
+        </p:nvSpPr>
+        <p:spPr>
+          <a:xfrm xmlns:a="http://schemas.openxmlformats.org/drawingml/2006/main">
+            <a:off x="1095375" y="2647950"/>
+            <a:ext cx="14382750" cy="419100"/>
+          </a:xfrm>
+          <a:prstGeom xmlns:a="http://schemas.openxmlformats.org/drawingml/2006/main" prst="rect">
+            <a:avLst/>
+          </a:prstGeom>
+          <a:noFill xmlns:a="http://schemas.openxmlformats.org/drawingml/2006/main"/>
+          <a:ln xmlns:a="http://schemas.openxmlformats.org/drawingml/2006/main" w="0">
+            <a:noFill/>
+            <a:prstDash val="solid"/>
+          </a:ln>
+        </p:spPr>
+        <p:txBody>
+          <a:bodyPr xmlns:a="http://schemas.openxmlformats.org/drawingml/2006/main" wrap="square" lIns="0" tIns="0" rIns="0" bIns="0" anchor="t">
+            <a:noAutofit/>
+          </a:bodyPr>
+          <a:lstStyle xmlns:a="http://schemas.openxmlformats.org/drawingml/2006/main"/>
+          <a:p xmlns:a="http://schemas.openxmlformats.org/drawingml/2006/main">
+            <a:pPr algn="l">
+              <a:defRPr sz="2250">
+                <a:solidFill>
+                  <a:srgbClr val="3F4B57"/>
+                </a:solidFill>
+                <a:latin typeface="Nunito"/>
+                <a:ea typeface="Nunito"/>
+                <a:cs typeface="Nunito"/>
+              </a:defRPr>
+            </a:pPr>
+            <a:r>
+              <a:rPr sz="2250">
+                <a:solidFill>
+                  <a:srgbClr val="3F4B57"/>
+                </a:solidFill>
+                <a:latin typeface="Nunito"/>
+                <a:ea typeface="Nunito"/>
+                <a:cs typeface="Nunito"/>
+              </a:rPr>
+              <a:t>For the same vertical-motion model, each selected time has one computed height.</a:t>
+            </a:r>
+          </a:p>
+        </p:txBody>
+      </p:sp>
+      <p:sp>
+        <p:nvSpPr>
+          <p:cNvPr id="4" name="">
+            <a:extLst xmlns:a="http://schemas.openxmlformats.org/drawingml/2006/main">
+              <a:ext uri="{FF2B5EF4-FFF2-40B4-BE49-F238E27FC236}">
+                <a16:creationId xmlns:a16="http://schemas.microsoft.com/office/drawing/2014/main" id="{00EE602A-1839-4F67-B0AE-32906B9142BA}"/>
+              </a:ext>
+            </a:extLst>
+          </p:cNvPr>
+          <p:cNvSpPr>
+            <a:spLocks xmlns:a="http://schemas.openxmlformats.org/drawingml/2006/main" noGrp="1"/>
+          </p:cNvSpPr>
+          <p:nvPr/>
+        </p:nvSpPr>
+        <p:spPr>
+          <a:xfrm xmlns:a="http://schemas.openxmlformats.org/drawingml/2006/main">
+            <a:off x="1095375" y="3714750"/>
+            <a:ext cx="2714625" cy="2762250"/>
           </a:xfrm>
           <a:prstGeom xmlns:a="http://schemas.openxmlformats.org/drawingml/2006/main" prst="roundRect">
             <a:avLst>
-              <a:gd name="adj" fmla="val 50000"/>
+              <a:gd name="adj" fmla="val 4211"/>
             </a:avLst>
           </a:prstGeom>
           <a:solidFill xmlns:a="http://schemas.openxmlformats.org/drawingml/2006/main">
             <a:srgbClr val="EEF5FD"/>
           </a:solidFill>
-          <a:ln xmlns:a="http://schemas.openxmlformats.org/drawingml/2006/main" w="0">
-            <a:noFill/>
-            <a:prstDash val="solid"/>
-          </a:ln>
-        </p:spPr>
-        <p:txBody>
-          <a:bodyPr xmlns:a="http://schemas.openxmlformats.org/drawingml/2006/main" lIns="76200" tIns="0" rIns="76200" bIns="0" anchor="ctr">
-            <a:noAutofit/>
-          </a:bodyPr>
-          <a:lstStyle xmlns:a="http://schemas.openxmlformats.org/drawingml/2006/main"/>
-          <a:p xmlns:a="http://schemas.openxmlformats.org/drawingml/2006/main">
-            <a:pPr algn="ctr">
-              <a:defRPr sz="1650" b="1">
-                <a:solidFill>
-                  <a:srgbClr val="2F6DB2"/>
-                </a:solidFill>
-                <a:latin typeface="Nunito"/>
-                <a:ea typeface="Nunito"/>
-                <a:cs typeface="Nunito"/>
-              </a:defRPr>
-            </a:pPr>
-            <a:r>
-              <a:rPr sz="1650" b="1">
-                <a:solidFill>
-                  <a:srgbClr val="2F6DB2"/>
-                </a:solidFill>
-                <a:latin typeface="Nunito"/>
-                <a:ea typeface="Nunito"/>
-                <a:cs typeface="Nunito"/>
-              </a:rPr>
-              <a:t>1</a:t>
-            </a:r>
-          </a:p>
-        </p:txBody>
-      </p:sp>
-      <p:sp>
-        <p:nvSpPr>
-          <p:cNvPr id="4" name="">
-            <a:extLst xmlns:a="http://schemas.openxmlformats.org/drawingml/2006/main">
-              <a:ext uri="{FF2B5EF4-FFF2-40B4-BE49-F238E27FC236}">
-                <a16:creationId xmlns:a16="http://schemas.microsoft.com/office/drawing/2014/main" id="{04B7EAE3-9E35-4B3E-8B01-692B3B4981B8}"/>
-              </a:ext>
-            </a:extLst>
-          </p:cNvPr>
-          <p:cNvSpPr>
-            <a:spLocks xmlns:a="http://schemas.openxmlformats.org/drawingml/2006/main" noGrp="1"/>
-          </p:cNvSpPr>
-          <p:nvPr/>
-        </p:nvSpPr>
-        <p:spPr>
-          <a:xfrm xmlns:a="http://schemas.openxmlformats.org/drawingml/2006/main">
-            <a:off x="2095500" y="2628900"/>
-            <a:ext cx="13049250" cy="609600"/>
+          <a:ln xmlns:a="http://schemas.openxmlformats.org/drawingml/2006/main" w="19050">
+            <a:solidFill>
+              <a:srgbClr val="2F6DB2"/>
+            </a:solidFill>
+            <a:prstDash val="solid"/>
+          </a:ln>
+        </p:spPr>
+      </p:sp>
+      <p:sp>
+        <p:nvSpPr>
+          <p:cNvPr id="5" name="">
+            <a:extLst xmlns:a="http://schemas.openxmlformats.org/drawingml/2006/main">
+              <a:ext uri="{FF2B5EF4-FFF2-40B4-BE49-F238E27FC236}">
+                <a16:creationId xmlns:a16="http://schemas.microsoft.com/office/drawing/2014/main" id="{DE0EB518-4CA0-44EB-B98E-A26CA72116AF}"/>
+              </a:ext>
+            </a:extLst>
+          </p:cNvPr>
+          <p:cNvSpPr>
+            <a:spLocks xmlns:a="http://schemas.openxmlformats.org/drawingml/2006/main" noGrp="1"/>
+          </p:cNvSpPr>
+          <p:nvPr/>
+        </p:nvSpPr>
+        <p:spPr>
+          <a:xfrm xmlns:a="http://schemas.openxmlformats.org/drawingml/2006/main">
+            <a:off x="1362075" y="4114800"/>
+            <a:ext cx="2190750" cy="419100"/>
           </a:xfrm>
           <a:prstGeom xmlns:a="http://schemas.openxmlformats.org/drawingml/2006/main" prst="rect">
             <a:avLst/>
@@ -6918,141 +7051,48 @@
           </a:bodyPr>
           <a:lstStyle xmlns:a="http://schemas.openxmlformats.org/drawingml/2006/main"/>
           <a:p xmlns:a="http://schemas.openxmlformats.org/drawingml/2006/main">
-            <a:pPr algn="l">
-              <a:defRPr sz="2400">
-                <a:solidFill>
-                  <a:srgbClr val="3F4B57"/>
-                </a:solidFill>
-                <a:latin typeface="Nunito"/>
-                <a:ea typeface="Nunito"/>
-                <a:cs typeface="Nunito"/>
-              </a:defRPr>
-            </a:pPr>
-            <a:r>
-              <a:rPr sz="2400">
-                <a:solidFill>
-                  <a:srgbClr val="3F4B57"/>
-                </a:solidFill>
-                <a:latin typeface="Nunito"/>
-                <a:ea typeface="Nunito"/>
-                <a:cs typeface="Nunito"/>
-              </a:rPr>
-              <a:t>Name the output variable and its unit</a:t>
-            </a:r>
-          </a:p>
-        </p:txBody>
-      </p:sp>
-      <p:sp>
-        <p:nvSpPr>
-          <p:cNvPr id="5" name="">
-            <a:extLst xmlns:a="http://schemas.openxmlformats.org/drawingml/2006/main">
-              <a:ext uri="{FF2B5EF4-FFF2-40B4-BE49-F238E27FC236}">
-                <a16:creationId xmlns:a16="http://schemas.microsoft.com/office/drawing/2014/main" id="{AF62DE54-6063-4310-841F-FBF094A8DCCF}"/>
-              </a:ext>
-            </a:extLst>
-          </p:cNvPr>
-          <p:cNvSpPr>
-            <a:spLocks xmlns:a="http://schemas.openxmlformats.org/drawingml/2006/main" noGrp="1"/>
-          </p:cNvSpPr>
-          <p:nvPr/>
-        </p:nvSpPr>
-        <p:spPr>
-          <a:xfrm xmlns:a="http://schemas.openxmlformats.org/drawingml/2006/main">
-            <a:off x="2095500" y="3448050"/>
-            <a:ext cx="13049250" cy="0"/>
-          </a:xfrm>
-          <a:prstGeom xmlns:a="http://schemas.openxmlformats.org/drawingml/2006/main" prst="line">
-            <a:avLst/>
-          </a:prstGeom>
-          <a:noFill xmlns:a="http://schemas.openxmlformats.org/drawingml/2006/main"/>
-          <a:ln xmlns:a="http://schemas.openxmlformats.org/drawingml/2006/main" w="19050">
-            <a:solidFill>
-              <a:srgbClr val="DDE5EC"/>
-            </a:solidFill>
-            <a:prstDash val="solid"/>
-          </a:ln>
-        </p:spPr>
+            <a:pPr algn="ctr">
+              <a:defRPr sz="2250" b="1">
+                <a:solidFill>
+                  <a:srgbClr val="2F6DB2"/>
+                </a:solidFill>
+                <a:latin typeface="Nunito"/>
+                <a:ea typeface="Nunito"/>
+                <a:cs typeface="Nunito"/>
+              </a:defRPr>
+            </a:pPr>
+            <a:r>
+              <a:rPr sz="2250" b="1">
+                <a:solidFill>
+                  <a:srgbClr val="2F6DB2"/>
+                </a:solidFill>
+                <a:latin typeface="Nunito"/>
+                <a:ea typeface="Nunito"/>
+                <a:cs typeface="Nunito"/>
+              </a:rPr>
+              <a:t>0.0 s</a:t>
+            </a:r>
+          </a:p>
+        </p:txBody>
       </p:sp>
       <p:sp>
         <p:nvSpPr>
           <p:cNvPr id="6" name="">
             <a:extLst xmlns:a="http://schemas.openxmlformats.org/drawingml/2006/main">
               <a:ext uri="{FF2B5EF4-FFF2-40B4-BE49-F238E27FC236}">
-                <a16:creationId xmlns:a16="http://schemas.microsoft.com/office/drawing/2014/main" id="{E7591562-9A94-465D-975B-AA9101852235}"/>
-              </a:ext>
-            </a:extLst>
-          </p:cNvPr>
-          <p:cNvSpPr>
-            <a:spLocks xmlns:a="http://schemas.openxmlformats.org/drawingml/2006/main" noGrp="1"/>
-          </p:cNvSpPr>
-          <p:nvPr/>
-        </p:nvSpPr>
-        <p:spPr>
-          <a:xfrm xmlns:a="http://schemas.openxmlformats.org/drawingml/2006/main">
-            <a:off x="1190625" y="3857625"/>
-            <a:ext cx="552450" cy="552450"/>
-          </a:xfrm>
-          <a:prstGeom xmlns:a="http://schemas.openxmlformats.org/drawingml/2006/main" prst="roundRect">
-            <a:avLst>
-              <a:gd name="adj" fmla="val 50000"/>
-            </a:avLst>
-          </a:prstGeom>
-          <a:solidFill xmlns:a="http://schemas.openxmlformats.org/drawingml/2006/main">
-            <a:srgbClr val="EEF5FD"/>
-          </a:solidFill>
-          <a:ln xmlns:a="http://schemas.openxmlformats.org/drawingml/2006/main" w="0">
-            <a:noFill/>
-            <a:prstDash val="solid"/>
-          </a:ln>
-        </p:spPr>
-        <p:txBody>
-          <a:bodyPr xmlns:a="http://schemas.openxmlformats.org/drawingml/2006/main" lIns="76200" tIns="0" rIns="76200" bIns="0" anchor="ctr">
-            <a:noAutofit/>
-          </a:bodyPr>
-          <a:lstStyle xmlns:a="http://schemas.openxmlformats.org/drawingml/2006/main"/>
-          <a:p xmlns:a="http://schemas.openxmlformats.org/drawingml/2006/main">
-            <a:pPr algn="ctr">
-              <a:defRPr sz="1650" b="1">
-                <a:solidFill>
-                  <a:srgbClr val="2F6DB2"/>
-                </a:solidFill>
-                <a:latin typeface="Nunito"/>
-                <a:ea typeface="Nunito"/>
-                <a:cs typeface="Nunito"/>
-              </a:defRPr>
-            </a:pPr>
-            <a:r>
-              <a:rPr sz="1650" b="1">
-                <a:solidFill>
-                  <a:srgbClr val="2F6DB2"/>
-                </a:solidFill>
-                <a:latin typeface="Nunito"/>
-                <a:ea typeface="Nunito"/>
-                <a:cs typeface="Nunito"/>
-              </a:rPr>
-              <a:t>2</a:t>
-            </a:r>
-          </a:p>
-        </p:txBody>
-      </p:sp>
-      <p:sp>
-        <p:nvSpPr>
-          <p:cNvPr id="7" name="">
-            <a:extLst xmlns:a="http://schemas.openxmlformats.org/drawingml/2006/main">
-              <a:ext uri="{FF2B5EF4-FFF2-40B4-BE49-F238E27FC236}">
-                <a16:creationId xmlns:a16="http://schemas.microsoft.com/office/drawing/2014/main" id="{348E6D60-1190-4132-B5CA-28168ED5B3B6}"/>
-              </a:ext>
-            </a:extLst>
-          </p:cNvPr>
-          <p:cNvSpPr>
-            <a:spLocks xmlns:a="http://schemas.openxmlformats.org/drawingml/2006/main" noGrp="1"/>
-          </p:cNvSpPr>
-          <p:nvPr/>
-        </p:nvSpPr>
-        <p:spPr>
-          <a:xfrm xmlns:a="http://schemas.openxmlformats.org/drawingml/2006/main">
-            <a:off x="2095500" y="3914775"/>
-            <a:ext cx="13049250" cy="609600"/>
+                <a16:creationId xmlns:a16="http://schemas.microsoft.com/office/drawing/2014/main" id="{989315F5-38C3-4ACD-9E57-301FBCA7B328}"/>
+              </a:ext>
+            </a:extLst>
+          </p:cNvPr>
+          <p:cNvSpPr>
+            <a:spLocks xmlns:a="http://schemas.openxmlformats.org/drawingml/2006/main" noGrp="1"/>
+          </p:cNvSpPr>
+          <p:nvPr/>
+        </p:nvSpPr>
+        <p:spPr>
+          <a:xfrm xmlns:a="http://schemas.openxmlformats.org/drawingml/2006/main">
+            <a:off x="1362075" y="4905375"/>
+            <a:ext cx="2190750" cy="514350"/>
           </a:xfrm>
           <a:prstGeom xmlns:a="http://schemas.openxmlformats.org/drawingml/2006/main" prst="rect">
             <a:avLst/>
@@ -7069,141 +7109,48 @@
           </a:bodyPr>
           <a:lstStyle xmlns:a="http://schemas.openxmlformats.org/drawingml/2006/main"/>
           <a:p xmlns:a="http://schemas.openxmlformats.org/drawingml/2006/main">
-            <a:pPr algn="l">
-              <a:defRPr sz="2400">
-                <a:solidFill>
-                  <a:srgbClr val="3F4B57"/>
-                </a:solidFill>
-                <a:latin typeface="Nunito"/>
-                <a:ea typeface="Nunito"/>
-                <a:cs typeface="Nunito"/>
-              </a:defRPr>
-            </a:pPr>
-            <a:r>
-              <a:rPr sz="2400">
-                <a:solidFill>
-                  <a:srgbClr val="3F4B57"/>
-                </a:solidFill>
-                <a:latin typeface="Nunito"/>
-                <a:ea typeface="Nunito"/>
-                <a:cs typeface="Nunito"/>
-              </a:rPr>
-              <a:t>What does t_s(11) select?</a:t>
-            </a:r>
-          </a:p>
-        </p:txBody>
-      </p:sp>
-      <p:sp>
-        <p:nvSpPr>
-          <p:cNvPr id="8" name="">
-            <a:extLst xmlns:a="http://schemas.openxmlformats.org/drawingml/2006/main">
-              <a:ext uri="{FF2B5EF4-FFF2-40B4-BE49-F238E27FC236}">
-                <a16:creationId xmlns:a16="http://schemas.microsoft.com/office/drawing/2014/main" id="{7FE9C625-9385-43AB-AB4C-A6B2BEA52F8D}"/>
-              </a:ext>
-            </a:extLst>
-          </p:cNvPr>
-          <p:cNvSpPr>
-            <a:spLocks xmlns:a="http://schemas.openxmlformats.org/drawingml/2006/main" noGrp="1"/>
-          </p:cNvSpPr>
-          <p:nvPr/>
-        </p:nvSpPr>
-        <p:spPr>
-          <a:xfrm xmlns:a="http://schemas.openxmlformats.org/drawingml/2006/main">
-            <a:off x="2095500" y="4733925"/>
-            <a:ext cx="13049250" cy="0"/>
-          </a:xfrm>
-          <a:prstGeom xmlns:a="http://schemas.openxmlformats.org/drawingml/2006/main" prst="line">
-            <a:avLst/>
-          </a:prstGeom>
-          <a:noFill xmlns:a="http://schemas.openxmlformats.org/drawingml/2006/main"/>
-          <a:ln xmlns:a="http://schemas.openxmlformats.org/drawingml/2006/main" w="19050">
-            <a:solidFill>
-              <a:srgbClr val="DDE5EC"/>
-            </a:solidFill>
-            <a:prstDash val="solid"/>
-          </a:ln>
-        </p:spPr>
-      </p:sp>
-      <p:sp>
-        <p:nvSpPr>
-          <p:cNvPr id="9" name="">
-            <a:extLst xmlns:a="http://schemas.openxmlformats.org/drawingml/2006/main">
-              <a:ext uri="{FF2B5EF4-FFF2-40B4-BE49-F238E27FC236}">
-                <a16:creationId xmlns:a16="http://schemas.microsoft.com/office/drawing/2014/main" id="{8DE4529F-C6B0-4C64-B7F1-B1BDE516821E}"/>
-              </a:ext>
-            </a:extLst>
-          </p:cNvPr>
-          <p:cNvSpPr>
-            <a:spLocks xmlns:a="http://schemas.openxmlformats.org/drawingml/2006/main" noGrp="1"/>
-          </p:cNvSpPr>
-          <p:nvPr/>
-        </p:nvSpPr>
-        <p:spPr>
-          <a:xfrm xmlns:a="http://schemas.openxmlformats.org/drawingml/2006/main">
-            <a:off x="1190625" y="5143500"/>
-            <a:ext cx="552450" cy="552450"/>
-          </a:xfrm>
-          <a:prstGeom xmlns:a="http://schemas.openxmlformats.org/drawingml/2006/main" prst="roundRect">
-            <a:avLst>
-              <a:gd name="adj" fmla="val 50000"/>
-            </a:avLst>
-          </a:prstGeom>
-          <a:solidFill xmlns:a="http://schemas.openxmlformats.org/drawingml/2006/main">
-            <a:srgbClr val="EEF5FD"/>
-          </a:solidFill>
-          <a:ln xmlns:a="http://schemas.openxmlformats.org/drawingml/2006/main" w="0">
-            <a:noFill/>
-            <a:prstDash val="solid"/>
-          </a:ln>
-        </p:spPr>
-        <p:txBody>
-          <a:bodyPr xmlns:a="http://schemas.openxmlformats.org/drawingml/2006/main" lIns="76200" tIns="0" rIns="76200" bIns="0" anchor="ctr">
-            <a:noAutofit/>
-          </a:bodyPr>
-          <a:lstStyle xmlns:a="http://schemas.openxmlformats.org/drawingml/2006/main"/>
-          <a:p xmlns:a="http://schemas.openxmlformats.org/drawingml/2006/main">
             <a:pPr algn="ctr">
-              <a:defRPr sz="1650" b="1">
-                <a:solidFill>
-                  <a:srgbClr val="2F6DB2"/>
-                </a:solidFill>
-                <a:latin typeface="Nunito"/>
-                <a:ea typeface="Nunito"/>
-                <a:cs typeface="Nunito"/>
-              </a:defRPr>
-            </a:pPr>
-            <a:r>
-              <a:rPr sz="1650" b="1">
-                <a:solidFill>
-                  <a:srgbClr val="2F6DB2"/>
-                </a:solidFill>
-                <a:latin typeface="Nunito"/>
-                <a:ea typeface="Nunito"/>
-                <a:cs typeface="Nunito"/>
-              </a:rPr>
-              <a:t>3</a:t>
-            </a:r>
-          </a:p>
-        </p:txBody>
-      </p:sp>
-      <p:sp>
-        <p:nvSpPr>
-          <p:cNvPr id="10" name="">
-            <a:extLst xmlns:a="http://schemas.openxmlformats.org/drawingml/2006/main">
-              <a:ext uri="{FF2B5EF4-FFF2-40B4-BE49-F238E27FC236}">
-                <a16:creationId xmlns:a16="http://schemas.microsoft.com/office/drawing/2014/main" id="{DE99D71E-0B13-4DB5-AA29-97DB3601624D}"/>
-              </a:ext>
-            </a:extLst>
-          </p:cNvPr>
-          <p:cNvSpPr>
-            <a:spLocks xmlns:a="http://schemas.openxmlformats.org/drawingml/2006/main" noGrp="1"/>
-          </p:cNvSpPr>
-          <p:nvPr/>
-        </p:nvSpPr>
-        <p:spPr>
-          <a:xfrm xmlns:a="http://schemas.openxmlformats.org/drawingml/2006/main">
-            <a:off x="2095500" y="5200650"/>
-            <a:ext cx="13049250" cy="609600"/>
+              <a:defRPr sz="2550" b="1">
+                <a:solidFill>
+                  <a:srgbClr val="0B2B4C"/>
+                </a:solidFill>
+                <a:latin typeface="Nunito"/>
+                <a:ea typeface="Nunito"/>
+                <a:cs typeface="Nunito"/>
+              </a:defRPr>
+            </a:pPr>
+            <a:r>
+              <a:rPr sz="2550" b="1">
+                <a:solidFill>
+                  <a:srgbClr val="0B2B4C"/>
+                </a:solidFill>
+                <a:latin typeface="Nunito"/>
+                <a:ea typeface="Nunito"/>
+                <a:cs typeface="Nunito"/>
+              </a:rPr>
+              <a:t>0.00 m</a:t>
+            </a:r>
+          </a:p>
+        </p:txBody>
+      </p:sp>
+      <p:sp>
+        <p:nvSpPr>
+          <p:cNvPr id="7" name="">
+            <a:extLst xmlns:a="http://schemas.openxmlformats.org/drawingml/2006/main">
+              <a:ext uri="{FF2B5EF4-FFF2-40B4-BE49-F238E27FC236}">
+                <a16:creationId xmlns:a16="http://schemas.microsoft.com/office/drawing/2014/main" id="{69A55DE0-34BE-405A-8863-804BDD286994}"/>
+              </a:ext>
+            </a:extLst>
+          </p:cNvPr>
+          <p:cNvSpPr>
+            <a:spLocks xmlns:a="http://schemas.openxmlformats.org/drawingml/2006/main" noGrp="1"/>
+          </p:cNvSpPr>
+          <p:nvPr/>
+        </p:nvSpPr>
+        <p:spPr>
+          <a:xfrm xmlns:a="http://schemas.openxmlformats.org/drawingml/2006/main">
+            <a:off x="1362075" y="5667375"/>
+            <a:ext cx="2190750" cy="514350"/>
           </a:xfrm>
           <a:prstGeom xmlns:a="http://schemas.openxmlformats.org/drawingml/2006/main" prst="rect">
             <a:avLst/>
@@ -7220,8 +7167,8 @@
           </a:bodyPr>
           <a:lstStyle xmlns:a="http://schemas.openxmlformats.org/drawingml/2006/main"/>
           <a:p xmlns:a="http://schemas.openxmlformats.org/drawingml/2006/main">
-            <a:pPr algn="l">
-              <a:defRPr sz="2400">
+            <a:pPr algn="ctr">
+              <a:defRPr sz="1800">
                 <a:solidFill>
                   <a:srgbClr val="3F4B57"/>
                 </a:solidFill>
@@ -7231,7 +7178,7 @@
               </a:defRPr>
             </a:pPr>
             <a:r>
-              <a:rPr sz="2400">
+              <a:rPr sz="1800">
                 <a:solidFill>
                   <a:srgbClr val="3F4B57"/>
                 </a:solidFill>
@@ -7239,37 +7186,41 @@
                 <a:ea typeface="Nunito"/>
                 <a:cs typeface="Nunito"/>
               </a:rPr>
-              <a:t>Which operator lets MATLAB square every value in t_s?</a:t>
-            </a:r>
-          </a:p>
-        </p:txBody>
-      </p:sp>
-      <p:sp>
-        <p:nvSpPr>
-          <p:cNvPr id="11" name="">
-            <a:extLst xmlns:a="http://schemas.openxmlformats.org/drawingml/2006/main">
-              <a:ext uri="{FF2B5EF4-FFF2-40B4-BE49-F238E27FC236}">
-                <a16:creationId xmlns:a16="http://schemas.microsoft.com/office/drawing/2014/main" id="{69BF9CC5-CF53-45B5-9218-9CB121DAEE91}"/>
-              </a:ext>
-            </a:extLst>
-          </p:cNvPr>
-          <p:cNvSpPr>
-            <a:spLocks xmlns:a="http://schemas.openxmlformats.org/drawingml/2006/main" noGrp="1"/>
-          </p:cNvSpPr>
-          <p:nvPr/>
-        </p:nvSpPr>
-        <p:spPr>
-          <a:xfrm xmlns:a="http://schemas.openxmlformats.org/drawingml/2006/main">
-            <a:off x="2095500" y="6019800"/>
-            <a:ext cx="13049250" cy="0"/>
-          </a:xfrm>
-          <a:prstGeom xmlns:a="http://schemas.openxmlformats.org/drawingml/2006/main" prst="line">
-            <a:avLst/>
-          </a:prstGeom>
-          <a:noFill xmlns:a="http://schemas.openxmlformats.org/drawingml/2006/main"/>
+              <a:t>launch</a:t>
+            </a:r>
+          </a:p>
+        </p:txBody>
+      </p:sp>
+      <p:sp>
+        <p:nvSpPr>
+          <p:cNvPr id="8" name="">
+            <a:extLst xmlns:a="http://schemas.openxmlformats.org/drawingml/2006/main">
+              <a:ext uri="{FF2B5EF4-FFF2-40B4-BE49-F238E27FC236}">
+                <a16:creationId xmlns:a16="http://schemas.microsoft.com/office/drawing/2014/main" id="{B7F73AA9-79B1-4C50-A2C6-5998BAEB2F0D}"/>
+              </a:ext>
+            </a:extLst>
+          </p:cNvPr>
+          <p:cNvSpPr>
+            <a:spLocks xmlns:a="http://schemas.openxmlformats.org/drawingml/2006/main" noGrp="1"/>
+          </p:cNvSpPr>
+          <p:nvPr/>
+        </p:nvSpPr>
+        <p:spPr>
+          <a:xfrm xmlns:a="http://schemas.openxmlformats.org/drawingml/2006/main">
+            <a:off x="4191000" y="3714750"/>
+            <a:ext cx="2714625" cy="2762250"/>
+          </a:xfrm>
+          <a:prstGeom xmlns:a="http://schemas.openxmlformats.org/drawingml/2006/main" prst="roundRect">
+            <a:avLst>
+              <a:gd name="adj" fmla="val 4211"/>
+            </a:avLst>
+          </a:prstGeom>
+          <a:solidFill xmlns:a="http://schemas.openxmlformats.org/drawingml/2006/main">
+            <a:srgbClr val="F7F9FB"/>
+          </a:solidFill>
           <a:ln xmlns:a="http://schemas.openxmlformats.org/drawingml/2006/main" w="19050">
             <a:solidFill>
-              <a:srgbClr val="DDE5EC"/>
+              <a:srgbClr val="0B2B4C"/>
             </a:solidFill>
             <a:prstDash val="solid"/>
           </a:ln>
@@ -7277,84 +7228,22 @@
       </p:sp>
       <p:sp>
         <p:nvSpPr>
-          <p:cNvPr id="12" name="">
-            <a:extLst xmlns:a="http://schemas.openxmlformats.org/drawingml/2006/main">
-              <a:ext uri="{FF2B5EF4-FFF2-40B4-BE49-F238E27FC236}">
-                <a16:creationId xmlns:a16="http://schemas.microsoft.com/office/drawing/2014/main" id="{AE4E9D56-50E5-4277-B8F0-1FC68D5D6C21}"/>
-              </a:ext>
-            </a:extLst>
-          </p:cNvPr>
-          <p:cNvSpPr>
-            <a:spLocks xmlns:a="http://schemas.openxmlformats.org/drawingml/2006/main" noGrp="1"/>
-          </p:cNvSpPr>
-          <p:nvPr/>
-        </p:nvSpPr>
-        <p:spPr>
-          <a:xfrm xmlns:a="http://schemas.openxmlformats.org/drawingml/2006/main">
-            <a:off x="1190625" y="6429375"/>
-            <a:ext cx="552450" cy="552450"/>
-          </a:xfrm>
-          <a:prstGeom xmlns:a="http://schemas.openxmlformats.org/drawingml/2006/main" prst="roundRect">
-            <a:avLst>
-              <a:gd name="adj" fmla="val 50000"/>
-            </a:avLst>
-          </a:prstGeom>
-          <a:solidFill xmlns:a="http://schemas.openxmlformats.org/drawingml/2006/main">
-            <a:srgbClr val="EEF5FD"/>
-          </a:solidFill>
-          <a:ln xmlns:a="http://schemas.openxmlformats.org/drawingml/2006/main" w="0">
-            <a:noFill/>
-            <a:prstDash val="solid"/>
-          </a:ln>
-        </p:spPr>
-        <p:txBody>
-          <a:bodyPr xmlns:a="http://schemas.openxmlformats.org/drawingml/2006/main" lIns="76200" tIns="0" rIns="76200" bIns="0" anchor="ctr">
-            <a:noAutofit/>
-          </a:bodyPr>
-          <a:lstStyle xmlns:a="http://schemas.openxmlformats.org/drawingml/2006/main"/>
-          <a:p xmlns:a="http://schemas.openxmlformats.org/drawingml/2006/main">
-            <a:pPr algn="ctr">
-              <a:defRPr sz="1650" b="1">
-                <a:solidFill>
-                  <a:srgbClr val="2F6DB2"/>
-                </a:solidFill>
-                <a:latin typeface="Nunito"/>
-                <a:ea typeface="Nunito"/>
-                <a:cs typeface="Nunito"/>
-              </a:defRPr>
-            </a:pPr>
-            <a:r>
-              <a:rPr sz="1650" b="1">
-                <a:solidFill>
-                  <a:srgbClr val="2F6DB2"/>
-                </a:solidFill>
-                <a:latin typeface="Nunito"/>
-                <a:ea typeface="Nunito"/>
-                <a:cs typeface="Nunito"/>
-              </a:rPr>
-              <a:t>4</a:t>
-            </a:r>
-          </a:p>
-        </p:txBody>
-      </p:sp>
-      <p:sp>
-        <p:nvSpPr>
-          <p:cNvPr id="13" name="">
-            <a:extLst xmlns:a="http://schemas.openxmlformats.org/drawingml/2006/main">
-              <a:ext uri="{FF2B5EF4-FFF2-40B4-BE49-F238E27FC236}">
-                <a16:creationId xmlns:a16="http://schemas.microsoft.com/office/drawing/2014/main" id="{5CA35E47-EA7F-4381-A329-4CE264858EF4}"/>
-              </a:ext>
-            </a:extLst>
-          </p:cNvPr>
-          <p:cNvSpPr>
-            <a:spLocks xmlns:a="http://schemas.openxmlformats.org/drawingml/2006/main" noGrp="1"/>
-          </p:cNvSpPr>
-          <p:nvPr/>
-        </p:nvSpPr>
-        <p:spPr>
-          <a:xfrm xmlns:a="http://schemas.openxmlformats.org/drawingml/2006/main">
-            <a:off x="2095500" y="6486525"/>
-            <a:ext cx="13049250" cy="609600"/>
+          <p:cNvPr id="9" name="">
+            <a:extLst xmlns:a="http://schemas.openxmlformats.org/drawingml/2006/main">
+              <a:ext uri="{FF2B5EF4-FFF2-40B4-BE49-F238E27FC236}">
+                <a16:creationId xmlns:a16="http://schemas.microsoft.com/office/drawing/2014/main" id="{ACB9FA56-D882-4FE8-BAB7-383CDA1CB5D7}"/>
+              </a:ext>
+            </a:extLst>
+          </p:cNvPr>
+          <p:cNvSpPr>
+            <a:spLocks xmlns:a="http://schemas.openxmlformats.org/drawingml/2006/main" noGrp="1"/>
+          </p:cNvSpPr>
+          <p:nvPr/>
+        </p:nvSpPr>
+        <p:spPr>
+          <a:xfrm xmlns:a="http://schemas.openxmlformats.org/drawingml/2006/main">
+            <a:off x="4457700" y="4114800"/>
+            <a:ext cx="2190750" cy="419100"/>
           </a:xfrm>
           <a:prstGeom xmlns:a="http://schemas.openxmlformats.org/drawingml/2006/main" prst="rect">
             <a:avLst/>
@@ -7371,8 +7260,124 @@
           </a:bodyPr>
           <a:lstStyle xmlns:a="http://schemas.openxmlformats.org/drawingml/2006/main"/>
           <a:p xmlns:a="http://schemas.openxmlformats.org/drawingml/2006/main">
-            <a:pPr algn="l">
-              <a:defRPr sz="2400">
+            <a:pPr algn="ctr">
+              <a:defRPr sz="2250" b="1">
+                <a:solidFill>
+                  <a:srgbClr val="0B2B4C"/>
+                </a:solidFill>
+                <a:latin typeface="Nunito"/>
+                <a:ea typeface="Nunito"/>
+                <a:cs typeface="Nunito"/>
+              </a:defRPr>
+            </a:pPr>
+            <a:r>
+              <a:rPr sz="2250" b="1">
+                <a:solidFill>
+                  <a:srgbClr val="0B2B4C"/>
+                </a:solidFill>
+                <a:latin typeface="Nunito"/>
+                <a:ea typeface="Nunito"/>
+                <a:cs typeface="Nunito"/>
+              </a:rPr>
+              <a:t>1.0 s</a:t>
+            </a:r>
+          </a:p>
+        </p:txBody>
+      </p:sp>
+      <p:sp>
+        <p:nvSpPr>
+          <p:cNvPr id="10" name="">
+            <a:extLst xmlns:a="http://schemas.openxmlformats.org/drawingml/2006/main">
+              <a:ext uri="{FF2B5EF4-FFF2-40B4-BE49-F238E27FC236}">
+                <a16:creationId xmlns:a16="http://schemas.microsoft.com/office/drawing/2014/main" id="{5BF2BB24-FEFB-4AC6-873F-DA85BC0D2300}"/>
+              </a:ext>
+            </a:extLst>
+          </p:cNvPr>
+          <p:cNvSpPr>
+            <a:spLocks xmlns:a="http://schemas.openxmlformats.org/drawingml/2006/main" noGrp="1"/>
+          </p:cNvSpPr>
+          <p:nvPr/>
+        </p:nvSpPr>
+        <p:spPr>
+          <a:xfrm xmlns:a="http://schemas.openxmlformats.org/drawingml/2006/main">
+            <a:off x="4457700" y="4905375"/>
+            <a:ext cx="2190750" cy="514350"/>
+          </a:xfrm>
+          <a:prstGeom xmlns:a="http://schemas.openxmlformats.org/drawingml/2006/main" prst="rect">
+            <a:avLst/>
+          </a:prstGeom>
+          <a:noFill xmlns:a="http://schemas.openxmlformats.org/drawingml/2006/main"/>
+          <a:ln xmlns:a="http://schemas.openxmlformats.org/drawingml/2006/main" w="0">
+            <a:noFill/>
+            <a:prstDash val="solid"/>
+          </a:ln>
+        </p:spPr>
+        <p:txBody>
+          <a:bodyPr xmlns:a="http://schemas.openxmlformats.org/drawingml/2006/main" wrap="square" lIns="0" tIns="0" rIns="0" bIns="0" anchor="t">
+            <a:noAutofit/>
+          </a:bodyPr>
+          <a:lstStyle xmlns:a="http://schemas.openxmlformats.org/drawingml/2006/main"/>
+          <a:p xmlns:a="http://schemas.openxmlformats.org/drawingml/2006/main">
+            <a:pPr algn="ctr">
+              <a:defRPr sz="2550" b="1">
+                <a:solidFill>
+                  <a:srgbClr val="0B2B4C"/>
+                </a:solidFill>
+                <a:latin typeface="Nunito"/>
+                <a:ea typeface="Nunito"/>
+                <a:cs typeface="Nunito"/>
+              </a:defRPr>
+            </a:pPr>
+            <a:r>
+              <a:rPr sz="2550" b="1">
+                <a:solidFill>
+                  <a:srgbClr val="0B2B4C"/>
+                </a:solidFill>
+                <a:latin typeface="Nunito"/>
+                <a:ea typeface="Nunito"/>
+                <a:cs typeface="Nunito"/>
+              </a:rPr>
+              <a:t>15.10 m</a:t>
+            </a:r>
+          </a:p>
+        </p:txBody>
+      </p:sp>
+      <p:sp>
+        <p:nvSpPr>
+          <p:cNvPr id="11" name="">
+            <a:extLst xmlns:a="http://schemas.openxmlformats.org/drawingml/2006/main">
+              <a:ext uri="{FF2B5EF4-FFF2-40B4-BE49-F238E27FC236}">
+                <a16:creationId xmlns:a16="http://schemas.microsoft.com/office/drawing/2014/main" id="{464ABAE2-A006-49D7-AC95-31C1E07FBF65}"/>
+              </a:ext>
+            </a:extLst>
+          </p:cNvPr>
+          <p:cNvSpPr>
+            <a:spLocks xmlns:a="http://schemas.openxmlformats.org/drawingml/2006/main" noGrp="1"/>
+          </p:cNvSpPr>
+          <p:nvPr/>
+        </p:nvSpPr>
+        <p:spPr>
+          <a:xfrm xmlns:a="http://schemas.openxmlformats.org/drawingml/2006/main">
+            <a:off x="4457700" y="5667375"/>
+            <a:ext cx="2190750" cy="514350"/>
+          </a:xfrm>
+          <a:prstGeom xmlns:a="http://schemas.openxmlformats.org/drawingml/2006/main" prst="rect">
+            <a:avLst/>
+          </a:prstGeom>
+          <a:noFill xmlns:a="http://schemas.openxmlformats.org/drawingml/2006/main"/>
+          <a:ln xmlns:a="http://schemas.openxmlformats.org/drawingml/2006/main" w="0">
+            <a:noFill/>
+            <a:prstDash val="solid"/>
+          </a:ln>
+        </p:spPr>
+        <p:txBody>
+          <a:bodyPr xmlns:a="http://schemas.openxmlformats.org/drawingml/2006/main" wrap="square" lIns="0" tIns="0" rIns="0" bIns="0" anchor="t">
+            <a:noAutofit/>
+          </a:bodyPr>
+          <a:lstStyle xmlns:a="http://schemas.openxmlformats.org/drawingml/2006/main"/>
+          <a:p xmlns:a="http://schemas.openxmlformats.org/drawingml/2006/main">
+            <a:pPr algn="ctr">
+              <a:defRPr sz="1800">
                 <a:solidFill>
                   <a:srgbClr val="3F4B57"/>
                 </a:solidFill>
@@ -7382,7 +7387,7 @@
               </a:defRPr>
             </a:pPr>
             <a:r>
-              <a:rPr sz="2400">
+              <a:rPr sz="1800">
                 <a:solidFill>
                   <a:srgbClr val="3F4B57"/>
                 </a:solidFill>
@@ -7390,33 +7395,451 @@
                 <a:ea typeface="Nunito"/>
                 <a:cs typeface="Nunito"/>
               </a:rPr>
-              <a:t>State one prediction for the graph and one value you can validate</a:t>
-            </a:r>
-          </a:p>
-        </p:txBody>
-      </p:sp>
-      <p:sp>
-        <p:nvSpPr>
-          <p:cNvPr id="14" name="">
-            <a:extLst xmlns:a="http://schemas.openxmlformats.org/drawingml/2006/main">
-              <a:ext uri="{FF2B5EF4-FFF2-40B4-BE49-F238E27FC236}">
-                <a16:creationId xmlns:a16="http://schemas.microsoft.com/office/drawing/2014/main" id="{2C0E284C-7913-45D7-81B4-602D4C851C2F}"/>
-              </a:ext>
-            </a:extLst>
-          </p:cNvPr>
-          <p:cNvSpPr>
-            <a:spLocks xmlns:a="http://schemas.openxmlformats.org/drawingml/2006/main" noGrp="1"/>
-          </p:cNvSpPr>
-          <p:nvPr/>
-        </p:nvSpPr>
-        <p:spPr>
-          <a:xfrm xmlns:a="http://schemas.openxmlformats.org/drawingml/2006/main">
-            <a:off x="1095375" y="8096250"/>
-            <a:ext cx="15001875" cy="838200"/>
+              <a:t>rising</a:t>
+            </a:r>
+          </a:p>
+        </p:txBody>
+      </p:sp>
+      <p:sp>
+        <p:nvSpPr>
+          <p:cNvPr id="12" name="">
+            <a:extLst xmlns:a="http://schemas.openxmlformats.org/drawingml/2006/main">
+              <a:ext uri="{FF2B5EF4-FFF2-40B4-BE49-F238E27FC236}">
+                <a16:creationId xmlns:a16="http://schemas.microsoft.com/office/drawing/2014/main" id="{A9949486-385B-4BFE-A370-9F4F8965521C}"/>
+              </a:ext>
+            </a:extLst>
+          </p:cNvPr>
+          <p:cNvSpPr>
+            <a:spLocks xmlns:a="http://schemas.openxmlformats.org/drawingml/2006/main" noGrp="1"/>
+          </p:cNvSpPr>
+          <p:nvPr/>
+        </p:nvSpPr>
+        <p:spPr>
+          <a:xfrm xmlns:a="http://schemas.openxmlformats.org/drawingml/2006/main">
+            <a:off x="7286625" y="3714750"/>
+            <a:ext cx="2714625" cy="2762250"/>
           </a:xfrm>
           <a:prstGeom xmlns:a="http://schemas.openxmlformats.org/drawingml/2006/main" prst="roundRect">
             <a:avLst>
-              <a:gd name="adj" fmla="val 13636"/>
+              <a:gd name="adj" fmla="val 4211"/>
+            </a:avLst>
+          </a:prstGeom>
+          <a:solidFill xmlns:a="http://schemas.openxmlformats.org/drawingml/2006/main">
+            <a:srgbClr val="FFF7E6"/>
+          </a:solidFill>
+          <a:ln xmlns:a="http://schemas.openxmlformats.org/drawingml/2006/main" w="19050">
+            <a:solidFill>
+              <a:srgbClr val="C98A16"/>
+            </a:solidFill>
+            <a:prstDash val="solid"/>
+          </a:ln>
+        </p:spPr>
+      </p:sp>
+      <p:sp>
+        <p:nvSpPr>
+          <p:cNvPr id="13" name="">
+            <a:extLst xmlns:a="http://schemas.openxmlformats.org/drawingml/2006/main">
+              <a:ext uri="{FF2B5EF4-FFF2-40B4-BE49-F238E27FC236}">
+                <a16:creationId xmlns:a16="http://schemas.microsoft.com/office/drawing/2014/main" id="{21C12C31-13BE-44CD-BF6F-8F38E6F87A9B}"/>
+              </a:ext>
+            </a:extLst>
+          </p:cNvPr>
+          <p:cNvSpPr>
+            <a:spLocks xmlns:a="http://schemas.openxmlformats.org/drawingml/2006/main" noGrp="1"/>
+          </p:cNvSpPr>
+          <p:nvPr/>
+        </p:nvSpPr>
+        <p:spPr>
+          <a:xfrm xmlns:a="http://schemas.openxmlformats.org/drawingml/2006/main">
+            <a:off x="7553325" y="4114800"/>
+            <a:ext cx="2190750" cy="419100"/>
+          </a:xfrm>
+          <a:prstGeom xmlns:a="http://schemas.openxmlformats.org/drawingml/2006/main" prst="rect">
+            <a:avLst/>
+          </a:prstGeom>
+          <a:noFill xmlns:a="http://schemas.openxmlformats.org/drawingml/2006/main"/>
+          <a:ln xmlns:a="http://schemas.openxmlformats.org/drawingml/2006/main" w="0">
+            <a:noFill/>
+            <a:prstDash val="solid"/>
+          </a:ln>
+        </p:spPr>
+        <p:txBody>
+          <a:bodyPr xmlns:a="http://schemas.openxmlformats.org/drawingml/2006/main" wrap="square" lIns="0" tIns="0" rIns="0" bIns="0" anchor="t">
+            <a:noAutofit/>
+          </a:bodyPr>
+          <a:lstStyle xmlns:a="http://schemas.openxmlformats.org/drawingml/2006/main"/>
+          <a:p xmlns:a="http://schemas.openxmlformats.org/drawingml/2006/main">
+            <a:pPr algn="ctr">
+              <a:defRPr sz="2250" b="1">
+                <a:solidFill>
+                  <a:srgbClr val="C98A16"/>
+                </a:solidFill>
+                <a:latin typeface="Nunito"/>
+                <a:ea typeface="Nunito"/>
+                <a:cs typeface="Nunito"/>
+              </a:defRPr>
+            </a:pPr>
+            <a:r>
+              <a:rPr sz="2250" b="1">
+                <a:solidFill>
+                  <a:srgbClr val="C98A16"/>
+                </a:solidFill>
+                <a:latin typeface="Nunito"/>
+                <a:ea typeface="Nunito"/>
+                <a:cs typeface="Nunito"/>
+              </a:rPr>
+              <a:t>2.0 s</a:t>
+            </a:r>
+          </a:p>
+        </p:txBody>
+      </p:sp>
+      <p:sp>
+        <p:nvSpPr>
+          <p:cNvPr id="14" name="">
+            <a:extLst xmlns:a="http://schemas.openxmlformats.org/drawingml/2006/main">
+              <a:ext uri="{FF2B5EF4-FFF2-40B4-BE49-F238E27FC236}">
+                <a16:creationId xmlns:a16="http://schemas.microsoft.com/office/drawing/2014/main" id="{1DBACCC2-416F-4EAE-81FA-53F062BCEB34}"/>
+              </a:ext>
+            </a:extLst>
+          </p:cNvPr>
+          <p:cNvSpPr>
+            <a:spLocks xmlns:a="http://schemas.openxmlformats.org/drawingml/2006/main" noGrp="1"/>
+          </p:cNvSpPr>
+          <p:nvPr/>
+        </p:nvSpPr>
+        <p:spPr>
+          <a:xfrm xmlns:a="http://schemas.openxmlformats.org/drawingml/2006/main">
+            <a:off x="7553325" y="4905375"/>
+            <a:ext cx="2190750" cy="514350"/>
+          </a:xfrm>
+          <a:prstGeom xmlns:a="http://schemas.openxmlformats.org/drawingml/2006/main" prst="rect">
+            <a:avLst/>
+          </a:prstGeom>
+          <a:noFill xmlns:a="http://schemas.openxmlformats.org/drawingml/2006/main"/>
+          <a:ln xmlns:a="http://schemas.openxmlformats.org/drawingml/2006/main" w="0">
+            <a:noFill/>
+            <a:prstDash val="solid"/>
+          </a:ln>
+        </p:spPr>
+        <p:txBody>
+          <a:bodyPr xmlns:a="http://schemas.openxmlformats.org/drawingml/2006/main" wrap="square" lIns="0" tIns="0" rIns="0" bIns="0" anchor="t">
+            <a:noAutofit/>
+          </a:bodyPr>
+          <a:lstStyle xmlns:a="http://schemas.openxmlformats.org/drawingml/2006/main"/>
+          <a:p xmlns:a="http://schemas.openxmlformats.org/drawingml/2006/main">
+            <a:pPr algn="ctr">
+              <a:defRPr sz="2550" b="1">
+                <a:solidFill>
+                  <a:srgbClr val="0B2B4C"/>
+                </a:solidFill>
+                <a:latin typeface="Nunito"/>
+                <a:ea typeface="Nunito"/>
+                <a:cs typeface="Nunito"/>
+              </a:defRPr>
+            </a:pPr>
+            <a:r>
+              <a:rPr sz="2550" b="1">
+                <a:solidFill>
+                  <a:srgbClr val="0B2B4C"/>
+                </a:solidFill>
+                <a:latin typeface="Nunito"/>
+                <a:ea typeface="Nunito"/>
+                <a:cs typeface="Nunito"/>
+              </a:rPr>
+              <a:t>20.38 m</a:t>
+            </a:r>
+          </a:p>
+        </p:txBody>
+      </p:sp>
+      <p:sp>
+        <p:nvSpPr>
+          <p:cNvPr id="15" name="">
+            <a:extLst xmlns:a="http://schemas.openxmlformats.org/drawingml/2006/main">
+              <a:ext uri="{FF2B5EF4-FFF2-40B4-BE49-F238E27FC236}">
+                <a16:creationId xmlns:a16="http://schemas.microsoft.com/office/drawing/2014/main" id="{E0F90DD3-2941-4510-8E22-B611B4A63ACB}"/>
+              </a:ext>
+            </a:extLst>
+          </p:cNvPr>
+          <p:cNvSpPr>
+            <a:spLocks xmlns:a="http://schemas.openxmlformats.org/drawingml/2006/main" noGrp="1"/>
+          </p:cNvSpPr>
+          <p:nvPr/>
+        </p:nvSpPr>
+        <p:spPr>
+          <a:xfrm xmlns:a="http://schemas.openxmlformats.org/drawingml/2006/main">
+            <a:off x="7553325" y="5667375"/>
+            <a:ext cx="2190750" cy="514350"/>
+          </a:xfrm>
+          <a:prstGeom xmlns:a="http://schemas.openxmlformats.org/drawingml/2006/main" prst="rect">
+            <a:avLst/>
+          </a:prstGeom>
+          <a:noFill xmlns:a="http://schemas.openxmlformats.org/drawingml/2006/main"/>
+          <a:ln xmlns:a="http://schemas.openxmlformats.org/drawingml/2006/main" w="0">
+            <a:noFill/>
+            <a:prstDash val="solid"/>
+          </a:ln>
+        </p:spPr>
+        <p:txBody>
+          <a:bodyPr xmlns:a="http://schemas.openxmlformats.org/drawingml/2006/main" wrap="square" lIns="0" tIns="0" rIns="0" bIns="0" anchor="t">
+            <a:noAutofit/>
+          </a:bodyPr>
+          <a:lstStyle xmlns:a="http://schemas.openxmlformats.org/drawingml/2006/main"/>
+          <a:p xmlns:a="http://schemas.openxmlformats.org/drawingml/2006/main">
+            <a:pPr algn="ctr">
+              <a:defRPr sz="1800">
+                <a:solidFill>
+                  <a:srgbClr val="3F4B57"/>
+                </a:solidFill>
+                <a:latin typeface="Nunito"/>
+                <a:ea typeface="Nunito"/>
+                <a:cs typeface="Nunito"/>
+              </a:defRPr>
+            </a:pPr>
+            <a:r>
+              <a:rPr sz="1800">
+                <a:solidFill>
+                  <a:srgbClr val="3F4B57"/>
+                </a:solidFill>
+                <a:latin typeface="Nunito"/>
+                <a:ea typeface="Nunito"/>
+                <a:cs typeface="Nunito"/>
+              </a:rPr>
+              <a:t>near the peak</a:t>
+            </a:r>
+          </a:p>
+        </p:txBody>
+      </p:sp>
+      <p:sp>
+        <p:nvSpPr>
+          <p:cNvPr id="16" name="">
+            <a:extLst xmlns:a="http://schemas.openxmlformats.org/drawingml/2006/main">
+              <a:ext uri="{FF2B5EF4-FFF2-40B4-BE49-F238E27FC236}">
+                <a16:creationId xmlns:a16="http://schemas.microsoft.com/office/drawing/2014/main" id="{9035F920-DFED-446F-819B-468D7D372346}"/>
+              </a:ext>
+            </a:extLst>
+          </p:cNvPr>
+          <p:cNvSpPr>
+            <a:spLocks xmlns:a="http://schemas.openxmlformats.org/drawingml/2006/main" noGrp="1"/>
+          </p:cNvSpPr>
+          <p:nvPr/>
+        </p:nvSpPr>
+        <p:spPr>
+          <a:xfrm xmlns:a="http://schemas.openxmlformats.org/drawingml/2006/main">
+            <a:off x="10382250" y="3714750"/>
+            <a:ext cx="2714625" cy="2762250"/>
+          </a:xfrm>
+          <a:prstGeom xmlns:a="http://schemas.openxmlformats.org/drawingml/2006/main" prst="roundRect">
+            <a:avLst>
+              <a:gd name="adj" fmla="val 4211"/>
+            </a:avLst>
+          </a:prstGeom>
+          <a:solidFill xmlns:a="http://schemas.openxmlformats.org/drawingml/2006/main">
+            <a:srgbClr val="F7F9FB"/>
+          </a:solidFill>
+          <a:ln xmlns:a="http://schemas.openxmlformats.org/drawingml/2006/main" w="19050">
+            <a:solidFill>
+              <a:srgbClr val="0B2B4C"/>
+            </a:solidFill>
+            <a:prstDash val="solid"/>
+          </a:ln>
+        </p:spPr>
+      </p:sp>
+      <p:sp>
+        <p:nvSpPr>
+          <p:cNvPr id="17" name="">
+            <a:extLst xmlns:a="http://schemas.openxmlformats.org/drawingml/2006/main">
+              <a:ext uri="{FF2B5EF4-FFF2-40B4-BE49-F238E27FC236}">
+                <a16:creationId xmlns:a16="http://schemas.microsoft.com/office/drawing/2014/main" id="{E2BEC0D8-FED3-4629-9E8D-7137FC94978C}"/>
+              </a:ext>
+            </a:extLst>
+          </p:cNvPr>
+          <p:cNvSpPr>
+            <a:spLocks xmlns:a="http://schemas.openxmlformats.org/drawingml/2006/main" noGrp="1"/>
+          </p:cNvSpPr>
+          <p:nvPr/>
+        </p:nvSpPr>
+        <p:spPr>
+          <a:xfrm xmlns:a="http://schemas.openxmlformats.org/drawingml/2006/main">
+            <a:off x="10648950" y="4114800"/>
+            <a:ext cx="2190750" cy="419100"/>
+          </a:xfrm>
+          <a:prstGeom xmlns:a="http://schemas.openxmlformats.org/drawingml/2006/main" prst="rect">
+            <a:avLst/>
+          </a:prstGeom>
+          <a:noFill xmlns:a="http://schemas.openxmlformats.org/drawingml/2006/main"/>
+          <a:ln xmlns:a="http://schemas.openxmlformats.org/drawingml/2006/main" w="0">
+            <a:noFill/>
+            <a:prstDash val="solid"/>
+          </a:ln>
+        </p:spPr>
+        <p:txBody>
+          <a:bodyPr xmlns:a="http://schemas.openxmlformats.org/drawingml/2006/main" wrap="square" lIns="0" tIns="0" rIns="0" bIns="0" anchor="t">
+            <a:noAutofit/>
+          </a:bodyPr>
+          <a:lstStyle xmlns:a="http://schemas.openxmlformats.org/drawingml/2006/main"/>
+          <a:p xmlns:a="http://schemas.openxmlformats.org/drawingml/2006/main">
+            <a:pPr algn="ctr">
+              <a:defRPr sz="2250" b="1">
+                <a:solidFill>
+                  <a:srgbClr val="0B2B4C"/>
+                </a:solidFill>
+                <a:latin typeface="Nunito"/>
+                <a:ea typeface="Nunito"/>
+                <a:cs typeface="Nunito"/>
+              </a:defRPr>
+            </a:pPr>
+            <a:r>
+              <a:rPr sz="2250" b="1">
+                <a:solidFill>
+                  <a:srgbClr val="0B2B4C"/>
+                </a:solidFill>
+                <a:latin typeface="Nunito"/>
+                <a:ea typeface="Nunito"/>
+                <a:cs typeface="Nunito"/>
+              </a:rPr>
+              <a:t>3.0 s</a:t>
+            </a:r>
+          </a:p>
+        </p:txBody>
+      </p:sp>
+      <p:sp>
+        <p:nvSpPr>
+          <p:cNvPr id="18" name="">
+            <a:extLst xmlns:a="http://schemas.openxmlformats.org/drawingml/2006/main">
+              <a:ext uri="{FF2B5EF4-FFF2-40B4-BE49-F238E27FC236}">
+                <a16:creationId xmlns:a16="http://schemas.microsoft.com/office/drawing/2014/main" id="{2273303E-4536-43C6-A4BD-CE5A76E7C0D1}"/>
+              </a:ext>
+            </a:extLst>
+          </p:cNvPr>
+          <p:cNvSpPr>
+            <a:spLocks xmlns:a="http://schemas.openxmlformats.org/drawingml/2006/main" noGrp="1"/>
+          </p:cNvSpPr>
+          <p:nvPr/>
+        </p:nvSpPr>
+        <p:spPr>
+          <a:xfrm xmlns:a="http://schemas.openxmlformats.org/drawingml/2006/main">
+            <a:off x="10648950" y="4905375"/>
+            <a:ext cx="2190750" cy="514350"/>
+          </a:xfrm>
+          <a:prstGeom xmlns:a="http://schemas.openxmlformats.org/drawingml/2006/main" prst="rect">
+            <a:avLst/>
+          </a:prstGeom>
+          <a:noFill xmlns:a="http://schemas.openxmlformats.org/drawingml/2006/main"/>
+          <a:ln xmlns:a="http://schemas.openxmlformats.org/drawingml/2006/main" w="0">
+            <a:noFill/>
+            <a:prstDash val="solid"/>
+          </a:ln>
+        </p:spPr>
+        <p:txBody>
+          <a:bodyPr xmlns:a="http://schemas.openxmlformats.org/drawingml/2006/main" wrap="square" lIns="0" tIns="0" rIns="0" bIns="0" anchor="t">
+            <a:noAutofit/>
+          </a:bodyPr>
+          <a:lstStyle xmlns:a="http://schemas.openxmlformats.org/drawingml/2006/main"/>
+          <a:p xmlns:a="http://schemas.openxmlformats.org/drawingml/2006/main">
+            <a:pPr algn="ctr">
+              <a:defRPr sz="2550" b="1">
+                <a:solidFill>
+                  <a:srgbClr val="0B2B4C"/>
+                </a:solidFill>
+                <a:latin typeface="Nunito"/>
+                <a:ea typeface="Nunito"/>
+                <a:cs typeface="Nunito"/>
+              </a:defRPr>
+            </a:pPr>
+            <a:r>
+              <a:rPr sz="2550" b="1">
+                <a:solidFill>
+                  <a:srgbClr val="0B2B4C"/>
+                </a:solidFill>
+                <a:latin typeface="Nunito"/>
+                <a:ea typeface="Nunito"/>
+                <a:cs typeface="Nunito"/>
+              </a:rPr>
+              <a:t>15.86 m</a:t>
+            </a:r>
+          </a:p>
+        </p:txBody>
+      </p:sp>
+      <p:sp>
+        <p:nvSpPr>
+          <p:cNvPr id="19" name="">
+            <a:extLst xmlns:a="http://schemas.openxmlformats.org/drawingml/2006/main">
+              <a:ext uri="{FF2B5EF4-FFF2-40B4-BE49-F238E27FC236}">
+                <a16:creationId xmlns:a16="http://schemas.microsoft.com/office/drawing/2014/main" id="{87853E43-FCA3-40C9-A792-337478FF05B5}"/>
+              </a:ext>
+            </a:extLst>
+          </p:cNvPr>
+          <p:cNvSpPr>
+            <a:spLocks xmlns:a="http://schemas.openxmlformats.org/drawingml/2006/main" noGrp="1"/>
+          </p:cNvSpPr>
+          <p:nvPr/>
+        </p:nvSpPr>
+        <p:spPr>
+          <a:xfrm xmlns:a="http://schemas.openxmlformats.org/drawingml/2006/main">
+            <a:off x="10648950" y="5667375"/>
+            <a:ext cx="2190750" cy="514350"/>
+          </a:xfrm>
+          <a:prstGeom xmlns:a="http://schemas.openxmlformats.org/drawingml/2006/main" prst="rect">
+            <a:avLst/>
+          </a:prstGeom>
+          <a:noFill xmlns:a="http://schemas.openxmlformats.org/drawingml/2006/main"/>
+          <a:ln xmlns:a="http://schemas.openxmlformats.org/drawingml/2006/main" w="0">
+            <a:noFill/>
+            <a:prstDash val="solid"/>
+          </a:ln>
+        </p:spPr>
+        <p:txBody>
+          <a:bodyPr xmlns:a="http://schemas.openxmlformats.org/drawingml/2006/main" wrap="square" lIns="0" tIns="0" rIns="0" bIns="0" anchor="t">
+            <a:noAutofit/>
+          </a:bodyPr>
+          <a:lstStyle xmlns:a="http://schemas.openxmlformats.org/drawingml/2006/main"/>
+          <a:p xmlns:a="http://schemas.openxmlformats.org/drawingml/2006/main">
+            <a:pPr algn="ctr">
+              <a:defRPr sz="1800">
+                <a:solidFill>
+                  <a:srgbClr val="3F4B57"/>
+                </a:solidFill>
+                <a:latin typeface="Nunito"/>
+                <a:ea typeface="Nunito"/>
+                <a:cs typeface="Nunito"/>
+              </a:defRPr>
+            </a:pPr>
+            <a:r>
+              <a:rPr sz="1800">
+                <a:solidFill>
+                  <a:srgbClr val="3F4B57"/>
+                </a:solidFill>
+                <a:latin typeface="Nunito"/>
+                <a:ea typeface="Nunito"/>
+                <a:cs typeface="Nunito"/>
+              </a:rPr>
+              <a:t>falling</a:t>
+            </a:r>
+          </a:p>
+        </p:txBody>
+      </p:sp>
+      <p:sp>
+        <p:nvSpPr>
+          <p:cNvPr id="20" name="">
+            <a:extLst xmlns:a="http://schemas.openxmlformats.org/drawingml/2006/main">
+              <a:ext uri="{FF2B5EF4-FFF2-40B4-BE49-F238E27FC236}">
+                <a16:creationId xmlns:a16="http://schemas.microsoft.com/office/drawing/2014/main" id="{3FEAE06F-FB5D-4696-9A0A-2A1BA53902AA}"/>
+              </a:ext>
+            </a:extLst>
+          </p:cNvPr>
+          <p:cNvSpPr>
+            <a:spLocks xmlns:a="http://schemas.openxmlformats.org/drawingml/2006/main" noGrp="1"/>
+          </p:cNvSpPr>
+          <p:nvPr/>
+        </p:nvSpPr>
+        <p:spPr>
+          <a:xfrm xmlns:a="http://schemas.openxmlformats.org/drawingml/2006/main">
+            <a:off x="13477875" y="3714750"/>
+            <a:ext cx="2714625" cy="2762250"/>
+          </a:xfrm>
+          <a:prstGeom xmlns:a="http://schemas.openxmlformats.org/drawingml/2006/main" prst="roundRect">
+            <a:avLst>
+              <a:gd name="adj" fmla="val 4211"/>
             </a:avLst>
           </a:prstGeom>
           <a:solidFill xmlns:a="http://schemas.openxmlformats.org/drawingml/2006/main">
@@ -7424,7 +7847,7 @@
           </a:solidFill>
           <a:ln xmlns:a="http://schemas.openxmlformats.org/drawingml/2006/main" w="19050">
             <a:solidFill>
-              <a:srgbClr val="3E8E45"/>
+              <a:srgbClr val="2A9D9F"/>
             </a:solidFill>
             <a:prstDash val="solid"/>
           </a:ln>
@@ -7432,22 +7855,22 @@
       </p:sp>
       <p:sp>
         <p:nvSpPr>
-          <p:cNvPr id="15" name="">
-            <a:extLst xmlns:a="http://schemas.openxmlformats.org/drawingml/2006/main">
-              <a:ext uri="{FF2B5EF4-FFF2-40B4-BE49-F238E27FC236}">
-                <a16:creationId xmlns:a16="http://schemas.microsoft.com/office/drawing/2014/main" id="{E89C1856-4E81-4F5F-A06A-BB76FA7726A0}"/>
-              </a:ext>
-            </a:extLst>
-          </p:cNvPr>
-          <p:cNvSpPr>
-            <a:spLocks xmlns:a="http://schemas.openxmlformats.org/drawingml/2006/main" noGrp="1"/>
-          </p:cNvSpPr>
-          <p:nvPr/>
-        </p:nvSpPr>
-        <p:spPr>
-          <a:xfrm xmlns:a="http://schemas.openxmlformats.org/drawingml/2006/main">
-            <a:off x="1476375" y="8334375"/>
-            <a:ext cx="14239875" cy="381000"/>
+          <p:cNvPr id="21" name="">
+            <a:extLst xmlns:a="http://schemas.openxmlformats.org/drawingml/2006/main">
+              <a:ext uri="{FF2B5EF4-FFF2-40B4-BE49-F238E27FC236}">
+                <a16:creationId xmlns:a16="http://schemas.microsoft.com/office/drawing/2014/main" id="{A03039CE-C291-4579-B416-F71DB1EA40C3}"/>
+              </a:ext>
+            </a:extLst>
+          </p:cNvPr>
+          <p:cNvSpPr>
+            <a:spLocks xmlns:a="http://schemas.openxmlformats.org/drawingml/2006/main" noGrp="1"/>
+          </p:cNvSpPr>
+          <p:nvPr/>
+        </p:nvSpPr>
+        <p:spPr>
+          <a:xfrm xmlns:a="http://schemas.openxmlformats.org/drawingml/2006/main">
+            <a:off x="13744575" y="4114800"/>
+            <a:ext cx="2190750" cy="419100"/>
           </a:xfrm>
           <a:prstGeom xmlns:a="http://schemas.openxmlformats.org/drawingml/2006/main" prst="rect">
             <a:avLst/>
@@ -7467,7 +7890,7 @@
             <a:pPr algn="ctr">
               <a:defRPr sz="2250" b="1">
                 <a:solidFill>
-                  <a:srgbClr val="3E8E45"/>
+                  <a:srgbClr val="2A9D9F"/>
                 </a:solidFill>
                 <a:latin typeface="Nunito"/>
                 <a:ea typeface="Nunito"/>
@@ -7477,23 +7900,232 @@
             <a:r>
               <a:rPr sz="2250" b="1">
                 <a:solidFill>
-                  <a:srgbClr val="3E8E45"/>
-                </a:solidFill>
-                <a:latin typeface="Nunito"/>
-                <a:ea typeface="Nunito"/>
-                <a:cs typeface="Nunito"/>
-              </a:rPr>
-              <a:t>Next time: turn the same physical model into a traceable algorithm</a:t>
-            </a:r>
-          </a:p>
-        </p:txBody>
-      </p:sp>
-      <p:sp>
-        <p:nvSpPr>
-          <p:cNvPr id="16" name="slide-number-13">
-            <a:extLst xmlns:a="http://schemas.openxmlformats.org/drawingml/2006/main">
-              <a:ext uri="{FF2B5EF4-FFF2-40B4-BE49-F238E27FC236}">
-                <a16:creationId xmlns:a16="http://schemas.microsoft.com/office/drawing/2014/main" id="{323CCE39-4BB6-4E34-A9D4-077005522E45}"/>
+                  <a:srgbClr val="2A9D9F"/>
+                </a:solidFill>
+                <a:latin typeface="Nunito"/>
+                <a:ea typeface="Nunito"/>
+                <a:cs typeface="Nunito"/>
+              </a:rPr>
+              <a:t>4.0 s</a:t>
+            </a:r>
+          </a:p>
+        </p:txBody>
+      </p:sp>
+      <p:sp>
+        <p:nvSpPr>
+          <p:cNvPr id="22" name="">
+            <a:extLst xmlns:a="http://schemas.openxmlformats.org/drawingml/2006/main">
+              <a:ext uri="{FF2B5EF4-FFF2-40B4-BE49-F238E27FC236}">
+                <a16:creationId xmlns:a16="http://schemas.microsoft.com/office/drawing/2014/main" id="{71B028E7-B6F5-4E5E-BE73-5C6345F4E075}"/>
+              </a:ext>
+            </a:extLst>
+          </p:cNvPr>
+          <p:cNvSpPr>
+            <a:spLocks xmlns:a="http://schemas.openxmlformats.org/drawingml/2006/main" noGrp="1"/>
+          </p:cNvSpPr>
+          <p:nvPr/>
+        </p:nvSpPr>
+        <p:spPr>
+          <a:xfrm xmlns:a="http://schemas.openxmlformats.org/drawingml/2006/main">
+            <a:off x="13744575" y="4905375"/>
+            <a:ext cx="2190750" cy="514350"/>
+          </a:xfrm>
+          <a:prstGeom xmlns:a="http://schemas.openxmlformats.org/drawingml/2006/main" prst="rect">
+            <a:avLst/>
+          </a:prstGeom>
+          <a:noFill xmlns:a="http://schemas.openxmlformats.org/drawingml/2006/main"/>
+          <a:ln xmlns:a="http://schemas.openxmlformats.org/drawingml/2006/main" w="0">
+            <a:noFill/>
+            <a:prstDash val="solid"/>
+          </a:ln>
+        </p:spPr>
+        <p:txBody>
+          <a:bodyPr xmlns:a="http://schemas.openxmlformats.org/drawingml/2006/main" wrap="square" lIns="0" tIns="0" rIns="0" bIns="0" anchor="t">
+            <a:noAutofit/>
+          </a:bodyPr>
+          <a:lstStyle xmlns:a="http://schemas.openxmlformats.org/drawingml/2006/main"/>
+          <a:p xmlns:a="http://schemas.openxmlformats.org/drawingml/2006/main">
+            <a:pPr algn="ctr">
+              <a:defRPr sz="2550" b="1">
+                <a:solidFill>
+                  <a:srgbClr val="0B2B4C"/>
+                </a:solidFill>
+                <a:latin typeface="Nunito"/>
+                <a:ea typeface="Nunito"/>
+                <a:cs typeface="Nunito"/>
+              </a:defRPr>
+            </a:pPr>
+            <a:r>
+              <a:rPr sz="2550" b="1">
+                <a:solidFill>
+                  <a:srgbClr val="0B2B4C"/>
+                </a:solidFill>
+                <a:latin typeface="Nunito"/>
+                <a:ea typeface="Nunito"/>
+                <a:cs typeface="Nunito"/>
+              </a:rPr>
+              <a:t>1.52 m</a:t>
+            </a:r>
+          </a:p>
+        </p:txBody>
+      </p:sp>
+      <p:sp>
+        <p:nvSpPr>
+          <p:cNvPr id="23" name="">
+            <a:extLst xmlns:a="http://schemas.openxmlformats.org/drawingml/2006/main">
+              <a:ext uri="{FF2B5EF4-FFF2-40B4-BE49-F238E27FC236}">
+                <a16:creationId xmlns:a16="http://schemas.microsoft.com/office/drawing/2014/main" id="{4ACA3C8B-A2C6-425F-A0F5-4B80DF32FE59}"/>
+              </a:ext>
+            </a:extLst>
+          </p:cNvPr>
+          <p:cNvSpPr>
+            <a:spLocks xmlns:a="http://schemas.openxmlformats.org/drawingml/2006/main" noGrp="1"/>
+          </p:cNvSpPr>
+          <p:nvPr/>
+        </p:nvSpPr>
+        <p:spPr>
+          <a:xfrm xmlns:a="http://schemas.openxmlformats.org/drawingml/2006/main">
+            <a:off x="13744575" y="5667375"/>
+            <a:ext cx="2190750" cy="514350"/>
+          </a:xfrm>
+          <a:prstGeom xmlns:a="http://schemas.openxmlformats.org/drawingml/2006/main" prst="rect">
+            <a:avLst/>
+          </a:prstGeom>
+          <a:noFill xmlns:a="http://schemas.openxmlformats.org/drawingml/2006/main"/>
+          <a:ln xmlns:a="http://schemas.openxmlformats.org/drawingml/2006/main" w="0">
+            <a:noFill/>
+            <a:prstDash val="solid"/>
+          </a:ln>
+        </p:spPr>
+        <p:txBody>
+          <a:bodyPr xmlns:a="http://schemas.openxmlformats.org/drawingml/2006/main" wrap="square" lIns="0" tIns="0" rIns="0" bIns="0" anchor="t">
+            <a:noAutofit/>
+          </a:bodyPr>
+          <a:lstStyle xmlns:a="http://schemas.openxmlformats.org/drawingml/2006/main"/>
+          <a:p xmlns:a="http://schemas.openxmlformats.org/drawingml/2006/main">
+            <a:pPr algn="ctr">
+              <a:defRPr sz="1800">
+                <a:solidFill>
+                  <a:srgbClr val="3F4B57"/>
+                </a:solidFill>
+                <a:latin typeface="Nunito"/>
+                <a:ea typeface="Nunito"/>
+                <a:cs typeface="Nunito"/>
+              </a:defRPr>
+            </a:pPr>
+            <a:r>
+              <a:rPr sz="1800">
+                <a:solidFill>
+                  <a:srgbClr val="3F4B57"/>
+                </a:solidFill>
+                <a:latin typeface="Nunito"/>
+                <a:ea typeface="Nunito"/>
+                <a:cs typeface="Nunito"/>
+              </a:rPr>
+              <a:t>near return</a:t>
+            </a:r>
+          </a:p>
+        </p:txBody>
+      </p:sp>
+      <p:sp>
+        <p:nvSpPr>
+          <p:cNvPr id="24" name="">
+            <a:extLst xmlns:a="http://schemas.openxmlformats.org/drawingml/2006/main">
+              <a:ext uri="{FF2B5EF4-FFF2-40B4-BE49-F238E27FC236}">
+                <a16:creationId xmlns:a16="http://schemas.microsoft.com/office/drawing/2014/main" id="{B273B03D-44C5-4FC8-8ADF-4E9EFA3DF01E}"/>
+              </a:ext>
+            </a:extLst>
+          </p:cNvPr>
+          <p:cNvSpPr>
+            <a:spLocks xmlns:a="http://schemas.openxmlformats.org/drawingml/2006/main" noGrp="1"/>
+          </p:cNvSpPr>
+          <p:nvPr/>
+        </p:nvSpPr>
+        <p:spPr>
+          <a:xfrm xmlns:a="http://schemas.openxmlformats.org/drawingml/2006/main">
+            <a:off x="1714500" y="7239000"/>
+            <a:ext cx="13525500" cy="990600"/>
+          </a:xfrm>
+          <a:prstGeom xmlns:a="http://schemas.openxmlformats.org/drawingml/2006/main" prst="roundRect">
+            <a:avLst>
+              <a:gd name="adj" fmla="val 11538"/>
+            </a:avLst>
+          </a:prstGeom>
+          <a:solidFill xmlns:a="http://schemas.openxmlformats.org/drawingml/2006/main">
+            <a:srgbClr val="F0FAF7"/>
+          </a:solidFill>
+          <a:ln xmlns:a="http://schemas.openxmlformats.org/drawingml/2006/main" w="19050">
+            <a:solidFill>
+              <a:srgbClr val="2A9D9F"/>
+            </a:solidFill>
+            <a:prstDash val="solid"/>
+          </a:ln>
+        </p:spPr>
+      </p:sp>
+      <p:sp>
+        <p:nvSpPr>
+          <p:cNvPr id="25" name="">
+            <a:extLst xmlns:a="http://schemas.openxmlformats.org/drawingml/2006/main">
+              <a:ext uri="{FF2B5EF4-FFF2-40B4-BE49-F238E27FC236}">
+                <a16:creationId xmlns:a16="http://schemas.microsoft.com/office/drawing/2014/main" id="{FAF4B758-B1D9-4EC6-8552-B80A399127C1}"/>
+              </a:ext>
+            </a:extLst>
+          </p:cNvPr>
+          <p:cNvSpPr>
+            <a:spLocks xmlns:a="http://schemas.openxmlformats.org/drawingml/2006/main" noGrp="1"/>
+          </p:cNvSpPr>
+          <p:nvPr/>
+        </p:nvSpPr>
+        <p:spPr>
+          <a:xfrm xmlns:a="http://schemas.openxmlformats.org/drawingml/2006/main">
+            <a:off x="2143125" y="7448550"/>
+            <a:ext cx="12668250" cy="571500"/>
+          </a:xfrm>
+          <a:prstGeom xmlns:a="http://schemas.openxmlformats.org/drawingml/2006/main" prst="rect">
+            <a:avLst/>
+          </a:prstGeom>
+          <a:noFill xmlns:a="http://schemas.openxmlformats.org/drawingml/2006/main"/>
+          <a:ln xmlns:a="http://schemas.openxmlformats.org/drawingml/2006/main" w="0">
+            <a:noFill/>
+            <a:prstDash val="solid"/>
+          </a:ln>
+        </p:spPr>
+        <p:txBody>
+          <a:bodyPr xmlns:a="http://schemas.openxmlformats.org/drawingml/2006/main" wrap="square" lIns="0" tIns="0" rIns="0" bIns="0" anchor="t">
+            <a:noAutofit/>
+          </a:bodyPr>
+          <a:lstStyle xmlns:a="http://schemas.openxmlformats.org/drawingml/2006/main"/>
+          <a:p xmlns:a="http://schemas.openxmlformats.org/drawingml/2006/main">
+            <a:pPr algn="ctr">
+              <a:defRPr sz="2250" b="1">
+                <a:solidFill>
+                  <a:srgbClr val="2A9D9F"/>
+                </a:solidFill>
+                <a:latin typeface="Nunito"/>
+                <a:ea typeface="Nunito"/>
+                <a:cs typeface="Nunito"/>
+              </a:defRPr>
+            </a:pPr>
+            <a:r>
+              <a:rPr sz="2250" b="1">
+                <a:solidFill>
+                  <a:srgbClr val="2A9D9F"/>
+                </a:solidFill>
+                <a:latin typeface="Nunito"/>
+                <a:ea typeface="Nunito"/>
+                <a:cs typeface="Nunito"/>
+              </a:rPr>
+              <a:t>Check the pattern: height rises, reaches one maximum, then falls toward the launch height.</a:t>
+            </a:r>
+          </a:p>
+        </p:txBody>
+      </p:sp>
+      <p:sp>
+        <p:nvSpPr>
+          <p:cNvPr id="26" name="slide-number-13">
+            <a:extLst xmlns:a="http://schemas.openxmlformats.org/drawingml/2006/main">
+              <a:ext uri="{FF2B5EF4-FFF2-40B4-BE49-F238E27FC236}">
+                <a16:creationId xmlns:a16="http://schemas.microsoft.com/office/drawing/2014/main" id="{90BF041F-8F8B-492D-88BF-270B40E4E62E}"/>
               </a:ext>
             </a:extLst>
           </p:cNvPr>
@@ -7551,7 +8183,7 @@
     </p:spTree>
     <p:extLst>
       <p:ext uri="{BB962C8B-B14F-4D97-AF65-F5344CB8AC3E}">
-        <p14:creationId xmlns:p14="http://schemas.microsoft.com/office/powerpoint/2010/main" val="1120774894"/>
+        <p14:creationId xmlns:p14="http://schemas.microsoft.com/office/powerpoint/2010/main" val="864213634"/>
       </p:ext>
     </p:extLst>
   </p:cSld>
@@ -7582,7 +8214,7 @@
           <p:cNvPr id="52" name="title-T1">
             <a:extLst xmlns:a="http://schemas.openxmlformats.org/drawingml/2006/main">
               <a:ext uri="{FF2B5EF4-FFF2-40B4-BE49-F238E27FC236}">
-                <a16:creationId xmlns:a16="http://schemas.microsoft.com/office/drawing/2014/main" id="{D894CA74-0D3B-44EF-A7D5-0E95891008BD}"/>
+                <a16:creationId xmlns:a16="http://schemas.microsoft.com/office/drawing/2014/main" id="{A985FDEF-4599-4DCB-93E1-8576E6D3CCA8}"/>
               </a:ext>
             </a:extLst>
           </p:cNvPr>
@@ -7646,7 +8278,7 @@
           <p:cNvPr id="2" name="subtitle-T1">
             <a:extLst xmlns:a="http://schemas.openxmlformats.org/drawingml/2006/main">
               <a:ext uri="{FF2B5EF4-FFF2-40B4-BE49-F238E27FC236}">
-                <a16:creationId xmlns:a16="http://schemas.microsoft.com/office/drawing/2014/main" id="{D58A1F2E-ACEB-4DC9-83FB-75116912B999}"/>
+                <a16:creationId xmlns:a16="http://schemas.microsoft.com/office/drawing/2014/main" id="{737DFE4D-D8A9-442C-9E7E-598D27CDC689}"/>
               </a:ext>
             </a:extLst>
           </p:cNvPr>
@@ -7710,7 +8342,7 @@
           <p:nvPr/>
         </p:nvPicPr>
         <p:blipFill>
-          <a:blip xmlns:r="http://schemas.openxmlformats.org/officeDocument/2006/relationships" xmlns:a="http://schemas.openxmlformats.org/drawingml/2006/main" r:embed="Rbf960fa2b138483f"/>
+          <a:blip xmlns:r="http://schemas.openxmlformats.org/officeDocument/2006/relationships" xmlns:a="http://schemas.openxmlformats.org/drawingml/2006/main" r:embed="Re903f0f17afb4008"/>
           <a:stretch xmlns:a="http://schemas.openxmlformats.org/drawingml/2006/main"/>
         </p:blipFill>
         <p:spPr>
@@ -7728,7 +8360,7 @@
           <p:cNvPr id="4" name="">
             <a:extLst xmlns:a="http://schemas.openxmlformats.org/drawingml/2006/main">
               <a:ext uri="{FF2B5EF4-FFF2-40B4-BE49-F238E27FC236}">
-                <a16:creationId xmlns:a16="http://schemas.microsoft.com/office/drawing/2014/main" id="{B98EFB80-F4E7-43BC-BFCF-CBB298234363}"/>
+                <a16:creationId xmlns:a16="http://schemas.microsoft.com/office/drawing/2014/main" id="{BD783304-2435-4D73-854F-40E8130D0328}"/>
               </a:ext>
             </a:extLst>
           </p:cNvPr>
@@ -7759,7 +8391,7 @@
           <p:cNvPr id="5" name="">
             <a:extLst xmlns:a="http://schemas.openxmlformats.org/drawingml/2006/main">
               <a:ext uri="{FF2B5EF4-FFF2-40B4-BE49-F238E27FC236}">
-                <a16:creationId xmlns:a16="http://schemas.microsoft.com/office/drawing/2014/main" id="{83C94EFB-3083-4453-BDF7-D67677BEA2BB}"/>
+                <a16:creationId xmlns:a16="http://schemas.microsoft.com/office/drawing/2014/main" id="{705704EC-272E-4E50-88B6-77F51C4168DB}"/>
               </a:ext>
             </a:extLst>
           </p:cNvPr>
@@ -7790,7 +8422,7 @@
           <p:cNvPr id="6" name="">
             <a:extLst xmlns:a="http://schemas.openxmlformats.org/drawingml/2006/main">
               <a:ext uri="{FF2B5EF4-FFF2-40B4-BE49-F238E27FC236}">
-                <a16:creationId xmlns:a16="http://schemas.microsoft.com/office/drawing/2014/main" id="{73414D26-2F68-4ED0-AD67-A67E73817E82}"/>
+                <a16:creationId xmlns:a16="http://schemas.microsoft.com/office/drawing/2014/main" id="{B127B839-13FD-45B3-9937-9DBB9B83FE55}"/>
               </a:ext>
             </a:extLst>
           </p:cNvPr>
@@ -7823,7 +8455,7 @@
           <p:cNvPr id="7" name="">
             <a:extLst xmlns:a="http://schemas.openxmlformats.org/drawingml/2006/main">
               <a:ext uri="{FF2B5EF4-FFF2-40B4-BE49-F238E27FC236}">
-                <a16:creationId xmlns:a16="http://schemas.microsoft.com/office/drawing/2014/main" id="{8E633E65-AEA9-43CD-A18B-A963CEB1CB50}"/>
+                <a16:creationId xmlns:a16="http://schemas.microsoft.com/office/drawing/2014/main" id="{AB4E5E8E-AF74-42C4-98D1-2CD710059E94}"/>
               </a:ext>
             </a:extLst>
           </p:cNvPr>
@@ -7881,7 +8513,7 @@
           <p:cNvPr id="8" name="">
             <a:extLst xmlns:a="http://schemas.openxmlformats.org/drawingml/2006/main">
               <a:ext uri="{FF2B5EF4-FFF2-40B4-BE49-F238E27FC236}">
-                <a16:creationId xmlns:a16="http://schemas.microsoft.com/office/drawing/2014/main" id="{F51A86F9-7752-4189-A447-8F59DF96A612}"/>
+                <a16:creationId xmlns:a16="http://schemas.microsoft.com/office/drawing/2014/main" id="{92ABE523-7DF1-41C2-B5AD-C4E83B1C38B5}"/>
               </a:ext>
             </a:extLst>
           </p:cNvPr>
@@ -7912,7 +8544,7 @@
           <p:cNvPr id="9" name="">
             <a:extLst xmlns:a="http://schemas.openxmlformats.org/drawingml/2006/main">
               <a:ext uri="{FF2B5EF4-FFF2-40B4-BE49-F238E27FC236}">
-                <a16:creationId xmlns:a16="http://schemas.microsoft.com/office/drawing/2014/main" id="{59159604-63F0-4128-9002-A591FDDA7030}"/>
+                <a16:creationId xmlns:a16="http://schemas.microsoft.com/office/drawing/2014/main" id="{3803F668-CAE6-4BC4-A55E-0CE9D055B17C}"/>
               </a:ext>
             </a:extLst>
           </p:cNvPr>
@@ -7945,7 +8577,7 @@
           <p:cNvPr id="10" name="">
             <a:extLst xmlns:a="http://schemas.openxmlformats.org/drawingml/2006/main">
               <a:ext uri="{FF2B5EF4-FFF2-40B4-BE49-F238E27FC236}">
-                <a16:creationId xmlns:a16="http://schemas.microsoft.com/office/drawing/2014/main" id="{102527B4-7210-4450-A2DF-7ECDCE40394F}"/>
+                <a16:creationId xmlns:a16="http://schemas.microsoft.com/office/drawing/2014/main" id="{81F0CC5D-45ED-4AEA-BD86-E2F03F4C6160}"/>
               </a:ext>
             </a:extLst>
           </p:cNvPr>
@@ -8003,7 +8635,7 @@
           <p:cNvPr id="11" name="">
             <a:extLst xmlns:a="http://schemas.openxmlformats.org/drawingml/2006/main">
               <a:ext uri="{FF2B5EF4-FFF2-40B4-BE49-F238E27FC236}">
-                <a16:creationId xmlns:a16="http://schemas.microsoft.com/office/drawing/2014/main" id="{E358B029-09BB-4E89-8185-66E44B21D295}"/>
+                <a16:creationId xmlns:a16="http://schemas.microsoft.com/office/drawing/2014/main" id="{44F7DC00-0895-489C-B950-335976192CB6}"/>
               </a:ext>
             </a:extLst>
           </p:cNvPr>
@@ -8034,7 +8666,7 @@
           <p:cNvPr id="12" name="">
             <a:extLst xmlns:a="http://schemas.openxmlformats.org/drawingml/2006/main">
               <a:ext uri="{FF2B5EF4-FFF2-40B4-BE49-F238E27FC236}">
-                <a16:creationId xmlns:a16="http://schemas.microsoft.com/office/drawing/2014/main" id="{8441B8C2-81F5-4C73-A321-31A46767E28F}"/>
+                <a16:creationId xmlns:a16="http://schemas.microsoft.com/office/drawing/2014/main" id="{744F9CA7-93D0-4648-8088-5238C04A5051}"/>
               </a:ext>
             </a:extLst>
           </p:cNvPr>
@@ -8067,7 +8699,7 @@
           <p:cNvPr id="13" name="">
             <a:extLst xmlns:a="http://schemas.openxmlformats.org/drawingml/2006/main">
               <a:ext uri="{FF2B5EF4-FFF2-40B4-BE49-F238E27FC236}">
-                <a16:creationId xmlns:a16="http://schemas.microsoft.com/office/drawing/2014/main" id="{1D80EC48-4926-4A28-A538-A7FAF5C35F05}"/>
+                <a16:creationId xmlns:a16="http://schemas.microsoft.com/office/drawing/2014/main" id="{D4BBD7A6-9506-4F35-A36C-B75CC4A62210}"/>
               </a:ext>
             </a:extLst>
           </p:cNvPr>
@@ -8125,7 +8757,7 @@
           <p:cNvPr id="14" name="">
             <a:extLst xmlns:a="http://schemas.openxmlformats.org/drawingml/2006/main">
               <a:ext uri="{FF2B5EF4-FFF2-40B4-BE49-F238E27FC236}">
-                <a16:creationId xmlns:a16="http://schemas.microsoft.com/office/drawing/2014/main" id="{5D59C85D-8797-4100-A9D3-1D20FF88977F}"/>
+                <a16:creationId xmlns:a16="http://schemas.microsoft.com/office/drawing/2014/main" id="{02CD1457-4F2B-4CCC-BAEC-6755FE6FCA7A}"/>
               </a:ext>
             </a:extLst>
           </p:cNvPr>
@@ -8156,7 +8788,7 @@
           <p:cNvPr id="15" name="">
             <a:extLst xmlns:a="http://schemas.openxmlformats.org/drawingml/2006/main">
               <a:ext uri="{FF2B5EF4-FFF2-40B4-BE49-F238E27FC236}">
-                <a16:creationId xmlns:a16="http://schemas.microsoft.com/office/drawing/2014/main" id="{5F039A9B-E791-4ECF-AAAD-5F7A5EABC7B6}"/>
+                <a16:creationId xmlns:a16="http://schemas.microsoft.com/office/drawing/2014/main" id="{95D2A62F-76D9-4EEE-9A9D-97D2C77A9D6C}"/>
               </a:ext>
             </a:extLst>
           </p:cNvPr>
@@ -8189,7 +8821,7 @@
           <p:cNvPr id="16" name="">
             <a:extLst xmlns:a="http://schemas.openxmlformats.org/drawingml/2006/main">
               <a:ext uri="{FF2B5EF4-FFF2-40B4-BE49-F238E27FC236}">
-                <a16:creationId xmlns:a16="http://schemas.microsoft.com/office/drawing/2014/main" id="{31CC57ED-3B4A-427E-98D5-8E5EFD3F5B50}"/>
+                <a16:creationId xmlns:a16="http://schemas.microsoft.com/office/drawing/2014/main" id="{40C32256-F1D3-480C-9782-CFA31064DD15}"/>
               </a:ext>
             </a:extLst>
           </p:cNvPr>
@@ -8247,7 +8879,7 @@
           <p:cNvPr id="17" name="">
             <a:extLst xmlns:a="http://schemas.openxmlformats.org/drawingml/2006/main">
               <a:ext uri="{FF2B5EF4-FFF2-40B4-BE49-F238E27FC236}">
-                <a16:creationId xmlns:a16="http://schemas.microsoft.com/office/drawing/2014/main" id="{A54A8203-9C72-4907-B8C8-9F8A0B9D8485}"/>
+                <a16:creationId xmlns:a16="http://schemas.microsoft.com/office/drawing/2014/main" id="{03F44635-C851-43D7-AB9E-FB3E99314798}"/>
               </a:ext>
             </a:extLst>
           </p:cNvPr>
@@ -8278,7 +8910,7 @@
           <p:cNvPr id="18" name="">
             <a:extLst xmlns:a="http://schemas.openxmlformats.org/drawingml/2006/main">
               <a:ext uri="{FF2B5EF4-FFF2-40B4-BE49-F238E27FC236}">
-                <a16:creationId xmlns:a16="http://schemas.microsoft.com/office/drawing/2014/main" id="{FBB2538C-ED79-462E-A030-63C775C30114}"/>
+                <a16:creationId xmlns:a16="http://schemas.microsoft.com/office/drawing/2014/main" id="{54531A31-F44C-47CC-932F-000EE5AF3C58}"/>
               </a:ext>
             </a:extLst>
           </p:cNvPr>
@@ -8311,7 +8943,7 @@
           <p:cNvPr id="19" name="">
             <a:extLst xmlns:a="http://schemas.openxmlformats.org/drawingml/2006/main">
               <a:ext uri="{FF2B5EF4-FFF2-40B4-BE49-F238E27FC236}">
-                <a16:creationId xmlns:a16="http://schemas.microsoft.com/office/drawing/2014/main" id="{B6BC5296-139B-41F6-9E56-1BD86D24488B}"/>
+                <a16:creationId xmlns:a16="http://schemas.microsoft.com/office/drawing/2014/main" id="{8846891F-EC69-4162-93E4-85708B3FE6CA}"/>
               </a:ext>
             </a:extLst>
           </p:cNvPr>
@@ -8369,7 +9001,7 @@
           <p:cNvPr id="20" name="">
             <a:extLst xmlns:a="http://schemas.openxmlformats.org/drawingml/2006/main">
               <a:ext uri="{FF2B5EF4-FFF2-40B4-BE49-F238E27FC236}">
-                <a16:creationId xmlns:a16="http://schemas.microsoft.com/office/drawing/2014/main" id="{775AB7F5-0046-4B84-AA2E-C85207C0455A}"/>
+                <a16:creationId xmlns:a16="http://schemas.microsoft.com/office/drawing/2014/main" id="{FCF37DFD-48B5-47AB-A786-75B91E00F2AB}"/>
               </a:ext>
             </a:extLst>
           </p:cNvPr>
@@ -8400,7 +9032,7 @@
           <p:cNvPr id="21" name="">
             <a:extLst xmlns:a="http://schemas.openxmlformats.org/drawingml/2006/main">
               <a:ext uri="{FF2B5EF4-FFF2-40B4-BE49-F238E27FC236}">
-                <a16:creationId xmlns:a16="http://schemas.microsoft.com/office/drawing/2014/main" id="{5822F807-C316-4AEB-95CF-45F461C41F86}"/>
+                <a16:creationId xmlns:a16="http://schemas.microsoft.com/office/drawing/2014/main" id="{D83FA407-D315-4D2C-87B0-F114F1FF47F7}"/>
               </a:ext>
             </a:extLst>
           </p:cNvPr>
@@ -8433,7 +9065,7 @@
           <p:cNvPr id="22" name="">
             <a:extLst xmlns:a="http://schemas.openxmlformats.org/drawingml/2006/main">
               <a:ext uri="{FF2B5EF4-FFF2-40B4-BE49-F238E27FC236}">
-                <a16:creationId xmlns:a16="http://schemas.microsoft.com/office/drawing/2014/main" id="{23EA74DD-8E91-4032-9BEA-1D9136CC9F2F}"/>
+                <a16:creationId xmlns:a16="http://schemas.microsoft.com/office/drawing/2014/main" id="{95374D0B-0B80-45C4-B34D-F807FE8BBB6A}"/>
               </a:ext>
             </a:extLst>
           </p:cNvPr>
@@ -8491,7 +9123,7 @@
           <p:cNvPr id="23" name="">
             <a:extLst xmlns:a="http://schemas.openxmlformats.org/drawingml/2006/main">
               <a:ext uri="{FF2B5EF4-FFF2-40B4-BE49-F238E27FC236}">
-                <a16:creationId xmlns:a16="http://schemas.microsoft.com/office/drawing/2014/main" id="{F3C19CC8-D54E-4465-BF89-0559459B7270}"/>
+                <a16:creationId xmlns:a16="http://schemas.microsoft.com/office/drawing/2014/main" id="{1CA21406-B4E7-4722-BC51-5D4FCDD6A771}"/>
               </a:ext>
             </a:extLst>
           </p:cNvPr>
@@ -8522,7 +9154,7 @@
           <p:cNvPr id="24" name="">
             <a:extLst xmlns:a="http://schemas.openxmlformats.org/drawingml/2006/main">
               <a:ext uri="{FF2B5EF4-FFF2-40B4-BE49-F238E27FC236}">
-                <a16:creationId xmlns:a16="http://schemas.microsoft.com/office/drawing/2014/main" id="{5204878C-E6D4-45B0-ACE5-6F58B7BB94BD}"/>
+                <a16:creationId xmlns:a16="http://schemas.microsoft.com/office/drawing/2014/main" id="{68348AC2-D3CC-48D9-B221-56DA25BDDCF6}"/>
               </a:ext>
             </a:extLst>
           </p:cNvPr>
@@ -8555,7 +9187,7 @@
           <p:cNvPr id="25" name="">
             <a:extLst xmlns:a="http://schemas.openxmlformats.org/drawingml/2006/main">
               <a:ext uri="{FF2B5EF4-FFF2-40B4-BE49-F238E27FC236}">
-                <a16:creationId xmlns:a16="http://schemas.microsoft.com/office/drawing/2014/main" id="{5625B975-4862-40C6-B9D2-EA9CD8C0F929}"/>
+                <a16:creationId xmlns:a16="http://schemas.microsoft.com/office/drawing/2014/main" id="{A6395746-237D-4692-9A10-64076144EA13}"/>
               </a:ext>
             </a:extLst>
           </p:cNvPr>
@@ -8613,7 +9245,7 @@
           <p:cNvPr id="26" name="">
             <a:extLst xmlns:a="http://schemas.openxmlformats.org/drawingml/2006/main">
               <a:ext uri="{FF2B5EF4-FFF2-40B4-BE49-F238E27FC236}">
-                <a16:creationId xmlns:a16="http://schemas.microsoft.com/office/drawing/2014/main" id="{FE2B0272-E517-48EB-B132-EB9D8C2D2BCD}"/>
+                <a16:creationId xmlns:a16="http://schemas.microsoft.com/office/drawing/2014/main" id="{881150B7-2C1E-483E-9119-708EAE614917}"/>
               </a:ext>
             </a:extLst>
           </p:cNvPr>
@@ -8644,7 +9276,7 @@
           <p:cNvPr id="27" name="">
             <a:extLst xmlns:a="http://schemas.openxmlformats.org/drawingml/2006/main">
               <a:ext uri="{FF2B5EF4-FFF2-40B4-BE49-F238E27FC236}">
-                <a16:creationId xmlns:a16="http://schemas.microsoft.com/office/drawing/2014/main" id="{D687BD80-840F-4C03-A68C-8636D9072F1A}"/>
+                <a16:creationId xmlns:a16="http://schemas.microsoft.com/office/drawing/2014/main" id="{ADD660A1-99DC-4A20-8EE6-EBFF10A50FCE}"/>
               </a:ext>
             </a:extLst>
           </p:cNvPr>
@@ -8677,7 +9309,7 @@
           <p:cNvPr id="28" name="">
             <a:extLst xmlns:a="http://schemas.openxmlformats.org/drawingml/2006/main">
               <a:ext uri="{FF2B5EF4-FFF2-40B4-BE49-F238E27FC236}">
-                <a16:creationId xmlns:a16="http://schemas.microsoft.com/office/drawing/2014/main" id="{020768B2-0EA2-4E34-82B4-D62CA9C09505}"/>
+                <a16:creationId xmlns:a16="http://schemas.microsoft.com/office/drawing/2014/main" id="{14551B3E-E6DA-415A-978F-01011FAB2A15}"/>
               </a:ext>
             </a:extLst>
           </p:cNvPr>
@@ -8735,7 +9367,7 @@
           <p:cNvPr id="29" name="">
             <a:extLst xmlns:a="http://schemas.openxmlformats.org/drawingml/2006/main">
               <a:ext uri="{FF2B5EF4-FFF2-40B4-BE49-F238E27FC236}">
-                <a16:creationId xmlns:a16="http://schemas.microsoft.com/office/drawing/2014/main" id="{5BE63A62-7DAB-4607-8FC8-F4845F9F0A44}"/>
+                <a16:creationId xmlns:a16="http://schemas.microsoft.com/office/drawing/2014/main" id="{FD770EA5-7ADD-48EE-B935-BC4097C5EA1B}"/>
               </a:ext>
             </a:extLst>
           </p:cNvPr>
@@ -8766,7 +9398,7 @@
           <p:cNvPr id="30" name="">
             <a:extLst xmlns:a="http://schemas.openxmlformats.org/drawingml/2006/main">
               <a:ext uri="{FF2B5EF4-FFF2-40B4-BE49-F238E27FC236}">
-                <a16:creationId xmlns:a16="http://schemas.microsoft.com/office/drawing/2014/main" id="{EBA3D60A-A12B-4B04-96AE-413DC9B25C53}"/>
+                <a16:creationId xmlns:a16="http://schemas.microsoft.com/office/drawing/2014/main" id="{1A4BD939-3B37-42A2-8C89-83F80D41D3C1}"/>
               </a:ext>
             </a:extLst>
           </p:cNvPr>
@@ -8799,7 +9431,7 @@
           <p:cNvPr id="31" name="">
             <a:extLst xmlns:a="http://schemas.openxmlformats.org/drawingml/2006/main">
               <a:ext uri="{FF2B5EF4-FFF2-40B4-BE49-F238E27FC236}">
-                <a16:creationId xmlns:a16="http://schemas.microsoft.com/office/drawing/2014/main" id="{F7472408-F38B-40A2-9693-72934EA06085}"/>
+                <a16:creationId xmlns:a16="http://schemas.microsoft.com/office/drawing/2014/main" id="{2BAEADA8-DBE5-447C-9826-3EE77DA08375}"/>
               </a:ext>
             </a:extLst>
           </p:cNvPr>
@@ -8857,7 +9489,7 @@
           <p:cNvPr id="32" name="">
             <a:extLst xmlns:a="http://schemas.openxmlformats.org/drawingml/2006/main">
               <a:ext uri="{FF2B5EF4-FFF2-40B4-BE49-F238E27FC236}">
-                <a16:creationId xmlns:a16="http://schemas.microsoft.com/office/drawing/2014/main" id="{D63B0841-A1E1-44FF-AEBC-151B50CA5804}"/>
+                <a16:creationId xmlns:a16="http://schemas.microsoft.com/office/drawing/2014/main" id="{FAD089BD-54B9-4C6E-B17F-F0CAD1DEEF46}"/>
               </a:ext>
             </a:extLst>
           </p:cNvPr>
@@ -8888,7 +9520,7 @@
           <p:cNvPr id="33" name="">
             <a:extLst xmlns:a="http://schemas.openxmlformats.org/drawingml/2006/main">
               <a:ext uri="{FF2B5EF4-FFF2-40B4-BE49-F238E27FC236}">
-                <a16:creationId xmlns:a16="http://schemas.microsoft.com/office/drawing/2014/main" id="{619E80DA-F27C-4445-B8E9-ED6A51C26724}"/>
+                <a16:creationId xmlns:a16="http://schemas.microsoft.com/office/drawing/2014/main" id="{82DB2E60-DFF0-4DCD-8621-BAF6923390B1}"/>
               </a:ext>
             </a:extLst>
           </p:cNvPr>
@@ -8921,7 +9553,7 @@
           <p:cNvPr id="34" name="">
             <a:extLst xmlns:a="http://schemas.openxmlformats.org/drawingml/2006/main">
               <a:ext uri="{FF2B5EF4-FFF2-40B4-BE49-F238E27FC236}">
-                <a16:creationId xmlns:a16="http://schemas.microsoft.com/office/drawing/2014/main" id="{8A1040AB-9517-419D-B2A9-2EE2990668C7}"/>
+                <a16:creationId xmlns:a16="http://schemas.microsoft.com/office/drawing/2014/main" id="{451FCE6C-086C-4317-9D61-D65D17B19AB3}"/>
               </a:ext>
             </a:extLst>
           </p:cNvPr>
@@ -8979,7 +9611,7 @@
           <p:cNvPr id="35" name="">
             <a:extLst xmlns:a="http://schemas.openxmlformats.org/drawingml/2006/main">
               <a:ext uri="{FF2B5EF4-FFF2-40B4-BE49-F238E27FC236}">
-                <a16:creationId xmlns:a16="http://schemas.microsoft.com/office/drawing/2014/main" id="{76295CE4-8780-44DA-873D-551C19309FD5}"/>
+                <a16:creationId xmlns:a16="http://schemas.microsoft.com/office/drawing/2014/main" id="{073066CA-F7F2-4E28-9AB2-A5A973F8BF30}"/>
               </a:ext>
             </a:extLst>
           </p:cNvPr>
@@ -9010,7 +9642,7 @@
           <p:cNvPr id="36" name="">
             <a:extLst xmlns:a="http://schemas.openxmlformats.org/drawingml/2006/main">
               <a:ext uri="{FF2B5EF4-FFF2-40B4-BE49-F238E27FC236}">
-                <a16:creationId xmlns:a16="http://schemas.microsoft.com/office/drawing/2014/main" id="{714A14ED-79DF-4296-88C2-8886B04147EB}"/>
+                <a16:creationId xmlns:a16="http://schemas.microsoft.com/office/drawing/2014/main" id="{88310B7C-4B35-4259-9A20-5A7BC10C2576}"/>
               </a:ext>
             </a:extLst>
           </p:cNvPr>
@@ -9043,7 +9675,7 @@
           <p:cNvPr id="37" name="">
             <a:extLst xmlns:a="http://schemas.openxmlformats.org/drawingml/2006/main">
               <a:ext uri="{FF2B5EF4-FFF2-40B4-BE49-F238E27FC236}">
-                <a16:creationId xmlns:a16="http://schemas.microsoft.com/office/drawing/2014/main" id="{1BA193A8-824D-4D8B-8018-DB2772C43A12}"/>
+                <a16:creationId xmlns:a16="http://schemas.microsoft.com/office/drawing/2014/main" id="{2B5E4C51-23DD-46E8-A4D1-8FCD17A43953}"/>
               </a:ext>
             </a:extLst>
           </p:cNvPr>
@@ -9101,7 +9733,7 @@
           <p:cNvPr id="38" name="">
             <a:extLst xmlns:a="http://schemas.openxmlformats.org/drawingml/2006/main">
               <a:ext uri="{FF2B5EF4-FFF2-40B4-BE49-F238E27FC236}">
-                <a16:creationId xmlns:a16="http://schemas.microsoft.com/office/drawing/2014/main" id="{3A43C9D7-1841-4DF0-9BC7-43EC05F9578F}"/>
+                <a16:creationId xmlns:a16="http://schemas.microsoft.com/office/drawing/2014/main" id="{75B6D3F7-D4B3-4617-BB8C-B80C3219A747}"/>
               </a:ext>
             </a:extLst>
           </p:cNvPr>
@@ -9136,7 +9768,7 @@
           <p:cNvPr id="39" name="">
             <a:extLst xmlns:a="http://schemas.openxmlformats.org/drawingml/2006/main">
               <a:ext uri="{FF2B5EF4-FFF2-40B4-BE49-F238E27FC236}">
-                <a16:creationId xmlns:a16="http://schemas.microsoft.com/office/drawing/2014/main" id="{81DE5020-3255-4B90-93D3-F00902C8EDFB}"/>
+                <a16:creationId xmlns:a16="http://schemas.microsoft.com/office/drawing/2014/main" id="{E99E11AB-B477-4F3F-9D8D-241478DAEF9D}"/>
               </a:ext>
             </a:extLst>
           </p:cNvPr>
@@ -9198,7 +9830,7 @@
           <p:nvPr/>
         </p:nvPicPr>
         <p:blipFill>
-          <a:blip xmlns:r="http://schemas.openxmlformats.org/officeDocument/2006/relationships" xmlns:a="http://schemas.openxmlformats.org/drawingml/2006/main" r:embed="R9f40e776790c4cc8"/>
+          <a:blip xmlns:r="http://schemas.openxmlformats.org/officeDocument/2006/relationships" xmlns:a="http://schemas.openxmlformats.org/drawingml/2006/main" r:embed="Rd9d4cc8ef9d846c8"/>
           <a:stretch xmlns:a="http://schemas.openxmlformats.org/drawingml/2006/main"/>
         </p:blipFill>
         <p:spPr>
@@ -9216,7 +9848,7 @@
           <p:cNvPr id="41" name="">
             <a:extLst xmlns:a="http://schemas.openxmlformats.org/drawingml/2006/main">
               <a:ext uri="{FF2B5EF4-FFF2-40B4-BE49-F238E27FC236}">
-                <a16:creationId xmlns:a16="http://schemas.microsoft.com/office/drawing/2014/main" id="{2EDA48EE-1FB6-45DC-BA06-06CC54E6221F}"/>
+                <a16:creationId xmlns:a16="http://schemas.microsoft.com/office/drawing/2014/main" id="{A2C5FBF2-B7A5-4C9E-8130-EE125DD01663}"/>
               </a:ext>
             </a:extLst>
           </p:cNvPr>
@@ -9274,7 +9906,7 @@
           <p:cNvPr id="42" name="">
             <a:extLst xmlns:a="http://schemas.openxmlformats.org/drawingml/2006/main">
               <a:ext uri="{FF2B5EF4-FFF2-40B4-BE49-F238E27FC236}">
-                <a16:creationId xmlns:a16="http://schemas.microsoft.com/office/drawing/2014/main" id="{076FACC8-1B15-4113-AD13-0BF22C6461CD}"/>
+                <a16:creationId xmlns:a16="http://schemas.microsoft.com/office/drawing/2014/main" id="{42B26FEF-9D4F-4AE9-9289-766CE057F38E}"/>
               </a:ext>
             </a:extLst>
           </p:cNvPr>
@@ -9309,7 +9941,7 @@
           <p:cNvPr id="43" name="">
             <a:extLst xmlns:a="http://schemas.openxmlformats.org/drawingml/2006/main">
               <a:ext uri="{FF2B5EF4-FFF2-40B4-BE49-F238E27FC236}">
-                <a16:creationId xmlns:a16="http://schemas.microsoft.com/office/drawing/2014/main" id="{863C8E26-B726-4063-95F6-568D36A9E071}"/>
+                <a16:creationId xmlns:a16="http://schemas.microsoft.com/office/drawing/2014/main" id="{46FA9531-A76A-400A-8806-FDF3FF69B3E3}"/>
               </a:ext>
             </a:extLst>
           </p:cNvPr>
@@ -9371,7 +10003,7 @@
           <p:nvPr/>
         </p:nvPicPr>
         <p:blipFill>
-          <a:blip xmlns:r="http://schemas.openxmlformats.org/officeDocument/2006/relationships" xmlns:a="http://schemas.openxmlformats.org/drawingml/2006/main" r:embed="Rf8ac715d6d9d44da"/>
+          <a:blip xmlns:r="http://schemas.openxmlformats.org/officeDocument/2006/relationships" xmlns:a="http://schemas.openxmlformats.org/drawingml/2006/main" r:embed="R24b217a819904129"/>
           <a:stretch xmlns:a="http://schemas.openxmlformats.org/drawingml/2006/main"/>
         </p:blipFill>
         <p:spPr>
@@ -9389,7 +10021,7 @@
           <p:cNvPr id="45" name="">
             <a:extLst xmlns:a="http://schemas.openxmlformats.org/drawingml/2006/main">
               <a:ext uri="{FF2B5EF4-FFF2-40B4-BE49-F238E27FC236}">
-                <a16:creationId xmlns:a16="http://schemas.microsoft.com/office/drawing/2014/main" id="{C15EC841-EA6F-48DA-8F05-951FF66C666D}"/>
+                <a16:creationId xmlns:a16="http://schemas.microsoft.com/office/drawing/2014/main" id="{4F812A70-82DB-4BBC-8DE0-B5C66A0ED763}"/>
               </a:ext>
             </a:extLst>
           </p:cNvPr>
@@ -9447,7 +10079,7 @@
           <p:cNvPr id="46" name="">
             <a:extLst xmlns:a="http://schemas.openxmlformats.org/drawingml/2006/main">
               <a:ext uri="{FF2B5EF4-FFF2-40B4-BE49-F238E27FC236}">
-                <a16:creationId xmlns:a16="http://schemas.microsoft.com/office/drawing/2014/main" id="{0C3BFC28-AE39-4894-9F19-2CD76E37B4EB}"/>
+                <a16:creationId xmlns:a16="http://schemas.microsoft.com/office/drawing/2014/main" id="{A4BF1DDC-9506-431F-9B9A-A87BBDA98221}"/>
               </a:ext>
             </a:extLst>
           </p:cNvPr>
@@ -9482,7 +10114,7 @@
           <p:cNvPr id="47" name="">
             <a:extLst xmlns:a="http://schemas.openxmlformats.org/drawingml/2006/main">
               <a:ext uri="{FF2B5EF4-FFF2-40B4-BE49-F238E27FC236}">
-                <a16:creationId xmlns:a16="http://schemas.microsoft.com/office/drawing/2014/main" id="{232EB64C-6164-4B18-AF9A-CD175FBF464E}"/>
+                <a16:creationId xmlns:a16="http://schemas.microsoft.com/office/drawing/2014/main" id="{C11E828E-22A9-495C-B83A-C073510EA668}"/>
               </a:ext>
             </a:extLst>
           </p:cNvPr>
@@ -9544,7 +10176,7 @@
           <p:nvPr/>
         </p:nvPicPr>
         <p:blipFill>
-          <a:blip xmlns:r="http://schemas.openxmlformats.org/officeDocument/2006/relationships" xmlns:a="http://schemas.openxmlformats.org/drawingml/2006/main" r:embed="R8c86a50e71ec4bcc"/>
+          <a:blip xmlns:r="http://schemas.openxmlformats.org/officeDocument/2006/relationships" xmlns:a="http://schemas.openxmlformats.org/drawingml/2006/main" r:embed="Rcc332849ae134329"/>
           <a:stretch xmlns:a="http://schemas.openxmlformats.org/drawingml/2006/main"/>
         </p:blipFill>
         <p:spPr>
@@ -9562,7 +10194,7 @@
           <p:cNvPr id="49" name="">
             <a:extLst xmlns:a="http://schemas.openxmlformats.org/drawingml/2006/main">
               <a:ext uri="{FF2B5EF4-FFF2-40B4-BE49-F238E27FC236}">
-                <a16:creationId xmlns:a16="http://schemas.microsoft.com/office/drawing/2014/main" id="{9D57BF6D-E4EE-46EE-ACBF-F291BAE78CC4}"/>
+                <a16:creationId xmlns:a16="http://schemas.microsoft.com/office/drawing/2014/main" id="{20233EDB-9527-4BBD-B022-1ED089CC3437}"/>
               </a:ext>
             </a:extLst>
           </p:cNvPr>
@@ -9620,7 +10252,7 @@
           <p:cNvPr id="50" name="">
             <a:extLst xmlns:a="http://schemas.openxmlformats.org/drawingml/2006/main">
               <a:ext uri="{FF2B5EF4-FFF2-40B4-BE49-F238E27FC236}">
-                <a16:creationId xmlns:a16="http://schemas.microsoft.com/office/drawing/2014/main" id="{EF559943-5F73-4607-99E1-323014F4AFA2}"/>
+                <a16:creationId xmlns:a16="http://schemas.microsoft.com/office/drawing/2014/main" id="{AD1F9B33-6F13-49DA-89E1-81A7CD127E3F}"/>
               </a:ext>
             </a:extLst>
           </p:cNvPr>
@@ -9678,7 +10310,7 @@
           <p:cNvPr id="51" name="slide-number-2">
             <a:extLst xmlns:a="http://schemas.openxmlformats.org/drawingml/2006/main">
               <a:ext uri="{FF2B5EF4-FFF2-40B4-BE49-F238E27FC236}">
-                <a16:creationId xmlns:a16="http://schemas.microsoft.com/office/drawing/2014/main" id="{34346466-C321-4A5E-8F37-C43A968FB1BF}"/>
+                <a16:creationId xmlns:a16="http://schemas.microsoft.com/office/drawing/2014/main" id="{0177282A-D393-413A-8E87-F8708645F8F9}"/>
               </a:ext>
             </a:extLst>
           </p:cNvPr>
@@ -9736,7 +10368,7 @@
     </p:spTree>
     <p:extLst>
       <p:ext uri="{BB962C8B-B14F-4D97-AF65-F5344CB8AC3E}">
-        <p14:creationId xmlns:p14="http://schemas.microsoft.com/office/powerpoint/2010/main" val="1495185254"/>
+        <p14:creationId xmlns:p14="http://schemas.microsoft.com/office/powerpoint/2010/main" val="975543101"/>
       </p:ext>
     </p:extLst>
   </p:cSld>
@@ -9767,7 +10399,7 @@
           <p:cNvPr id="15" name="title-T2">
             <a:extLst xmlns:a="http://schemas.openxmlformats.org/drawingml/2006/main">
               <a:ext uri="{FF2B5EF4-FFF2-40B4-BE49-F238E27FC236}">
-                <a16:creationId xmlns:a16="http://schemas.microsoft.com/office/drawing/2014/main" id="{989B175F-CCCC-4D70-9628-8898C55DF53C}"/>
+                <a16:creationId xmlns:a16="http://schemas.microsoft.com/office/drawing/2014/main" id="{CD2813F3-A711-4308-9024-DF25BCFACA30}"/>
               </a:ext>
             </a:extLst>
           </p:cNvPr>
@@ -9831,7 +10463,7 @@
           <p:cNvPr id="2" name="subtitle-T2">
             <a:extLst xmlns:a="http://schemas.openxmlformats.org/drawingml/2006/main">
               <a:ext uri="{FF2B5EF4-FFF2-40B4-BE49-F238E27FC236}">
-                <a16:creationId xmlns:a16="http://schemas.microsoft.com/office/drawing/2014/main" id="{584918E6-14D3-46A5-AA8D-F669C090220F}"/>
+                <a16:creationId xmlns:a16="http://schemas.microsoft.com/office/drawing/2014/main" id="{02F7F329-E5AE-4C4C-85C7-5D397735F37D}"/>
               </a:ext>
             </a:extLst>
           </p:cNvPr>
@@ -9891,7 +10523,7 @@
           <p:cNvPr id="3" name="">
             <a:extLst xmlns:a="http://schemas.openxmlformats.org/drawingml/2006/main">
               <a:ext uri="{FF2B5EF4-FFF2-40B4-BE49-F238E27FC236}">
-                <a16:creationId xmlns:a16="http://schemas.microsoft.com/office/drawing/2014/main" id="{DB43E288-B072-4B12-952A-6E6E1E5C644A}"/>
+                <a16:creationId xmlns:a16="http://schemas.microsoft.com/office/drawing/2014/main" id="{6BC1E788-A901-454A-A75D-5421EC2CFA29}"/>
               </a:ext>
             </a:extLst>
           </p:cNvPr>
@@ -9926,7 +10558,7 @@
           <p:cNvPr id="4" name="">
             <a:extLst xmlns:a="http://schemas.openxmlformats.org/drawingml/2006/main">
               <a:ext uri="{FF2B5EF4-FFF2-40B4-BE49-F238E27FC236}">
-                <a16:creationId xmlns:a16="http://schemas.microsoft.com/office/drawing/2014/main" id="{0FF70302-5893-4BF3-9B92-5D6A092CE35C}"/>
+                <a16:creationId xmlns:a16="http://schemas.microsoft.com/office/drawing/2014/main" id="{0F5AA42C-B5E5-4EEA-906C-E9F90331E7BA}"/>
               </a:ext>
             </a:extLst>
           </p:cNvPr>
@@ -9984,7 +10616,7 @@
           <p:cNvPr id="5" name="">
             <a:extLst xmlns:a="http://schemas.openxmlformats.org/drawingml/2006/main">
               <a:ext uri="{FF2B5EF4-FFF2-40B4-BE49-F238E27FC236}">
-                <a16:creationId xmlns:a16="http://schemas.microsoft.com/office/drawing/2014/main" id="{1CDC63A3-5F40-4F85-B46E-C6E400719BA7}"/>
+                <a16:creationId xmlns:a16="http://schemas.microsoft.com/office/drawing/2014/main" id="{A047BE03-972B-437A-B9B4-BDB8ADF571BD}"/>
               </a:ext>
             </a:extLst>
           </p:cNvPr>
@@ -10046,7 +10678,7 @@
           <p:nvPr/>
         </p:nvPicPr>
         <p:blipFill>
-          <a:blip xmlns:r="http://schemas.openxmlformats.org/officeDocument/2006/relationships" xmlns:a="http://schemas.openxmlformats.org/drawingml/2006/main" r:embed="Rc3c5744c2a4e4de2"/>
+          <a:blip xmlns:r="http://schemas.openxmlformats.org/officeDocument/2006/relationships" xmlns:a="http://schemas.openxmlformats.org/drawingml/2006/main" r:embed="R117f6d998728483d"/>
           <a:stretch xmlns:a="http://schemas.openxmlformats.org/drawingml/2006/main"/>
         </p:blipFill>
         <p:spPr>
@@ -10064,7 +10696,7 @@
           <p:cNvPr id="7" name="">
             <a:extLst xmlns:a="http://schemas.openxmlformats.org/drawingml/2006/main">
               <a:ext uri="{FF2B5EF4-FFF2-40B4-BE49-F238E27FC236}">
-                <a16:creationId xmlns:a16="http://schemas.microsoft.com/office/drawing/2014/main" id="{90510A87-B5CE-4520-AEA0-90C53E020556}"/>
+                <a16:creationId xmlns:a16="http://schemas.microsoft.com/office/drawing/2014/main" id="{98E1F90F-4533-4ADC-A247-4B59E1172F00}"/>
               </a:ext>
             </a:extLst>
           </p:cNvPr>
@@ -10122,7 +10754,7 @@
           <p:cNvPr id="8" name="">
             <a:extLst xmlns:a="http://schemas.openxmlformats.org/drawingml/2006/main">
               <a:ext uri="{FF2B5EF4-FFF2-40B4-BE49-F238E27FC236}">
-                <a16:creationId xmlns:a16="http://schemas.microsoft.com/office/drawing/2014/main" id="{DE8A57AF-D8A1-4CE0-ABFA-6611E990808E}"/>
+                <a16:creationId xmlns:a16="http://schemas.microsoft.com/office/drawing/2014/main" id="{B0E653B3-AD2D-4C9F-A816-E4E434BA9592}"/>
               </a:ext>
             </a:extLst>
           </p:cNvPr>
@@ -10180,7 +10812,7 @@
           <p:cNvPr id="9" name="">
             <a:extLst xmlns:a="http://schemas.openxmlformats.org/drawingml/2006/main">
               <a:ext uri="{FF2B5EF4-FFF2-40B4-BE49-F238E27FC236}">
-                <a16:creationId xmlns:a16="http://schemas.microsoft.com/office/drawing/2014/main" id="{ED7BFCFB-C185-4337-970E-DB92009EDA37}"/>
+                <a16:creationId xmlns:a16="http://schemas.microsoft.com/office/drawing/2014/main" id="{D7F54680-A89D-42C0-9736-ECE750F1A3BA}"/>
               </a:ext>
             </a:extLst>
           </p:cNvPr>
@@ -10242,7 +10874,7 @@
           <p:nvPr/>
         </p:nvPicPr>
         <p:blipFill>
-          <a:blip xmlns:r="http://schemas.openxmlformats.org/officeDocument/2006/relationships" xmlns:a="http://schemas.openxmlformats.org/drawingml/2006/main" r:embed="Ra503d8a430a3456a"/>
+          <a:blip xmlns:r="http://schemas.openxmlformats.org/officeDocument/2006/relationships" xmlns:a="http://schemas.openxmlformats.org/drawingml/2006/main" r:embed="R273c03c49df64c4b"/>
           <a:stretch xmlns:a="http://schemas.openxmlformats.org/drawingml/2006/main"/>
         </p:blipFill>
         <p:spPr>
@@ -10260,7 +10892,7 @@
           <p:cNvPr id="11" name="">
             <a:extLst xmlns:a="http://schemas.openxmlformats.org/drawingml/2006/main">
               <a:ext uri="{FF2B5EF4-FFF2-40B4-BE49-F238E27FC236}">
-                <a16:creationId xmlns:a16="http://schemas.microsoft.com/office/drawing/2014/main" id="{FA0AB4BF-4C02-4F26-B147-E12F5A0D8250}"/>
+                <a16:creationId xmlns:a16="http://schemas.microsoft.com/office/drawing/2014/main" id="{04376150-9A0C-4862-9219-46DE6D05A07D}"/>
               </a:ext>
             </a:extLst>
           </p:cNvPr>
@@ -10326,13 +10958,13 @@
           <p:nvPr/>
         </p:nvPicPr>
         <p:blipFill>
-          <a:blip xmlns:r="http://schemas.openxmlformats.org/officeDocument/2006/relationships" xmlns:a="http://schemas.openxmlformats.org/drawingml/2006/main" r:embed="R91e5c2652ddd4c1e"/>
+          <a:blip xmlns:r="http://schemas.openxmlformats.org/officeDocument/2006/relationships" xmlns:a="http://schemas.openxmlformats.org/drawingml/2006/main" r:embed="R5d3588b0f0ec4792"/>
           <a:stretch xmlns:a="http://schemas.openxmlformats.org/drawingml/2006/main"/>
         </p:blipFill>
         <p:spPr>
           <a:xfrm xmlns:a="http://schemas.openxmlformats.org/drawingml/2006/main">
-            <a:off x="6475992" y="2381250"/>
-            <a:ext cx="9336515" cy="5810250"/>
+            <a:off x="6502161" y="2381250"/>
+            <a:ext cx="9284178" cy="5810250"/>
           </a:xfrm>
           <a:prstGeom xmlns:a="http://schemas.openxmlformats.org/drawingml/2006/main" prst="rect">
             <a:avLst/>
@@ -10344,7 +10976,7 @@
           <p:cNvPr id="13" name="">
             <a:extLst xmlns:a="http://schemas.openxmlformats.org/drawingml/2006/main">
               <a:ext uri="{FF2B5EF4-FFF2-40B4-BE49-F238E27FC236}">
-                <a16:creationId xmlns:a16="http://schemas.microsoft.com/office/drawing/2014/main" id="{98920BAE-73FC-45C9-9CFB-3E0449052627}"/>
+                <a16:creationId xmlns:a16="http://schemas.microsoft.com/office/drawing/2014/main" id="{FB2BBDEB-C04B-4A43-B42B-FFC0CF5A2F2E}"/>
               </a:ext>
             </a:extLst>
           </p:cNvPr>
@@ -10402,7 +11034,7 @@
           <p:cNvPr id="14" name="slide-number-3">
             <a:extLst xmlns:a="http://schemas.openxmlformats.org/drawingml/2006/main">
               <a:ext uri="{FF2B5EF4-FFF2-40B4-BE49-F238E27FC236}">
-                <a16:creationId xmlns:a16="http://schemas.microsoft.com/office/drawing/2014/main" id="{E5B237BD-9C9B-4CFD-9B77-DCC34E1B49EE}"/>
+                <a16:creationId xmlns:a16="http://schemas.microsoft.com/office/drawing/2014/main" id="{0E53A367-5A10-4EC5-A615-4FB6740503A1}"/>
               </a:ext>
             </a:extLst>
           </p:cNvPr>
@@ -10460,7 +11092,7 @@
     </p:spTree>
     <p:extLst>
       <p:ext uri="{BB962C8B-B14F-4D97-AF65-F5344CB8AC3E}">
-        <p14:creationId xmlns:p14="http://schemas.microsoft.com/office/powerpoint/2010/main" val="1258745024"/>
+        <p14:creationId xmlns:p14="http://schemas.microsoft.com/office/powerpoint/2010/main" val="494973230"/>
       </p:ext>
     </p:extLst>
   </p:cSld>
@@ -10491,7 +11123,7 @@
           <p:cNvPr id="18" name="title-T3">
             <a:extLst xmlns:a="http://schemas.openxmlformats.org/drawingml/2006/main">
               <a:ext uri="{FF2B5EF4-FFF2-40B4-BE49-F238E27FC236}">
-                <a16:creationId xmlns:a16="http://schemas.microsoft.com/office/drawing/2014/main" id="{47321F4C-8373-41D1-8457-3E65CBAF5E56}"/>
+                <a16:creationId xmlns:a16="http://schemas.microsoft.com/office/drawing/2014/main" id="{7504B3B8-42CB-4228-AC31-37A8F30D3A10}"/>
               </a:ext>
             </a:extLst>
           </p:cNvPr>
@@ -10582,7 +11214,7 @@
           <p:cNvPr id="2" name="subtitle-T3">
             <a:extLst xmlns:a="http://schemas.openxmlformats.org/drawingml/2006/main">
               <a:ext uri="{FF2B5EF4-FFF2-40B4-BE49-F238E27FC236}">
-                <a16:creationId xmlns:a16="http://schemas.microsoft.com/office/drawing/2014/main" id="{BF449F7F-123A-4A98-812D-7BB90BA8E4AB}"/>
+                <a16:creationId xmlns:a16="http://schemas.microsoft.com/office/drawing/2014/main" id="{E95EDD2A-0586-4CFC-BB6B-32A194073178}"/>
               </a:ext>
             </a:extLst>
           </p:cNvPr>
@@ -10642,7 +11274,7 @@
           <p:cNvPr id="3" name="">
             <a:extLst xmlns:a="http://schemas.openxmlformats.org/drawingml/2006/main">
               <a:ext uri="{FF2B5EF4-FFF2-40B4-BE49-F238E27FC236}">
-                <a16:creationId xmlns:a16="http://schemas.microsoft.com/office/drawing/2014/main" id="{1F4EA1FF-21A8-4A8B-9B8D-CB12B5CFDA3C}"/>
+                <a16:creationId xmlns:a16="http://schemas.microsoft.com/office/drawing/2014/main" id="{FEF7207E-02BD-4629-A9B1-92BE0DD0CE3C}"/>
               </a:ext>
             </a:extLst>
           </p:cNvPr>
@@ -10704,7 +11336,7 @@
           <p:nvPr/>
         </p:nvPicPr>
         <p:blipFill>
-          <a:blip xmlns:r="http://schemas.openxmlformats.org/officeDocument/2006/relationships" xmlns:a="http://schemas.openxmlformats.org/drawingml/2006/main" r:embed="R20bfb9731d044abd"/>
+          <a:blip xmlns:r="http://schemas.openxmlformats.org/officeDocument/2006/relationships" xmlns:a="http://schemas.openxmlformats.org/drawingml/2006/main" r:embed="R6246bc82b5d24333"/>
           <a:stretch xmlns:a="http://schemas.openxmlformats.org/drawingml/2006/main"/>
         </p:blipFill>
         <p:spPr>
@@ -10722,7 +11354,7 @@
           <p:cNvPr id="5" name="">
             <a:extLst xmlns:a="http://schemas.openxmlformats.org/drawingml/2006/main">
               <a:ext uri="{FF2B5EF4-FFF2-40B4-BE49-F238E27FC236}">
-                <a16:creationId xmlns:a16="http://schemas.microsoft.com/office/drawing/2014/main" id="{587B8426-3078-4FD7-83A4-A51F2DD4B751}"/>
+                <a16:creationId xmlns:a16="http://schemas.microsoft.com/office/drawing/2014/main" id="{C72CA492-795E-4044-846A-670130231A88}"/>
               </a:ext>
             </a:extLst>
           </p:cNvPr>
@@ -10757,7 +11389,7 @@
           <p:cNvPr id="6" name="">
             <a:extLst xmlns:a="http://schemas.openxmlformats.org/drawingml/2006/main">
               <a:ext uri="{FF2B5EF4-FFF2-40B4-BE49-F238E27FC236}">
-                <a16:creationId xmlns:a16="http://schemas.microsoft.com/office/drawing/2014/main" id="{B4826E21-9348-460B-A664-744E6343F767}"/>
+                <a16:creationId xmlns:a16="http://schemas.microsoft.com/office/drawing/2014/main" id="{29B30438-FAC3-44A7-B0F4-BBFAAD13D80B}"/>
               </a:ext>
             </a:extLst>
           </p:cNvPr>
@@ -10819,7 +11451,7 @@
           <p:nvPr/>
         </p:nvPicPr>
         <p:blipFill>
-          <a:blip xmlns:r="http://schemas.openxmlformats.org/officeDocument/2006/relationships" xmlns:a="http://schemas.openxmlformats.org/drawingml/2006/main" r:embed="Rbacf56ef8f3043f3"/>
+          <a:blip xmlns:r="http://schemas.openxmlformats.org/officeDocument/2006/relationships" xmlns:a="http://schemas.openxmlformats.org/drawingml/2006/main" r:embed="R016cd8c413114d98"/>
           <a:stretch xmlns:a="http://schemas.openxmlformats.org/drawingml/2006/main"/>
         </p:blipFill>
         <p:spPr>
@@ -10837,7 +11469,7 @@
           <p:cNvPr id="8" name="">
             <a:extLst xmlns:a="http://schemas.openxmlformats.org/drawingml/2006/main">
               <a:ext uri="{FF2B5EF4-FFF2-40B4-BE49-F238E27FC236}">
-                <a16:creationId xmlns:a16="http://schemas.microsoft.com/office/drawing/2014/main" id="{5637EA7E-750D-4672-B52D-D8E749AD8DEA}"/>
+                <a16:creationId xmlns:a16="http://schemas.microsoft.com/office/drawing/2014/main" id="{F802F847-6381-41BF-BEAF-CBB24CA3272A}"/>
               </a:ext>
             </a:extLst>
           </p:cNvPr>
@@ -10899,7 +11531,7 @@
           <p:nvPr/>
         </p:nvPicPr>
         <p:blipFill>
-          <a:blip xmlns:r="http://schemas.openxmlformats.org/officeDocument/2006/relationships" xmlns:a="http://schemas.openxmlformats.org/drawingml/2006/main" r:embed="R7df5a503e8894183"/>
+          <a:blip xmlns:r="http://schemas.openxmlformats.org/officeDocument/2006/relationships" xmlns:a="http://schemas.openxmlformats.org/drawingml/2006/main" r:embed="Rdfadd6ab6a8d4fd0"/>
           <a:stretch xmlns:a="http://schemas.openxmlformats.org/drawingml/2006/main"/>
         </p:blipFill>
         <p:spPr>
@@ -10917,7 +11549,7 @@
           <p:cNvPr id="10" name="">
             <a:extLst xmlns:a="http://schemas.openxmlformats.org/drawingml/2006/main">
               <a:ext uri="{FF2B5EF4-FFF2-40B4-BE49-F238E27FC236}">
-                <a16:creationId xmlns:a16="http://schemas.microsoft.com/office/drawing/2014/main" id="{DAECC9CC-3A4A-4466-BEF3-A5AD0168CC44}"/>
+                <a16:creationId xmlns:a16="http://schemas.microsoft.com/office/drawing/2014/main" id="{D92B916F-C113-4623-8105-299A94ED27CB}"/>
               </a:ext>
             </a:extLst>
           </p:cNvPr>
@@ -10975,7 +11607,7 @@
           <p:cNvPr id="11" name="">
             <a:extLst xmlns:a="http://schemas.openxmlformats.org/drawingml/2006/main">
               <a:ext uri="{FF2B5EF4-FFF2-40B4-BE49-F238E27FC236}">
-                <a16:creationId xmlns:a16="http://schemas.microsoft.com/office/drawing/2014/main" id="{8B9EBE8D-66FD-4738-B15E-B65FE277501E}"/>
+                <a16:creationId xmlns:a16="http://schemas.microsoft.com/office/drawing/2014/main" id="{4C1EC2FC-603B-41C1-9111-7E566FE4CEAB}"/>
               </a:ext>
             </a:extLst>
           </p:cNvPr>
@@ -11014,7 +11646,7 @@
           <p:nvPr/>
         </p:nvPicPr>
         <p:blipFill>
-          <a:blip xmlns:r="http://schemas.openxmlformats.org/officeDocument/2006/relationships" xmlns:a="http://schemas.openxmlformats.org/drawingml/2006/main" r:embed="R8a366c4accc94edd"/>
+          <a:blip xmlns:r="http://schemas.openxmlformats.org/officeDocument/2006/relationships" xmlns:a="http://schemas.openxmlformats.org/drawingml/2006/main" r:embed="Rdd3c3b617c084f53"/>
           <a:stretch xmlns:a="http://schemas.openxmlformats.org/drawingml/2006/main"/>
         </p:blipFill>
         <p:spPr>
@@ -11032,7 +11664,7 @@
           <p:cNvPr id="13" name="">
             <a:extLst xmlns:a="http://schemas.openxmlformats.org/drawingml/2006/main">
               <a:ext uri="{FF2B5EF4-FFF2-40B4-BE49-F238E27FC236}">
-                <a16:creationId xmlns:a16="http://schemas.microsoft.com/office/drawing/2014/main" id="{4422797F-33B5-4946-877C-8238549E2A4F}"/>
+                <a16:creationId xmlns:a16="http://schemas.microsoft.com/office/drawing/2014/main" id="{23617049-8050-4587-891D-4AA6B1DBA0E6}"/>
               </a:ext>
             </a:extLst>
           </p:cNvPr>
@@ -11090,7 +11722,7 @@
           <p:cNvPr id="14" name="">
             <a:extLst xmlns:a="http://schemas.openxmlformats.org/drawingml/2006/main">
               <a:ext uri="{FF2B5EF4-FFF2-40B4-BE49-F238E27FC236}">
-                <a16:creationId xmlns:a16="http://schemas.microsoft.com/office/drawing/2014/main" id="{949D4AE1-BA0E-42C7-8187-4286E1BDEEB9}"/>
+                <a16:creationId xmlns:a16="http://schemas.microsoft.com/office/drawing/2014/main" id="{FD82DBAC-ABBC-4EF1-84B1-2F0D0EE47F4E}"/>
               </a:ext>
             </a:extLst>
           </p:cNvPr>
@@ -11148,7 +11780,7 @@
           <p:cNvPr id="15" name="">
             <a:extLst xmlns:a="http://schemas.openxmlformats.org/drawingml/2006/main">
               <a:ext uri="{FF2B5EF4-FFF2-40B4-BE49-F238E27FC236}">
-                <a16:creationId xmlns:a16="http://schemas.microsoft.com/office/drawing/2014/main" id="{6626C0A8-C302-44D8-9290-79906CF33DD2}"/>
+                <a16:creationId xmlns:a16="http://schemas.microsoft.com/office/drawing/2014/main" id="{EF4990DD-FAD2-4275-869C-B21510BBD2CE}"/>
               </a:ext>
             </a:extLst>
           </p:cNvPr>
@@ -11183,7 +11815,7 @@
           <p:cNvPr id="16" name="">
             <a:extLst xmlns:a="http://schemas.openxmlformats.org/drawingml/2006/main">
               <a:ext uri="{FF2B5EF4-FFF2-40B4-BE49-F238E27FC236}">
-                <a16:creationId xmlns:a16="http://schemas.microsoft.com/office/drawing/2014/main" id="{56ACC64F-E72A-414B-BE45-52ABB978F56F}"/>
+                <a16:creationId xmlns:a16="http://schemas.microsoft.com/office/drawing/2014/main" id="{6A4D7AB2-B435-45EA-95E8-04472D1786F7}"/>
               </a:ext>
             </a:extLst>
           </p:cNvPr>
@@ -11241,7 +11873,7 @@
           <p:cNvPr id="17" name="slide-number-4">
             <a:extLst xmlns:a="http://schemas.openxmlformats.org/drawingml/2006/main">
               <a:ext uri="{FF2B5EF4-FFF2-40B4-BE49-F238E27FC236}">
-                <a16:creationId xmlns:a16="http://schemas.microsoft.com/office/drawing/2014/main" id="{B8BB464A-EE16-4064-A148-E81368C04ED0}"/>
+                <a16:creationId xmlns:a16="http://schemas.microsoft.com/office/drawing/2014/main" id="{FC6B512F-A2A0-42D4-B883-45357B1EB631}"/>
               </a:ext>
             </a:extLst>
           </p:cNvPr>
@@ -11299,7 +11931,7 @@
     </p:spTree>
     <p:extLst>
       <p:ext uri="{BB962C8B-B14F-4D97-AF65-F5344CB8AC3E}">
-        <p14:creationId xmlns:p14="http://schemas.microsoft.com/office/powerpoint/2010/main" val="1545612955"/>
+        <p14:creationId xmlns:p14="http://schemas.microsoft.com/office/powerpoint/2010/main" val="39973451"/>
       </p:ext>
     </p:extLst>
   </p:cSld>
@@ -11330,7 +11962,7 @@
           <p:cNvPr id="29" name="title-T1">
             <a:extLst xmlns:a="http://schemas.openxmlformats.org/drawingml/2006/main">
               <a:ext uri="{FF2B5EF4-FFF2-40B4-BE49-F238E27FC236}">
-                <a16:creationId xmlns:a16="http://schemas.microsoft.com/office/drawing/2014/main" id="{E816B637-7716-400A-8731-DB52F734C9C0}"/>
+                <a16:creationId xmlns:a16="http://schemas.microsoft.com/office/drawing/2014/main" id="{AC79F7EE-BCE9-4BBB-B41F-B22301B9F6AD}"/>
               </a:ext>
             </a:extLst>
           </p:cNvPr>
@@ -11394,7 +12026,7 @@
           <p:cNvPr id="2" name="subtitle-T1">
             <a:extLst xmlns:a="http://schemas.openxmlformats.org/drawingml/2006/main">
               <a:ext uri="{FF2B5EF4-FFF2-40B4-BE49-F238E27FC236}">
-                <a16:creationId xmlns:a16="http://schemas.microsoft.com/office/drawing/2014/main" id="{26C68BDA-8DD7-4ED1-8039-E30E367C6B95}"/>
+                <a16:creationId xmlns:a16="http://schemas.microsoft.com/office/drawing/2014/main" id="{85DA6C2F-789C-4C10-A3E9-377681079246}"/>
               </a:ext>
             </a:extLst>
           </p:cNvPr>
@@ -11454,7 +12086,7 @@
           <p:cNvPr id="3" name="">
             <a:extLst xmlns:a="http://schemas.openxmlformats.org/drawingml/2006/main">
               <a:ext uri="{FF2B5EF4-FFF2-40B4-BE49-F238E27FC236}">
-                <a16:creationId xmlns:a16="http://schemas.microsoft.com/office/drawing/2014/main" id="{16CB3E9C-C40E-4A20-881C-A15CAE58CF48}"/>
+                <a16:creationId xmlns:a16="http://schemas.microsoft.com/office/drawing/2014/main" id="{907B884B-9B86-4072-9C16-51C2408AB11D}"/>
               </a:ext>
             </a:extLst>
           </p:cNvPr>
@@ -11512,7 +12144,7 @@
           <p:cNvPr id="4" name="">
             <a:extLst xmlns:a="http://schemas.openxmlformats.org/drawingml/2006/main">
               <a:ext uri="{FF2B5EF4-FFF2-40B4-BE49-F238E27FC236}">
-                <a16:creationId xmlns:a16="http://schemas.microsoft.com/office/drawing/2014/main" id="{4FE250CF-A067-423C-A022-FAA09B5D8F18}"/>
+                <a16:creationId xmlns:a16="http://schemas.microsoft.com/office/drawing/2014/main" id="{65394F1C-CC58-432F-B7E7-DA6E7C6F4EED}"/>
               </a:ext>
             </a:extLst>
           </p:cNvPr>
@@ -11570,7 +12202,7 @@
           <p:cNvPr id="5" name="">
             <a:extLst xmlns:a="http://schemas.openxmlformats.org/drawingml/2006/main">
               <a:ext uri="{FF2B5EF4-FFF2-40B4-BE49-F238E27FC236}">
-                <a16:creationId xmlns:a16="http://schemas.microsoft.com/office/drawing/2014/main" id="{1EB2E3D6-E9B6-4B3F-AD80-60F9CE1135E1}"/>
+                <a16:creationId xmlns:a16="http://schemas.microsoft.com/office/drawing/2014/main" id="{274136A5-7B26-4826-8A94-84BE7E62C513}"/>
               </a:ext>
             </a:extLst>
           </p:cNvPr>
@@ -11628,7 +12260,7 @@
           <p:cNvPr id="6" name="">
             <a:extLst xmlns:a="http://schemas.openxmlformats.org/drawingml/2006/main">
               <a:ext uri="{FF2B5EF4-FFF2-40B4-BE49-F238E27FC236}">
-                <a16:creationId xmlns:a16="http://schemas.microsoft.com/office/drawing/2014/main" id="{39810B8A-FF04-4457-BE09-CC104106BA93}"/>
+                <a16:creationId xmlns:a16="http://schemas.microsoft.com/office/drawing/2014/main" id="{D0667F08-E7AA-4B38-A338-D03C9AA4BACD}"/>
               </a:ext>
             </a:extLst>
           </p:cNvPr>
@@ -11686,7 +12318,7 @@
           <p:cNvPr id="7" name="">
             <a:extLst xmlns:a="http://schemas.openxmlformats.org/drawingml/2006/main">
               <a:ext uri="{FF2B5EF4-FFF2-40B4-BE49-F238E27FC236}">
-                <a16:creationId xmlns:a16="http://schemas.microsoft.com/office/drawing/2014/main" id="{151CDCAF-36BB-4CB6-AAB7-B1B98596603F}"/>
+                <a16:creationId xmlns:a16="http://schemas.microsoft.com/office/drawing/2014/main" id="{7A952E5E-6CC9-43B4-BA02-7F6048575C14}"/>
               </a:ext>
             </a:extLst>
           </p:cNvPr>
@@ -11725,7 +12357,7 @@
           <p:nvPr/>
         </p:nvPicPr>
         <p:blipFill>
-          <a:blip xmlns:r="http://schemas.openxmlformats.org/officeDocument/2006/relationships" xmlns:a="http://schemas.openxmlformats.org/drawingml/2006/main" r:embed="Re8fa4fd6e02c4c75"/>
+          <a:blip xmlns:r="http://schemas.openxmlformats.org/officeDocument/2006/relationships" xmlns:a="http://schemas.openxmlformats.org/drawingml/2006/main" r:embed="R4c815d8ae236464b"/>
           <a:stretch xmlns:a="http://schemas.openxmlformats.org/drawingml/2006/main"/>
         </p:blipFill>
         <p:spPr>
@@ -11743,7 +12375,7 @@
           <p:cNvPr id="9" name="">
             <a:extLst xmlns:a="http://schemas.openxmlformats.org/drawingml/2006/main">
               <a:ext uri="{FF2B5EF4-FFF2-40B4-BE49-F238E27FC236}">
-                <a16:creationId xmlns:a16="http://schemas.microsoft.com/office/drawing/2014/main" id="{169D90FF-7C66-45FA-B413-5E1DC6ACAAFA}"/>
+                <a16:creationId xmlns:a16="http://schemas.microsoft.com/office/drawing/2014/main" id="{262170B5-40AE-4763-AFF9-89D716A079A0}"/>
               </a:ext>
             </a:extLst>
           </p:cNvPr>
@@ -11801,7 +12433,7 @@
           <p:cNvPr id="10" name="">
             <a:extLst xmlns:a="http://schemas.openxmlformats.org/drawingml/2006/main">
               <a:ext uri="{FF2B5EF4-FFF2-40B4-BE49-F238E27FC236}">
-                <a16:creationId xmlns:a16="http://schemas.microsoft.com/office/drawing/2014/main" id="{736A7354-6BE0-4C80-ACBF-39AF4806EA60}"/>
+                <a16:creationId xmlns:a16="http://schemas.microsoft.com/office/drawing/2014/main" id="{461D3258-09DF-457E-B753-F3349E948B10}"/>
               </a:ext>
             </a:extLst>
           </p:cNvPr>
@@ -11863,7 +12495,7 @@
           <p:nvPr/>
         </p:nvPicPr>
         <p:blipFill>
-          <a:blip xmlns:r="http://schemas.openxmlformats.org/officeDocument/2006/relationships" xmlns:a="http://schemas.openxmlformats.org/drawingml/2006/main" r:embed="R3ac5afcae91a4691"/>
+          <a:blip xmlns:r="http://schemas.openxmlformats.org/officeDocument/2006/relationships" xmlns:a="http://schemas.openxmlformats.org/drawingml/2006/main" r:embed="Redff347423004ed6"/>
           <a:stretch xmlns:a="http://schemas.openxmlformats.org/drawingml/2006/main"/>
         </p:blipFill>
         <p:spPr>
@@ -11881,7 +12513,7 @@
           <p:cNvPr id="12" name="">
             <a:extLst xmlns:a="http://schemas.openxmlformats.org/drawingml/2006/main">
               <a:ext uri="{FF2B5EF4-FFF2-40B4-BE49-F238E27FC236}">
-                <a16:creationId xmlns:a16="http://schemas.microsoft.com/office/drawing/2014/main" id="{D6A85F69-299E-4990-90E9-B9817096BD4C}"/>
+                <a16:creationId xmlns:a16="http://schemas.microsoft.com/office/drawing/2014/main" id="{AE089802-CA3E-4DF5-BAEB-186D3B0ADE6E}"/>
               </a:ext>
             </a:extLst>
           </p:cNvPr>
@@ -11920,7 +12552,7 @@
           <p:nvPr/>
         </p:nvPicPr>
         <p:blipFill>
-          <a:blip xmlns:r="http://schemas.openxmlformats.org/officeDocument/2006/relationships" xmlns:a="http://schemas.openxmlformats.org/drawingml/2006/main" r:embed="Rd5d72cfc42704a6a"/>
+          <a:blip xmlns:r="http://schemas.openxmlformats.org/officeDocument/2006/relationships" xmlns:a="http://schemas.openxmlformats.org/drawingml/2006/main" r:embed="R2c4454095ad74d30"/>
           <a:stretch xmlns:a="http://schemas.openxmlformats.org/drawingml/2006/main"/>
         </p:blipFill>
         <p:spPr>
@@ -11938,7 +12570,7 @@
           <p:cNvPr id="14" name="">
             <a:extLst xmlns:a="http://schemas.openxmlformats.org/drawingml/2006/main">
               <a:ext uri="{FF2B5EF4-FFF2-40B4-BE49-F238E27FC236}">
-                <a16:creationId xmlns:a16="http://schemas.microsoft.com/office/drawing/2014/main" id="{60973B92-C4E1-43CE-BA90-57208A2C37A3}"/>
+                <a16:creationId xmlns:a16="http://schemas.microsoft.com/office/drawing/2014/main" id="{063C486E-69E1-48AC-8330-50AC4BEAD6DD}"/>
               </a:ext>
             </a:extLst>
           </p:cNvPr>
@@ -11996,7 +12628,7 @@
           <p:cNvPr id="15" name="">
             <a:extLst xmlns:a="http://schemas.openxmlformats.org/drawingml/2006/main">
               <a:ext uri="{FF2B5EF4-FFF2-40B4-BE49-F238E27FC236}">
-                <a16:creationId xmlns:a16="http://schemas.microsoft.com/office/drawing/2014/main" id="{C88AA685-99A5-4D4E-A080-68DDB738A770}"/>
+                <a16:creationId xmlns:a16="http://schemas.microsoft.com/office/drawing/2014/main" id="{A7F8A41C-7EF4-4CB0-9A88-EE3FB4B1A596}"/>
               </a:ext>
             </a:extLst>
           </p:cNvPr>
@@ -12058,7 +12690,7 @@
           <p:nvPr/>
         </p:nvPicPr>
         <p:blipFill>
-          <a:blip xmlns:r="http://schemas.openxmlformats.org/officeDocument/2006/relationships" xmlns:a="http://schemas.openxmlformats.org/drawingml/2006/main" r:embed="Rc621dc1bc11b4942"/>
+          <a:blip xmlns:r="http://schemas.openxmlformats.org/officeDocument/2006/relationships" xmlns:a="http://schemas.openxmlformats.org/drawingml/2006/main" r:embed="R9fdaea1b49e64c27"/>
           <a:stretch xmlns:a="http://schemas.openxmlformats.org/drawingml/2006/main"/>
         </p:blipFill>
         <p:spPr>
@@ -12076,7 +12708,7 @@
           <p:cNvPr id="17" name="">
             <a:extLst xmlns:a="http://schemas.openxmlformats.org/drawingml/2006/main">
               <a:ext uri="{FF2B5EF4-FFF2-40B4-BE49-F238E27FC236}">
-                <a16:creationId xmlns:a16="http://schemas.microsoft.com/office/drawing/2014/main" id="{98C820D9-52B9-4483-8C7D-2C1648EB9486}"/>
+                <a16:creationId xmlns:a16="http://schemas.microsoft.com/office/drawing/2014/main" id="{0C040044-A71F-4BC7-BDCD-A3920C4F05AA}"/>
               </a:ext>
             </a:extLst>
           </p:cNvPr>
@@ -12115,7 +12747,7 @@
           <p:nvPr/>
         </p:nvPicPr>
         <p:blipFill>
-          <a:blip xmlns:r="http://schemas.openxmlformats.org/officeDocument/2006/relationships" xmlns:a="http://schemas.openxmlformats.org/drawingml/2006/main" r:embed="Ra87ab58381f24897"/>
+          <a:blip xmlns:r="http://schemas.openxmlformats.org/officeDocument/2006/relationships" xmlns:a="http://schemas.openxmlformats.org/drawingml/2006/main" r:embed="R8d8872289d404465"/>
           <a:stretch xmlns:a="http://schemas.openxmlformats.org/drawingml/2006/main"/>
         </p:blipFill>
         <p:spPr>
@@ -12133,7 +12765,7 @@
           <p:cNvPr id="19" name="">
             <a:extLst xmlns:a="http://schemas.openxmlformats.org/drawingml/2006/main">
               <a:ext uri="{FF2B5EF4-FFF2-40B4-BE49-F238E27FC236}">
-                <a16:creationId xmlns:a16="http://schemas.microsoft.com/office/drawing/2014/main" id="{AC48E7D6-FDDC-44DE-934A-E43D565D064A}"/>
+                <a16:creationId xmlns:a16="http://schemas.microsoft.com/office/drawing/2014/main" id="{5D26266D-B783-481D-9EC3-A2E5A1E05528}"/>
               </a:ext>
             </a:extLst>
           </p:cNvPr>
@@ -12191,7 +12823,7 @@
           <p:cNvPr id="20" name="">
             <a:extLst xmlns:a="http://schemas.openxmlformats.org/drawingml/2006/main">
               <a:ext uri="{FF2B5EF4-FFF2-40B4-BE49-F238E27FC236}">
-                <a16:creationId xmlns:a16="http://schemas.microsoft.com/office/drawing/2014/main" id="{0F172789-BEA3-42C8-92E4-2D3CCE6F7A33}"/>
+                <a16:creationId xmlns:a16="http://schemas.microsoft.com/office/drawing/2014/main" id="{60C79B9A-4D09-4246-842A-82091D5BB8ED}"/>
               </a:ext>
             </a:extLst>
           </p:cNvPr>
@@ -12253,7 +12885,7 @@
           <p:nvPr/>
         </p:nvPicPr>
         <p:blipFill>
-          <a:blip xmlns:r="http://schemas.openxmlformats.org/officeDocument/2006/relationships" xmlns:a="http://schemas.openxmlformats.org/drawingml/2006/main" r:embed="R34958b3c4fa6460a"/>
+          <a:blip xmlns:r="http://schemas.openxmlformats.org/officeDocument/2006/relationships" xmlns:a="http://schemas.openxmlformats.org/drawingml/2006/main" r:embed="R89c03164095546de"/>
           <a:stretch xmlns:a="http://schemas.openxmlformats.org/drawingml/2006/main"/>
         </p:blipFill>
         <p:spPr>
@@ -12271,7 +12903,7 @@
           <p:cNvPr id="22" name="">
             <a:extLst xmlns:a="http://schemas.openxmlformats.org/drawingml/2006/main">
               <a:ext uri="{FF2B5EF4-FFF2-40B4-BE49-F238E27FC236}">
-                <a16:creationId xmlns:a16="http://schemas.microsoft.com/office/drawing/2014/main" id="{164866BD-866D-4729-892C-4D348EDC461E}"/>
+                <a16:creationId xmlns:a16="http://schemas.microsoft.com/office/drawing/2014/main" id="{E709468B-D880-464F-808A-1535B4805178}"/>
               </a:ext>
             </a:extLst>
           </p:cNvPr>
@@ -12291,11 +12923,11 @@
             </a:avLst>
           </a:prstGeom>
           <a:solidFill xmlns:a="http://schemas.openxmlformats.org/drawingml/2006/main">
-            <a:srgbClr val="F5F1FB"/>
+            <a:srgbClr val="FFF7E6"/>
           </a:solidFill>
           <a:ln xmlns:a="http://schemas.openxmlformats.org/drawingml/2006/main" w="19050">
             <a:solidFill>
-              <a:srgbClr val="6F4B9B"/>
+              <a:srgbClr val="C98A16"/>
             </a:solidFill>
             <a:prstDash val="solid"/>
           </a:ln>
@@ -12310,7 +12942,7 @@
           <p:nvPr/>
         </p:nvPicPr>
         <p:blipFill>
-          <a:blip xmlns:r="http://schemas.openxmlformats.org/officeDocument/2006/relationships" xmlns:a="http://schemas.openxmlformats.org/drawingml/2006/main" r:embed="R6704e4e315db4737"/>
+          <a:blip xmlns:r="http://schemas.openxmlformats.org/officeDocument/2006/relationships" xmlns:a="http://schemas.openxmlformats.org/drawingml/2006/main" r:embed="R2e70e7f8f3c4487a"/>
           <a:stretch xmlns:a="http://schemas.openxmlformats.org/drawingml/2006/main"/>
         </p:blipFill>
         <p:spPr>
@@ -12328,7 +12960,7 @@
           <p:cNvPr id="24" name="">
             <a:extLst xmlns:a="http://schemas.openxmlformats.org/drawingml/2006/main">
               <a:ext uri="{FF2B5EF4-FFF2-40B4-BE49-F238E27FC236}">
-                <a16:creationId xmlns:a16="http://schemas.microsoft.com/office/drawing/2014/main" id="{11B13E89-DDD3-4CE2-9C25-6BA86D708872}"/>
+                <a16:creationId xmlns:a16="http://schemas.microsoft.com/office/drawing/2014/main" id="{A20CEE8A-D78D-44CC-8FCA-F24971AC02D1}"/>
               </a:ext>
             </a:extLst>
           </p:cNvPr>
@@ -12386,7 +13018,7 @@
           <p:cNvPr id="25" name="">
             <a:extLst xmlns:a="http://schemas.openxmlformats.org/drawingml/2006/main">
               <a:ext uri="{FF2B5EF4-FFF2-40B4-BE49-F238E27FC236}">
-                <a16:creationId xmlns:a16="http://schemas.microsoft.com/office/drawing/2014/main" id="{AA706939-C6E0-4A17-AF13-DFC6D8E17B47}"/>
+                <a16:creationId xmlns:a16="http://schemas.microsoft.com/office/drawing/2014/main" id="{420552F7-F9D4-484C-B4B5-E9B15B0373CF}"/>
               </a:ext>
             </a:extLst>
           </p:cNvPr>
@@ -12448,7 +13080,7 @@
           <p:nvPr/>
         </p:nvPicPr>
         <p:blipFill>
-          <a:blip xmlns:r="http://schemas.openxmlformats.org/officeDocument/2006/relationships" xmlns:a="http://schemas.openxmlformats.org/drawingml/2006/main" r:embed="Rf70741d78ddb4677"/>
+          <a:blip xmlns:r="http://schemas.openxmlformats.org/officeDocument/2006/relationships" xmlns:a="http://schemas.openxmlformats.org/drawingml/2006/main" r:embed="R38f030967bf84346"/>
           <a:stretch xmlns:a="http://schemas.openxmlformats.org/drawingml/2006/main"/>
         </p:blipFill>
         <p:spPr>
@@ -12466,7 +13098,7 @@
           <p:cNvPr id="27" name="">
             <a:extLst xmlns:a="http://schemas.openxmlformats.org/drawingml/2006/main">
               <a:ext uri="{FF2B5EF4-FFF2-40B4-BE49-F238E27FC236}">
-                <a16:creationId xmlns:a16="http://schemas.microsoft.com/office/drawing/2014/main" id="{0B23DC31-8624-40F5-B5DE-EB399421B0FF}"/>
+                <a16:creationId xmlns:a16="http://schemas.microsoft.com/office/drawing/2014/main" id="{77D3EA9E-F970-4C20-85DB-3FF3BBC7EE09}"/>
               </a:ext>
             </a:extLst>
           </p:cNvPr>
@@ -12524,7 +13156,7 @@
           <p:cNvPr id="28" name="slide-number-5">
             <a:extLst xmlns:a="http://schemas.openxmlformats.org/drawingml/2006/main">
               <a:ext uri="{FF2B5EF4-FFF2-40B4-BE49-F238E27FC236}">
-                <a16:creationId xmlns:a16="http://schemas.microsoft.com/office/drawing/2014/main" id="{9DF95364-81B4-4A3E-A7D2-175464A0972B}"/>
+                <a16:creationId xmlns:a16="http://schemas.microsoft.com/office/drawing/2014/main" id="{50436423-91BD-4212-969C-7B917CF39687}"/>
               </a:ext>
             </a:extLst>
           </p:cNvPr>
@@ -12582,7 +13214,7 @@
     </p:spTree>
     <p:extLst>
       <p:ext uri="{BB962C8B-B14F-4D97-AF65-F5344CB8AC3E}">
-        <p14:creationId xmlns:p14="http://schemas.microsoft.com/office/powerpoint/2010/main" val="823692364"/>
+        <p14:creationId xmlns:p14="http://schemas.microsoft.com/office/powerpoint/2010/main" val="1235652779"/>
       </p:ext>
     </p:extLst>
   </p:cSld>
@@ -12613,7 +13245,7 @@
           <p:cNvPr id="23" name="title-T1">
             <a:extLst xmlns:a="http://schemas.openxmlformats.org/drawingml/2006/main">
               <a:ext uri="{FF2B5EF4-FFF2-40B4-BE49-F238E27FC236}">
-                <a16:creationId xmlns:a16="http://schemas.microsoft.com/office/drawing/2014/main" id="{B8739721-84D8-4AAE-AE82-20F01BA9A772}"/>
+                <a16:creationId xmlns:a16="http://schemas.microsoft.com/office/drawing/2014/main" id="{4D1222CF-626D-4B63-8357-AA9FC606288C}"/>
               </a:ext>
             </a:extLst>
           </p:cNvPr>
@@ -12677,7 +13309,7 @@
           <p:cNvPr id="2" name="subtitle-T1">
             <a:extLst xmlns:a="http://schemas.openxmlformats.org/drawingml/2006/main">
               <a:ext uri="{FF2B5EF4-FFF2-40B4-BE49-F238E27FC236}">
-                <a16:creationId xmlns:a16="http://schemas.microsoft.com/office/drawing/2014/main" id="{16A2B812-CC04-4EC9-B583-827F8B419423}"/>
+                <a16:creationId xmlns:a16="http://schemas.microsoft.com/office/drawing/2014/main" id="{4C00CAA6-5092-4698-9B71-FC33252F545B}"/>
               </a:ext>
             </a:extLst>
           </p:cNvPr>
@@ -12737,7 +13369,7 @@
           <p:cNvPr id="3" name="">
             <a:extLst xmlns:a="http://schemas.openxmlformats.org/drawingml/2006/main">
               <a:ext uri="{FF2B5EF4-FFF2-40B4-BE49-F238E27FC236}">
-                <a16:creationId xmlns:a16="http://schemas.microsoft.com/office/drawing/2014/main" id="{37CB6076-7EEE-4D4D-8134-83FD3EC5BC8E}"/>
+                <a16:creationId xmlns:a16="http://schemas.microsoft.com/office/drawing/2014/main" id="{5FB6EDD5-6163-46E4-9C60-F3FB142FF97B}"/>
               </a:ext>
             </a:extLst>
           </p:cNvPr>
@@ -12795,7 +13427,7 @@
           <p:cNvPr id="4" name="">
             <a:extLst xmlns:a="http://schemas.openxmlformats.org/drawingml/2006/main">
               <a:ext uri="{FF2B5EF4-FFF2-40B4-BE49-F238E27FC236}">
-                <a16:creationId xmlns:a16="http://schemas.microsoft.com/office/drawing/2014/main" id="{6C949FCB-0810-40C8-94C9-B0DFFC9F0BD3}"/>
+                <a16:creationId xmlns:a16="http://schemas.microsoft.com/office/drawing/2014/main" id="{3CFCAD90-EF7A-4241-9191-91EE916C446F}"/>
               </a:ext>
             </a:extLst>
           </p:cNvPr>
@@ -12857,7 +13489,7 @@
           <p:cNvPr id="5" name="">
             <a:extLst xmlns:a="http://schemas.openxmlformats.org/drawingml/2006/main">
               <a:ext uri="{FF2B5EF4-FFF2-40B4-BE49-F238E27FC236}">
-                <a16:creationId xmlns:a16="http://schemas.microsoft.com/office/drawing/2014/main" id="{E132B48B-063C-4EF9-AAF1-A941EFACA344}"/>
+                <a16:creationId xmlns:a16="http://schemas.microsoft.com/office/drawing/2014/main" id="{0EBAC60A-4FED-4DA8-ADA8-7DDC0429797F}"/>
               </a:ext>
             </a:extLst>
           </p:cNvPr>
@@ -12915,7 +13547,7 @@
           <p:cNvPr id="6" name="">
             <a:extLst xmlns:a="http://schemas.openxmlformats.org/drawingml/2006/main">
               <a:ext uri="{FF2B5EF4-FFF2-40B4-BE49-F238E27FC236}">
-                <a16:creationId xmlns:a16="http://schemas.microsoft.com/office/drawing/2014/main" id="{460760DA-D7A9-48A6-B014-86E952242DAD}"/>
+                <a16:creationId xmlns:a16="http://schemas.microsoft.com/office/drawing/2014/main" id="{C09CFD4C-86AD-4041-8BFA-665790D4B38D}"/>
               </a:ext>
             </a:extLst>
           </p:cNvPr>
@@ -12946,7 +13578,7 @@
           <p:cNvPr id="7" name="">
             <a:extLst xmlns:a="http://schemas.openxmlformats.org/drawingml/2006/main">
               <a:ext uri="{FF2B5EF4-FFF2-40B4-BE49-F238E27FC236}">
-                <a16:creationId xmlns:a16="http://schemas.microsoft.com/office/drawing/2014/main" id="{8EBE7AB4-8C16-485F-B6CF-C768B1DE99B5}"/>
+                <a16:creationId xmlns:a16="http://schemas.microsoft.com/office/drawing/2014/main" id="{69E4ED77-29EB-426C-8759-A877482746DC}"/>
               </a:ext>
             </a:extLst>
           </p:cNvPr>
@@ -13008,7 +13640,7 @@
           <p:cNvPr id="8" name="">
             <a:extLst xmlns:a="http://schemas.openxmlformats.org/drawingml/2006/main">
               <a:ext uri="{FF2B5EF4-FFF2-40B4-BE49-F238E27FC236}">
-                <a16:creationId xmlns:a16="http://schemas.microsoft.com/office/drawing/2014/main" id="{2F13434A-57DD-4E75-A847-86C1C372F268}"/>
+                <a16:creationId xmlns:a16="http://schemas.microsoft.com/office/drawing/2014/main" id="{C7D31309-0884-4F01-A20F-2557201A02CD}"/>
               </a:ext>
             </a:extLst>
           </p:cNvPr>
@@ -13066,7 +13698,7 @@
           <p:cNvPr id="9" name="">
             <a:extLst xmlns:a="http://schemas.openxmlformats.org/drawingml/2006/main">
               <a:ext uri="{FF2B5EF4-FFF2-40B4-BE49-F238E27FC236}">
-                <a16:creationId xmlns:a16="http://schemas.microsoft.com/office/drawing/2014/main" id="{82B1E02B-3D6F-496D-8239-012A28F9A6EE}"/>
+                <a16:creationId xmlns:a16="http://schemas.microsoft.com/office/drawing/2014/main" id="{94B725D9-3FFF-4CFA-9116-C3F867BAC886}"/>
               </a:ext>
             </a:extLst>
           </p:cNvPr>
@@ -13097,7 +13729,7 @@
           <p:cNvPr id="10" name="">
             <a:extLst xmlns:a="http://schemas.openxmlformats.org/drawingml/2006/main">
               <a:ext uri="{FF2B5EF4-FFF2-40B4-BE49-F238E27FC236}">
-                <a16:creationId xmlns:a16="http://schemas.microsoft.com/office/drawing/2014/main" id="{54760522-1242-4926-98E0-E71EA56D2A0A}"/>
+                <a16:creationId xmlns:a16="http://schemas.microsoft.com/office/drawing/2014/main" id="{C717C926-9765-4432-A87B-06882C3E08D4}"/>
               </a:ext>
             </a:extLst>
           </p:cNvPr>
@@ -13159,7 +13791,7 @@
           <p:cNvPr id="11" name="">
             <a:extLst xmlns:a="http://schemas.openxmlformats.org/drawingml/2006/main">
               <a:ext uri="{FF2B5EF4-FFF2-40B4-BE49-F238E27FC236}">
-                <a16:creationId xmlns:a16="http://schemas.microsoft.com/office/drawing/2014/main" id="{9513C224-3ED1-443B-97A6-CC339DEDF05D}"/>
+                <a16:creationId xmlns:a16="http://schemas.microsoft.com/office/drawing/2014/main" id="{0D48A2C7-B565-4526-8C8B-42EAF80E30C5}"/>
               </a:ext>
             </a:extLst>
           </p:cNvPr>
@@ -13217,7 +13849,7 @@
           <p:cNvPr id="12" name="">
             <a:extLst xmlns:a="http://schemas.openxmlformats.org/drawingml/2006/main">
               <a:ext uri="{FF2B5EF4-FFF2-40B4-BE49-F238E27FC236}">
-                <a16:creationId xmlns:a16="http://schemas.microsoft.com/office/drawing/2014/main" id="{11DB0977-C924-47E3-AEB9-8723FFAB6343}"/>
+                <a16:creationId xmlns:a16="http://schemas.microsoft.com/office/drawing/2014/main" id="{E3EB2052-269B-47E2-9CFC-C9CD6CC3ABE8}"/>
               </a:ext>
             </a:extLst>
           </p:cNvPr>
@@ -13248,7 +13880,7 @@
           <p:cNvPr id="13" name="">
             <a:extLst xmlns:a="http://schemas.openxmlformats.org/drawingml/2006/main">
               <a:ext uri="{FF2B5EF4-FFF2-40B4-BE49-F238E27FC236}">
-                <a16:creationId xmlns:a16="http://schemas.microsoft.com/office/drawing/2014/main" id="{81EE7B2E-5170-4638-8130-D081C4258B0E}"/>
+                <a16:creationId xmlns:a16="http://schemas.microsoft.com/office/drawing/2014/main" id="{05CD28E7-2331-448D-B61D-63F969C37CB9}"/>
               </a:ext>
             </a:extLst>
           </p:cNvPr>
@@ -13310,7 +13942,7 @@
           <p:cNvPr id="14" name="">
             <a:extLst xmlns:a="http://schemas.openxmlformats.org/drawingml/2006/main">
               <a:ext uri="{FF2B5EF4-FFF2-40B4-BE49-F238E27FC236}">
-                <a16:creationId xmlns:a16="http://schemas.microsoft.com/office/drawing/2014/main" id="{F9089E52-6FC0-4431-8E0F-139856A88712}"/>
+                <a16:creationId xmlns:a16="http://schemas.microsoft.com/office/drawing/2014/main" id="{5DD79570-5481-41BB-B3D9-6AF1BF3CAAC7}"/>
               </a:ext>
             </a:extLst>
           </p:cNvPr>
@@ -13368,7 +14000,7 @@
           <p:cNvPr id="15" name="">
             <a:extLst xmlns:a="http://schemas.openxmlformats.org/drawingml/2006/main">
               <a:ext uri="{FF2B5EF4-FFF2-40B4-BE49-F238E27FC236}">
-                <a16:creationId xmlns:a16="http://schemas.microsoft.com/office/drawing/2014/main" id="{7799DE99-AE9A-4FE1-8F44-62D6387000B1}"/>
+                <a16:creationId xmlns:a16="http://schemas.microsoft.com/office/drawing/2014/main" id="{D856B321-84DC-43B4-BFD1-DE02FF0F02FD}"/>
               </a:ext>
             </a:extLst>
           </p:cNvPr>
@@ -13399,7 +14031,7 @@
           <p:cNvPr id="16" name="">
             <a:extLst xmlns:a="http://schemas.openxmlformats.org/drawingml/2006/main">
               <a:ext uri="{FF2B5EF4-FFF2-40B4-BE49-F238E27FC236}">
-                <a16:creationId xmlns:a16="http://schemas.microsoft.com/office/drawing/2014/main" id="{B5FA8AF1-E2A1-45D6-A31E-B4817E16E0E9}"/>
+                <a16:creationId xmlns:a16="http://schemas.microsoft.com/office/drawing/2014/main" id="{CF153E27-5081-448D-A776-21220C539774}"/>
               </a:ext>
             </a:extLst>
           </p:cNvPr>
@@ -13461,7 +14093,7 @@
           <p:cNvPr id="17" name="">
             <a:extLst xmlns:a="http://schemas.openxmlformats.org/drawingml/2006/main">
               <a:ext uri="{FF2B5EF4-FFF2-40B4-BE49-F238E27FC236}">
-                <a16:creationId xmlns:a16="http://schemas.microsoft.com/office/drawing/2014/main" id="{AC5046AE-72B3-44B6-8C81-D8B59AC73383}"/>
+                <a16:creationId xmlns:a16="http://schemas.microsoft.com/office/drawing/2014/main" id="{FDE0C572-485F-45C7-A360-D03FCB769490}"/>
               </a:ext>
             </a:extLst>
           </p:cNvPr>
@@ -13519,7 +14151,7 @@
           <p:cNvPr id="18" name="">
             <a:extLst xmlns:a="http://schemas.openxmlformats.org/drawingml/2006/main">
               <a:ext uri="{FF2B5EF4-FFF2-40B4-BE49-F238E27FC236}">
-                <a16:creationId xmlns:a16="http://schemas.microsoft.com/office/drawing/2014/main" id="{E5E43097-EC11-4772-A6B3-7ABEF252C953}"/>
+                <a16:creationId xmlns:a16="http://schemas.microsoft.com/office/drawing/2014/main" id="{5E22FF1F-56AD-4567-BAA4-45769B8C8206}"/>
               </a:ext>
             </a:extLst>
           </p:cNvPr>
@@ -13554,7 +14186,7 @@
           <p:cNvPr id="19" name="">
             <a:extLst xmlns:a="http://schemas.openxmlformats.org/drawingml/2006/main">
               <a:ext uri="{FF2B5EF4-FFF2-40B4-BE49-F238E27FC236}">
-                <a16:creationId xmlns:a16="http://schemas.microsoft.com/office/drawing/2014/main" id="{297C6910-1267-483C-BF0C-FD25DD4BC87D}"/>
+                <a16:creationId xmlns:a16="http://schemas.microsoft.com/office/drawing/2014/main" id="{BB983C2A-1819-4FFD-84F1-AD6E08C3E37D}"/>
               </a:ext>
             </a:extLst>
           </p:cNvPr>
@@ -13612,7 +14244,7 @@
           <p:cNvPr id="20" name="code-sample">
             <a:extLst xmlns:a="http://schemas.openxmlformats.org/drawingml/2006/main">
               <a:ext uri="{FF2B5EF4-FFF2-40B4-BE49-F238E27FC236}">
-                <a16:creationId xmlns:a16="http://schemas.microsoft.com/office/drawing/2014/main" id="{35A590EB-C62E-4C1B-976A-449785D8BE0F}"/>
+                <a16:creationId xmlns:a16="http://schemas.microsoft.com/office/drawing/2014/main" id="{08CAA20A-1EB1-4A24-87DA-77FD1FB29DB4}"/>
               </a:ext>
             </a:extLst>
           </p:cNvPr>
@@ -13905,7 +14537,7 @@
           <p:cNvPr id="21" name="">
             <a:extLst xmlns:a="http://schemas.openxmlformats.org/drawingml/2006/main">
               <a:ext uri="{FF2B5EF4-FFF2-40B4-BE49-F238E27FC236}">
-                <a16:creationId xmlns:a16="http://schemas.microsoft.com/office/drawing/2014/main" id="{6C8075D0-9710-453D-A253-BC522350F215}"/>
+                <a16:creationId xmlns:a16="http://schemas.microsoft.com/office/drawing/2014/main" id="{9614F523-6919-417E-89C1-266E386794A3}"/>
               </a:ext>
             </a:extLst>
           </p:cNvPr>
@@ -13963,7 +14595,7 @@
           <p:cNvPr id="22" name="slide-number-6">
             <a:extLst xmlns:a="http://schemas.openxmlformats.org/drawingml/2006/main">
               <a:ext uri="{FF2B5EF4-FFF2-40B4-BE49-F238E27FC236}">
-                <a16:creationId xmlns:a16="http://schemas.microsoft.com/office/drawing/2014/main" id="{D5133256-23A8-4910-B730-2EBEAECA994B}"/>
+                <a16:creationId xmlns:a16="http://schemas.microsoft.com/office/drawing/2014/main" id="{DEE20350-5485-4C29-A818-6A5A9E1D7A1A}"/>
               </a:ext>
             </a:extLst>
           </p:cNvPr>
@@ -14021,7 +14653,7 @@
     </p:spTree>
     <p:extLst>
       <p:ext uri="{BB962C8B-B14F-4D97-AF65-F5344CB8AC3E}">
-        <p14:creationId xmlns:p14="http://schemas.microsoft.com/office/powerpoint/2010/main" val="1372998777"/>
+        <p14:creationId xmlns:p14="http://schemas.microsoft.com/office/powerpoint/2010/main" val="1236018948"/>
       </p:ext>
     </p:extLst>
   </p:cSld>
@@ -14052,7 +14684,7 @@
           <p:cNvPr id="20" name="title-T1">
             <a:extLst xmlns:a="http://schemas.openxmlformats.org/drawingml/2006/main">
               <a:ext uri="{FF2B5EF4-FFF2-40B4-BE49-F238E27FC236}">
-                <a16:creationId xmlns:a16="http://schemas.microsoft.com/office/drawing/2014/main" id="{C97752E2-CA7C-4E6A-8C8F-3764217948E6}"/>
+                <a16:creationId xmlns:a16="http://schemas.microsoft.com/office/drawing/2014/main" id="{23D818BF-2FB4-47EC-817F-546FE36FF092}"/>
               </a:ext>
             </a:extLst>
           </p:cNvPr>
@@ -14116,7 +14748,7 @@
           <p:cNvPr id="2" name="subtitle-T1">
             <a:extLst xmlns:a="http://schemas.openxmlformats.org/drawingml/2006/main">
               <a:ext uri="{FF2B5EF4-FFF2-40B4-BE49-F238E27FC236}">
-                <a16:creationId xmlns:a16="http://schemas.microsoft.com/office/drawing/2014/main" id="{A2C2DE0B-249F-49E4-A00E-F6557D282F62}"/>
+                <a16:creationId xmlns:a16="http://schemas.microsoft.com/office/drawing/2014/main" id="{B3015A30-6E55-43D4-9D25-1CB4F242217A}"/>
               </a:ext>
             </a:extLst>
           </p:cNvPr>
@@ -14180,7 +14812,7 @@
           <p:nvPr/>
         </p:nvPicPr>
         <p:blipFill>
-          <a:blip xmlns:r="http://schemas.openxmlformats.org/officeDocument/2006/relationships" xmlns:a="http://schemas.openxmlformats.org/drawingml/2006/main" r:embed="R0c253ec02ab64cf3"/>
+          <a:blip xmlns:r="http://schemas.openxmlformats.org/officeDocument/2006/relationships" xmlns:a="http://schemas.openxmlformats.org/drawingml/2006/main" r:embed="R04db1f029fd34e52"/>
           <a:stretch xmlns:a="http://schemas.openxmlformats.org/drawingml/2006/main"/>
         </p:blipFill>
         <p:spPr>
@@ -14202,7 +14834,7 @@
           <p:nvPr/>
         </p:nvPicPr>
         <p:blipFill>
-          <a:blip xmlns:r="http://schemas.openxmlformats.org/officeDocument/2006/relationships" xmlns:a="http://schemas.openxmlformats.org/drawingml/2006/main" r:embed="Ra791f747d9924164"/>
+          <a:blip xmlns:r="http://schemas.openxmlformats.org/officeDocument/2006/relationships" xmlns:a="http://schemas.openxmlformats.org/drawingml/2006/main" r:embed="R0c2d4bd063674d8b"/>
           <a:stretch xmlns:a="http://schemas.openxmlformats.org/drawingml/2006/main"/>
         </p:blipFill>
         <p:spPr>
@@ -14220,7 +14852,7 @@
           <p:cNvPr id="5" name="">
             <a:extLst xmlns:a="http://schemas.openxmlformats.org/drawingml/2006/main">
               <a:ext uri="{FF2B5EF4-FFF2-40B4-BE49-F238E27FC236}">
-                <a16:creationId xmlns:a16="http://schemas.microsoft.com/office/drawing/2014/main" id="{DCB486A3-32BD-44AB-A9E9-A960873493D7}"/>
+                <a16:creationId xmlns:a16="http://schemas.microsoft.com/office/drawing/2014/main" id="{025C8E34-3C70-47BB-A7AE-6135E0C08C3F}"/>
               </a:ext>
             </a:extLst>
           </p:cNvPr>
@@ -14259,7 +14891,7 @@
           <p:nvPr/>
         </p:nvPicPr>
         <p:blipFill>
-          <a:blip xmlns:r="http://schemas.openxmlformats.org/officeDocument/2006/relationships" xmlns:a="http://schemas.openxmlformats.org/drawingml/2006/main" r:embed="Rdcaa7c8f961e4561"/>
+          <a:blip xmlns:r="http://schemas.openxmlformats.org/officeDocument/2006/relationships" xmlns:a="http://schemas.openxmlformats.org/drawingml/2006/main" r:embed="R8c01dc2cf0544e97"/>
           <a:stretch xmlns:a="http://schemas.openxmlformats.org/drawingml/2006/main"/>
         </p:blipFill>
         <p:spPr>
@@ -14277,7 +14909,7 @@
           <p:cNvPr id="7" name="">
             <a:extLst xmlns:a="http://schemas.openxmlformats.org/drawingml/2006/main">
               <a:ext uri="{FF2B5EF4-FFF2-40B4-BE49-F238E27FC236}">
-                <a16:creationId xmlns:a16="http://schemas.microsoft.com/office/drawing/2014/main" id="{8062FC7B-5932-41C1-A7AA-37E4017735BA}"/>
+                <a16:creationId xmlns:a16="http://schemas.microsoft.com/office/drawing/2014/main" id="{3A1DCF9B-D197-4ADC-8640-CDBD1618DA47}"/>
               </a:ext>
             </a:extLst>
           </p:cNvPr>
@@ -14335,7 +14967,7 @@
           <p:cNvPr id="8" name="">
             <a:extLst xmlns:a="http://schemas.openxmlformats.org/drawingml/2006/main">
               <a:ext uri="{FF2B5EF4-FFF2-40B4-BE49-F238E27FC236}">
-                <a16:creationId xmlns:a16="http://schemas.microsoft.com/office/drawing/2014/main" id="{2A7030D7-FB0F-4170-B459-4EBF447D9E6E}"/>
+                <a16:creationId xmlns:a16="http://schemas.microsoft.com/office/drawing/2014/main" id="{C5674453-9F51-4318-95B9-7DEAF336668F}"/>
               </a:ext>
             </a:extLst>
           </p:cNvPr>
@@ -14374,7 +15006,7 @@
           <p:nvPr/>
         </p:nvPicPr>
         <p:blipFill>
-          <a:blip xmlns:r="http://schemas.openxmlformats.org/officeDocument/2006/relationships" xmlns:a="http://schemas.openxmlformats.org/drawingml/2006/main" r:embed="R1a0ea1f9950e42e3"/>
+          <a:blip xmlns:r="http://schemas.openxmlformats.org/officeDocument/2006/relationships" xmlns:a="http://schemas.openxmlformats.org/drawingml/2006/main" r:embed="Ra9594efd1f6f48e4"/>
           <a:stretch xmlns:a="http://schemas.openxmlformats.org/drawingml/2006/main"/>
         </p:blipFill>
         <p:spPr>
@@ -14392,7 +15024,7 @@
           <p:cNvPr id="10" name="">
             <a:extLst xmlns:a="http://schemas.openxmlformats.org/drawingml/2006/main">
               <a:ext uri="{FF2B5EF4-FFF2-40B4-BE49-F238E27FC236}">
-                <a16:creationId xmlns:a16="http://schemas.microsoft.com/office/drawing/2014/main" id="{2C9C9288-7C1B-4FFD-A86A-966C6E80972E}"/>
+                <a16:creationId xmlns:a16="http://schemas.microsoft.com/office/drawing/2014/main" id="{4A1C1608-03AC-432C-9B6F-C09FEF3C07D0}"/>
               </a:ext>
             </a:extLst>
           </p:cNvPr>
@@ -14450,7 +15082,7 @@
           <p:cNvPr id="11" name="">
             <a:extLst xmlns:a="http://schemas.openxmlformats.org/drawingml/2006/main">
               <a:ext uri="{FF2B5EF4-FFF2-40B4-BE49-F238E27FC236}">
-                <a16:creationId xmlns:a16="http://schemas.microsoft.com/office/drawing/2014/main" id="{5655E902-E7B9-44EE-9B75-0018086D27C2}"/>
+                <a16:creationId xmlns:a16="http://schemas.microsoft.com/office/drawing/2014/main" id="{78725423-71E2-4396-8242-24E8856224AE}"/>
               </a:ext>
             </a:extLst>
           </p:cNvPr>
@@ -14489,7 +15121,7 @@
           <p:nvPr/>
         </p:nvPicPr>
         <p:blipFill>
-          <a:blip xmlns:r="http://schemas.openxmlformats.org/officeDocument/2006/relationships" xmlns:a="http://schemas.openxmlformats.org/drawingml/2006/main" r:embed="R3c657e80a604452e"/>
+          <a:blip xmlns:r="http://schemas.openxmlformats.org/officeDocument/2006/relationships" xmlns:a="http://schemas.openxmlformats.org/drawingml/2006/main" r:embed="Rdf5940acede149a8"/>
           <a:stretch xmlns:a="http://schemas.openxmlformats.org/drawingml/2006/main"/>
         </p:blipFill>
         <p:spPr>
@@ -14507,7 +15139,7 @@
           <p:cNvPr id="13" name="">
             <a:extLst xmlns:a="http://schemas.openxmlformats.org/drawingml/2006/main">
               <a:ext uri="{FF2B5EF4-FFF2-40B4-BE49-F238E27FC236}">
-                <a16:creationId xmlns:a16="http://schemas.microsoft.com/office/drawing/2014/main" id="{F2D4F408-4582-4047-AEA6-87FC16713430}"/>
+                <a16:creationId xmlns:a16="http://schemas.microsoft.com/office/drawing/2014/main" id="{D4226E98-F10A-4D0C-BD4C-4A20FD4E7D28}"/>
               </a:ext>
             </a:extLst>
           </p:cNvPr>
@@ -14565,7 +15197,7 @@
           <p:cNvPr id="14" name="">
             <a:extLst xmlns:a="http://schemas.openxmlformats.org/drawingml/2006/main">
               <a:ext uri="{FF2B5EF4-FFF2-40B4-BE49-F238E27FC236}">
-                <a16:creationId xmlns:a16="http://schemas.microsoft.com/office/drawing/2014/main" id="{86781613-58C1-4F75-AF5F-965DAD1D5E73}"/>
+                <a16:creationId xmlns:a16="http://schemas.microsoft.com/office/drawing/2014/main" id="{DF262601-9CD6-48D0-98FF-858674A088E7}"/>
               </a:ext>
             </a:extLst>
           </p:cNvPr>
@@ -14604,7 +15236,7 @@
           <p:nvPr/>
         </p:nvPicPr>
         <p:blipFill>
-          <a:blip xmlns:r="http://schemas.openxmlformats.org/officeDocument/2006/relationships" xmlns:a="http://schemas.openxmlformats.org/drawingml/2006/main" r:embed="Rd74611654ca0406a"/>
+          <a:blip xmlns:r="http://schemas.openxmlformats.org/officeDocument/2006/relationships" xmlns:a="http://schemas.openxmlformats.org/drawingml/2006/main" r:embed="Rece383ade4fe4dae"/>
           <a:stretch xmlns:a="http://schemas.openxmlformats.org/drawingml/2006/main"/>
         </p:blipFill>
         <p:spPr>
@@ -14622,7 +15254,7 @@
           <p:cNvPr id="16" name="">
             <a:extLst xmlns:a="http://schemas.openxmlformats.org/drawingml/2006/main">
               <a:ext uri="{FF2B5EF4-FFF2-40B4-BE49-F238E27FC236}">
-                <a16:creationId xmlns:a16="http://schemas.microsoft.com/office/drawing/2014/main" id="{3254F705-0EEA-4282-923F-6B2A85282A97}"/>
+                <a16:creationId xmlns:a16="http://schemas.microsoft.com/office/drawing/2014/main" id="{725C084F-0F06-444D-8E5A-CB5B4539DB2A}"/>
               </a:ext>
             </a:extLst>
           </p:cNvPr>
@@ -14680,7 +15312,7 @@
           <p:cNvPr id="17" name="">
             <a:extLst xmlns:a="http://schemas.openxmlformats.org/drawingml/2006/main">
               <a:ext uri="{FF2B5EF4-FFF2-40B4-BE49-F238E27FC236}">
-                <a16:creationId xmlns:a16="http://schemas.microsoft.com/office/drawing/2014/main" id="{D9A6339A-2B11-498C-BD6E-A39689AF3E80}"/>
+                <a16:creationId xmlns:a16="http://schemas.microsoft.com/office/drawing/2014/main" id="{32D39349-3B08-4F18-AB9D-F456247D74D6}"/>
               </a:ext>
             </a:extLst>
           </p:cNvPr>
@@ -14700,11 +15332,11 @@
             </a:avLst>
           </a:prstGeom>
           <a:solidFill xmlns:a="http://schemas.openxmlformats.org/drawingml/2006/main">
-            <a:srgbClr val="FFF2F2"/>
+            <a:srgbClr val="F0FAF7"/>
           </a:solidFill>
           <a:ln xmlns:a="http://schemas.openxmlformats.org/drawingml/2006/main" w="19050">
             <a:solidFill>
-              <a:srgbClr val="B3262E"/>
+              <a:srgbClr val="2A9D9F"/>
             </a:solidFill>
             <a:prstDash val="solid"/>
           </a:ln>
@@ -14715,7 +15347,7 @@
           <p:cNvPr id="18" name="">
             <a:extLst xmlns:a="http://schemas.openxmlformats.org/drawingml/2006/main">
               <a:ext uri="{FF2B5EF4-FFF2-40B4-BE49-F238E27FC236}">
-                <a16:creationId xmlns:a16="http://schemas.microsoft.com/office/drawing/2014/main" id="{DB4AF300-FF18-49D2-B01B-CC8990EB1CB5}"/>
+                <a16:creationId xmlns:a16="http://schemas.microsoft.com/office/drawing/2014/main" id="{CED9AE97-41ED-493C-BBC1-64C828B1E758}"/>
               </a:ext>
             </a:extLst>
           </p:cNvPr>
@@ -14747,7 +15379,7 @@
             <a:pPr algn="ctr">
               <a:defRPr sz="2250" b="1">
                 <a:solidFill>
-                  <a:srgbClr val="B3262E"/>
+                  <a:srgbClr val="2A9D9F"/>
                 </a:solidFill>
                 <a:latin typeface="Nunito"/>
                 <a:ea typeface="Nunito"/>
@@ -14757,7 +15389,7 @@
             <a:r>
               <a:rPr sz="2250" b="1">
                 <a:solidFill>
-                  <a:srgbClr val="B3262E"/>
+                  <a:srgbClr val="2A9D9F"/>
                 </a:solidFill>
                 <a:latin typeface="Nunito"/>
                 <a:ea typeface="Nunito"/>
@@ -14773,7 +15405,7 @@
           <p:cNvPr id="19" name="slide-number-7">
             <a:extLst xmlns:a="http://schemas.openxmlformats.org/drawingml/2006/main">
               <a:ext uri="{FF2B5EF4-FFF2-40B4-BE49-F238E27FC236}">
-                <a16:creationId xmlns:a16="http://schemas.microsoft.com/office/drawing/2014/main" id="{3084CE78-B22C-4F4E-AFB4-2C6AEE782F3D}"/>
+                <a16:creationId xmlns:a16="http://schemas.microsoft.com/office/drawing/2014/main" id="{0F9B52B8-7B1F-46BB-8F3C-4882F4883E81}"/>
               </a:ext>
             </a:extLst>
           </p:cNvPr>
@@ -14831,7 +15463,7 @@
     </p:spTree>
     <p:extLst>
       <p:ext uri="{BB962C8B-B14F-4D97-AF65-F5344CB8AC3E}">
-        <p14:creationId xmlns:p14="http://schemas.microsoft.com/office/powerpoint/2010/main" val="118765007"/>
+        <p14:creationId xmlns:p14="http://schemas.microsoft.com/office/powerpoint/2010/main" val="1460068525"/>
       </p:ext>
     </p:extLst>
   </p:cSld>
@@ -14859,10 +15491,10 @@
       </p:grpSpPr>
       <p:sp>
         <p:nvSpPr>
-          <p:cNvPr id="16" name="title-T2">
-            <a:extLst xmlns:a="http://schemas.openxmlformats.org/drawingml/2006/main">
-              <a:ext uri="{FF2B5EF4-FFF2-40B4-BE49-F238E27FC236}">
-                <a16:creationId xmlns:a16="http://schemas.microsoft.com/office/drawing/2014/main" id="{D91D63A1-BB2B-43E3-9BC5-9731E06FC319}"/>
+          <p:cNvPr id="25" name="title-T1">
+            <a:extLst xmlns:a="http://schemas.openxmlformats.org/drawingml/2006/main">
+              <a:ext uri="{FF2B5EF4-FFF2-40B4-BE49-F238E27FC236}">
+                <a16:creationId xmlns:a16="http://schemas.microsoft.com/office/drawing/2014/main" id="{E3FEADC2-3A71-4074-8105-ECF010630868}"/>
               </a:ext>
             </a:extLst>
           </p:cNvPr>
@@ -14898,7 +15530,7 @@
                 <a:spcPct val="100000"/>
               </a:lnSpc>
               <a:buNone/>
-              <a:defRPr sz="4650" b="1">
+              <a:defRPr sz="5100" b="1">
                 <a:solidFill>
                   <a:srgbClr val="0B2B4C"/>
                 </a:solidFill>
@@ -14908,7 +15540,7 @@
               </a:defRPr>
             </a:pPr>
             <a:r>
-              <a:rPr sz="4650" b="1">
+              <a:rPr sz="5100" b="1">
                 <a:solidFill>
                   <a:srgbClr val="0B2B4C"/>
                 </a:solidFill>
@@ -14916,17 +15548,17 @@
                 <a:ea typeface="Nunito"/>
                 <a:cs typeface="Nunito"/>
               </a:rPr>
-              <a:t>Changing one parameter reveals the trend</a:t>
-            </a:r>
-          </a:p>
-        </p:txBody>
-      </p:sp>
-      <p:sp>
-        <p:nvSpPr>
-          <p:cNvPr id="2" name="subtitle-T2">
-            <a:extLst xmlns:a="http://schemas.openxmlformats.org/drawingml/2006/main">
-              <a:ext uri="{FF2B5EF4-FFF2-40B4-BE49-F238E27FC236}">
-                <a16:creationId xmlns:a16="http://schemas.microsoft.com/office/drawing/2014/main" id="{6A9E261F-3BDD-4F15-83FB-F0420C00E69F}"/>
+              <a:t>Trace one model from physics to a graph</a:t>
+            </a:r>
+          </a:p>
+        </p:txBody>
+      </p:sp>
+      <p:sp>
+        <p:nvSpPr>
+          <p:cNvPr id="2" name="subtitle-T1">
+            <a:extLst xmlns:a="http://schemas.openxmlformats.org/drawingml/2006/main">
+              <a:ext uri="{FF2B5EF4-FFF2-40B4-BE49-F238E27FC236}">
+                <a16:creationId xmlns:a16="http://schemas.microsoft.com/office/drawing/2014/main" id="{3A8718B0-909B-4C3F-9E13-551613E4AFEC}"/>
               </a:ext>
             </a:extLst>
           </p:cNvPr>
@@ -14976,7 +15608,7 @@
                 <a:ea typeface="Nunito"/>
                 <a:cs typeface="Nunito"/>
               </a:rPr>
-              <a:t>Keep the model fixed and change only the initial velocity</a:t>
+              <a:t>Use the same reasoning chain every time you model</a:t>
             </a:r>
           </a:p>
         </p:txBody>
@@ -14986,19 +15618,147 @@
           <p:cNvPr id="3" name="">
             <a:extLst xmlns:a="http://schemas.openxmlformats.org/drawingml/2006/main">
               <a:ext uri="{FF2B5EF4-FFF2-40B4-BE49-F238E27FC236}">
-                <a16:creationId xmlns:a16="http://schemas.microsoft.com/office/drawing/2014/main" id="{4B07D48D-0F32-4B45-B548-6A243B76E28F}"/>
-              </a:ext>
-            </a:extLst>
-          </p:cNvPr>
-          <p:cNvSpPr>
-            <a:spLocks xmlns:a="http://schemas.openxmlformats.org/drawingml/2006/main" noGrp="1"/>
-          </p:cNvSpPr>
-          <p:nvPr/>
-        </p:nvSpPr>
-        <p:spPr>
-          <a:xfrm xmlns:a="http://schemas.openxmlformats.org/drawingml/2006/main">
-            <a:off x="1095375" y="2457450"/>
-            <a:ext cx="2857500" cy="495300"/>
+                <a16:creationId xmlns:a16="http://schemas.microsoft.com/office/drawing/2014/main" id="{0B75ADD3-417D-477C-B408-246FFE223E74}"/>
+              </a:ext>
+            </a:extLst>
+          </p:cNvPr>
+          <p:cNvSpPr>
+            <a:spLocks xmlns:a="http://schemas.openxmlformats.org/drawingml/2006/main" noGrp="1"/>
+          </p:cNvSpPr>
+          <p:nvPr/>
+        </p:nvSpPr>
+        <p:spPr>
+          <a:xfrm xmlns:a="http://schemas.openxmlformats.org/drawingml/2006/main">
+            <a:off x="4048125" y="4181475"/>
+            <a:ext cx="762000" cy="114300"/>
+          </a:xfrm>
+          <a:prstGeom xmlns:a="http://schemas.openxmlformats.org/drawingml/2006/main" prst="rightArrow">
+            <a:avLst/>
+          </a:prstGeom>
+          <a:solidFill xmlns:a="http://schemas.openxmlformats.org/drawingml/2006/main">
+            <a:srgbClr val="AAB4BE"/>
+          </a:solidFill>
+          <a:ln xmlns:a="http://schemas.openxmlformats.org/drawingml/2006/main" w="0">
+            <a:noFill/>
+            <a:prstDash val="solid"/>
+          </a:ln>
+        </p:spPr>
+      </p:sp>
+      <p:sp>
+        <p:nvSpPr>
+          <p:cNvPr id="4" name="">
+            <a:extLst xmlns:a="http://schemas.openxmlformats.org/drawingml/2006/main">
+              <a:ext uri="{FF2B5EF4-FFF2-40B4-BE49-F238E27FC236}">
+                <a16:creationId xmlns:a16="http://schemas.microsoft.com/office/drawing/2014/main" id="{55AA7104-0123-4FD0-9CA4-8CF6B8FBE2AB}"/>
+              </a:ext>
+            </a:extLst>
+          </p:cNvPr>
+          <p:cNvSpPr>
+            <a:spLocks xmlns:a="http://schemas.openxmlformats.org/drawingml/2006/main" noGrp="1"/>
+          </p:cNvSpPr>
+          <p:nvPr/>
+        </p:nvSpPr>
+        <p:spPr>
+          <a:xfrm xmlns:a="http://schemas.openxmlformats.org/drawingml/2006/main">
+            <a:off x="7810500" y="4181475"/>
+            <a:ext cx="762000" cy="114300"/>
+          </a:xfrm>
+          <a:prstGeom xmlns:a="http://schemas.openxmlformats.org/drawingml/2006/main" prst="rightArrow">
+            <a:avLst/>
+          </a:prstGeom>
+          <a:solidFill xmlns:a="http://schemas.openxmlformats.org/drawingml/2006/main">
+            <a:srgbClr val="AAB4BE"/>
+          </a:solidFill>
+          <a:ln xmlns:a="http://schemas.openxmlformats.org/drawingml/2006/main" w="0">
+            <a:noFill/>
+            <a:prstDash val="solid"/>
+          </a:ln>
+        </p:spPr>
+      </p:sp>
+      <p:sp>
+        <p:nvSpPr>
+          <p:cNvPr id="5" name="">
+            <a:extLst xmlns:a="http://schemas.openxmlformats.org/drawingml/2006/main">
+              <a:ext uri="{FF2B5EF4-FFF2-40B4-BE49-F238E27FC236}">
+                <a16:creationId xmlns:a16="http://schemas.microsoft.com/office/drawing/2014/main" id="{8D2AB9C1-7BD6-46D5-AA94-1E7994E2EFBC}"/>
+              </a:ext>
+            </a:extLst>
+          </p:cNvPr>
+          <p:cNvSpPr>
+            <a:spLocks xmlns:a="http://schemas.openxmlformats.org/drawingml/2006/main" noGrp="1"/>
+          </p:cNvSpPr>
+          <p:nvPr/>
+        </p:nvSpPr>
+        <p:spPr>
+          <a:xfrm xmlns:a="http://schemas.openxmlformats.org/drawingml/2006/main">
+            <a:off x="11572875" y="4181475"/>
+            <a:ext cx="762000" cy="114300"/>
+          </a:xfrm>
+          <a:prstGeom xmlns:a="http://schemas.openxmlformats.org/drawingml/2006/main" prst="rightArrow">
+            <a:avLst/>
+          </a:prstGeom>
+          <a:solidFill xmlns:a="http://schemas.openxmlformats.org/drawingml/2006/main">
+            <a:srgbClr val="AAB4BE"/>
+          </a:solidFill>
+          <a:ln xmlns:a="http://schemas.openxmlformats.org/drawingml/2006/main" w="0">
+            <a:noFill/>
+            <a:prstDash val="solid"/>
+          </a:ln>
+        </p:spPr>
+      </p:sp>
+      <p:sp>
+        <p:nvSpPr>
+          <p:cNvPr id="6" name="">
+            <a:extLst xmlns:a="http://schemas.openxmlformats.org/drawingml/2006/main">
+              <a:ext uri="{FF2B5EF4-FFF2-40B4-BE49-F238E27FC236}">
+                <a16:creationId xmlns:a16="http://schemas.microsoft.com/office/drawing/2014/main" id="{E8DC4283-1117-4D8A-8EEB-99895B48650B}"/>
+              </a:ext>
+            </a:extLst>
+          </p:cNvPr>
+          <p:cNvSpPr>
+            <a:spLocks xmlns:a="http://schemas.openxmlformats.org/drawingml/2006/main" noGrp="1"/>
+          </p:cNvSpPr>
+          <p:nvPr/>
+        </p:nvSpPr>
+        <p:spPr>
+          <a:xfrm xmlns:a="http://schemas.openxmlformats.org/drawingml/2006/main">
+            <a:off x="1095375" y="2571750"/>
+            <a:ext cx="3143250" cy="3810000"/>
+          </a:xfrm>
+          <a:prstGeom xmlns:a="http://schemas.openxmlformats.org/drawingml/2006/main" prst="roundRect">
+            <a:avLst>
+              <a:gd name="adj" fmla="val 3636"/>
+            </a:avLst>
+          </a:prstGeom>
+          <a:solidFill xmlns:a="http://schemas.openxmlformats.org/drawingml/2006/main">
+            <a:srgbClr val="EEF5FD"/>
+          </a:solidFill>
+          <a:ln xmlns:a="http://schemas.openxmlformats.org/drawingml/2006/main" w="19050">
+            <a:solidFill>
+              <a:srgbClr val="2F6DB2"/>
+            </a:solidFill>
+            <a:prstDash val="solid"/>
+          </a:ln>
+        </p:spPr>
+      </p:sp>
+      <p:sp>
+        <p:nvSpPr>
+          <p:cNvPr id="7" name="">
+            <a:extLst xmlns:a="http://schemas.openxmlformats.org/drawingml/2006/main">
+              <a:ext uri="{FF2B5EF4-FFF2-40B4-BE49-F238E27FC236}">
+                <a16:creationId xmlns:a16="http://schemas.microsoft.com/office/drawing/2014/main" id="{ADD05D5C-524A-4BED-894C-4B136AD74D45}"/>
+              </a:ext>
+            </a:extLst>
+          </p:cNvPr>
+          <p:cNvSpPr>
+            <a:spLocks xmlns:a="http://schemas.openxmlformats.org/drawingml/2006/main" noGrp="1"/>
+          </p:cNvSpPr>
+          <p:nvPr/>
+        </p:nvSpPr>
+        <p:spPr>
+          <a:xfrm xmlns:a="http://schemas.openxmlformats.org/drawingml/2006/main">
+            <a:off x="1362075" y="2857500"/>
+            <a:ext cx="609600" cy="438150"/>
           </a:xfrm>
           <a:prstGeom xmlns:a="http://schemas.openxmlformats.org/drawingml/2006/main" prst="roundRect">
             <a:avLst>
@@ -15006,7 +15766,7 @@
             </a:avLst>
           </a:prstGeom>
           <a:solidFill xmlns:a="http://schemas.openxmlformats.org/drawingml/2006/main">
-            <a:srgbClr val="EEF5FD"/>
+            <a:srgbClr val="FFFFFF"/>
           </a:solidFill>
           <a:ln xmlns:a="http://schemas.openxmlformats.org/drawingml/2006/main" w="0">
             <a:noFill/>
@@ -15038,33 +15798,424 @@
                 <a:ea typeface="Nunito"/>
                 <a:cs typeface="Nunito"/>
               </a:rPr>
-              <a:t>controlled comparison</a:t>
-            </a:r>
-          </a:p>
-        </p:txBody>
-      </p:sp>
-      <p:sp>
-        <p:nvSpPr>
-          <p:cNvPr id="4" name="">
-            <a:extLst xmlns:a="http://schemas.openxmlformats.org/drawingml/2006/main">
-              <a:ext uri="{FF2B5EF4-FFF2-40B4-BE49-F238E27FC236}">
-                <a16:creationId xmlns:a16="http://schemas.microsoft.com/office/drawing/2014/main" id="{39A77FDD-42C6-4355-A0EB-ADFC50EACC15}"/>
-              </a:ext>
-            </a:extLst>
-          </p:cNvPr>
-          <p:cNvSpPr>
-            <a:spLocks xmlns:a="http://schemas.openxmlformats.org/drawingml/2006/main" noGrp="1"/>
-          </p:cNvSpPr>
-          <p:nvPr/>
-        </p:nvSpPr>
-        <p:spPr>
-          <a:xfrm xmlns:a="http://schemas.openxmlformats.org/drawingml/2006/main">
-            <a:off x="1095375" y="3238500"/>
-            <a:ext cx="4000500" cy="3333750"/>
+              <a:t>01</a:t>
+            </a:r>
+          </a:p>
+        </p:txBody>
+      </p:sp>
+      <p:sp>
+        <p:nvSpPr>
+          <p:cNvPr id="8" name="">
+            <a:extLst xmlns:a="http://schemas.openxmlformats.org/drawingml/2006/main">
+              <a:ext uri="{FF2B5EF4-FFF2-40B4-BE49-F238E27FC236}">
+                <a16:creationId xmlns:a16="http://schemas.microsoft.com/office/drawing/2014/main" id="{11605CCD-9F8A-4FD5-9CEE-65B747B7840B}"/>
+              </a:ext>
+            </a:extLst>
+          </p:cNvPr>
+          <p:cNvSpPr>
+            <a:spLocks xmlns:a="http://schemas.openxmlformats.org/drawingml/2006/main" noGrp="1"/>
+          </p:cNvSpPr>
+          <p:nvPr/>
+        </p:nvSpPr>
+        <p:spPr>
+          <a:xfrm xmlns:a="http://schemas.openxmlformats.org/drawingml/2006/main">
+            <a:off x="1362075" y="3600450"/>
+            <a:ext cx="2619375" cy="476250"/>
+          </a:xfrm>
+          <a:prstGeom xmlns:a="http://schemas.openxmlformats.org/drawingml/2006/main" prst="rect">
+            <a:avLst/>
+          </a:prstGeom>
+          <a:noFill xmlns:a="http://schemas.openxmlformats.org/drawingml/2006/main"/>
+          <a:ln xmlns:a="http://schemas.openxmlformats.org/drawingml/2006/main" w="0">
+            <a:noFill/>
+            <a:prstDash val="solid"/>
+          </a:ln>
+        </p:spPr>
+        <p:txBody>
+          <a:bodyPr xmlns:a="http://schemas.openxmlformats.org/drawingml/2006/main" wrap="square" lIns="0" tIns="0" rIns="0" bIns="0" anchor="t">
+            <a:noAutofit/>
+          </a:bodyPr>
+          <a:lstStyle xmlns:a="http://schemas.openxmlformats.org/drawingml/2006/main"/>
+          <a:p xmlns:a="http://schemas.openxmlformats.org/drawingml/2006/main">
+            <a:pPr algn="l">
+              <a:defRPr sz="2550" b="1">
+                <a:solidFill>
+                  <a:srgbClr val="2F6DB2"/>
+                </a:solidFill>
+                <a:latin typeface="Nunito"/>
+                <a:ea typeface="Nunito"/>
+                <a:cs typeface="Nunito"/>
+              </a:defRPr>
+            </a:pPr>
+            <a:r>
+              <a:rPr sz="2550" b="1">
+                <a:solidFill>
+                  <a:srgbClr val="2F6DB2"/>
+                </a:solidFill>
+                <a:latin typeface="Nunito"/>
+                <a:ea typeface="Nunito"/>
+                <a:cs typeface="Nunito"/>
+              </a:rPr>
+              <a:t>Model</a:t>
+            </a:r>
+          </a:p>
+        </p:txBody>
+      </p:sp>
+      <p:sp>
+        <p:nvSpPr>
+          <p:cNvPr id="9" name="">
+            <a:extLst xmlns:a="http://schemas.openxmlformats.org/drawingml/2006/main">
+              <a:ext uri="{FF2B5EF4-FFF2-40B4-BE49-F238E27FC236}">
+                <a16:creationId xmlns:a16="http://schemas.microsoft.com/office/drawing/2014/main" id="{158D9FD7-562D-45D4-A694-47FD37CAE8DB}"/>
+              </a:ext>
+            </a:extLst>
+          </p:cNvPr>
+          <p:cNvSpPr>
+            <a:spLocks xmlns:a="http://schemas.openxmlformats.org/drawingml/2006/main" noGrp="1"/>
+          </p:cNvSpPr>
+          <p:nvPr/>
+        </p:nvSpPr>
+        <p:spPr>
+          <a:xfrm xmlns:a="http://schemas.openxmlformats.org/drawingml/2006/main">
+            <a:off x="1362075" y="4429125"/>
+            <a:ext cx="2619375" cy="1571625"/>
+          </a:xfrm>
+          <a:prstGeom xmlns:a="http://schemas.openxmlformats.org/drawingml/2006/main" prst="rect">
+            <a:avLst/>
+          </a:prstGeom>
+          <a:noFill xmlns:a="http://schemas.openxmlformats.org/drawingml/2006/main"/>
+          <a:ln xmlns:a="http://schemas.openxmlformats.org/drawingml/2006/main" w="0">
+            <a:noFill/>
+            <a:prstDash val="solid"/>
+          </a:ln>
+        </p:spPr>
+        <p:txBody>
+          <a:bodyPr xmlns:a="http://schemas.openxmlformats.org/drawingml/2006/main" wrap="square" lIns="0" tIns="0" rIns="0" bIns="0" anchor="t">
+            <a:noAutofit/>
+          </a:bodyPr>
+          <a:lstStyle xmlns:a="http://schemas.openxmlformats.org/drawingml/2006/main"/>
+          <a:p xmlns:a="http://schemas.openxmlformats.org/drawingml/2006/main">
+            <a:pPr algn="l">
+              <a:lnSpc>
+                <a:spcPct val="118000"/>
+              </a:lnSpc>
+              <a:buNone/>
+              <a:defRPr sz="1875">
+                <a:solidFill>
+                  <a:srgbClr val="3F4B57"/>
+                </a:solidFill>
+                <a:latin typeface="Nunito"/>
+                <a:ea typeface="Nunito"/>
+                <a:cs typeface="Nunito"/>
+              </a:defRPr>
+            </a:pPr>
+            <a:r>
+              <a:rPr sz="1875">
+                <a:solidFill>
+                  <a:srgbClr val="3F4B57"/>
+                </a:solidFill>
+                <a:latin typeface="Nunito"/>
+                <a:ea typeface="Nunito"/>
+                <a:cs typeface="Nunito"/>
+              </a:rPr>
+              <a:t>question, direction,</a:t>
+            </a:r>
+          </a:p>
+          <a:p xmlns:a="http://schemas.openxmlformats.org/drawingml/2006/main">
+            <a:pPr algn="l">
+              <a:lnSpc>
+                <a:spcPct val="118000"/>
+              </a:lnSpc>
+              <a:buNone/>
+              <a:defRPr sz="1875">
+                <a:solidFill>
+                  <a:srgbClr val="3F4B57"/>
+                </a:solidFill>
+                <a:latin typeface="Nunito"/>
+                <a:ea typeface="Nunito"/>
+                <a:cs typeface="Nunito"/>
+              </a:defRPr>
+            </a:pPr>
+            <a:r>
+              <a:rPr sz="1875">
+                <a:solidFill>
+                  <a:srgbClr val="3F4B57"/>
+                </a:solidFill>
+                <a:latin typeface="Nunito"/>
+                <a:ea typeface="Nunito"/>
+                <a:cs typeface="Nunito"/>
+              </a:rPr>
+              <a:t>variables, and units</a:t>
+            </a:r>
+          </a:p>
+        </p:txBody>
+      </p:sp>
+      <p:sp>
+        <p:nvSpPr>
+          <p:cNvPr id="10" name="">
+            <a:extLst xmlns:a="http://schemas.openxmlformats.org/drawingml/2006/main">
+              <a:ext uri="{FF2B5EF4-FFF2-40B4-BE49-F238E27FC236}">
+                <a16:creationId xmlns:a16="http://schemas.microsoft.com/office/drawing/2014/main" id="{290F669B-605B-436B-A28D-B9DBD72BC3C7}"/>
+              </a:ext>
+            </a:extLst>
+          </p:cNvPr>
+          <p:cNvSpPr>
+            <a:spLocks xmlns:a="http://schemas.openxmlformats.org/drawingml/2006/main" noGrp="1"/>
+          </p:cNvSpPr>
+          <p:nvPr/>
+        </p:nvSpPr>
+        <p:spPr>
+          <a:xfrm xmlns:a="http://schemas.openxmlformats.org/drawingml/2006/main">
+            <a:off x="4857750" y="2571750"/>
+            <a:ext cx="3143250" cy="3810000"/>
           </a:xfrm>
           <a:prstGeom xmlns:a="http://schemas.openxmlformats.org/drawingml/2006/main" prst="roundRect">
             <a:avLst>
-              <a:gd name="adj" fmla="val 3429"/>
+              <a:gd name="adj" fmla="val 3636"/>
+            </a:avLst>
+          </a:prstGeom>
+          <a:solidFill xmlns:a="http://schemas.openxmlformats.org/drawingml/2006/main">
+            <a:srgbClr val="F7F9FB"/>
+          </a:solidFill>
+          <a:ln xmlns:a="http://schemas.openxmlformats.org/drawingml/2006/main" w="19050">
+            <a:solidFill>
+              <a:srgbClr val="0B2B4C"/>
+            </a:solidFill>
+            <a:prstDash val="solid"/>
+          </a:ln>
+        </p:spPr>
+      </p:sp>
+      <p:sp>
+        <p:nvSpPr>
+          <p:cNvPr id="11" name="">
+            <a:extLst xmlns:a="http://schemas.openxmlformats.org/drawingml/2006/main">
+              <a:ext uri="{FF2B5EF4-FFF2-40B4-BE49-F238E27FC236}">
+                <a16:creationId xmlns:a16="http://schemas.microsoft.com/office/drawing/2014/main" id="{A324CADC-FC8F-47C1-A920-1AA52D9B688F}"/>
+              </a:ext>
+            </a:extLst>
+          </p:cNvPr>
+          <p:cNvSpPr>
+            <a:spLocks xmlns:a="http://schemas.openxmlformats.org/drawingml/2006/main" noGrp="1"/>
+          </p:cNvSpPr>
+          <p:nvPr/>
+        </p:nvSpPr>
+        <p:spPr>
+          <a:xfrm xmlns:a="http://schemas.openxmlformats.org/drawingml/2006/main">
+            <a:off x="5124450" y="2857500"/>
+            <a:ext cx="609600" cy="438150"/>
+          </a:xfrm>
+          <a:prstGeom xmlns:a="http://schemas.openxmlformats.org/drawingml/2006/main" prst="roundRect">
+            <a:avLst>
+              <a:gd name="adj" fmla="val 50000"/>
+            </a:avLst>
+          </a:prstGeom>
+          <a:solidFill xmlns:a="http://schemas.openxmlformats.org/drawingml/2006/main">
+            <a:srgbClr val="FFFFFF"/>
+          </a:solidFill>
+          <a:ln xmlns:a="http://schemas.openxmlformats.org/drawingml/2006/main" w="0">
+            <a:noFill/>
+            <a:prstDash val="solid"/>
+          </a:ln>
+        </p:spPr>
+        <p:txBody>
+          <a:bodyPr xmlns:a="http://schemas.openxmlformats.org/drawingml/2006/main" lIns="76200" tIns="0" rIns="76200" bIns="0" anchor="ctr">
+            <a:noAutofit/>
+          </a:bodyPr>
+          <a:lstStyle xmlns:a="http://schemas.openxmlformats.org/drawingml/2006/main"/>
+          <a:p xmlns:a="http://schemas.openxmlformats.org/drawingml/2006/main">
+            <a:pPr algn="ctr">
+              <a:defRPr sz="1650" b="1">
+                <a:solidFill>
+                  <a:srgbClr val="0B2B4C"/>
+                </a:solidFill>
+                <a:latin typeface="Nunito"/>
+                <a:ea typeface="Nunito"/>
+                <a:cs typeface="Nunito"/>
+              </a:defRPr>
+            </a:pPr>
+            <a:r>
+              <a:rPr sz="1650" b="1">
+                <a:solidFill>
+                  <a:srgbClr val="0B2B4C"/>
+                </a:solidFill>
+                <a:latin typeface="Nunito"/>
+                <a:ea typeface="Nunito"/>
+                <a:cs typeface="Nunito"/>
+              </a:rPr>
+              <a:t>02</a:t>
+            </a:r>
+          </a:p>
+        </p:txBody>
+      </p:sp>
+      <p:sp>
+        <p:nvSpPr>
+          <p:cNvPr id="12" name="">
+            <a:extLst xmlns:a="http://schemas.openxmlformats.org/drawingml/2006/main">
+              <a:ext uri="{FF2B5EF4-FFF2-40B4-BE49-F238E27FC236}">
+                <a16:creationId xmlns:a16="http://schemas.microsoft.com/office/drawing/2014/main" id="{41431419-3ECD-4A30-A007-7C853930DB8D}"/>
+              </a:ext>
+            </a:extLst>
+          </p:cNvPr>
+          <p:cNvSpPr>
+            <a:spLocks xmlns:a="http://schemas.openxmlformats.org/drawingml/2006/main" noGrp="1"/>
+          </p:cNvSpPr>
+          <p:nvPr/>
+        </p:nvSpPr>
+        <p:spPr>
+          <a:xfrm xmlns:a="http://schemas.openxmlformats.org/drawingml/2006/main">
+            <a:off x="5124450" y="3600450"/>
+            <a:ext cx="2619375" cy="476250"/>
+          </a:xfrm>
+          <a:prstGeom xmlns:a="http://schemas.openxmlformats.org/drawingml/2006/main" prst="rect">
+            <a:avLst/>
+          </a:prstGeom>
+          <a:noFill xmlns:a="http://schemas.openxmlformats.org/drawingml/2006/main"/>
+          <a:ln xmlns:a="http://schemas.openxmlformats.org/drawingml/2006/main" w="0">
+            <a:noFill/>
+            <a:prstDash val="solid"/>
+          </a:ln>
+        </p:spPr>
+        <p:txBody>
+          <a:bodyPr xmlns:a="http://schemas.openxmlformats.org/drawingml/2006/main" wrap="square" lIns="0" tIns="0" rIns="0" bIns="0" anchor="t">
+            <a:noAutofit/>
+          </a:bodyPr>
+          <a:lstStyle xmlns:a="http://schemas.openxmlformats.org/drawingml/2006/main"/>
+          <a:p xmlns:a="http://schemas.openxmlformats.org/drawingml/2006/main">
+            <a:pPr algn="l">
+              <a:defRPr sz="2550" b="1">
+                <a:solidFill>
+                  <a:srgbClr val="0B2B4C"/>
+                </a:solidFill>
+                <a:latin typeface="Nunito"/>
+                <a:ea typeface="Nunito"/>
+                <a:cs typeface="Nunito"/>
+              </a:defRPr>
+            </a:pPr>
+            <a:r>
+              <a:rPr sz="2550" b="1">
+                <a:solidFill>
+                  <a:srgbClr val="0B2B4C"/>
+                </a:solidFill>
+                <a:latin typeface="Nunito"/>
+                <a:ea typeface="Nunito"/>
+                <a:cs typeface="Nunito"/>
+              </a:rPr>
+              <a:t>Algorithm</a:t>
+            </a:r>
+          </a:p>
+        </p:txBody>
+      </p:sp>
+      <p:sp>
+        <p:nvSpPr>
+          <p:cNvPr id="13" name="">
+            <a:extLst xmlns:a="http://schemas.openxmlformats.org/drawingml/2006/main">
+              <a:ext uri="{FF2B5EF4-FFF2-40B4-BE49-F238E27FC236}">
+                <a16:creationId xmlns:a16="http://schemas.microsoft.com/office/drawing/2014/main" id="{812F8AFA-4E4E-4A78-88C2-A4F8EFB89BB7}"/>
+              </a:ext>
+            </a:extLst>
+          </p:cNvPr>
+          <p:cNvSpPr>
+            <a:spLocks xmlns:a="http://schemas.openxmlformats.org/drawingml/2006/main" noGrp="1"/>
+          </p:cNvSpPr>
+          <p:nvPr/>
+        </p:nvSpPr>
+        <p:spPr>
+          <a:xfrm xmlns:a="http://schemas.openxmlformats.org/drawingml/2006/main">
+            <a:off x="5124450" y="4429125"/>
+            <a:ext cx="2619375" cy="1571625"/>
+          </a:xfrm>
+          <a:prstGeom xmlns:a="http://schemas.openxmlformats.org/drawingml/2006/main" prst="rect">
+            <a:avLst/>
+          </a:prstGeom>
+          <a:noFill xmlns:a="http://schemas.openxmlformats.org/drawingml/2006/main"/>
+          <a:ln xmlns:a="http://schemas.openxmlformats.org/drawingml/2006/main" w="0">
+            <a:noFill/>
+            <a:prstDash val="solid"/>
+          </a:ln>
+        </p:spPr>
+        <p:txBody>
+          <a:bodyPr xmlns:a="http://schemas.openxmlformats.org/drawingml/2006/main" wrap="square" lIns="0" tIns="0" rIns="0" bIns="0" anchor="t">
+            <a:noAutofit/>
+          </a:bodyPr>
+          <a:lstStyle xmlns:a="http://schemas.openxmlformats.org/drawingml/2006/main"/>
+          <a:p xmlns:a="http://schemas.openxmlformats.org/drawingml/2006/main">
+            <a:pPr algn="l">
+              <a:lnSpc>
+                <a:spcPct val="118000"/>
+              </a:lnSpc>
+              <a:buNone/>
+              <a:defRPr sz="1875">
+                <a:solidFill>
+                  <a:srgbClr val="3F4B57"/>
+                </a:solidFill>
+                <a:latin typeface="Nunito"/>
+                <a:ea typeface="Nunito"/>
+                <a:cs typeface="Nunito"/>
+              </a:defRPr>
+            </a:pPr>
+            <a:r>
+              <a:rPr sz="1875">
+                <a:solidFill>
+                  <a:srgbClr val="3F4B57"/>
+                </a:solidFill>
+                <a:latin typeface="Nunito"/>
+                <a:ea typeface="Nunito"/>
+                <a:cs typeface="Nunito"/>
+              </a:rPr>
+              <a:t>time array, calculate,</a:t>
+            </a:r>
+          </a:p>
+          <a:p xmlns:a="http://schemas.openxmlformats.org/drawingml/2006/main">
+            <a:pPr algn="l">
+              <a:lnSpc>
+                <a:spcPct val="118000"/>
+              </a:lnSpc>
+              <a:buNone/>
+              <a:defRPr sz="1875">
+                <a:solidFill>
+                  <a:srgbClr val="3F4B57"/>
+                </a:solidFill>
+                <a:latin typeface="Nunito"/>
+                <a:ea typeface="Nunito"/>
+                <a:cs typeface="Nunito"/>
+              </a:defRPr>
+            </a:pPr>
+            <a:r>
+              <a:rPr sz="1875">
+                <a:solidFill>
+                  <a:srgbClr val="3F4B57"/>
+                </a:solidFill>
+                <a:latin typeface="Nunito"/>
+                <a:ea typeface="Nunito"/>
+                <a:cs typeface="Nunito"/>
+              </a:rPr>
+              <a:t>plot, then check</a:t>
+            </a:r>
+          </a:p>
+        </p:txBody>
+      </p:sp>
+      <p:sp>
+        <p:nvSpPr>
+          <p:cNvPr id="14" name="">
+            <a:extLst xmlns:a="http://schemas.openxmlformats.org/drawingml/2006/main">
+              <a:ext uri="{FF2B5EF4-FFF2-40B4-BE49-F238E27FC236}">
+                <a16:creationId xmlns:a16="http://schemas.microsoft.com/office/drawing/2014/main" id="{760C21AF-B778-4B91-B9DB-EFF99587EFEA}"/>
+              </a:ext>
+            </a:extLst>
+          </p:cNvPr>
+          <p:cNvSpPr>
+            <a:spLocks xmlns:a="http://schemas.openxmlformats.org/drawingml/2006/main" noGrp="1"/>
+          </p:cNvSpPr>
+          <p:nvPr/>
+        </p:nvSpPr>
+        <p:spPr>
+          <a:xfrm xmlns:a="http://schemas.openxmlformats.org/drawingml/2006/main">
+            <a:off x="8620125" y="2571750"/>
+            <a:ext cx="3143250" cy="3810000"/>
+          </a:xfrm>
+          <a:prstGeom xmlns:a="http://schemas.openxmlformats.org/drawingml/2006/main" prst="roundRect">
+            <a:avLst>
+              <a:gd name="adj" fmla="val 3636"/>
             </a:avLst>
           </a:prstGeom>
           <a:solidFill xmlns:a="http://schemas.openxmlformats.org/drawingml/2006/main">
@@ -15080,22 +16231,84 @@
       </p:sp>
       <p:sp>
         <p:nvSpPr>
-          <p:cNvPr id="5" name="">
-            <a:extLst xmlns:a="http://schemas.openxmlformats.org/drawingml/2006/main">
-              <a:ext uri="{FF2B5EF4-FFF2-40B4-BE49-F238E27FC236}">
-                <a16:creationId xmlns:a16="http://schemas.microsoft.com/office/drawing/2014/main" id="{A0E2CF86-E76F-4439-9FA4-68C5D9177E29}"/>
-              </a:ext>
-            </a:extLst>
-          </p:cNvPr>
-          <p:cNvSpPr>
-            <a:spLocks xmlns:a="http://schemas.openxmlformats.org/drawingml/2006/main" noGrp="1"/>
-          </p:cNvSpPr>
-          <p:nvPr/>
-        </p:nvSpPr>
-        <p:spPr>
-          <a:xfrm xmlns:a="http://schemas.openxmlformats.org/drawingml/2006/main">
-            <a:off x="1438275" y="3600450"/>
-            <a:ext cx="3143250" cy="666750"/>
+          <p:cNvPr id="15" name="">
+            <a:extLst xmlns:a="http://schemas.openxmlformats.org/drawingml/2006/main">
+              <a:ext uri="{FF2B5EF4-FFF2-40B4-BE49-F238E27FC236}">
+                <a16:creationId xmlns:a16="http://schemas.microsoft.com/office/drawing/2014/main" id="{FCD38ECE-5EF2-4018-9478-53D0E7F2A7BF}"/>
+              </a:ext>
+            </a:extLst>
+          </p:cNvPr>
+          <p:cNvSpPr>
+            <a:spLocks xmlns:a="http://schemas.openxmlformats.org/drawingml/2006/main" noGrp="1"/>
+          </p:cNvSpPr>
+          <p:nvPr/>
+        </p:nvSpPr>
+        <p:spPr>
+          <a:xfrm xmlns:a="http://schemas.openxmlformats.org/drawingml/2006/main">
+            <a:off x="8886825" y="2857500"/>
+            <a:ext cx="609600" cy="438150"/>
+          </a:xfrm>
+          <a:prstGeom xmlns:a="http://schemas.openxmlformats.org/drawingml/2006/main" prst="roundRect">
+            <a:avLst>
+              <a:gd name="adj" fmla="val 50000"/>
+            </a:avLst>
+          </a:prstGeom>
+          <a:solidFill xmlns:a="http://schemas.openxmlformats.org/drawingml/2006/main">
+            <a:srgbClr val="FFFFFF"/>
+          </a:solidFill>
+          <a:ln xmlns:a="http://schemas.openxmlformats.org/drawingml/2006/main" w="0">
+            <a:noFill/>
+            <a:prstDash val="solid"/>
+          </a:ln>
+        </p:spPr>
+        <p:txBody>
+          <a:bodyPr xmlns:a="http://schemas.openxmlformats.org/drawingml/2006/main" lIns="76200" tIns="0" rIns="76200" bIns="0" anchor="ctr">
+            <a:noAutofit/>
+          </a:bodyPr>
+          <a:lstStyle xmlns:a="http://schemas.openxmlformats.org/drawingml/2006/main"/>
+          <a:p xmlns:a="http://schemas.openxmlformats.org/drawingml/2006/main">
+            <a:pPr algn="ctr">
+              <a:defRPr sz="1650" b="1">
+                <a:solidFill>
+                  <a:srgbClr val="C98A16"/>
+                </a:solidFill>
+                <a:latin typeface="Nunito"/>
+                <a:ea typeface="Nunito"/>
+                <a:cs typeface="Nunito"/>
+              </a:defRPr>
+            </a:pPr>
+            <a:r>
+              <a:rPr sz="1650" b="1">
+                <a:solidFill>
+                  <a:srgbClr val="C98A16"/>
+                </a:solidFill>
+                <a:latin typeface="Nunito"/>
+                <a:ea typeface="Nunito"/>
+                <a:cs typeface="Nunito"/>
+              </a:rPr>
+              <a:t>03</a:t>
+            </a:r>
+          </a:p>
+        </p:txBody>
+      </p:sp>
+      <p:sp>
+        <p:nvSpPr>
+          <p:cNvPr id="16" name="">
+            <a:extLst xmlns:a="http://schemas.openxmlformats.org/drawingml/2006/main">
+              <a:ext uri="{FF2B5EF4-FFF2-40B4-BE49-F238E27FC236}">
+                <a16:creationId xmlns:a16="http://schemas.microsoft.com/office/drawing/2014/main" id="{3059E380-CD16-4E5E-8617-95B9212C974F}"/>
+              </a:ext>
+            </a:extLst>
+          </p:cNvPr>
+          <p:cNvSpPr>
+            <a:spLocks xmlns:a="http://schemas.openxmlformats.org/drawingml/2006/main" noGrp="1"/>
+          </p:cNvSpPr>
+          <p:nvPr/>
+        </p:nvSpPr>
+        <p:spPr>
+          <a:xfrm xmlns:a="http://schemas.openxmlformats.org/drawingml/2006/main">
+            <a:off x="8886825" y="3600450"/>
+            <a:ext cx="2619375" cy="476250"/>
           </a:xfrm>
           <a:prstGeom xmlns:a="http://schemas.openxmlformats.org/drawingml/2006/main" prst="rect">
             <a:avLst/>
@@ -15113,47 +16326,47 @@
           <a:lstStyle xmlns:a="http://schemas.openxmlformats.org/drawingml/2006/main"/>
           <a:p xmlns:a="http://schemas.openxmlformats.org/drawingml/2006/main">
             <a:pPr algn="l">
-              <a:defRPr sz="2400" b="1">
-                <a:solidFill>
-                  <a:srgbClr val="0B2B4C"/>
-                </a:solidFill>
-                <a:latin typeface="Nunito"/>
-                <a:ea typeface="Nunito"/>
-                <a:cs typeface="Nunito"/>
-              </a:defRPr>
-            </a:pPr>
-            <a:r>
-              <a:rPr sz="2400" b="1">
-                <a:solidFill>
-                  <a:srgbClr val="0B2B4C"/>
-                </a:solidFill>
-                <a:latin typeface="Nunito"/>
-                <a:ea typeface="Nunito"/>
-                <a:cs typeface="Nunito"/>
-              </a:rPr>
-              <a:t>Ask one focused question</a:t>
-            </a:r>
-          </a:p>
-        </p:txBody>
-      </p:sp>
-      <p:sp>
-        <p:nvSpPr>
-          <p:cNvPr id="6" name="">
-            <a:extLst xmlns:a="http://schemas.openxmlformats.org/drawingml/2006/main">
-              <a:ext uri="{FF2B5EF4-FFF2-40B4-BE49-F238E27FC236}">
-                <a16:creationId xmlns:a16="http://schemas.microsoft.com/office/drawing/2014/main" id="{64893832-73B8-4DC0-BBD0-4FEEA8560182}"/>
-              </a:ext>
-            </a:extLst>
-          </p:cNvPr>
-          <p:cNvSpPr>
-            <a:spLocks xmlns:a="http://schemas.openxmlformats.org/drawingml/2006/main" noGrp="1"/>
-          </p:cNvSpPr>
-          <p:nvPr/>
-        </p:nvSpPr>
-        <p:spPr>
-          <a:xfrm xmlns:a="http://schemas.openxmlformats.org/drawingml/2006/main">
-            <a:off x="1438275" y="4362450"/>
-            <a:ext cx="3143250" cy="1066800"/>
+              <a:defRPr sz="2550" b="1">
+                <a:solidFill>
+                  <a:srgbClr val="C98A16"/>
+                </a:solidFill>
+                <a:latin typeface="Nunito"/>
+                <a:ea typeface="Nunito"/>
+                <a:cs typeface="Nunito"/>
+              </a:defRPr>
+            </a:pPr>
+            <a:r>
+              <a:rPr sz="2550" b="1">
+                <a:solidFill>
+                  <a:srgbClr val="C98A16"/>
+                </a:solidFill>
+                <a:latin typeface="Nunito"/>
+                <a:ea typeface="Nunito"/>
+                <a:cs typeface="Nunito"/>
+              </a:rPr>
+              <a:t>Code</a:t>
+            </a:r>
+          </a:p>
+        </p:txBody>
+      </p:sp>
+      <p:sp>
+        <p:nvSpPr>
+          <p:cNvPr id="17" name="">
+            <a:extLst xmlns:a="http://schemas.openxmlformats.org/drawingml/2006/main">
+              <a:ext uri="{FF2B5EF4-FFF2-40B4-BE49-F238E27FC236}">
+                <a16:creationId xmlns:a16="http://schemas.microsoft.com/office/drawing/2014/main" id="{120EDEC6-1754-430A-8718-9180CAF1D8DC}"/>
+              </a:ext>
+            </a:extLst>
+          </p:cNvPr>
+          <p:cNvSpPr>
+            <a:spLocks xmlns:a="http://schemas.openxmlformats.org/drawingml/2006/main" noGrp="1"/>
+          </p:cNvSpPr>
+          <p:nvPr/>
+        </p:nvSpPr>
+        <p:spPr>
+          <a:xfrm xmlns:a="http://schemas.openxmlformats.org/drawingml/2006/main">
+            <a:off x="8886825" y="4429125"/>
+            <a:ext cx="2619375" cy="1571625"/>
           </a:xfrm>
           <a:prstGeom xmlns:a="http://schemas.openxmlformats.org/drawingml/2006/main" prst="rect">
             <a:avLst/>
@@ -15172,10 +16385,10 @@
           <a:p xmlns:a="http://schemas.openxmlformats.org/drawingml/2006/main">
             <a:pPr algn="l">
               <a:lnSpc>
-                <a:spcPct val="105000"/>
+                <a:spcPct val="118000"/>
               </a:lnSpc>
               <a:buNone/>
-              <a:defRPr sz="2250">
+              <a:defRPr sz="1875">
                 <a:solidFill>
                   <a:srgbClr val="3F4B57"/>
                 </a:solidFill>
@@ -15185,7 +16398,7 @@
               </a:defRPr>
             </a:pPr>
             <a:r>
-              <a:rPr sz="2250">
+              <a:rPr sz="1875">
                 <a:solidFill>
                   <a:srgbClr val="3F4B57"/>
                 </a:solidFill>
@@ -15193,16 +16406,16 @@
                 <a:ea typeface="Nunito"/>
                 <a:cs typeface="Nunito"/>
               </a:rPr>
-              <a:t>What changes when</a:t>
+              <a:t>read the dots in .*</a:t>
             </a:r>
           </a:p>
           <a:p xmlns:a="http://schemas.openxmlformats.org/drawingml/2006/main">
             <a:pPr algn="l">
               <a:lnSpc>
-                <a:spcPct val="105000"/>
+                <a:spcPct val="118000"/>
               </a:lnSpc>
               <a:buNone/>
-              <a:defRPr sz="2250">
+              <a:defRPr sz="1875">
                 <a:solidFill>
                   <a:srgbClr val="3F4B57"/>
                 </a:solidFill>
@@ -15212,7 +16425,7 @@
               </a:defRPr>
             </a:pPr>
             <a:r>
-              <a:rPr sz="2250">
+              <a:rPr sz="1875">
                 <a:solidFill>
                   <a:srgbClr val="3F4B57"/>
                 </a:solidFill>
@@ -15220,29 +16433,126 @@
                 <a:ea typeface="Nunito"/>
                 <a:cs typeface="Nunito"/>
               </a:rPr>
-              <a:t>launch speed changes?</a:t>
-            </a:r>
-          </a:p>
-        </p:txBody>
-      </p:sp>
-      <p:sp>
-        <p:nvSpPr>
-          <p:cNvPr id="7" name="">
-            <a:extLst xmlns:a="http://schemas.openxmlformats.org/drawingml/2006/main">
-              <a:ext uri="{FF2B5EF4-FFF2-40B4-BE49-F238E27FC236}">
-                <a16:creationId xmlns:a16="http://schemas.microsoft.com/office/drawing/2014/main" id="{CF9053D6-0658-441F-BCF0-82EE8946E782}"/>
-              </a:ext>
-            </a:extLst>
-          </p:cNvPr>
-          <p:cNvSpPr>
-            <a:spLocks xmlns:a="http://schemas.openxmlformats.org/drawingml/2006/main" noGrp="1"/>
-          </p:cNvSpPr>
-          <p:nvPr/>
-        </p:nvSpPr>
-        <p:spPr>
-          <a:xfrm xmlns:a="http://schemas.openxmlformats.org/drawingml/2006/main">
-            <a:off x="1438275" y="5543550"/>
-            <a:ext cx="3143250" cy="914400"/>
+              <a:t>and .^ before running</a:t>
+            </a:r>
+          </a:p>
+        </p:txBody>
+      </p:sp>
+      <p:sp>
+        <p:nvSpPr>
+          <p:cNvPr id="18" name="">
+            <a:extLst xmlns:a="http://schemas.openxmlformats.org/drawingml/2006/main">
+              <a:ext uri="{FF2B5EF4-FFF2-40B4-BE49-F238E27FC236}">
+                <a16:creationId xmlns:a16="http://schemas.microsoft.com/office/drawing/2014/main" id="{7605848F-7266-470E-B1C5-660FF697480A}"/>
+              </a:ext>
+            </a:extLst>
+          </p:cNvPr>
+          <p:cNvSpPr>
+            <a:spLocks xmlns:a="http://schemas.openxmlformats.org/drawingml/2006/main" noGrp="1"/>
+          </p:cNvSpPr>
+          <p:nvPr/>
+        </p:nvSpPr>
+        <p:spPr>
+          <a:xfrm xmlns:a="http://schemas.openxmlformats.org/drawingml/2006/main">
+            <a:off x="12382500" y="2571750"/>
+            <a:ext cx="3143250" cy="3810000"/>
+          </a:xfrm>
+          <a:prstGeom xmlns:a="http://schemas.openxmlformats.org/drawingml/2006/main" prst="roundRect">
+            <a:avLst>
+              <a:gd name="adj" fmla="val 3636"/>
+            </a:avLst>
+          </a:prstGeom>
+          <a:solidFill xmlns:a="http://schemas.openxmlformats.org/drawingml/2006/main">
+            <a:srgbClr val="F0FAF7"/>
+          </a:solidFill>
+          <a:ln xmlns:a="http://schemas.openxmlformats.org/drawingml/2006/main" w="19050">
+            <a:solidFill>
+              <a:srgbClr val="3E8E45"/>
+            </a:solidFill>
+            <a:prstDash val="solid"/>
+          </a:ln>
+        </p:spPr>
+      </p:sp>
+      <p:sp>
+        <p:nvSpPr>
+          <p:cNvPr id="19" name="">
+            <a:extLst xmlns:a="http://schemas.openxmlformats.org/drawingml/2006/main">
+              <a:ext uri="{FF2B5EF4-FFF2-40B4-BE49-F238E27FC236}">
+                <a16:creationId xmlns:a16="http://schemas.microsoft.com/office/drawing/2014/main" id="{EBEE30C6-F4BA-4DE4-87B6-91D1FDC7AD02}"/>
+              </a:ext>
+            </a:extLst>
+          </p:cNvPr>
+          <p:cNvSpPr>
+            <a:spLocks xmlns:a="http://schemas.openxmlformats.org/drawingml/2006/main" noGrp="1"/>
+          </p:cNvSpPr>
+          <p:nvPr/>
+        </p:nvSpPr>
+        <p:spPr>
+          <a:xfrm xmlns:a="http://schemas.openxmlformats.org/drawingml/2006/main">
+            <a:off x="12649200" y="2857500"/>
+            <a:ext cx="609600" cy="438150"/>
+          </a:xfrm>
+          <a:prstGeom xmlns:a="http://schemas.openxmlformats.org/drawingml/2006/main" prst="roundRect">
+            <a:avLst>
+              <a:gd name="adj" fmla="val 50000"/>
+            </a:avLst>
+          </a:prstGeom>
+          <a:solidFill xmlns:a="http://schemas.openxmlformats.org/drawingml/2006/main">
+            <a:srgbClr val="FFFFFF"/>
+          </a:solidFill>
+          <a:ln xmlns:a="http://schemas.openxmlformats.org/drawingml/2006/main" w="0">
+            <a:noFill/>
+            <a:prstDash val="solid"/>
+          </a:ln>
+        </p:spPr>
+        <p:txBody>
+          <a:bodyPr xmlns:a="http://schemas.openxmlformats.org/drawingml/2006/main" lIns="76200" tIns="0" rIns="76200" bIns="0" anchor="ctr">
+            <a:noAutofit/>
+          </a:bodyPr>
+          <a:lstStyle xmlns:a="http://schemas.openxmlformats.org/drawingml/2006/main"/>
+          <a:p xmlns:a="http://schemas.openxmlformats.org/drawingml/2006/main">
+            <a:pPr algn="ctr">
+              <a:defRPr sz="1650" b="1">
+                <a:solidFill>
+                  <a:srgbClr val="3E8E45"/>
+                </a:solidFill>
+                <a:latin typeface="Nunito"/>
+                <a:ea typeface="Nunito"/>
+                <a:cs typeface="Nunito"/>
+              </a:defRPr>
+            </a:pPr>
+            <a:r>
+              <a:rPr sz="1650" b="1">
+                <a:solidFill>
+                  <a:srgbClr val="3E8E45"/>
+                </a:solidFill>
+                <a:latin typeface="Nunito"/>
+                <a:ea typeface="Nunito"/>
+                <a:cs typeface="Nunito"/>
+              </a:rPr>
+              <a:t>04</a:t>
+            </a:r>
+          </a:p>
+        </p:txBody>
+      </p:sp>
+      <p:sp>
+        <p:nvSpPr>
+          <p:cNvPr id="20" name="">
+            <a:extLst xmlns:a="http://schemas.openxmlformats.org/drawingml/2006/main">
+              <a:ext uri="{FF2B5EF4-FFF2-40B4-BE49-F238E27FC236}">
+                <a16:creationId xmlns:a16="http://schemas.microsoft.com/office/drawing/2014/main" id="{E7009813-0C54-4C80-BC04-982AB78664E2}"/>
+              </a:ext>
+            </a:extLst>
+          </p:cNvPr>
+          <p:cNvSpPr>
+            <a:spLocks xmlns:a="http://schemas.openxmlformats.org/drawingml/2006/main" noGrp="1"/>
+          </p:cNvSpPr>
+          <p:nvPr/>
+        </p:nvSpPr>
+        <p:spPr>
+          <a:xfrm xmlns:a="http://schemas.openxmlformats.org/drawingml/2006/main">
+            <a:off x="12649200" y="3600450"/>
+            <a:ext cx="2619375" cy="476250"/>
           </a:xfrm>
           <a:prstGeom xmlns:a="http://schemas.openxmlformats.org/drawingml/2006/main" prst="rect">
             <a:avLst/>
@@ -15260,100 +16570,47 @@
           <a:lstStyle xmlns:a="http://schemas.openxmlformats.org/drawingml/2006/main"/>
           <a:p xmlns:a="http://schemas.openxmlformats.org/drawingml/2006/main">
             <a:pPr algn="l">
-              <a:lnSpc>
-                <a:spcPct val="105000"/>
-              </a:lnSpc>
-              <a:buNone/>
-              <a:defRPr sz="2025" b="1">
-                <a:solidFill>
-                  <a:srgbClr val="C98A16"/>
-                </a:solidFill>
-                <a:latin typeface="Nunito"/>
-                <a:ea typeface="Nunito"/>
-                <a:cs typeface="Nunito"/>
-              </a:defRPr>
-            </a:pPr>
-            <a:r>
-              <a:rPr sz="2025" b="1">
-                <a:solidFill>
-                  <a:srgbClr val="C98A16"/>
-                </a:solidFill>
-                <a:latin typeface="Nunito"/>
-                <a:ea typeface="Nunito"/>
-                <a:cs typeface="Nunito"/>
-              </a:rPr>
-              <a:t>Keep gravity and starting</a:t>
-            </a:r>
-          </a:p>
-          <a:p xmlns:a="http://schemas.openxmlformats.org/drawingml/2006/main">
-            <a:pPr algn="l">
-              <a:lnSpc>
-                <a:spcPct val="105000"/>
-              </a:lnSpc>
-              <a:buNone/>
-              <a:defRPr sz="2025" b="1">
-                <a:solidFill>
-                  <a:srgbClr val="C98A16"/>
-                </a:solidFill>
-                <a:latin typeface="Nunito"/>
-                <a:ea typeface="Nunito"/>
-                <a:cs typeface="Nunito"/>
-              </a:defRPr>
-            </a:pPr>
-            <a:r>
-              <a:rPr sz="2025" b="1">
-                <a:solidFill>
-                  <a:srgbClr val="C98A16"/>
-                </a:solidFill>
-                <a:latin typeface="Nunito"/>
-                <a:ea typeface="Nunito"/>
-                <a:cs typeface="Nunito"/>
-              </a:rPr>
-              <a:t>height fixed.</a:t>
-            </a:r>
-          </a:p>
-        </p:txBody>
-      </p:sp>
-      <p:pic>
-        <p:nvPicPr>
-          <p:cNvPr id="23" name="matlab-launch-speed-figure" descr="MATLAB-generated comparison of two launch speeds with LaTeX-interpreted labels and legend"/>
-          <p:cNvPicPr>
-            <a:picLocks xmlns:a="http://schemas.openxmlformats.org/drawingml/2006/main" noChangeAspect="1"/>
-          </p:cNvPicPr>
-          <p:nvPr/>
-        </p:nvPicPr>
-        <p:blipFill>
-          <a:blip xmlns:r="http://schemas.openxmlformats.org/officeDocument/2006/relationships" xmlns:a="http://schemas.openxmlformats.org/drawingml/2006/main" r:embed="Rc6099979865842af"/>
-          <a:stretch xmlns:a="http://schemas.openxmlformats.org/drawingml/2006/main"/>
-        </p:blipFill>
-        <p:spPr>
-          <a:xfrm xmlns:a="http://schemas.openxmlformats.org/drawingml/2006/main">
-            <a:off x="5779807" y="2381250"/>
-            <a:ext cx="10538386" cy="5905500"/>
-          </a:xfrm>
-          <a:prstGeom xmlns:a="http://schemas.openxmlformats.org/drawingml/2006/main" prst="rect">
-            <a:avLst/>
-          </a:prstGeom>
-        </p:spPr>
-      </p:pic>
-      <p:sp>
-        <p:nvSpPr>
-          <p:cNvPr id="9" name="">
-            <a:extLst xmlns:a="http://schemas.openxmlformats.org/drawingml/2006/main">
-              <a:ext uri="{FF2B5EF4-FFF2-40B4-BE49-F238E27FC236}">
-                <a16:creationId xmlns:a16="http://schemas.microsoft.com/office/drawing/2014/main" id="{F8094218-59F2-4933-BAD7-51D729DAE044}"/>
-              </a:ext>
-            </a:extLst>
-          </p:cNvPr>
-          <p:cNvSpPr>
-            <a:spLocks xmlns:a="http://schemas.openxmlformats.org/drawingml/2006/main" noGrp="1"/>
-          </p:cNvSpPr>
-          <p:nvPr/>
-        </p:nvSpPr>
-        <p:spPr>
-          <a:xfrm xmlns:a="http://schemas.openxmlformats.org/drawingml/2006/main">
-            <a:off x="1095375" y="7048500"/>
-            <a:ext cx="4095750" cy="723900"/>
+              <a:defRPr sz="2550" b="1">
+                <a:solidFill>
+                  <a:srgbClr val="3E8E45"/>
+                </a:solidFill>
+                <a:latin typeface="Nunito"/>
+                <a:ea typeface="Nunito"/>
+                <a:cs typeface="Nunito"/>
+              </a:defRPr>
+            </a:pPr>
+            <a:r>
+              <a:rPr sz="2550" b="1">
+                <a:solidFill>
+                  <a:srgbClr val="3E8E45"/>
+                </a:solidFill>
+                <a:latin typeface="Nunito"/>
+                <a:ea typeface="Nunito"/>
+                <a:cs typeface="Nunito"/>
+              </a:rPr>
+              <a:t>Evidence</a:t>
+            </a:r>
+          </a:p>
+        </p:txBody>
+      </p:sp>
+      <p:sp>
+        <p:nvSpPr>
+          <p:cNvPr id="21" name="">
+            <a:extLst xmlns:a="http://schemas.openxmlformats.org/drawingml/2006/main">
+              <a:ext uri="{FF2B5EF4-FFF2-40B4-BE49-F238E27FC236}">
+                <a16:creationId xmlns:a16="http://schemas.microsoft.com/office/drawing/2014/main" id="{2A5D52C4-F7CA-457E-9069-6B9D4A080DFE}"/>
+              </a:ext>
+            </a:extLst>
+          </p:cNvPr>
+          <p:cNvSpPr>
+            <a:spLocks xmlns:a="http://schemas.openxmlformats.org/drawingml/2006/main" noGrp="1"/>
+          </p:cNvSpPr>
+          <p:nvPr/>
+        </p:nvSpPr>
+        <p:spPr>
+          <a:xfrm xmlns:a="http://schemas.openxmlformats.org/drawingml/2006/main">
+            <a:off x="12649200" y="4429125"/>
+            <a:ext cx="2619375" cy="1571625"/>
           </a:xfrm>
           <a:prstGeom xmlns:a="http://schemas.openxmlformats.org/drawingml/2006/main" prst="rect">
             <a:avLst/>
@@ -15370,48 +16627,114 @@
           </a:bodyPr>
           <a:lstStyle xmlns:a="http://schemas.openxmlformats.org/drawingml/2006/main"/>
           <a:p xmlns:a="http://schemas.openxmlformats.org/drawingml/2006/main">
-            <a:pPr algn="ctr">
-              <a:defRPr sz="2250" b="1">
-                <a:solidFill>
-                  <a:srgbClr val="0B2B4C"/>
-                </a:solidFill>
-                <a:latin typeface="Nunito"/>
-                <a:ea typeface="Nunito"/>
-                <a:cs typeface="Nunito"/>
-              </a:defRPr>
-            </a:pPr>
-            <a:r>
-              <a:rPr sz="2250" b="1">
-                <a:solidFill>
-                  <a:srgbClr val="0B2B4C"/>
-                </a:solidFill>
-                <a:latin typeface="Nunito"/>
-                <a:ea typeface="Nunito"/>
-                <a:cs typeface="Nunito"/>
-              </a:rPr>
-              <a:t>Higher initial speed → higher peak</a:t>
-            </a:r>
-          </a:p>
-        </p:txBody>
-      </p:sp>
-      <p:sp>
-        <p:nvSpPr>
-          <p:cNvPr id="10" name="">
-            <a:extLst xmlns:a="http://schemas.openxmlformats.org/drawingml/2006/main">
-              <a:ext uri="{FF2B5EF4-FFF2-40B4-BE49-F238E27FC236}">
-                <a16:creationId xmlns:a16="http://schemas.microsoft.com/office/drawing/2014/main" id="{BBC6892B-CCDA-404E-A749-E66B3064C70B}"/>
-              </a:ext>
-            </a:extLst>
-          </p:cNvPr>
-          <p:cNvSpPr>
-            <a:spLocks xmlns:a="http://schemas.openxmlformats.org/drawingml/2006/main" noGrp="1"/>
-          </p:cNvSpPr>
-          <p:nvPr/>
-        </p:nvSpPr>
-        <p:spPr>
-          <a:xfrm xmlns:a="http://schemas.openxmlformats.org/drawingml/2006/main">
-            <a:off x="1095375" y="7962900"/>
-            <a:ext cx="1095375" cy="457200"/>
+            <a:pPr algn="l">
+              <a:lnSpc>
+                <a:spcPct val="118000"/>
+              </a:lnSpc>
+              <a:buNone/>
+              <a:defRPr sz="1875">
+                <a:solidFill>
+                  <a:srgbClr val="3F4B57"/>
+                </a:solidFill>
+                <a:latin typeface="Nunito"/>
+                <a:ea typeface="Nunito"/>
+                <a:cs typeface="Nunito"/>
+              </a:defRPr>
+            </a:pPr>
+            <a:r>
+              <a:rPr sz="1875">
+                <a:solidFill>
+                  <a:srgbClr val="3F4B57"/>
+                </a:solidFill>
+                <a:latin typeface="Nunito"/>
+                <a:ea typeface="Nunito"/>
+                <a:cs typeface="Nunito"/>
+              </a:rPr>
+              <a:t>prediction, labelled plot,</a:t>
+            </a:r>
+          </a:p>
+          <a:p xmlns:a="http://schemas.openxmlformats.org/drawingml/2006/main">
+            <a:pPr algn="l">
+              <a:lnSpc>
+                <a:spcPct val="118000"/>
+              </a:lnSpc>
+              <a:buNone/>
+              <a:defRPr sz="1875">
+                <a:solidFill>
+                  <a:srgbClr val="3F4B57"/>
+                </a:solidFill>
+                <a:latin typeface="Nunito"/>
+                <a:ea typeface="Nunito"/>
+                <a:cs typeface="Nunito"/>
+              </a:defRPr>
+            </a:pPr>
+            <a:r>
+              <a:rPr sz="1875">
+                <a:solidFill>
+                  <a:srgbClr val="3F4B57"/>
+                </a:solidFill>
+                <a:latin typeface="Nunito"/>
+                <a:ea typeface="Nunito"/>
+                <a:cs typeface="Nunito"/>
+              </a:rPr>
+              <a:t>and launch-value check</a:t>
+            </a:r>
+          </a:p>
+        </p:txBody>
+      </p:sp>
+      <p:sp>
+        <p:nvSpPr>
+          <p:cNvPr id="22" name="">
+            <a:extLst xmlns:a="http://schemas.openxmlformats.org/drawingml/2006/main">
+              <a:ext uri="{FF2B5EF4-FFF2-40B4-BE49-F238E27FC236}">
+                <a16:creationId xmlns:a16="http://schemas.microsoft.com/office/drawing/2014/main" id="{9DE0C063-B4E0-4C4D-81F5-DE98FD09606E}"/>
+              </a:ext>
+            </a:extLst>
+          </p:cNvPr>
+          <p:cNvSpPr>
+            <a:spLocks xmlns:a="http://schemas.openxmlformats.org/drawingml/2006/main" noGrp="1"/>
+          </p:cNvSpPr>
+          <p:nvPr/>
+        </p:nvSpPr>
+        <p:spPr>
+          <a:xfrm xmlns:a="http://schemas.openxmlformats.org/drawingml/2006/main">
+            <a:off x="1095375" y="7048500"/>
+            <a:ext cx="15001875" cy="1123950"/>
+          </a:xfrm>
+          <a:prstGeom xmlns:a="http://schemas.openxmlformats.org/drawingml/2006/main" prst="roundRect">
+            <a:avLst>
+              <a:gd name="adj" fmla="val 10169"/>
+            </a:avLst>
+          </a:prstGeom>
+          <a:solidFill xmlns:a="http://schemas.openxmlformats.org/drawingml/2006/main">
+            <a:srgbClr val="F7F9FB"/>
+          </a:solidFill>
+          <a:ln xmlns:a="http://schemas.openxmlformats.org/drawingml/2006/main" w="19050">
+            <a:solidFill>
+              <a:srgbClr val="0B2B4C"/>
+            </a:solidFill>
+            <a:prstDash val="solid"/>
+          </a:ln>
+        </p:spPr>
+      </p:sp>
+      <p:sp>
+        <p:nvSpPr>
+          <p:cNvPr id="23" name="">
+            <a:extLst xmlns:a="http://schemas.openxmlformats.org/drawingml/2006/main">
+              <a:ext uri="{FF2B5EF4-FFF2-40B4-BE49-F238E27FC236}">
+                <a16:creationId xmlns:a16="http://schemas.microsoft.com/office/drawing/2014/main" id="{7C326A3E-08A7-4C5F-B4AD-402BBD47FAF8}"/>
+              </a:ext>
+            </a:extLst>
+          </p:cNvPr>
+          <p:cNvSpPr>
+            <a:spLocks xmlns:a="http://schemas.openxmlformats.org/drawingml/2006/main" noGrp="1"/>
+          </p:cNvSpPr>
+          <p:nvPr/>
+        </p:nvSpPr>
+        <p:spPr>
+          <a:xfrm xmlns:a="http://schemas.openxmlformats.org/drawingml/2006/main">
+            <a:off x="1524000" y="7372350"/>
+            <a:ext cx="14144625" cy="666750"/>
           </a:xfrm>
           <a:prstGeom xmlns:a="http://schemas.openxmlformats.org/drawingml/2006/main" prst="rect">
             <a:avLst/>
@@ -15428,168 +16751,8 @@
           </a:bodyPr>
           <a:lstStyle xmlns:a="http://schemas.openxmlformats.org/drawingml/2006/main"/>
           <a:p xmlns:a="http://schemas.openxmlformats.org/drawingml/2006/main">
-            <a:pPr algn="l">
-              <a:defRPr sz="1800" b="1">
-                <a:solidFill>
-                  <a:srgbClr val="2F6DB2"/>
-                </a:solidFill>
-                <a:latin typeface="Nunito"/>
-                <a:ea typeface="Nunito"/>
-                <a:cs typeface="Nunito"/>
-              </a:defRPr>
-            </a:pPr>
-            <a:r>
-              <a:rPr sz="1800" b="1">
-                <a:solidFill>
-                  <a:srgbClr val="2F6DB2"/>
-                </a:solidFill>
-                <a:latin typeface="Nunito"/>
-                <a:ea typeface="Nunito"/>
-                <a:cs typeface="Nunito"/>
-              </a:rPr>
-              <a:t>changed:</a:t>
-            </a:r>
-          </a:p>
-        </p:txBody>
-      </p:sp>
-      <p:pic>
-        <p:nvPicPr>
-          <p:cNvPr id="26" name="equation-comparison-v0" descr="LaTeX-rendered symbol v subscript 0"/>
-          <p:cNvPicPr>
-            <a:picLocks xmlns:a="http://schemas.openxmlformats.org/drawingml/2006/main" noChangeAspect="1"/>
-          </p:cNvPicPr>
-          <p:nvPr/>
-        </p:nvPicPr>
-        <p:blipFill>
-          <a:blip xmlns:r="http://schemas.openxmlformats.org/officeDocument/2006/relationships" xmlns:a="http://schemas.openxmlformats.org/drawingml/2006/main" r:embed="R3c1617fcc2dd429d"/>
-          <a:stretch xmlns:a="http://schemas.openxmlformats.org/drawingml/2006/main"/>
-        </p:blipFill>
-        <p:spPr>
-          <a:xfrm xmlns:a="http://schemas.openxmlformats.org/drawingml/2006/main">
-            <a:off x="2271713" y="7943850"/>
-            <a:ext cx="485775" cy="323850"/>
-          </a:xfrm>
-          <a:prstGeom xmlns:a="http://schemas.openxmlformats.org/drawingml/2006/main" prst="rect">
-            <a:avLst/>
-          </a:prstGeom>
-        </p:spPr>
-      </p:pic>
-      <p:sp>
-        <p:nvSpPr>
-          <p:cNvPr id="12" name="">
-            <a:extLst xmlns:a="http://schemas.openxmlformats.org/drawingml/2006/main">
-              <a:ext uri="{FF2B5EF4-FFF2-40B4-BE49-F238E27FC236}">
-                <a16:creationId xmlns:a16="http://schemas.microsoft.com/office/drawing/2014/main" id="{10F52EBA-C1AA-4C9E-805C-0C747E33D500}"/>
-              </a:ext>
-            </a:extLst>
-          </p:cNvPr>
-          <p:cNvSpPr>
-            <a:spLocks xmlns:a="http://schemas.openxmlformats.org/drawingml/2006/main" noGrp="1"/>
-          </p:cNvSpPr>
-          <p:nvPr/>
-        </p:nvSpPr>
-        <p:spPr>
-          <a:xfrm xmlns:a="http://schemas.openxmlformats.org/drawingml/2006/main">
-            <a:off x="3048000" y="7962900"/>
-            <a:ext cx="742950" cy="457200"/>
-          </a:xfrm>
-          <a:prstGeom xmlns:a="http://schemas.openxmlformats.org/drawingml/2006/main" prst="rect">
-            <a:avLst/>
-          </a:prstGeom>
-          <a:noFill xmlns:a="http://schemas.openxmlformats.org/drawingml/2006/main"/>
-          <a:ln xmlns:a="http://schemas.openxmlformats.org/drawingml/2006/main" w="0">
-            <a:noFill/>
-            <a:prstDash val="solid"/>
-          </a:ln>
-        </p:spPr>
-        <p:txBody>
-          <a:bodyPr xmlns:a="http://schemas.openxmlformats.org/drawingml/2006/main" wrap="square" lIns="0" tIns="0" rIns="0" bIns="0" anchor="t">
-            <a:noAutofit/>
-          </a:bodyPr>
-          <a:lstStyle xmlns:a="http://schemas.openxmlformats.org/drawingml/2006/main"/>
-          <a:p xmlns:a="http://schemas.openxmlformats.org/drawingml/2006/main">
-            <a:pPr algn="l">
-              <a:defRPr sz="1800" b="1">
-                <a:solidFill>
-                  <a:srgbClr val="697684"/>
-                </a:solidFill>
-                <a:latin typeface="Nunito"/>
-                <a:ea typeface="Nunito"/>
-                <a:cs typeface="Nunito"/>
-              </a:defRPr>
-            </a:pPr>
-            <a:r>
-              <a:rPr sz="1800" b="1">
-                <a:solidFill>
-                  <a:srgbClr val="697684"/>
-                </a:solidFill>
-                <a:latin typeface="Nunito"/>
-                <a:ea typeface="Nunito"/>
-                <a:cs typeface="Nunito"/>
-              </a:rPr>
-              <a:t>fixed:</a:t>
-            </a:r>
-          </a:p>
-        </p:txBody>
-      </p:sp>
-      <p:pic>
-        <p:nvPicPr>
-          <p:cNvPr id="28" name="equation-comparison-fixed" descr="LaTeX-rendered expression g and y subscript 0"/>
-          <p:cNvPicPr>
-            <a:picLocks xmlns:a="http://schemas.openxmlformats.org/drawingml/2006/main" noChangeAspect="1"/>
-          </p:cNvPicPr>
-          <p:nvPr/>
-        </p:nvPicPr>
-        <p:blipFill>
-          <a:blip xmlns:r="http://schemas.openxmlformats.org/officeDocument/2006/relationships" xmlns:a="http://schemas.openxmlformats.org/drawingml/2006/main" r:embed="R3bfa691160c2405a"/>
-          <a:stretch xmlns:a="http://schemas.openxmlformats.org/drawingml/2006/main"/>
-        </p:blipFill>
-        <p:spPr>
-          <a:xfrm xmlns:a="http://schemas.openxmlformats.org/drawingml/2006/main">
-            <a:off x="3900577" y="7943850"/>
-            <a:ext cx="1057095" cy="323850"/>
-          </a:xfrm>
-          <a:prstGeom xmlns:a="http://schemas.openxmlformats.org/drawingml/2006/main" prst="rect">
-            <a:avLst/>
-          </a:prstGeom>
-        </p:spPr>
-      </p:pic>
-      <p:sp>
-        <p:nvSpPr>
-          <p:cNvPr id="14" name="">
-            <a:extLst xmlns:a="http://schemas.openxmlformats.org/drawingml/2006/main">
-              <a:ext uri="{FF2B5EF4-FFF2-40B4-BE49-F238E27FC236}">
-                <a16:creationId xmlns:a16="http://schemas.microsoft.com/office/drawing/2014/main" id="{C95439EA-E8AE-4A10-8D05-9F219F11F38B}"/>
-              </a:ext>
-            </a:extLst>
-          </p:cNvPr>
-          <p:cNvSpPr>
-            <a:spLocks xmlns:a="http://schemas.openxmlformats.org/drawingml/2006/main" noGrp="1"/>
-          </p:cNvSpPr>
-          <p:nvPr/>
-        </p:nvSpPr>
-        <p:spPr>
-          <a:xfrm xmlns:a="http://schemas.openxmlformats.org/drawingml/2006/main">
-            <a:off x="5715000" y="8362950"/>
-            <a:ext cx="9525000" cy="400050"/>
-          </a:xfrm>
-          <a:prstGeom xmlns:a="http://schemas.openxmlformats.org/drawingml/2006/main" prst="rect">
-            <a:avLst/>
-          </a:prstGeom>
-          <a:noFill xmlns:a="http://schemas.openxmlformats.org/drawingml/2006/main"/>
-          <a:ln xmlns:a="http://schemas.openxmlformats.org/drawingml/2006/main" w="0">
-            <a:noFill/>
-            <a:prstDash val="solid"/>
-          </a:ln>
-        </p:spPr>
-        <p:txBody>
-          <a:bodyPr xmlns:a="http://schemas.openxmlformats.org/drawingml/2006/main" wrap="square" lIns="0" tIns="0" rIns="0" bIns="0" anchor="t">
-            <a:noAutofit/>
-          </a:bodyPr>
-          <a:lstStyle xmlns:a="http://schemas.openxmlformats.org/drawingml/2006/main"/>
-          <a:p xmlns:a="http://schemas.openxmlformats.org/drawingml/2006/main">
-            <a:pPr algn="l">
-              <a:defRPr sz="2250" b="1">
+            <a:pPr algn="ctr">
+              <a:defRPr sz="2400" b="1">
                 <a:solidFill>
                   <a:srgbClr val="0B2B4C"/>
                 </a:solidFill>
@@ -15599,7 +16762,7 @@
               </a:defRPr>
             </a:pPr>
             <a:r>
-              <a:rPr sz="2250" b="1">
+              <a:rPr sz="2400" b="1">
                 <a:solidFill>
                   <a:srgbClr val="0B2B4C"/>
                 </a:solidFill>
@@ -15607,17 +16770,17 @@
                 <a:ea typeface="Nunito"/>
                 <a:cs typeface="Nunito"/>
               </a:rPr>
-              <a:t>Observed: the blue curve reaches the higher peak</a:t>
-            </a:r>
-          </a:p>
-        </p:txBody>
-      </p:sp>
-      <p:sp>
-        <p:nvSpPr>
-          <p:cNvPr id="15" name="slide-number-8">
-            <a:extLst xmlns:a="http://schemas.openxmlformats.org/drawingml/2006/main">
-              <a:ext uri="{FF2B5EF4-FFF2-40B4-BE49-F238E27FC236}">
-                <a16:creationId xmlns:a16="http://schemas.microsoft.com/office/drawing/2014/main" id="{0870CD0D-7421-4197-B236-58E6AAC86F87}"/>
+              <a:t>Checkpoint: which step would help you find a wrong sign in the model?</a:t>
+            </a:r>
+          </a:p>
+        </p:txBody>
+      </p:sp>
+      <p:sp>
+        <p:nvSpPr>
+          <p:cNvPr id="24" name="slide-number-8">
+            <a:extLst xmlns:a="http://schemas.openxmlformats.org/drawingml/2006/main">
+              <a:ext uri="{FF2B5EF4-FFF2-40B4-BE49-F238E27FC236}">
+                <a16:creationId xmlns:a16="http://schemas.microsoft.com/office/drawing/2014/main" id="{6371E8FE-3B2F-486B-801E-0C151B00B310}"/>
               </a:ext>
             </a:extLst>
           </p:cNvPr>
@@ -15675,7 +16838,7 @@
     </p:spTree>
     <p:extLst>
       <p:ext uri="{BB962C8B-B14F-4D97-AF65-F5344CB8AC3E}">
-        <p14:creationId xmlns:p14="http://schemas.microsoft.com/office/powerpoint/2010/main" val="1771240573"/>
+        <p14:creationId xmlns:p14="http://schemas.microsoft.com/office/powerpoint/2010/main" val="767498597"/>
       </p:ext>
     </p:extLst>
   </p:cSld>
@@ -15703,10 +16866,10 @@
       </p:grpSpPr>
       <p:sp>
         <p:nvSpPr>
-          <p:cNvPr id="25" name="title-T1">
-            <a:extLst xmlns:a="http://schemas.openxmlformats.org/drawingml/2006/main">
-              <a:ext uri="{FF2B5EF4-FFF2-40B4-BE49-F238E27FC236}">
-                <a16:creationId xmlns:a16="http://schemas.microsoft.com/office/drawing/2014/main" id="{6E33CE2F-924B-4E95-9CC4-BA30C97DA3D9}"/>
+          <p:cNvPr id="14" name="title-T1">
+            <a:extLst xmlns:a="http://schemas.openxmlformats.org/drawingml/2006/main">
+              <a:ext uri="{FF2B5EF4-FFF2-40B4-BE49-F238E27FC236}">
+                <a16:creationId xmlns:a16="http://schemas.microsoft.com/office/drawing/2014/main" id="{BDAE99FC-7192-4DA4-8040-AEFFBC885962}"/>
               </a:ext>
             </a:extLst>
           </p:cNvPr>
@@ -15760,7 +16923,7 @@
                 <a:ea typeface="Nunito"/>
                 <a:cs typeface="Nunito"/>
               </a:rPr>
-              <a:t>Trace one model from physics to a graph</a:t>
+              <a:t>Build the time array first</a:t>
             </a:r>
           </a:p>
         </p:txBody>
@@ -15770,7 +16933,7 @@
           <p:cNvPr id="2" name="subtitle-T1">
             <a:extLst xmlns:a="http://schemas.openxmlformats.org/drawingml/2006/main">
               <a:ext uri="{FF2B5EF4-FFF2-40B4-BE49-F238E27FC236}">
-                <a16:creationId xmlns:a16="http://schemas.microsoft.com/office/drawing/2014/main" id="{F767A53D-F51E-405F-9FC3-3C3D326F513D}"/>
+                <a16:creationId xmlns:a16="http://schemas.microsoft.com/office/drawing/2014/main" id="{A3789155-89FA-4935-BB94-B6F98C7383BF}"/>
               </a:ext>
             </a:extLst>
           </p:cNvPr>
@@ -15820,7 +16983,7 @@
                 <a:ea typeface="Nunito"/>
                 <a:cs typeface="Nunito"/>
               </a:rPr>
-              <a:t>Use the same reasoning chain every time you model</a:t>
+              <a:t>The model needs one time value for each computed height</a:t>
             </a:r>
           </a:p>
         </p:txBody>
@@ -15830,116 +16993,23 @@
           <p:cNvPr id="3" name="">
             <a:extLst xmlns:a="http://schemas.openxmlformats.org/drawingml/2006/main">
               <a:ext uri="{FF2B5EF4-FFF2-40B4-BE49-F238E27FC236}">
-                <a16:creationId xmlns:a16="http://schemas.microsoft.com/office/drawing/2014/main" id="{AD1B6A9F-1AC9-4F75-821E-0A493942502D}"/>
-              </a:ext>
-            </a:extLst>
-          </p:cNvPr>
-          <p:cNvSpPr>
-            <a:spLocks xmlns:a="http://schemas.openxmlformats.org/drawingml/2006/main" noGrp="1"/>
-          </p:cNvSpPr>
-          <p:nvPr/>
-        </p:nvSpPr>
-        <p:spPr>
-          <a:xfrm xmlns:a="http://schemas.openxmlformats.org/drawingml/2006/main">
-            <a:off x="4048125" y="4181475"/>
-            <a:ext cx="762000" cy="114300"/>
-          </a:xfrm>
-          <a:prstGeom xmlns:a="http://schemas.openxmlformats.org/drawingml/2006/main" prst="rightArrow">
-            <a:avLst/>
-          </a:prstGeom>
-          <a:solidFill xmlns:a="http://schemas.openxmlformats.org/drawingml/2006/main">
-            <a:srgbClr val="AAB4BE"/>
-          </a:solidFill>
-          <a:ln xmlns:a="http://schemas.openxmlformats.org/drawingml/2006/main" w="0">
-            <a:noFill/>
-            <a:prstDash val="solid"/>
-          </a:ln>
-        </p:spPr>
-      </p:sp>
-      <p:sp>
-        <p:nvSpPr>
-          <p:cNvPr id="4" name="">
-            <a:extLst xmlns:a="http://schemas.openxmlformats.org/drawingml/2006/main">
-              <a:ext uri="{FF2B5EF4-FFF2-40B4-BE49-F238E27FC236}">
-                <a16:creationId xmlns:a16="http://schemas.microsoft.com/office/drawing/2014/main" id="{BF59FAF7-635D-46B3-8387-67F4357F5AB3}"/>
-              </a:ext>
-            </a:extLst>
-          </p:cNvPr>
-          <p:cNvSpPr>
-            <a:spLocks xmlns:a="http://schemas.openxmlformats.org/drawingml/2006/main" noGrp="1"/>
-          </p:cNvSpPr>
-          <p:nvPr/>
-        </p:nvSpPr>
-        <p:spPr>
-          <a:xfrm xmlns:a="http://schemas.openxmlformats.org/drawingml/2006/main">
-            <a:off x="7810500" y="4181475"/>
-            <a:ext cx="762000" cy="114300"/>
-          </a:xfrm>
-          <a:prstGeom xmlns:a="http://schemas.openxmlformats.org/drawingml/2006/main" prst="rightArrow">
-            <a:avLst/>
-          </a:prstGeom>
-          <a:solidFill xmlns:a="http://schemas.openxmlformats.org/drawingml/2006/main">
-            <a:srgbClr val="AAB4BE"/>
-          </a:solidFill>
-          <a:ln xmlns:a="http://schemas.openxmlformats.org/drawingml/2006/main" w="0">
-            <a:noFill/>
-            <a:prstDash val="solid"/>
-          </a:ln>
-        </p:spPr>
-      </p:sp>
-      <p:sp>
-        <p:nvSpPr>
-          <p:cNvPr id="5" name="">
-            <a:extLst xmlns:a="http://schemas.openxmlformats.org/drawingml/2006/main">
-              <a:ext uri="{FF2B5EF4-FFF2-40B4-BE49-F238E27FC236}">
-                <a16:creationId xmlns:a16="http://schemas.microsoft.com/office/drawing/2014/main" id="{C3E46983-74D1-48F2-A4C4-7A8AD8A5338E}"/>
-              </a:ext>
-            </a:extLst>
-          </p:cNvPr>
-          <p:cNvSpPr>
-            <a:spLocks xmlns:a="http://schemas.openxmlformats.org/drawingml/2006/main" noGrp="1"/>
-          </p:cNvSpPr>
-          <p:nvPr/>
-        </p:nvSpPr>
-        <p:spPr>
-          <a:xfrm xmlns:a="http://schemas.openxmlformats.org/drawingml/2006/main">
-            <a:off x="11572875" y="4181475"/>
-            <a:ext cx="762000" cy="114300"/>
-          </a:xfrm>
-          <a:prstGeom xmlns:a="http://schemas.openxmlformats.org/drawingml/2006/main" prst="rightArrow">
-            <a:avLst/>
-          </a:prstGeom>
-          <a:solidFill xmlns:a="http://schemas.openxmlformats.org/drawingml/2006/main">
-            <a:srgbClr val="AAB4BE"/>
-          </a:solidFill>
-          <a:ln xmlns:a="http://schemas.openxmlformats.org/drawingml/2006/main" w="0">
-            <a:noFill/>
-            <a:prstDash val="solid"/>
-          </a:ln>
-        </p:spPr>
-      </p:sp>
-      <p:sp>
-        <p:nvSpPr>
-          <p:cNvPr id="6" name="">
-            <a:extLst xmlns:a="http://schemas.openxmlformats.org/drawingml/2006/main">
-              <a:ext uri="{FF2B5EF4-FFF2-40B4-BE49-F238E27FC236}">
-                <a16:creationId xmlns:a16="http://schemas.microsoft.com/office/drawing/2014/main" id="{7FA76481-9CB0-4D9C-96FA-233F45222198}"/>
-              </a:ext>
-            </a:extLst>
-          </p:cNvPr>
-          <p:cNvSpPr>
-            <a:spLocks xmlns:a="http://schemas.openxmlformats.org/drawingml/2006/main" noGrp="1"/>
-          </p:cNvSpPr>
-          <p:nvPr/>
-        </p:nvSpPr>
-        <p:spPr>
-          <a:xfrm xmlns:a="http://schemas.openxmlformats.org/drawingml/2006/main">
-            <a:off x="1095375" y="2571750"/>
-            <a:ext cx="3143250" cy="3810000"/>
+                <a16:creationId xmlns:a16="http://schemas.microsoft.com/office/drawing/2014/main" id="{EDD5BB88-680F-48DC-9D62-19B698D78362}"/>
+              </a:ext>
+            </a:extLst>
+          </p:cNvPr>
+          <p:cNvSpPr>
+            <a:spLocks xmlns:a="http://schemas.openxmlformats.org/drawingml/2006/main" noGrp="1"/>
+          </p:cNvSpPr>
+          <p:nvPr/>
+        </p:nvSpPr>
+        <p:spPr>
+          <a:xfrm xmlns:a="http://schemas.openxmlformats.org/drawingml/2006/main">
+            <a:off x="1095375" y="2714625"/>
+            <a:ext cx="6858000" cy="4000500"/>
           </a:xfrm>
           <a:prstGeom xmlns:a="http://schemas.openxmlformats.org/drawingml/2006/main" prst="roundRect">
             <a:avLst>
-              <a:gd name="adj" fmla="val 3636"/>
+              <a:gd name="adj" fmla="val 2857"/>
             </a:avLst>
           </a:prstGeom>
           <a:solidFill xmlns:a="http://schemas.openxmlformats.org/drawingml/2006/main">
@@ -15955,84 +17025,22 @@
       </p:sp>
       <p:sp>
         <p:nvSpPr>
-          <p:cNvPr id="7" name="">
-            <a:extLst xmlns:a="http://schemas.openxmlformats.org/drawingml/2006/main">
-              <a:ext uri="{FF2B5EF4-FFF2-40B4-BE49-F238E27FC236}">
-                <a16:creationId xmlns:a16="http://schemas.microsoft.com/office/drawing/2014/main" id="{53A94FFB-61D8-4554-BF88-D004017B0F64}"/>
-              </a:ext>
-            </a:extLst>
-          </p:cNvPr>
-          <p:cNvSpPr>
-            <a:spLocks xmlns:a="http://schemas.openxmlformats.org/drawingml/2006/main" noGrp="1"/>
-          </p:cNvSpPr>
-          <p:nvPr/>
-        </p:nvSpPr>
-        <p:spPr>
-          <a:xfrm xmlns:a="http://schemas.openxmlformats.org/drawingml/2006/main">
-            <a:off x="1362075" y="2857500"/>
-            <a:ext cx="609600" cy="438150"/>
-          </a:xfrm>
-          <a:prstGeom xmlns:a="http://schemas.openxmlformats.org/drawingml/2006/main" prst="roundRect">
-            <a:avLst>
-              <a:gd name="adj" fmla="val 50000"/>
-            </a:avLst>
-          </a:prstGeom>
-          <a:solidFill xmlns:a="http://schemas.openxmlformats.org/drawingml/2006/main">
-            <a:srgbClr val="FFFFFF"/>
-          </a:solidFill>
-          <a:ln xmlns:a="http://schemas.openxmlformats.org/drawingml/2006/main" w="0">
-            <a:noFill/>
-            <a:prstDash val="solid"/>
-          </a:ln>
-        </p:spPr>
-        <p:txBody>
-          <a:bodyPr xmlns:a="http://schemas.openxmlformats.org/drawingml/2006/main" lIns="76200" tIns="0" rIns="76200" bIns="0" anchor="ctr">
-            <a:noAutofit/>
-          </a:bodyPr>
-          <a:lstStyle xmlns:a="http://schemas.openxmlformats.org/drawingml/2006/main"/>
-          <a:p xmlns:a="http://schemas.openxmlformats.org/drawingml/2006/main">
-            <a:pPr algn="ctr">
-              <a:defRPr sz="1650" b="1">
-                <a:solidFill>
-                  <a:srgbClr val="2F6DB2"/>
-                </a:solidFill>
-                <a:latin typeface="Nunito"/>
-                <a:ea typeface="Nunito"/>
-                <a:cs typeface="Nunito"/>
-              </a:defRPr>
-            </a:pPr>
-            <a:r>
-              <a:rPr sz="1650" b="1">
-                <a:solidFill>
-                  <a:srgbClr val="2F6DB2"/>
-                </a:solidFill>
-                <a:latin typeface="Nunito"/>
-                <a:ea typeface="Nunito"/>
-                <a:cs typeface="Nunito"/>
-              </a:rPr>
-              <a:t>01</a:t>
-            </a:r>
-          </a:p>
-        </p:txBody>
-      </p:sp>
-      <p:sp>
-        <p:nvSpPr>
-          <p:cNvPr id="8" name="">
-            <a:extLst xmlns:a="http://schemas.openxmlformats.org/drawingml/2006/main">
-              <a:ext uri="{FF2B5EF4-FFF2-40B4-BE49-F238E27FC236}">
-                <a16:creationId xmlns:a16="http://schemas.microsoft.com/office/drawing/2014/main" id="{0EA1CB9D-B9C6-468D-AD4A-4D8959B39B37}"/>
-              </a:ext>
-            </a:extLst>
-          </p:cNvPr>
-          <p:cNvSpPr>
-            <a:spLocks xmlns:a="http://schemas.openxmlformats.org/drawingml/2006/main" noGrp="1"/>
-          </p:cNvSpPr>
-          <p:nvPr/>
-        </p:nvSpPr>
-        <p:spPr>
-          <a:xfrm xmlns:a="http://schemas.openxmlformats.org/drawingml/2006/main">
-            <a:off x="1362075" y="3600450"/>
-            <a:ext cx="2619375" cy="476250"/>
+          <p:cNvPr id="4" name="">
+            <a:extLst xmlns:a="http://schemas.openxmlformats.org/drawingml/2006/main">
+              <a:ext uri="{FF2B5EF4-FFF2-40B4-BE49-F238E27FC236}">
+                <a16:creationId xmlns:a16="http://schemas.microsoft.com/office/drawing/2014/main" id="{5028C1C7-EBAA-457F-B21D-471690027530}"/>
+              </a:ext>
+            </a:extLst>
+          </p:cNvPr>
+          <p:cNvSpPr>
+            <a:spLocks xmlns:a="http://schemas.openxmlformats.org/drawingml/2006/main" noGrp="1"/>
+          </p:cNvSpPr>
+          <p:nvPr/>
+        </p:nvSpPr>
+        <p:spPr>
+          <a:xfrm xmlns:a="http://schemas.openxmlformats.org/drawingml/2006/main">
+            <a:off x="1476375" y="3095625"/>
+            <a:ext cx="5905500" cy="571500"/>
           </a:xfrm>
           <a:prstGeom xmlns:a="http://schemas.openxmlformats.org/drawingml/2006/main" prst="rect">
             <a:avLst/>
@@ -16052,7 +17060,7 @@
             <a:pPr algn="l">
               <a:defRPr sz="2550" b="1">
                 <a:solidFill>
-                  <a:srgbClr val="2F6DB2"/>
+                  <a:srgbClr val="0B2B4C"/>
                 </a:solidFill>
                 <a:latin typeface="Nunito"/>
                 <a:ea typeface="Nunito"/>
@@ -16062,35 +17070,35 @@
             <a:r>
               <a:rPr sz="2550" b="1">
                 <a:solidFill>
-                  <a:srgbClr val="2F6DB2"/>
-                </a:solidFill>
-                <a:latin typeface="Nunito"/>
-                <a:ea typeface="Nunito"/>
-                <a:cs typeface="Nunito"/>
-              </a:rPr>
-              <a:t>Model</a:t>
-            </a:r>
-          </a:p>
-        </p:txBody>
-      </p:sp>
-      <p:sp>
-        <p:nvSpPr>
-          <p:cNvPr id="9" name="">
-            <a:extLst xmlns:a="http://schemas.openxmlformats.org/drawingml/2006/main">
-              <a:ext uri="{FF2B5EF4-FFF2-40B4-BE49-F238E27FC236}">
-                <a16:creationId xmlns:a16="http://schemas.microsoft.com/office/drawing/2014/main" id="{8F73D90C-D63B-4BAF-81C2-B422D0B8E488}"/>
-              </a:ext>
-            </a:extLst>
-          </p:cNvPr>
-          <p:cNvSpPr>
-            <a:spLocks xmlns:a="http://schemas.openxmlformats.org/drawingml/2006/main" noGrp="1"/>
-          </p:cNvSpPr>
-          <p:nvPr/>
-        </p:nvSpPr>
-        <p:spPr>
-          <a:xfrm xmlns:a="http://schemas.openxmlformats.org/drawingml/2006/main">
-            <a:off x="1362075" y="4429125"/>
-            <a:ext cx="2619375" cy="1571625"/>
+                  <a:srgbClr val="0B2B4C"/>
+                </a:solidFill>
+                <a:latin typeface="Nunito"/>
+                <a:ea typeface="Nunito"/>
+                <a:cs typeface="Nunito"/>
+              </a:rPr>
+              <a:t>Two ways to make 41 samples</a:t>
+            </a:r>
+          </a:p>
+        </p:txBody>
+      </p:sp>
+      <p:sp>
+        <p:nvSpPr>
+          <p:cNvPr id="5" name="">
+            <a:extLst xmlns:a="http://schemas.openxmlformats.org/drawingml/2006/main">
+              <a:ext uri="{FF2B5EF4-FFF2-40B4-BE49-F238E27FC236}">
+                <a16:creationId xmlns:a16="http://schemas.microsoft.com/office/drawing/2014/main" id="{3693B7D8-597F-49B9-9A76-7C6EFD996372}"/>
+              </a:ext>
+            </a:extLst>
+          </p:cNvPr>
+          <p:cNvSpPr>
+            <a:spLocks xmlns:a="http://schemas.openxmlformats.org/drawingml/2006/main" noGrp="1"/>
+          </p:cNvSpPr>
+          <p:nvPr/>
+        </p:nvSpPr>
+        <p:spPr>
+          <a:xfrm xmlns:a="http://schemas.openxmlformats.org/drawingml/2006/main">
+            <a:off x="1571625" y="4000500"/>
+            <a:ext cx="5524500" cy="571500"/>
           </a:xfrm>
           <a:prstGeom xmlns:a="http://schemas.openxmlformats.org/drawingml/2006/main" prst="rect">
             <a:avLst/>
@@ -16108,175 +17116,47 @@
           <a:lstStyle xmlns:a="http://schemas.openxmlformats.org/drawingml/2006/main"/>
           <a:p xmlns:a="http://schemas.openxmlformats.org/drawingml/2006/main">
             <a:pPr algn="l">
-              <a:lnSpc>
-                <a:spcPct val="118000"/>
-              </a:lnSpc>
-              <a:buNone/>
-              <a:defRPr sz="1875">
-                <a:solidFill>
-                  <a:srgbClr val="3F4B57"/>
-                </a:solidFill>
-                <a:latin typeface="Nunito"/>
-                <a:ea typeface="Nunito"/>
-                <a:cs typeface="Nunito"/>
-              </a:defRPr>
-            </a:pPr>
-            <a:r>
-              <a:rPr sz="1875">
-                <a:solidFill>
-                  <a:srgbClr val="3F4B57"/>
-                </a:solidFill>
-                <a:latin typeface="Nunito"/>
-                <a:ea typeface="Nunito"/>
-                <a:cs typeface="Nunito"/>
-              </a:rPr>
-              <a:t>question, direction,</a:t>
-            </a:r>
-          </a:p>
-          <a:p xmlns:a="http://schemas.openxmlformats.org/drawingml/2006/main">
-            <a:pPr algn="l">
-              <a:lnSpc>
-                <a:spcPct val="118000"/>
-              </a:lnSpc>
-              <a:buNone/>
-              <a:defRPr sz="1875">
-                <a:solidFill>
-                  <a:srgbClr val="3F4B57"/>
-                </a:solidFill>
-                <a:latin typeface="Nunito"/>
-                <a:ea typeface="Nunito"/>
-                <a:cs typeface="Nunito"/>
-              </a:defRPr>
-            </a:pPr>
-            <a:r>
-              <a:rPr sz="1875">
-                <a:solidFill>
-                  <a:srgbClr val="3F4B57"/>
-                </a:solidFill>
-                <a:latin typeface="Nunito"/>
-                <a:ea typeface="Nunito"/>
-                <a:cs typeface="Nunito"/>
-              </a:rPr>
-              <a:t>variables, and units</a:t>
-            </a:r>
-          </a:p>
-        </p:txBody>
-      </p:sp>
-      <p:sp>
-        <p:nvSpPr>
-          <p:cNvPr id="10" name="">
-            <a:extLst xmlns:a="http://schemas.openxmlformats.org/drawingml/2006/main">
-              <a:ext uri="{FF2B5EF4-FFF2-40B4-BE49-F238E27FC236}">
-                <a16:creationId xmlns:a16="http://schemas.microsoft.com/office/drawing/2014/main" id="{7FD5DF61-95DB-472F-8120-814F3A2ABAB2}"/>
-              </a:ext>
-            </a:extLst>
-          </p:cNvPr>
-          <p:cNvSpPr>
-            <a:spLocks xmlns:a="http://schemas.openxmlformats.org/drawingml/2006/main" noGrp="1"/>
-          </p:cNvSpPr>
-          <p:nvPr/>
-        </p:nvSpPr>
-        <p:spPr>
-          <a:xfrm xmlns:a="http://schemas.openxmlformats.org/drawingml/2006/main">
-            <a:off x="4857750" y="2571750"/>
-            <a:ext cx="3143250" cy="3810000"/>
-          </a:xfrm>
-          <a:prstGeom xmlns:a="http://schemas.openxmlformats.org/drawingml/2006/main" prst="roundRect">
-            <a:avLst>
-              <a:gd name="adj" fmla="val 3636"/>
-            </a:avLst>
-          </a:prstGeom>
-          <a:solidFill xmlns:a="http://schemas.openxmlformats.org/drawingml/2006/main">
-            <a:srgbClr val="F7F9FB"/>
-          </a:solidFill>
-          <a:ln xmlns:a="http://schemas.openxmlformats.org/drawingml/2006/main" w="19050">
-            <a:solidFill>
-              <a:srgbClr val="0B2B4C"/>
-            </a:solidFill>
-            <a:prstDash val="solid"/>
-          </a:ln>
-        </p:spPr>
-      </p:sp>
-      <p:sp>
-        <p:nvSpPr>
-          <p:cNvPr id="11" name="">
-            <a:extLst xmlns:a="http://schemas.openxmlformats.org/drawingml/2006/main">
-              <a:ext uri="{FF2B5EF4-FFF2-40B4-BE49-F238E27FC236}">
-                <a16:creationId xmlns:a16="http://schemas.microsoft.com/office/drawing/2014/main" id="{A59A3C6C-E0E2-4C3C-9F59-1821D35DCDAB}"/>
-              </a:ext>
-            </a:extLst>
-          </p:cNvPr>
-          <p:cNvSpPr>
-            <a:spLocks xmlns:a="http://schemas.openxmlformats.org/drawingml/2006/main" noGrp="1"/>
-          </p:cNvSpPr>
-          <p:nvPr/>
-        </p:nvSpPr>
-        <p:spPr>
-          <a:xfrm xmlns:a="http://schemas.openxmlformats.org/drawingml/2006/main">
-            <a:off x="5124450" y="2857500"/>
-            <a:ext cx="609600" cy="438150"/>
-          </a:xfrm>
-          <a:prstGeom xmlns:a="http://schemas.openxmlformats.org/drawingml/2006/main" prst="roundRect">
-            <a:avLst>
-              <a:gd name="adj" fmla="val 50000"/>
-            </a:avLst>
-          </a:prstGeom>
-          <a:solidFill xmlns:a="http://schemas.openxmlformats.org/drawingml/2006/main">
-            <a:srgbClr val="FFFFFF"/>
-          </a:solidFill>
-          <a:ln xmlns:a="http://schemas.openxmlformats.org/drawingml/2006/main" w="0">
-            <a:noFill/>
-            <a:prstDash val="solid"/>
-          </a:ln>
-        </p:spPr>
-        <p:txBody>
-          <a:bodyPr xmlns:a="http://schemas.openxmlformats.org/drawingml/2006/main" lIns="76200" tIns="0" rIns="76200" bIns="0" anchor="ctr">
-            <a:noAutofit/>
-          </a:bodyPr>
-          <a:lstStyle xmlns:a="http://schemas.openxmlformats.org/drawingml/2006/main"/>
-          <a:p xmlns:a="http://schemas.openxmlformats.org/drawingml/2006/main">
-            <a:pPr algn="ctr">
-              <a:defRPr sz="1650" b="1">
+              <a:defRPr sz="2550" b="1">
                 <a:solidFill>
                   <a:srgbClr val="0B2B4C"/>
                 </a:solidFill>
-                <a:latin typeface="Nunito"/>
-                <a:ea typeface="Nunito"/>
-                <a:cs typeface="Nunito"/>
-              </a:defRPr>
-            </a:pPr>
-            <a:r>
-              <a:rPr sz="1650" b="1">
+                <a:latin typeface="IBM Plex Mono"/>
+                <a:ea typeface="IBM Plex Mono"/>
+                <a:cs typeface="IBM Plex Mono"/>
+              </a:defRPr>
+            </a:pPr>
+            <a:r>
+              <a:rPr sz="2550" b="1">
                 <a:solidFill>
                   <a:srgbClr val="0B2B4C"/>
                 </a:solidFill>
-                <a:latin typeface="Nunito"/>
-                <a:ea typeface="Nunito"/>
-                <a:cs typeface="Nunito"/>
-              </a:rPr>
-              <a:t>02</a:t>
-            </a:r>
-          </a:p>
-        </p:txBody>
-      </p:sp>
-      <p:sp>
-        <p:nvSpPr>
-          <p:cNvPr id="12" name="">
-            <a:extLst xmlns:a="http://schemas.openxmlformats.org/drawingml/2006/main">
-              <a:ext uri="{FF2B5EF4-FFF2-40B4-BE49-F238E27FC236}">
-                <a16:creationId xmlns:a16="http://schemas.microsoft.com/office/drawing/2014/main" id="{1C8F0D0C-6DAF-40FA-8888-0E645371225E}"/>
-              </a:ext>
-            </a:extLst>
-          </p:cNvPr>
-          <p:cNvSpPr>
-            <a:spLocks xmlns:a="http://schemas.openxmlformats.org/drawingml/2006/main" noGrp="1"/>
-          </p:cNvSpPr>
-          <p:nvPr/>
-        </p:nvSpPr>
-        <p:spPr>
-          <a:xfrm xmlns:a="http://schemas.openxmlformats.org/drawingml/2006/main">
-            <a:off x="5124450" y="3600450"/>
-            <a:ext cx="2619375" cy="476250"/>
+                <a:latin typeface="IBM Plex Mono"/>
+                <a:ea typeface="IBM Plex Mono"/>
+                <a:cs typeface="IBM Plex Mono"/>
+              </a:rPr>
+              <a:t>t_s = 0:0.1:4;</a:t>
+            </a:r>
+          </a:p>
+        </p:txBody>
+      </p:sp>
+      <p:sp>
+        <p:nvSpPr>
+          <p:cNvPr id="6" name="">
+            <a:extLst xmlns:a="http://schemas.openxmlformats.org/drawingml/2006/main">
+              <a:ext uri="{FF2B5EF4-FFF2-40B4-BE49-F238E27FC236}">
+                <a16:creationId xmlns:a16="http://schemas.microsoft.com/office/drawing/2014/main" id="{6C5D44BF-2F1D-4500-8C6C-E0D6C5797011}"/>
+              </a:ext>
+            </a:extLst>
+          </p:cNvPr>
+          <p:cNvSpPr>
+            <a:spLocks xmlns:a="http://schemas.openxmlformats.org/drawingml/2006/main" noGrp="1"/>
+          </p:cNvSpPr>
+          <p:nvPr/>
+        </p:nvSpPr>
+        <p:spPr>
+          <a:xfrm xmlns:a="http://schemas.openxmlformats.org/drawingml/2006/main">
+            <a:off x="1571625" y="4857750"/>
+            <a:ext cx="952500" cy="419100"/>
           </a:xfrm>
           <a:prstGeom xmlns:a="http://schemas.openxmlformats.org/drawingml/2006/main" prst="rect">
             <a:avLst/>
@@ -16294,47 +17174,47 @@
           <a:lstStyle xmlns:a="http://schemas.openxmlformats.org/drawingml/2006/main"/>
           <a:p xmlns:a="http://schemas.openxmlformats.org/drawingml/2006/main">
             <a:pPr algn="l">
-              <a:defRPr sz="2550" b="1">
-                <a:solidFill>
-                  <a:srgbClr val="0B2B4C"/>
-                </a:solidFill>
-                <a:latin typeface="Nunito"/>
-                <a:ea typeface="Nunito"/>
-                <a:cs typeface="Nunito"/>
-              </a:defRPr>
-            </a:pPr>
-            <a:r>
-              <a:rPr sz="2550" b="1">
-                <a:solidFill>
-                  <a:srgbClr val="0B2B4C"/>
-                </a:solidFill>
-                <a:latin typeface="Nunito"/>
-                <a:ea typeface="Nunito"/>
-                <a:cs typeface="Nunito"/>
-              </a:rPr>
-              <a:t>Algorithm</a:t>
-            </a:r>
-          </a:p>
-        </p:txBody>
-      </p:sp>
-      <p:sp>
-        <p:nvSpPr>
-          <p:cNvPr id="13" name="">
-            <a:extLst xmlns:a="http://schemas.openxmlformats.org/drawingml/2006/main">
-              <a:ext uri="{FF2B5EF4-FFF2-40B4-BE49-F238E27FC236}">
-                <a16:creationId xmlns:a16="http://schemas.microsoft.com/office/drawing/2014/main" id="{1D5F15D0-0378-423B-A9B5-85C5C2760AC8}"/>
-              </a:ext>
-            </a:extLst>
-          </p:cNvPr>
-          <p:cNvSpPr>
-            <a:spLocks xmlns:a="http://schemas.openxmlformats.org/drawingml/2006/main" noGrp="1"/>
-          </p:cNvSpPr>
-          <p:nvPr/>
-        </p:nvSpPr>
-        <p:spPr>
-          <a:xfrm xmlns:a="http://schemas.openxmlformats.org/drawingml/2006/main">
-            <a:off x="5124450" y="4429125"/>
-            <a:ext cx="2619375" cy="1571625"/>
+              <a:defRPr sz="2100">
+                <a:solidFill>
+                  <a:srgbClr val="697684"/>
+                </a:solidFill>
+                <a:latin typeface="Nunito"/>
+                <a:ea typeface="Nunito"/>
+                <a:cs typeface="Nunito"/>
+              </a:defRPr>
+            </a:pPr>
+            <a:r>
+              <a:rPr sz="2100">
+                <a:solidFill>
+                  <a:srgbClr val="697684"/>
+                </a:solidFill>
+                <a:latin typeface="Nunito"/>
+                <a:ea typeface="Nunito"/>
+                <a:cs typeface="Nunito"/>
+              </a:rPr>
+              <a:t>or</a:t>
+            </a:r>
+          </a:p>
+        </p:txBody>
+      </p:sp>
+      <p:sp>
+        <p:nvSpPr>
+          <p:cNvPr id="7" name="">
+            <a:extLst xmlns:a="http://schemas.openxmlformats.org/drawingml/2006/main">
+              <a:ext uri="{FF2B5EF4-FFF2-40B4-BE49-F238E27FC236}">
+                <a16:creationId xmlns:a16="http://schemas.microsoft.com/office/drawing/2014/main" id="{B8A56BEF-C717-4A92-916D-F10AA4057D69}"/>
+              </a:ext>
+            </a:extLst>
+          </p:cNvPr>
+          <p:cNvSpPr>
+            <a:spLocks xmlns:a="http://schemas.openxmlformats.org/drawingml/2006/main" noGrp="1"/>
+          </p:cNvSpPr>
+          <p:nvPr/>
+        </p:nvSpPr>
+        <p:spPr>
+          <a:xfrm xmlns:a="http://schemas.openxmlformats.org/drawingml/2006/main">
+            <a:off x="1571625" y="5524500"/>
+            <a:ext cx="5810250" cy="571500"/>
           </a:xfrm>
           <a:prstGeom xmlns:a="http://schemas.openxmlformats.org/drawingml/2006/main" prst="rect">
             <a:avLst/>
@@ -16352,326 +17232,51 @@
           <a:lstStyle xmlns:a="http://schemas.openxmlformats.org/drawingml/2006/main"/>
           <a:p xmlns:a="http://schemas.openxmlformats.org/drawingml/2006/main">
             <a:pPr algn="l">
-              <a:lnSpc>
-                <a:spcPct val="118000"/>
-              </a:lnSpc>
-              <a:buNone/>
-              <a:defRPr sz="1875">
-                <a:solidFill>
-                  <a:srgbClr val="3F4B57"/>
-                </a:solidFill>
-                <a:latin typeface="Nunito"/>
-                <a:ea typeface="Nunito"/>
-                <a:cs typeface="Nunito"/>
-              </a:defRPr>
-            </a:pPr>
-            <a:r>
-              <a:rPr sz="1875">
-                <a:solidFill>
-                  <a:srgbClr val="3F4B57"/>
-                </a:solidFill>
-                <a:latin typeface="Nunito"/>
-                <a:ea typeface="Nunito"/>
-                <a:cs typeface="Nunito"/>
-              </a:rPr>
-              <a:t>time array, calculate,</a:t>
-            </a:r>
-          </a:p>
-          <a:p xmlns:a="http://schemas.openxmlformats.org/drawingml/2006/main">
-            <a:pPr algn="l">
-              <a:lnSpc>
-                <a:spcPct val="118000"/>
-              </a:lnSpc>
-              <a:buNone/>
-              <a:defRPr sz="1875">
-                <a:solidFill>
-                  <a:srgbClr val="3F4B57"/>
-                </a:solidFill>
-                <a:latin typeface="Nunito"/>
-                <a:ea typeface="Nunito"/>
-                <a:cs typeface="Nunito"/>
-              </a:defRPr>
-            </a:pPr>
-            <a:r>
-              <a:rPr sz="1875">
-                <a:solidFill>
-                  <a:srgbClr val="3F4B57"/>
-                </a:solidFill>
-                <a:latin typeface="Nunito"/>
-                <a:ea typeface="Nunito"/>
-                <a:cs typeface="Nunito"/>
-              </a:rPr>
-              <a:t>plot, then check</a:t>
-            </a:r>
-          </a:p>
-        </p:txBody>
-      </p:sp>
-      <p:sp>
-        <p:nvSpPr>
-          <p:cNvPr id="14" name="">
-            <a:extLst xmlns:a="http://schemas.openxmlformats.org/drawingml/2006/main">
-              <a:ext uri="{FF2B5EF4-FFF2-40B4-BE49-F238E27FC236}">
-                <a16:creationId xmlns:a16="http://schemas.microsoft.com/office/drawing/2014/main" id="{DB0253DB-E1A5-4B9A-8992-1EBF257220C9}"/>
-              </a:ext>
-            </a:extLst>
-          </p:cNvPr>
-          <p:cNvSpPr>
-            <a:spLocks xmlns:a="http://schemas.openxmlformats.org/drawingml/2006/main" noGrp="1"/>
-          </p:cNvSpPr>
-          <p:nvPr/>
-        </p:nvSpPr>
-        <p:spPr>
-          <a:xfrm xmlns:a="http://schemas.openxmlformats.org/drawingml/2006/main">
-            <a:off x="8620125" y="2571750"/>
-            <a:ext cx="3143250" cy="3810000"/>
+              <a:defRPr sz="2550" b="1">
+                <a:solidFill>
+                  <a:srgbClr val="0B2B4C"/>
+                </a:solidFill>
+                <a:latin typeface="IBM Plex Mono"/>
+                <a:ea typeface="IBM Plex Mono"/>
+                <a:cs typeface="IBM Plex Mono"/>
+              </a:defRPr>
+            </a:pPr>
+            <a:r>
+              <a:rPr sz="2550" b="1">
+                <a:solidFill>
+                  <a:srgbClr val="0B2B4C"/>
+                </a:solidFill>
+                <a:latin typeface="IBM Plex Mono"/>
+                <a:ea typeface="IBM Plex Mono"/>
+                <a:cs typeface="IBM Plex Mono"/>
+              </a:rPr>
+              <a:t>t_s = linspace(0,4,41);</a:t>
+            </a:r>
+          </a:p>
+        </p:txBody>
+      </p:sp>
+      <p:sp>
+        <p:nvSpPr>
+          <p:cNvPr id="8" name="">
+            <a:extLst xmlns:a="http://schemas.openxmlformats.org/drawingml/2006/main">
+              <a:ext uri="{FF2B5EF4-FFF2-40B4-BE49-F238E27FC236}">
+                <a16:creationId xmlns:a16="http://schemas.microsoft.com/office/drawing/2014/main" id="{8E9F4CAD-C73C-4BAB-A4D0-22E70720E04B}"/>
+              </a:ext>
+            </a:extLst>
+          </p:cNvPr>
+          <p:cNvSpPr>
+            <a:spLocks xmlns:a="http://schemas.openxmlformats.org/drawingml/2006/main" noGrp="1"/>
+          </p:cNvSpPr>
+          <p:nvPr/>
+        </p:nvSpPr>
+        <p:spPr>
+          <a:xfrm xmlns:a="http://schemas.openxmlformats.org/drawingml/2006/main">
+            <a:off x="8858250" y="2714625"/>
+            <a:ext cx="7239000" cy="4000500"/>
           </a:xfrm>
           <a:prstGeom xmlns:a="http://schemas.openxmlformats.org/drawingml/2006/main" prst="roundRect">
             <a:avLst>
-              <a:gd name="adj" fmla="val 3636"/>
-            </a:avLst>
-          </a:prstGeom>
-          <a:solidFill xmlns:a="http://schemas.openxmlformats.org/drawingml/2006/main">
-            <a:srgbClr val="FFF7E6"/>
-          </a:solidFill>
-          <a:ln xmlns:a="http://schemas.openxmlformats.org/drawingml/2006/main" w="19050">
-            <a:solidFill>
-              <a:srgbClr val="C98A16"/>
-            </a:solidFill>
-            <a:prstDash val="solid"/>
-          </a:ln>
-        </p:spPr>
-      </p:sp>
-      <p:sp>
-        <p:nvSpPr>
-          <p:cNvPr id="15" name="">
-            <a:extLst xmlns:a="http://schemas.openxmlformats.org/drawingml/2006/main">
-              <a:ext uri="{FF2B5EF4-FFF2-40B4-BE49-F238E27FC236}">
-                <a16:creationId xmlns:a16="http://schemas.microsoft.com/office/drawing/2014/main" id="{19AD57D0-D85A-40AE-8778-5864EC08FA0E}"/>
-              </a:ext>
-            </a:extLst>
-          </p:cNvPr>
-          <p:cNvSpPr>
-            <a:spLocks xmlns:a="http://schemas.openxmlformats.org/drawingml/2006/main" noGrp="1"/>
-          </p:cNvSpPr>
-          <p:nvPr/>
-        </p:nvSpPr>
-        <p:spPr>
-          <a:xfrm xmlns:a="http://schemas.openxmlformats.org/drawingml/2006/main">
-            <a:off x="8886825" y="2857500"/>
-            <a:ext cx="609600" cy="438150"/>
-          </a:xfrm>
-          <a:prstGeom xmlns:a="http://schemas.openxmlformats.org/drawingml/2006/main" prst="roundRect">
-            <a:avLst>
-              <a:gd name="adj" fmla="val 50000"/>
-            </a:avLst>
-          </a:prstGeom>
-          <a:solidFill xmlns:a="http://schemas.openxmlformats.org/drawingml/2006/main">
-            <a:srgbClr val="FFFFFF"/>
-          </a:solidFill>
-          <a:ln xmlns:a="http://schemas.openxmlformats.org/drawingml/2006/main" w="0">
-            <a:noFill/>
-            <a:prstDash val="solid"/>
-          </a:ln>
-        </p:spPr>
-        <p:txBody>
-          <a:bodyPr xmlns:a="http://schemas.openxmlformats.org/drawingml/2006/main" lIns="76200" tIns="0" rIns="76200" bIns="0" anchor="ctr">
-            <a:noAutofit/>
-          </a:bodyPr>
-          <a:lstStyle xmlns:a="http://schemas.openxmlformats.org/drawingml/2006/main"/>
-          <a:p xmlns:a="http://schemas.openxmlformats.org/drawingml/2006/main">
-            <a:pPr algn="ctr">
-              <a:defRPr sz="1650" b="1">
-                <a:solidFill>
-                  <a:srgbClr val="C98A16"/>
-                </a:solidFill>
-                <a:latin typeface="Nunito"/>
-                <a:ea typeface="Nunito"/>
-                <a:cs typeface="Nunito"/>
-              </a:defRPr>
-            </a:pPr>
-            <a:r>
-              <a:rPr sz="1650" b="1">
-                <a:solidFill>
-                  <a:srgbClr val="C98A16"/>
-                </a:solidFill>
-                <a:latin typeface="Nunito"/>
-                <a:ea typeface="Nunito"/>
-                <a:cs typeface="Nunito"/>
-              </a:rPr>
-              <a:t>03</a:t>
-            </a:r>
-          </a:p>
-        </p:txBody>
-      </p:sp>
-      <p:sp>
-        <p:nvSpPr>
-          <p:cNvPr id="16" name="">
-            <a:extLst xmlns:a="http://schemas.openxmlformats.org/drawingml/2006/main">
-              <a:ext uri="{FF2B5EF4-FFF2-40B4-BE49-F238E27FC236}">
-                <a16:creationId xmlns:a16="http://schemas.microsoft.com/office/drawing/2014/main" id="{2085786F-9097-4AE6-8C7F-4226B667A3B9}"/>
-              </a:ext>
-            </a:extLst>
-          </p:cNvPr>
-          <p:cNvSpPr>
-            <a:spLocks xmlns:a="http://schemas.openxmlformats.org/drawingml/2006/main" noGrp="1"/>
-          </p:cNvSpPr>
-          <p:nvPr/>
-        </p:nvSpPr>
-        <p:spPr>
-          <a:xfrm xmlns:a="http://schemas.openxmlformats.org/drawingml/2006/main">
-            <a:off x="8886825" y="3600450"/>
-            <a:ext cx="2619375" cy="476250"/>
-          </a:xfrm>
-          <a:prstGeom xmlns:a="http://schemas.openxmlformats.org/drawingml/2006/main" prst="rect">
-            <a:avLst/>
-          </a:prstGeom>
-          <a:noFill xmlns:a="http://schemas.openxmlformats.org/drawingml/2006/main"/>
-          <a:ln xmlns:a="http://schemas.openxmlformats.org/drawingml/2006/main" w="0">
-            <a:noFill/>
-            <a:prstDash val="solid"/>
-          </a:ln>
-        </p:spPr>
-        <p:txBody>
-          <a:bodyPr xmlns:a="http://schemas.openxmlformats.org/drawingml/2006/main" wrap="square" lIns="0" tIns="0" rIns="0" bIns="0" anchor="t">
-            <a:noAutofit/>
-          </a:bodyPr>
-          <a:lstStyle xmlns:a="http://schemas.openxmlformats.org/drawingml/2006/main"/>
-          <a:p xmlns:a="http://schemas.openxmlformats.org/drawingml/2006/main">
-            <a:pPr algn="l">
-              <a:defRPr sz="2550" b="1">
-                <a:solidFill>
-                  <a:srgbClr val="C98A16"/>
-                </a:solidFill>
-                <a:latin typeface="Nunito"/>
-                <a:ea typeface="Nunito"/>
-                <a:cs typeface="Nunito"/>
-              </a:defRPr>
-            </a:pPr>
-            <a:r>
-              <a:rPr sz="2550" b="1">
-                <a:solidFill>
-                  <a:srgbClr val="C98A16"/>
-                </a:solidFill>
-                <a:latin typeface="Nunito"/>
-                <a:ea typeface="Nunito"/>
-                <a:cs typeface="Nunito"/>
-              </a:rPr>
-              <a:t>Code</a:t>
-            </a:r>
-          </a:p>
-        </p:txBody>
-      </p:sp>
-      <p:sp>
-        <p:nvSpPr>
-          <p:cNvPr id="17" name="">
-            <a:extLst xmlns:a="http://schemas.openxmlformats.org/drawingml/2006/main">
-              <a:ext uri="{FF2B5EF4-FFF2-40B4-BE49-F238E27FC236}">
-                <a16:creationId xmlns:a16="http://schemas.microsoft.com/office/drawing/2014/main" id="{5577A3FC-E2F4-4E9C-8E68-23789E067EF3}"/>
-              </a:ext>
-            </a:extLst>
-          </p:cNvPr>
-          <p:cNvSpPr>
-            <a:spLocks xmlns:a="http://schemas.openxmlformats.org/drawingml/2006/main" noGrp="1"/>
-          </p:cNvSpPr>
-          <p:nvPr/>
-        </p:nvSpPr>
-        <p:spPr>
-          <a:xfrm xmlns:a="http://schemas.openxmlformats.org/drawingml/2006/main">
-            <a:off x="8886825" y="4429125"/>
-            <a:ext cx="2619375" cy="1571625"/>
-          </a:xfrm>
-          <a:prstGeom xmlns:a="http://schemas.openxmlformats.org/drawingml/2006/main" prst="rect">
-            <a:avLst/>
-          </a:prstGeom>
-          <a:noFill xmlns:a="http://schemas.openxmlformats.org/drawingml/2006/main"/>
-          <a:ln xmlns:a="http://schemas.openxmlformats.org/drawingml/2006/main" w="0">
-            <a:noFill/>
-            <a:prstDash val="solid"/>
-          </a:ln>
-        </p:spPr>
-        <p:txBody>
-          <a:bodyPr xmlns:a="http://schemas.openxmlformats.org/drawingml/2006/main" wrap="square" lIns="0" tIns="0" rIns="0" bIns="0" anchor="t">
-            <a:noAutofit/>
-          </a:bodyPr>
-          <a:lstStyle xmlns:a="http://schemas.openxmlformats.org/drawingml/2006/main"/>
-          <a:p xmlns:a="http://schemas.openxmlformats.org/drawingml/2006/main">
-            <a:pPr algn="l">
-              <a:lnSpc>
-                <a:spcPct val="118000"/>
-              </a:lnSpc>
-              <a:buNone/>
-              <a:defRPr sz="1875">
-                <a:solidFill>
-                  <a:srgbClr val="3F4B57"/>
-                </a:solidFill>
-                <a:latin typeface="Nunito"/>
-                <a:ea typeface="Nunito"/>
-                <a:cs typeface="Nunito"/>
-              </a:defRPr>
-            </a:pPr>
-            <a:r>
-              <a:rPr sz="1875">
-                <a:solidFill>
-                  <a:srgbClr val="3F4B57"/>
-                </a:solidFill>
-                <a:latin typeface="Nunito"/>
-                <a:ea typeface="Nunito"/>
-                <a:cs typeface="Nunito"/>
-              </a:rPr>
-              <a:t>read the dots in .*</a:t>
-            </a:r>
-          </a:p>
-          <a:p xmlns:a="http://schemas.openxmlformats.org/drawingml/2006/main">
-            <a:pPr algn="l">
-              <a:lnSpc>
-                <a:spcPct val="118000"/>
-              </a:lnSpc>
-              <a:buNone/>
-              <a:defRPr sz="1875">
-                <a:solidFill>
-                  <a:srgbClr val="3F4B57"/>
-                </a:solidFill>
-                <a:latin typeface="Nunito"/>
-                <a:ea typeface="Nunito"/>
-                <a:cs typeface="Nunito"/>
-              </a:defRPr>
-            </a:pPr>
-            <a:r>
-              <a:rPr sz="1875">
-                <a:solidFill>
-                  <a:srgbClr val="3F4B57"/>
-                </a:solidFill>
-                <a:latin typeface="Nunito"/>
-                <a:ea typeface="Nunito"/>
-                <a:cs typeface="Nunito"/>
-              </a:rPr>
-              <a:t>and .^ before running</a:t>
-            </a:r>
-          </a:p>
-        </p:txBody>
-      </p:sp>
-      <p:sp>
-        <p:nvSpPr>
-          <p:cNvPr id="18" name="">
-            <a:extLst xmlns:a="http://schemas.openxmlformats.org/drawingml/2006/main">
-              <a:ext uri="{FF2B5EF4-FFF2-40B4-BE49-F238E27FC236}">
-                <a16:creationId xmlns:a16="http://schemas.microsoft.com/office/drawing/2014/main" id="{D03CED43-B82C-452E-95FE-A26A80621D19}"/>
-              </a:ext>
-            </a:extLst>
-          </p:cNvPr>
-          <p:cNvSpPr>
-            <a:spLocks xmlns:a="http://schemas.openxmlformats.org/drawingml/2006/main" noGrp="1"/>
-          </p:cNvSpPr>
-          <p:nvPr/>
-        </p:nvSpPr>
-        <p:spPr>
-          <a:xfrm xmlns:a="http://schemas.openxmlformats.org/drawingml/2006/main">
-            <a:off x="12382500" y="2571750"/>
-            <a:ext cx="3143250" cy="3810000"/>
-          </a:xfrm>
-          <a:prstGeom xmlns:a="http://schemas.openxmlformats.org/drawingml/2006/main" prst="roundRect">
-            <a:avLst>
-              <a:gd name="adj" fmla="val 3636"/>
+              <a:gd name="adj" fmla="val 2857"/>
             </a:avLst>
           </a:prstGeom>
           <a:solidFill xmlns:a="http://schemas.openxmlformats.org/drawingml/2006/main">
@@ -16687,84 +17292,22 @@
       </p:sp>
       <p:sp>
         <p:nvSpPr>
-          <p:cNvPr id="19" name="">
-            <a:extLst xmlns:a="http://schemas.openxmlformats.org/drawingml/2006/main">
-              <a:ext uri="{FF2B5EF4-FFF2-40B4-BE49-F238E27FC236}">
-                <a16:creationId xmlns:a16="http://schemas.microsoft.com/office/drawing/2014/main" id="{CD08492B-EDAC-4F51-80B2-CAAF890A0E89}"/>
-              </a:ext>
-            </a:extLst>
-          </p:cNvPr>
-          <p:cNvSpPr>
-            <a:spLocks xmlns:a="http://schemas.openxmlformats.org/drawingml/2006/main" noGrp="1"/>
-          </p:cNvSpPr>
-          <p:nvPr/>
-        </p:nvSpPr>
-        <p:spPr>
-          <a:xfrm xmlns:a="http://schemas.openxmlformats.org/drawingml/2006/main">
-            <a:off x="12649200" y="2857500"/>
-            <a:ext cx="609600" cy="438150"/>
-          </a:xfrm>
-          <a:prstGeom xmlns:a="http://schemas.openxmlformats.org/drawingml/2006/main" prst="roundRect">
-            <a:avLst>
-              <a:gd name="adj" fmla="val 50000"/>
-            </a:avLst>
-          </a:prstGeom>
-          <a:solidFill xmlns:a="http://schemas.openxmlformats.org/drawingml/2006/main">
-            <a:srgbClr val="FFFFFF"/>
-          </a:solidFill>
-          <a:ln xmlns:a="http://schemas.openxmlformats.org/drawingml/2006/main" w="0">
-            <a:noFill/>
-            <a:prstDash val="solid"/>
-          </a:ln>
-        </p:spPr>
-        <p:txBody>
-          <a:bodyPr xmlns:a="http://schemas.openxmlformats.org/drawingml/2006/main" lIns="76200" tIns="0" rIns="76200" bIns="0" anchor="ctr">
-            <a:noAutofit/>
-          </a:bodyPr>
-          <a:lstStyle xmlns:a="http://schemas.openxmlformats.org/drawingml/2006/main"/>
-          <a:p xmlns:a="http://schemas.openxmlformats.org/drawingml/2006/main">
-            <a:pPr algn="ctr">
-              <a:defRPr sz="1650" b="1">
-                <a:solidFill>
-                  <a:srgbClr val="3E8E45"/>
-                </a:solidFill>
-                <a:latin typeface="Nunito"/>
-                <a:ea typeface="Nunito"/>
-                <a:cs typeface="Nunito"/>
-              </a:defRPr>
-            </a:pPr>
-            <a:r>
-              <a:rPr sz="1650" b="1">
-                <a:solidFill>
-                  <a:srgbClr val="3E8E45"/>
-                </a:solidFill>
-                <a:latin typeface="Nunito"/>
-                <a:ea typeface="Nunito"/>
-                <a:cs typeface="Nunito"/>
-              </a:rPr>
-              <a:t>04</a:t>
-            </a:r>
-          </a:p>
-        </p:txBody>
-      </p:sp>
-      <p:sp>
-        <p:nvSpPr>
-          <p:cNvPr id="20" name="">
-            <a:extLst xmlns:a="http://schemas.openxmlformats.org/drawingml/2006/main">
-              <a:ext uri="{FF2B5EF4-FFF2-40B4-BE49-F238E27FC236}">
-                <a16:creationId xmlns:a16="http://schemas.microsoft.com/office/drawing/2014/main" id="{B93496A3-6E11-44A9-A64E-6643D36D87A4}"/>
-              </a:ext>
-            </a:extLst>
-          </p:cNvPr>
-          <p:cNvSpPr>
-            <a:spLocks xmlns:a="http://schemas.openxmlformats.org/drawingml/2006/main" noGrp="1"/>
-          </p:cNvSpPr>
-          <p:nvPr/>
-        </p:nvSpPr>
-        <p:spPr>
-          <a:xfrm xmlns:a="http://schemas.openxmlformats.org/drawingml/2006/main">
-            <a:off x="12649200" y="3600450"/>
-            <a:ext cx="2619375" cy="476250"/>
+          <p:cNvPr id="9" name="">
+            <a:extLst xmlns:a="http://schemas.openxmlformats.org/drawingml/2006/main">
+              <a:ext uri="{FF2B5EF4-FFF2-40B4-BE49-F238E27FC236}">
+                <a16:creationId xmlns:a16="http://schemas.microsoft.com/office/drawing/2014/main" id="{A83B5D95-5CA5-4057-8890-854923E822CC}"/>
+              </a:ext>
+            </a:extLst>
+          </p:cNvPr>
+          <p:cNvSpPr>
+            <a:spLocks xmlns:a="http://schemas.openxmlformats.org/drawingml/2006/main" noGrp="1"/>
+          </p:cNvSpPr>
+          <p:nvPr/>
+        </p:nvSpPr>
+        <p:spPr>
+          <a:xfrm xmlns:a="http://schemas.openxmlformats.org/drawingml/2006/main">
+            <a:off x="9239250" y="3095625"/>
+            <a:ext cx="6191250" cy="457200"/>
           </a:xfrm>
           <a:prstGeom xmlns:a="http://schemas.openxmlformats.org/drawingml/2006/main" prst="rect">
             <a:avLst/>
@@ -16800,29 +17343,29 @@
                 <a:ea typeface="Nunito"/>
                 <a:cs typeface="Nunito"/>
               </a:rPr>
-              <a:t>Evidence</a:t>
-            </a:r>
-          </a:p>
-        </p:txBody>
-      </p:sp>
-      <p:sp>
-        <p:nvSpPr>
-          <p:cNvPr id="21" name="">
-            <a:extLst xmlns:a="http://schemas.openxmlformats.org/drawingml/2006/main">
-              <a:ext uri="{FF2B5EF4-FFF2-40B4-BE49-F238E27FC236}">
-                <a16:creationId xmlns:a16="http://schemas.microsoft.com/office/drawing/2014/main" id="{289C2439-DF58-41DC-B5E4-62290E8AB4CD}"/>
-              </a:ext>
-            </a:extLst>
-          </p:cNvPr>
-          <p:cNvSpPr>
-            <a:spLocks xmlns:a="http://schemas.openxmlformats.org/drawingml/2006/main" noGrp="1"/>
-          </p:cNvSpPr>
-          <p:nvPr/>
-        </p:nvSpPr>
-        <p:spPr>
-          <a:xfrm xmlns:a="http://schemas.openxmlformats.org/drawingml/2006/main">
-            <a:off x="12649200" y="4429125"/>
-            <a:ext cx="2619375" cy="1571625"/>
+              <a:t>Read one indexed value</a:t>
+            </a:r>
+          </a:p>
+        </p:txBody>
+      </p:sp>
+      <p:sp>
+        <p:nvSpPr>
+          <p:cNvPr id="10" name="">
+            <a:extLst xmlns:a="http://schemas.openxmlformats.org/drawingml/2006/main">
+              <a:ext uri="{FF2B5EF4-FFF2-40B4-BE49-F238E27FC236}">
+                <a16:creationId xmlns:a16="http://schemas.microsoft.com/office/drawing/2014/main" id="{0CFAAE7D-BEEF-45F7-83D9-E4765CF3D9BA}"/>
+              </a:ext>
+            </a:extLst>
+          </p:cNvPr>
+          <p:cNvSpPr>
+            <a:spLocks xmlns:a="http://schemas.openxmlformats.org/drawingml/2006/main" noGrp="1"/>
+          </p:cNvSpPr>
+          <p:nvPr/>
+        </p:nvSpPr>
+        <p:spPr>
+          <a:xfrm xmlns:a="http://schemas.openxmlformats.org/drawingml/2006/main">
+            <a:off x="9334500" y="4095750"/>
+            <a:ext cx="5810250" cy="495300"/>
           </a:xfrm>
           <a:prstGeom xmlns:a="http://schemas.openxmlformats.org/drawingml/2006/main" prst="rect">
             <a:avLst/>
@@ -16840,113 +17383,47 @@
           <a:lstStyle xmlns:a="http://schemas.openxmlformats.org/drawingml/2006/main"/>
           <a:p xmlns:a="http://schemas.openxmlformats.org/drawingml/2006/main">
             <a:pPr algn="l">
-              <a:lnSpc>
-                <a:spcPct val="118000"/>
-              </a:lnSpc>
-              <a:buNone/>
-              <a:defRPr sz="1875">
-                <a:solidFill>
-                  <a:srgbClr val="3F4B57"/>
-                </a:solidFill>
-                <a:latin typeface="Nunito"/>
-                <a:ea typeface="Nunito"/>
-                <a:cs typeface="Nunito"/>
-              </a:defRPr>
-            </a:pPr>
-            <a:r>
-              <a:rPr sz="1875">
-                <a:solidFill>
-                  <a:srgbClr val="3F4B57"/>
-                </a:solidFill>
-                <a:latin typeface="Nunito"/>
-                <a:ea typeface="Nunito"/>
-                <a:cs typeface="Nunito"/>
-              </a:rPr>
-              <a:t>prediction, labelled plot,</a:t>
-            </a:r>
-          </a:p>
-          <a:p xmlns:a="http://schemas.openxmlformats.org/drawingml/2006/main">
-            <a:pPr algn="l">
-              <a:lnSpc>
-                <a:spcPct val="118000"/>
-              </a:lnSpc>
-              <a:buNone/>
-              <a:defRPr sz="1875">
-                <a:solidFill>
-                  <a:srgbClr val="3F4B57"/>
-                </a:solidFill>
-                <a:latin typeface="Nunito"/>
-                <a:ea typeface="Nunito"/>
-                <a:cs typeface="Nunito"/>
-              </a:defRPr>
-            </a:pPr>
-            <a:r>
-              <a:rPr sz="1875">
-                <a:solidFill>
-                  <a:srgbClr val="3F4B57"/>
-                </a:solidFill>
-                <a:latin typeface="Nunito"/>
-                <a:ea typeface="Nunito"/>
-                <a:cs typeface="Nunito"/>
-              </a:rPr>
-              <a:t>and launch-value check</a:t>
-            </a:r>
-          </a:p>
-        </p:txBody>
-      </p:sp>
-      <p:sp>
-        <p:nvSpPr>
-          <p:cNvPr id="22" name="">
-            <a:extLst xmlns:a="http://schemas.openxmlformats.org/drawingml/2006/main">
-              <a:ext uri="{FF2B5EF4-FFF2-40B4-BE49-F238E27FC236}">
-                <a16:creationId xmlns:a16="http://schemas.microsoft.com/office/drawing/2014/main" id="{38DEF497-7A3E-450F-9FC1-CB8D902D3522}"/>
-              </a:ext>
-            </a:extLst>
-          </p:cNvPr>
-          <p:cNvSpPr>
-            <a:spLocks xmlns:a="http://schemas.openxmlformats.org/drawingml/2006/main" noGrp="1"/>
-          </p:cNvSpPr>
-          <p:nvPr/>
-        </p:nvSpPr>
-        <p:spPr>
-          <a:xfrm xmlns:a="http://schemas.openxmlformats.org/drawingml/2006/main">
-            <a:off x="1095375" y="7048500"/>
-            <a:ext cx="15001875" cy="1123950"/>
-          </a:xfrm>
-          <a:prstGeom xmlns:a="http://schemas.openxmlformats.org/drawingml/2006/main" prst="roundRect">
-            <a:avLst>
-              <a:gd name="adj" fmla="val 10169"/>
-            </a:avLst>
-          </a:prstGeom>
-          <a:solidFill xmlns:a="http://schemas.openxmlformats.org/drawingml/2006/main">
-            <a:srgbClr val="F7F9FB"/>
-          </a:solidFill>
-          <a:ln xmlns:a="http://schemas.openxmlformats.org/drawingml/2006/main" w="19050">
-            <a:solidFill>
-              <a:srgbClr val="0B2B4C"/>
-            </a:solidFill>
-            <a:prstDash val="solid"/>
-          </a:ln>
-        </p:spPr>
-      </p:sp>
-      <p:sp>
-        <p:nvSpPr>
-          <p:cNvPr id="23" name="">
-            <a:extLst xmlns:a="http://schemas.openxmlformats.org/drawingml/2006/main">
-              <a:ext uri="{FF2B5EF4-FFF2-40B4-BE49-F238E27FC236}">
-                <a16:creationId xmlns:a16="http://schemas.microsoft.com/office/drawing/2014/main" id="{521CCC40-0C81-48F7-B6C4-7D68F999B619}"/>
-              </a:ext>
-            </a:extLst>
-          </p:cNvPr>
-          <p:cNvSpPr>
-            <a:spLocks xmlns:a="http://schemas.openxmlformats.org/drawingml/2006/main" noGrp="1"/>
-          </p:cNvSpPr>
-          <p:nvPr/>
-        </p:nvSpPr>
-        <p:spPr>
-          <a:xfrm xmlns:a="http://schemas.openxmlformats.org/drawingml/2006/main">
-            <a:off x="1524000" y="7372350"/>
-            <a:ext cx="14144625" cy="666750"/>
+              <a:defRPr sz="2250">
+                <a:solidFill>
+                  <a:srgbClr val="0B2B4C"/>
+                </a:solidFill>
+                <a:latin typeface="IBM Plex Mono"/>
+                <a:ea typeface="IBM Plex Mono"/>
+                <a:cs typeface="IBM Plex Mono"/>
+              </a:defRPr>
+            </a:pPr>
+            <a:r>
+              <a:rPr sz="2250">
+                <a:solidFill>
+                  <a:srgbClr val="0B2B4C"/>
+                </a:solidFill>
+                <a:latin typeface="IBM Plex Mono"/>
+                <a:ea typeface="IBM Plex Mono"/>
+                <a:cs typeface="IBM Plex Mono"/>
+              </a:rPr>
+              <a:t>length(t_s)     % 41</a:t>
+            </a:r>
+          </a:p>
+        </p:txBody>
+      </p:sp>
+      <p:sp>
+        <p:nvSpPr>
+          <p:cNvPr id="11" name="">
+            <a:extLst xmlns:a="http://schemas.openxmlformats.org/drawingml/2006/main">
+              <a:ext uri="{FF2B5EF4-FFF2-40B4-BE49-F238E27FC236}">
+                <a16:creationId xmlns:a16="http://schemas.microsoft.com/office/drawing/2014/main" id="{4C8B6FBB-D974-4C02-B27D-2878533365CB}"/>
+              </a:ext>
+            </a:extLst>
+          </p:cNvPr>
+          <p:cNvSpPr>
+            <a:spLocks xmlns:a="http://schemas.openxmlformats.org/drawingml/2006/main" noGrp="1"/>
+          </p:cNvSpPr>
+          <p:nvPr/>
+        </p:nvSpPr>
+        <p:spPr>
+          <a:xfrm xmlns:a="http://schemas.openxmlformats.org/drawingml/2006/main">
+            <a:off x="9334500" y="5143500"/>
+            <a:ext cx="5810250" cy="495300"/>
           </a:xfrm>
           <a:prstGeom xmlns:a="http://schemas.openxmlformats.org/drawingml/2006/main" prst="rect">
             <a:avLst/>
@@ -16963,7 +17440,65 @@
           </a:bodyPr>
           <a:lstStyle xmlns:a="http://schemas.openxmlformats.org/drawingml/2006/main"/>
           <a:p xmlns:a="http://schemas.openxmlformats.org/drawingml/2006/main">
-            <a:pPr algn="ctr">
+            <a:pPr algn="l">
+              <a:defRPr sz="2250">
+                <a:solidFill>
+                  <a:srgbClr val="0B2B4C"/>
+                </a:solidFill>
+                <a:latin typeface="IBM Plex Mono"/>
+                <a:ea typeface="IBM Plex Mono"/>
+                <a:cs typeface="IBM Plex Mono"/>
+              </a:defRPr>
+            </a:pPr>
+            <a:r>
+              <a:rPr sz="2250">
+                <a:solidFill>
+                  <a:srgbClr val="0B2B4C"/>
+                </a:solidFill>
+                <a:latin typeface="IBM Plex Mono"/>
+                <a:ea typeface="IBM Plex Mono"/>
+                <a:cs typeface="IBM Plex Mono"/>
+              </a:rPr>
+              <a:t>t_s(11)         % 1.0 s</a:t>
+            </a:r>
+          </a:p>
+        </p:txBody>
+      </p:sp>
+      <p:sp>
+        <p:nvSpPr>
+          <p:cNvPr id="12" name="">
+            <a:extLst xmlns:a="http://schemas.openxmlformats.org/drawingml/2006/main">
+              <a:ext uri="{FF2B5EF4-FFF2-40B4-BE49-F238E27FC236}">
+                <a16:creationId xmlns:a16="http://schemas.microsoft.com/office/drawing/2014/main" id="{F5A12A77-AAFE-4B02-A39C-525CDE502636}"/>
+              </a:ext>
+            </a:extLst>
+          </p:cNvPr>
+          <p:cNvSpPr>
+            <a:spLocks xmlns:a="http://schemas.openxmlformats.org/drawingml/2006/main" noGrp="1"/>
+          </p:cNvSpPr>
+          <p:nvPr/>
+        </p:nvSpPr>
+        <p:spPr>
+          <a:xfrm xmlns:a="http://schemas.openxmlformats.org/drawingml/2006/main">
+            <a:off x="1095375" y="7620000"/>
+            <a:ext cx="14287500" cy="457200"/>
+          </a:xfrm>
+          <a:prstGeom xmlns:a="http://schemas.openxmlformats.org/drawingml/2006/main" prst="rect">
+            <a:avLst/>
+          </a:prstGeom>
+          <a:noFill xmlns:a="http://schemas.openxmlformats.org/drawingml/2006/main"/>
+          <a:ln xmlns:a="http://schemas.openxmlformats.org/drawingml/2006/main" w="0">
+            <a:noFill/>
+            <a:prstDash val="solid"/>
+          </a:ln>
+        </p:spPr>
+        <p:txBody>
+          <a:bodyPr xmlns:a="http://schemas.openxmlformats.org/drawingml/2006/main" wrap="square" lIns="0" tIns="0" rIns="0" bIns="0" anchor="t">
+            <a:noAutofit/>
+          </a:bodyPr>
+          <a:lstStyle xmlns:a="http://schemas.openxmlformats.org/drawingml/2006/main"/>
+          <a:p xmlns:a="http://schemas.openxmlformats.org/drawingml/2006/main">
+            <a:pPr algn="l">
               <a:defRPr sz="2400" b="1">
                 <a:solidFill>
                   <a:srgbClr val="0B2B4C"/>
@@ -16982,17 +17517,17 @@
                 <a:ea typeface="Nunito"/>
                 <a:cs typeface="Nunito"/>
               </a:rPr>
-              <a:t>Exit prompt: which step would help you find a wrong sign in the model?</a:t>
-            </a:r>
-          </a:p>
-        </p:txBody>
-      </p:sp>
-      <p:sp>
-        <p:nvSpPr>
-          <p:cNvPr id="24" name="slide-number-9">
-            <a:extLst xmlns:a="http://schemas.openxmlformats.org/drawingml/2006/main">
-              <a:ext uri="{FF2B5EF4-FFF2-40B4-BE49-F238E27FC236}">
-                <a16:creationId xmlns:a16="http://schemas.microsoft.com/office/drawing/2014/main" id="{0D390833-4615-42B0-BCE7-6CBD534AF8B7}"/>
+              <a:t>MATLAB indices start at 1: t_s(1) is the launch time</a:t>
+            </a:r>
+          </a:p>
+        </p:txBody>
+      </p:sp>
+      <p:sp>
+        <p:nvSpPr>
+          <p:cNvPr id="13" name="slide-number-9">
+            <a:extLst xmlns:a="http://schemas.openxmlformats.org/drawingml/2006/main">
+              <a:ext uri="{FF2B5EF4-FFF2-40B4-BE49-F238E27FC236}">
+                <a16:creationId xmlns:a16="http://schemas.microsoft.com/office/drawing/2014/main" id="{A568B047-4676-48D2-BCCB-A7806D8A08B0}"/>
               </a:ext>
             </a:extLst>
           </p:cNvPr>
@@ -17050,7 +17585,7 @@
     </p:spTree>
     <p:extLst>
       <p:ext uri="{BB962C8B-B14F-4D97-AF65-F5344CB8AC3E}">
-        <p14:creationId xmlns:p14="http://schemas.microsoft.com/office/powerpoint/2010/main" val="1276563524"/>
+        <p14:creationId xmlns:p14="http://schemas.microsoft.com/office/powerpoint/2010/main" val="441198273"/>
       </p:ext>
     </p:extLst>
   </p:cSld>
